--- a/S1-CL3-Cloud-Infrastructure-Improvement/delivery/topic_06/Topic_06_Slides.pptx
+++ b/S1-CL3-Cloud-Infrastructure-Improvement/delivery/topic_06/Topic_06_Slides.pptx
@@ -4123,7 +4123,7 @@
           <a:noFill/>
         </p:spPr>
         <p:txBody>
-          <a:bodyPr wrap="square" anchor="t" lIns="0" rIns="0" tIns="0" bIns="0">
+          <a:bodyPr wrap="square" anchor="ctr" lIns="0" rIns="0" tIns="0" bIns="0">
             <a:spAutoFit/>
           </a:bodyPr>
           <a:lstStyle/>
@@ -4140,7 +4140,7 @@
               </a:spcAft>
             </a:pPr>
             <a:r>
-              <a:rPr sz="1800" b="1" i="0">
+              <a:rPr sz="2400" b="1" i="0">
                 <a:solidFill>
                   <a:srgbClr val="EDAB0C"/>
                 </a:solidFill>
@@ -4149,7 +4149,7 @@
               <a:t>■  </a:t>
             </a:r>
             <a:r>
-              <a:rPr sz="1800" b="0" i="0">
+              <a:rPr sz="2400" b="0" i="0">
                 <a:solidFill>
                   <a:srgbClr val="2A2929"/>
                 </a:solidFill>
@@ -4171,7 +4171,7 @@
               </a:spcAft>
             </a:pPr>
             <a:r>
-              <a:rPr sz="1800" b="1" i="0">
+              <a:rPr sz="2400" b="1" i="0">
                 <a:solidFill>
                   <a:srgbClr val="EDAB0C"/>
                 </a:solidFill>
@@ -4180,7 +4180,7 @@
               <a:t>■  </a:t>
             </a:r>
             <a:r>
-              <a:rPr sz="1800" b="0" i="0">
+              <a:rPr sz="2400" b="0" i="0">
                 <a:solidFill>
                   <a:srgbClr val="2A2929"/>
                 </a:solidFill>
@@ -4202,7 +4202,7 @@
               </a:spcAft>
             </a:pPr>
             <a:r>
-              <a:rPr sz="1800" b="1" i="0">
+              <a:rPr sz="2400" b="1" i="0">
                 <a:solidFill>
                   <a:srgbClr val="EDAB0C"/>
                 </a:solidFill>
@@ -4211,7 +4211,7 @@
               <a:t>■  </a:t>
             </a:r>
             <a:r>
-              <a:rPr sz="1800" b="0" i="0">
+              <a:rPr sz="2400" b="0" i="0">
                 <a:solidFill>
                   <a:srgbClr val="2A2929"/>
                 </a:solidFill>
@@ -4465,7 +4465,7 @@
           <a:noFill/>
         </p:spPr>
         <p:txBody>
-          <a:bodyPr wrap="square" anchor="t" lIns="0" rIns="0" tIns="0" bIns="0">
+          <a:bodyPr wrap="square" anchor="ctr" lIns="0" rIns="0" tIns="0" bIns="0">
             <a:spAutoFit/>
           </a:bodyPr>
           <a:lstStyle/>
@@ -4482,7 +4482,7 @@
               </a:spcAft>
             </a:pPr>
             <a:r>
-              <a:rPr sz="1800" b="1" i="0">
+              <a:rPr sz="2400" b="1" i="0">
                 <a:solidFill>
                   <a:srgbClr val="EDAB0C"/>
                 </a:solidFill>
@@ -4491,7 +4491,7 @@
               <a:t>■  </a:t>
             </a:r>
             <a:r>
-              <a:rPr sz="1800" b="0" i="0">
+              <a:rPr sz="2400" b="0" i="0">
                 <a:solidFill>
                   <a:srgbClr val="2A2929"/>
                 </a:solidFill>
@@ -4513,7 +4513,7 @@
               </a:spcAft>
             </a:pPr>
             <a:r>
-              <a:rPr sz="1800" b="1" i="0">
+              <a:rPr sz="2400" b="1" i="0">
                 <a:solidFill>
                   <a:srgbClr val="EDAB0C"/>
                 </a:solidFill>
@@ -4522,7 +4522,7 @@
               <a:t>■  </a:t>
             </a:r>
             <a:r>
-              <a:rPr sz="1800" b="0" i="0">
+              <a:rPr sz="2400" b="0" i="0">
                 <a:solidFill>
                   <a:srgbClr val="2A2929"/>
                 </a:solidFill>
@@ -4544,7 +4544,7 @@
               </a:spcAft>
             </a:pPr>
             <a:r>
-              <a:rPr sz="1800" b="1" i="0">
+              <a:rPr sz="2400" b="1" i="0">
                 <a:solidFill>
                   <a:srgbClr val="EDAB0C"/>
                 </a:solidFill>
@@ -4553,7 +4553,7 @@
               <a:t>■  </a:t>
             </a:r>
             <a:r>
-              <a:rPr sz="1800" b="0" i="0">
+              <a:rPr sz="2400" b="0" i="0">
                 <a:solidFill>
                   <a:srgbClr val="2A2929"/>
                 </a:solidFill>
@@ -5099,7 +5099,7 @@
           <a:noFill/>
         </p:spPr>
         <p:txBody>
-          <a:bodyPr wrap="square" anchor="t" lIns="0" rIns="0" tIns="0" bIns="0">
+          <a:bodyPr wrap="square" anchor="ctr" lIns="0" rIns="0" tIns="0" bIns="0">
             <a:spAutoFit/>
           </a:bodyPr>
           <a:lstStyle/>
@@ -5116,7 +5116,7 @@
               </a:spcAft>
             </a:pPr>
             <a:r>
-              <a:rPr sz="1800" b="1" i="0">
+              <a:rPr sz="2400" b="1" i="0">
                 <a:solidFill>
                   <a:srgbClr val="EDAB0C"/>
                 </a:solidFill>
@@ -5125,7 +5125,7 @@
               <a:t>■  </a:t>
             </a:r>
             <a:r>
-              <a:rPr sz="1800" b="0" i="0">
+              <a:rPr sz="2400" b="0" i="0">
                 <a:solidFill>
                   <a:srgbClr val="2A2929"/>
                 </a:solidFill>
@@ -5147,7 +5147,7 @@
               </a:spcAft>
             </a:pPr>
             <a:r>
-              <a:rPr sz="1800" b="1" i="0">
+              <a:rPr sz="2400" b="1" i="0">
                 <a:solidFill>
                   <a:srgbClr val="EDAB0C"/>
                 </a:solidFill>
@@ -5156,7 +5156,7 @@
               <a:t>■  </a:t>
             </a:r>
             <a:r>
-              <a:rPr sz="1800" b="0" i="0">
+              <a:rPr sz="2400" b="0" i="0">
                 <a:solidFill>
                   <a:srgbClr val="2A2929"/>
                 </a:solidFill>
@@ -5178,7 +5178,7 @@
               </a:spcAft>
             </a:pPr>
             <a:r>
-              <a:rPr sz="1800" b="1" i="0">
+              <a:rPr sz="2400" b="1" i="0">
                 <a:solidFill>
                   <a:srgbClr val="EDAB0C"/>
                 </a:solidFill>
@@ -5187,7 +5187,7 @@
               <a:t>■  </a:t>
             </a:r>
             <a:r>
-              <a:rPr sz="1800" b="0" i="0">
+              <a:rPr sz="2400" b="0" i="0">
                 <a:solidFill>
                   <a:srgbClr val="2A2929"/>
                 </a:solidFill>
@@ -5441,7 +5441,7 @@
           <a:noFill/>
         </p:spPr>
         <p:txBody>
-          <a:bodyPr wrap="square" anchor="t" lIns="0" rIns="0" tIns="0" bIns="0">
+          <a:bodyPr wrap="square" anchor="ctr" lIns="0" rIns="0" tIns="0" bIns="0">
             <a:spAutoFit/>
           </a:bodyPr>
           <a:lstStyle/>
@@ -5458,7 +5458,7 @@
               </a:spcAft>
             </a:pPr>
             <a:r>
-              <a:rPr sz="1800" b="1" i="0">
+              <a:rPr sz="2400" b="1" i="0">
                 <a:solidFill>
                   <a:srgbClr val="EDAB0C"/>
                 </a:solidFill>
@@ -5467,7 +5467,7 @@
               <a:t>■  </a:t>
             </a:r>
             <a:r>
-              <a:rPr sz="1800" b="0" i="0">
+              <a:rPr sz="2400" b="0" i="0">
                 <a:solidFill>
                   <a:srgbClr val="2A2929"/>
                 </a:solidFill>
@@ -5489,7 +5489,7 @@
               </a:spcAft>
             </a:pPr>
             <a:r>
-              <a:rPr sz="1800" b="1" i="0">
+              <a:rPr sz="2400" b="1" i="0">
                 <a:solidFill>
                   <a:srgbClr val="EDAB0C"/>
                 </a:solidFill>
@@ -5498,7 +5498,7 @@
               <a:t>■  </a:t>
             </a:r>
             <a:r>
-              <a:rPr sz="1800" b="0" i="0">
+              <a:rPr sz="2400" b="0" i="0">
                 <a:solidFill>
                   <a:srgbClr val="2A2929"/>
                 </a:solidFill>
@@ -5520,7 +5520,7 @@
               </a:spcAft>
             </a:pPr>
             <a:r>
-              <a:rPr sz="1800" b="1" i="0">
+              <a:rPr sz="2400" b="1" i="0">
                 <a:solidFill>
                   <a:srgbClr val="EDAB0C"/>
                 </a:solidFill>
@@ -5529,7 +5529,7 @@
               <a:t>■  </a:t>
             </a:r>
             <a:r>
-              <a:rPr sz="1800" b="0" i="0">
+              <a:rPr sz="2400" b="0" i="0">
                 <a:solidFill>
                   <a:srgbClr val="2A2929"/>
                 </a:solidFill>
@@ -7738,7 +7738,7 @@
           <a:noFill/>
         </p:spPr>
         <p:txBody>
-          <a:bodyPr wrap="square" anchor="t" lIns="0" rIns="0" tIns="0" bIns="0">
+          <a:bodyPr wrap="square" anchor="ctr" lIns="0" rIns="0" tIns="0" bIns="0">
             <a:spAutoFit/>
           </a:bodyPr>
           <a:lstStyle/>
@@ -7755,7 +7755,7 @@
               </a:spcAft>
             </a:pPr>
             <a:r>
-              <a:rPr sz="1800" b="1" i="0">
+              <a:rPr sz="2400" b="1" i="0">
                 <a:solidFill>
                   <a:srgbClr val="EDAB0C"/>
                 </a:solidFill>
@@ -7764,7 +7764,7 @@
               <a:t>■  </a:t>
             </a:r>
             <a:r>
-              <a:rPr sz="1800" b="0" i="0">
+              <a:rPr sz="2400" b="0" i="0">
                 <a:solidFill>
                   <a:srgbClr val="2A2929"/>
                 </a:solidFill>
@@ -7786,7 +7786,7 @@
               </a:spcAft>
             </a:pPr>
             <a:r>
-              <a:rPr sz="1800" b="1" i="0">
+              <a:rPr sz="2400" b="1" i="0">
                 <a:solidFill>
                   <a:srgbClr val="EDAB0C"/>
                 </a:solidFill>
@@ -7795,7 +7795,7 @@
               <a:t>■  </a:t>
             </a:r>
             <a:r>
-              <a:rPr sz="1800" b="0" i="0">
+              <a:rPr sz="2400" b="0" i="0">
                 <a:solidFill>
                   <a:srgbClr val="2A2929"/>
                 </a:solidFill>
@@ -7817,7 +7817,7 @@
               </a:spcAft>
             </a:pPr>
             <a:r>
-              <a:rPr sz="1800" b="1" i="0">
+              <a:rPr sz="2400" b="1" i="0">
                 <a:solidFill>
                   <a:srgbClr val="EDAB0C"/>
                 </a:solidFill>
@@ -7826,7 +7826,7 @@
               <a:t>■  </a:t>
             </a:r>
             <a:r>
-              <a:rPr sz="1800" b="0" i="0">
+              <a:rPr sz="2400" b="0" i="0">
                 <a:solidFill>
                   <a:srgbClr val="2A2929"/>
                 </a:solidFill>
@@ -8080,7 +8080,7 @@
           <a:noFill/>
         </p:spPr>
         <p:txBody>
-          <a:bodyPr wrap="square" anchor="t" lIns="0" rIns="0" tIns="0" bIns="0">
+          <a:bodyPr wrap="square" anchor="ctr" lIns="0" rIns="0" tIns="0" bIns="0">
             <a:spAutoFit/>
           </a:bodyPr>
           <a:lstStyle/>
@@ -8097,7 +8097,7 @@
               </a:spcAft>
             </a:pPr>
             <a:r>
-              <a:rPr sz="1800" b="1" i="0">
+              <a:rPr sz="2400" b="1" i="0">
                 <a:solidFill>
                   <a:srgbClr val="EDAB0C"/>
                 </a:solidFill>
@@ -8106,7 +8106,7 @@
               <a:t>■  </a:t>
             </a:r>
             <a:r>
-              <a:rPr sz="1800" b="0" i="0">
+              <a:rPr sz="2400" b="0" i="0">
                 <a:solidFill>
                   <a:srgbClr val="2A2929"/>
                 </a:solidFill>
@@ -8128,7 +8128,7 @@
               </a:spcAft>
             </a:pPr>
             <a:r>
-              <a:rPr sz="1800" b="1" i="0">
+              <a:rPr sz="2400" b="1" i="0">
                 <a:solidFill>
                   <a:srgbClr val="EDAB0C"/>
                 </a:solidFill>
@@ -8137,7 +8137,7 @@
               <a:t>■  </a:t>
             </a:r>
             <a:r>
-              <a:rPr sz="1800" b="0" i="0">
+              <a:rPr sz="2400" b="0" i="0">
                 <a:solidFill>
                   <a:srgbClr val="2A2929"/>
                 </a:solidFill>
@@ -8159,7 +8159,7 @@
               </a:spcAft>
             </a:pPr>
             <a:r>
-              <a:rPr sz="1800" b="1" i="0">
+              <a:rPr sz="2400" b="1" i="0">
                 <a:solidFill>
                   <a:srgbClr val="EDAB0C"/>
                 </a:solidFill>
@@ -8168,7 +8168,7 @@
               <a:t>■  </a:t>
             </a:r>
             <a:r>
-              <a:rPr sz="1800" b="0" i="0">
+              <a:rPr sz="2400" b="0" i="0">
                 <a:solidFill>
                   <a:srgbClr val="2A2929"/>
                 </a:solidFill>
@@ -8714,7 +8714,7 @@
           <a:noFill/>
         </p:spPr>
         <p:txBody>
-          <a:bodyPr wrap="square" anchor="t" lIns="0" rIns="0" tIns="0" bIns="0">
+          <a:bodyPr wrap="square" anchor="ctr" lIns="0" rIns="0" tIns="0" bIns="0">
             <a:spAutoFit/>
           </a:bodyPr>
           <a:lstStyle/>
@@ -8731,7 +8731,7 @@
               </a:spcAft>
             </a:pPr>
             <a:r>
-              <a:rPr sz="1800" b="1" i="0">
+              <a:rPr sz="2400" b="1" i="0">
                 <a:solidFill>
                   <a:srgbClr val="EDAB0C"/>
                 </a:solidFill>
@@ -8740,7 +8740,7 @@
               <a:t>■  </a:t>
             </a:r>
             <a:r>
-              <a:rPr sz="1800" b="0" i="0">
+              <a:rPr sz="2400" b="0" i="0">
                 <a:solidFill>
                   <a:srgbClr val="2A2929"/>
                 </a:solidFill>
@@ -8762,7 +8762,7 @@
               </a:spcAft>
             </a:pPr>
             <a:r>
-              <a:rPr sz="1800" b="1" i="0">
+              <a:rPr sz="2400" b="1" i="0">
                 <a:solidFill>
                   <a:srgbClr val="EDAB0C"/>
                 </a:solidFill>
@@ -8771,7 +8771,7 @@
               <a:t>■  </a:t>
             </a:r>
             <a:r>
-              <a:rPr sz="1800" b="0" i="0">
+              <a:rPr sz="2400" b="0" i="0">
                 <a:solidFill>
                   <a:srgbClr val="2A2929"/>
                 </a:solidFill>
@@ -8793,7 +8793,7 @@
               </a:spcAft>
             </a:pPr>
             <a:r>
-              <a:rPr sz="1800" b="1" i="0">
+              <a:rPr sz="2400" b="1" i="0">
                 <a:solidFill>
                   <a:srgbClr val="EDAB0C"/>
                 </a:solidFill>
@@ -8802,7 +8802,7 @@
               <a:t>■  </a:t>
             </a:r>
             <a:r>
-              <a:rPr sz="1800" b="0" i="0">
+              <a:rPr sz="2400" b="0" i="0">
                 <a:solidFill>
                   <a:srgbClr val="2A2929"/>
                 </a:solidFill>
@@ -9056,7 +9056,7 @@
           <a:noFill/>
         </p:spPr>
         <p:txBody>
-          <a:bodyPr wrap="square" anchor="t" lIns="0" rIns="0" tIns="0" bIns="0">
+          <a:bodyPr wrap="square" anchor="ctr" lIns="0" rIns="0" tIns="0" bIns="0">
             <a:spAutoFit/>
           </a:bodyPr>
           <a:lstStyle/>
@@ -9073,7 +9073,7 @@
               </a:spcAft>
             </a:pPr>
             <a:r>
-              <a:rPr sz="1800" b="1" i="0">
+              <a:rPr sz="2400" b="1" i="0">
                 <a:solidFill>
                   <a:srgbClr val="EDAB0C"/>
                 </a:solidFill>
@@ -9082,7 +9082,7 @@
               <a:t>■  </a:t>
             </a:r>
             <a:r>
-              <a:rPr sz="1800" b="0" i="0">
+              <a:rPr sz="2400" b="0" i="0">
                 <a:solidFill>
                   <a:srgbClr val="2A2929"/>
                 </a:solidFill>
@@ -9104,7 +9104,7 @@
               </a:spcAft>
             </a:pPr>
             <a:r>
-              <a:rPr sz="1800" b="1" i="0">
+              <a:rPr sz="2400" b="1" i="0">
                 <a:solidFill>
                   <a:srgbClr val="EDAB0C"/>
                 </a:solidFill>
@@ -9113,7 +9113,7 @@
               <a:t>■  </a:t>
             </a:r>
             <a:r>
-              <a:rPr sz="1800" b="0" i="0">
+              <a:rPr sz="2400" b="0" i="0">
                 <a:solidFill>
                   <a:srgbClr val="2A2929"/>
                 </a:solidFill>
@@ -9135,7 +9135,7 @@
               </a:spcAft>
             </a:pPr>
             <a:r>
-              <a:rPr sz="1800" b="1" i="0">
+              <a:rPr sz="2400" b="1" i="0">
                 <a:solidFill>
                   <a:srgbClr val="EDAB0C"/>
                 </a:solidFill>
@@ -9144,7 +9144,7 @@
               <a:t>■  </a:t>
             </a:r>
             <a:r>
-              <a:rPr sz="1800" b="0" i="0">
+              <a:rPr sz="2400" b="0" i="0">
                 <a:solidFill>
                   <a:srgbClr val="2A2929"/>
                 </a:solidFill>

--- a/S1-CL3-Cloud-Infrastructure-Improvement/delivery/topic_06/Topic_06_Slides.pptx
+++ b/S1-CL3-Cloud-Infrastructure-Improvement/delivery/topic_06/Topic_06_Slides.pptx
@@ -7,22 +7,22 @@
   <p:sldIdLst>
     <p:sldId id="256" r:id="rId7"/>
     <p:sldId id="257" r:id="rId8"/>
-    <p:sldId id="258" r:id="rId9"/>
-    <p:sldId id="259" r:id="rId10"/>
-    <p:sldId id="260" r:id="rId11"/>
-    <p:sldId id="261" r:id="rId12"/>
-    <p:sldId id="262" r:id="rId13"/>
-    <p:sldId id="263" r:id="rId14"/>
-    <p:sldId id="264" r:id="rId15"/>
-    <p:sldId id="265" r:id="rId16"/>
-    <p:sldId id="266" r:id="rId17"/>
-    <p:sldId id="267" r:id="rId18"/>
-    <p:sldId id="268" r:id="rId19"/>
-    <p:sldId id="269" r:id="rId20"/>
-    <p:sldId id="270" r:id="rId21"/>
-    <p:sldId id="271" r:id="rId22"/>
-    <p:sldId id="272" r:id="rId23"/>
-    <p:sldId id="273" r:id="rId24"/>
+    <p:sldId id="258" r:id="rId10"/>
+    <p:sldId id="259" r:id="rId11"/>
+    <p:sldId id="260" r:id="rId12"/>
+    <p:sldId id="261" r:id="rId13"/>
+    <p:sldId id="262" r:id="rId14"/>
+    <p:sldId id="263" r:id="rId15"/>
+    <p:sldId id="264" r:id="rId16"/>
+    <p:sldId id="265" r:id="rId17"/>
+    <p:sldId id="266" r:id="rId18"/>
+    <p:sldId id="267" r:id="rId19"/>
+    <p:sldId id="268" r:id="rId20"/>
+    <p:sldId id="269" r:id="rId21"/>
+    <p:sldId id="270" r:id="rId22"/>
+    <p:sldId id="271" r:id="rId23"/>
+    <p:sldId id="272" r:id="rId24"/>
+    <p:sldId id="273" r:id="rId25"/>
   </p:sldIdLst>
   <p:sldSz cx="12191695" cy="6858000" type="screen4x3"/>
   <p:notesSz cx="6858000" cy="9144000"/>
@@ -122,6 +122,1886 @@
     </a:lvl9pPr>
   </p:defaultTextStyle>
 </p:presentation>
+</file>
+
+<file path=ppt/notesMasters/notesMaster1.xml><?xml version="1.0" encoding="utf-8"?>
+<p:notesMaster xmlns:a="http://schemas.openxmlformats.org/drawingml/2006/main" xmlns:p="http://schemas.openxmlformats.org/presentationml/2006/main" xmlns:r="http://schemas.openxmlformats.org/officeDocument/2006/relationships">
+  <p:cSld>
+    <p:bg>
+      <p:bgRef idx="1001">
+        <a:schemeClr val="bg1"/>
+      </p:bgRef>
+    </p:bg>
+    <p:spTree>
+      <p:nvGrpSpPr>
+        <p:cNvPr id="1" name=""/>
+        <p:cNvGrpSpPr/>
+        <p:nvPr/>
+      </p:nvGrpSpPr>
+      <p:grpSpPr>
+        <a:xfrm>
+          <a:off x="0" y="0"/>
+          <a:ext cx="0" cy="0"/>
+          <a:chOff x="0" y="0"/>
+          <a:chExt cx="0" cy="0"/>
+        </a:xfrm>
+      </p:grpSpPr>
+      <p:sp>
+        <p:nvSpPr>
+          <p:cNvPr id="2" name="Header Placeholder 1"/>
+          <p:cNvSpPr>
+            <a:spLocks noGrp="1"/>
+          </p:cNvSpPr>
+          <p:nvPr>
+            <p:ph type="hdr" sz="quarter"/>
+          </p:nvPr>
+        </p:nvSpPr>
+        <p:spPr>
+          <a:xfrm>
+            <a:off x="0" y="0"/>
+            <a:ext cx="2971800" cy="457200"/>
+          </a:xfrm>
+          <a:prstGeom prst="rect">
+            <a:avLst/>
+          </a:prstGeom>
+        </p:spPr>
+        <p:txBody>
+          <a:bodyPr vert="horz" lIns="91440" tIns="45720" rIns="91440" bIns="45720" rtlCol="0"/>
+          <a:lstStyle>
+            <a:lvl1pPr algn="l">
+              <a:defRPr sz="1200"/>
+            </a:lvl1pPr>
+          </a:lstStyle>
+          <a:p>
+            <a:endParaRPr lang="en-US"/>
+          </a:p>
+        </p:txBody>
+      </p:sp>
+      <p:sp>
+        <p:nvSpPr>
+          <p:cNvPr id="3" name="Date Placeholder 2"/>
+          <p:cNvSpPr>
+            <a:spLocks noGrp="1"/>
+          </p:cNvSpPr>
+          <p:nvPr>
+            <p:ph type="dt" idx="1"/>
+          </p:nvPr>
+        </p:nvSpPr>
+        <p:spPr>
+          <a:xfrm>
+            <a:off x="3884613" y="0"/>
+            <a:ext cx="2971800" cy="457200"/>
+          </a:xfrm>
+          <a:prstGeom prst="rect">
+            <a:avLst/>
+          </a:prstGeom>
+        </p:spPr>
+        <p:txBody>
+          <a:bodyPr vert="horz" lIns="91440" tIns="45720" rIns="91440" bIns="45720" rtlCol="0"/>
+          <a:lstStyle>
+            <a:lvl1pPr algn="r">
+              <a:defRPr sz="1200"/>
+            </a:lvl1pPr>
+          </a:lstStyle>
+          <a:p>
+            <a:fld id="{0F89C1C7-3DCD-1040-A9CF-14679D8B5DDD}" type="datetimeFigureOut">
+              <a:rPr lang="en-US" smtClean="0"/>
+              <a:t>10/17/16</a:t>
+            </a:fld>
+            <a:endParaRPr lang="en-US"/>
+          </a:p>
+        </p:txBody>
+      </p:sp>
+      <p:sp>
+        <p:nvSpPr>
+          <p:cNvPr id="4" name="Slide Image Placeholder 3"/>
+          <p:cNvSpPr>
+            <a:spLocks noGrp="1" noRot="1" noChangeAspect="1"/>
+          </p:cNvSpPr>
+          <p:nvPr>
+            <p:ph type="sldImg" idx="2"/>
+          </p:nvPr>
+        </p:nvSpPr>
+        <p:spPr>
+          <a:xfrm>
+            <a:off x="1143000" y="685800"/>
+            <a:ext cx="4572000" cy="3429000"/>
+          </a:xfrm>
+          <a:prstGeom prst="rect">
+            <a:avLst/>
+          </a:prstGeom>
+          <a:noFill/>
+          <a:ln w="12700">
+            <a:solidFill>
+              <a:prstClr val="black"/>
+            </a:solidFill>
+          </a:ln>
+        </p:spPr>
+        <p:txBody>
+          <a:bodyPr vert="horz" lIns="91440" tIns="45720" rIns="91440" bIns="45720" rtlCol="0" anchor="ctr"/>
+          <a:lstStyle/>
+          <a:p>
+            <a:endParaRPr lang="en-US"/>
+          </a:p>
+        </p:txBody>
+      </p:sp>
+      <p:sp>
+        <p:nvSpPr>
+          <p:cNvPr id="5" name="Notes Placeholder 4"/>
+          <p:cNvSpPr>
+            <a:spLocks noGrp="1"/>
+          </p:cNvSpPr>
+          <p:nvPr>
+            <p:ph type="body" sz="quarter" idx="3"/>
+          </p:nvPr>
+        </p:nvSpPr>
+        <p:spPr>
+          <a:xfrm>
+            <a:off x="685800" y="4343400"/>
+            <a:ext cx="5486400" cy="4114800"/>
+          </a:xfrm>
+          <a:prstGeom prst="rect">
+            <a:avLst/>
+          </a:prstGeom>
+        </p:spPr>
+        <p:txBody>
+          <a:bodyPr vert="horz" lIns="91440" tIns="45720" rIns="91440" bIns="45720" rtlCol="0"/>
+          <a:lstStyle/>
+          <a:p>
+            <a:pPr lvl="0"/>
+            <a:r>
+              <a:rPr lang="en-US" smtClean="0"/>
+              <a:t>Click to edit Master text styles</a:t>
+            </a:r>
+          </a:p>
+          <a:p>
+            <a:pPr lvl="1"/>
+            <a:r>
+              <a:rPr lang="en-US" smtClean="0"/>
+              <a:t>Second level</a:t>
+            </a:r>
+          </a:p>
+          <a:p>
+            <a:pPr lvl="2"/>
+            <a:r>
+              <a:rPr lang="en-US" smtClean="0"/>
+              <a:t>Third level</a:t>
+            </a:r>
+          </a:p>
+          <a:p>
+            <a:pPr lvl="3"/>
+            <a:r>
+              <a:rPr lang="en-US" smtClean="0"/>
+              <a:t>Fourth level</a:t>
+            </a:r>
+          </a:p>
+          <a:p>
+            <a:pPr lvl="4"/>
+            <a:r>
+              <a:rPr lang="en-US" smtClean="0"/>
+              <a:t>Fifth level</a:t>
+            </a:r>
+            <a:endParaRPr lang="en-US"/>
+          </a:p>
+        </p:txBody>
+      </p:sp>
+      <p:sp>
+        <p:nvSpPr>
+          <p:cNvPr id="6" name="Footer Placeholder 5"/>
+          <p:cNvSpPr>
+            <a:spLocks noGrp="1"/>
+          </p:cNvSpPr>
+          <p:nvPr>
+            <p:ph type="ftr" sz="quarter" idx="4"/>
+          </p:nvPr>
+        </p:nvSpPr>
+        <p:spPr>
+          <a:xfrm>
+            <a:off x="0" y="8685213"/>
+            <a:ext cx="2971800" cy="457200"/>
+          </a:xfrm>
+          <a:prstGeom prst="rect">
+            <a:avLst/>
+          </a:prstGeom>
+        </p:spPr>
+        <p:txBody>
+          <a:bodyPr vert="horz" lIns="91440" tIns="45720" rIns="91440" bIns="45720" rtlCol="0" anchor="b"/>
+          <a:lstStyle>
+            <a:lvl1pPr algn="l">
+              <a:defRPr sz="1200"/>
+            </a:lvl1pPr>
+          </a:lstStyle>
+          <a:p>
+            <a:endParaRPr lang="en-US"/>
+          </a:p>
+        </p:txBody>
+      </p:sp>
+      <p:sp>
+        <p:nvSpPr>
+          <p:cNvPr id="7" name="Slide Number Placeholder 6"/>
+          <p:cNvSpPr>
+            <a:spLocks noGrp="1"/>
+          </p:cNvSpPr>
+          <p:nvPr>
+            <p:ph type="sldNum" sz="quarter" idx="5"/>
+          </p:nvPr>
+        </p:nvSpPr>
+        <p:spPr>
+          <a:xfrm>
+            <a:off x="3884613" y="8685213"/>
+            <a:ext cx="2971800" cy="457200"/>
+          </a:xfrm>
+          <a:prstGeom prst="rect">
+            <a:avLst/>
+          </a:prstGeom>
+        </p:spPr>
+        <p:txBody>
+          <a:bodyPr vert="horz" lIns="91440" tIns="45720" rIns="91440" bIns="45720" rtlCol="0" anchor="b"/>
+          <a:lstStyle>
+            <a:lvl1pPr algn="r">
+              <a:defRPr sz="1200"/>
+            </a:lvl1pPr>
+          </a:lstStyle>
+          <a:p>
+            <a:fld id="{BB5E49A5-4136-284D-997B-48E1D791AD67}" type="slidenum">
+              <a:rPr lang="en-US" smtClean="0"/>
+              <a:t>‹#›</a:t>
+            </a:fld>
+            <a:endParaRPr lang="en-US"/>
+          </a:p>
+        </p:txBody>
+      </p:sp>
+    </p:spTree>
+    <p:extLst>
+      <p:ext uri="{BB962C8B-B14F-4D97-AF65-F5344CB8AC3E}">
+        <p14:creationId xmlns:p14="http://schemas.microsoft.com/office/powerpoint/2010/main" val="2623252185"/>
+      </p:ext>
+    </p:extLst>
+  </p:cSld>
+  <p:clrMap bg1="lt1" tx1="dk1" bg2="lt2" tx2="dk2" accent1="accent1" accent2="accent2" accent3="accent3" accent4="accent4" accent5="accent5" accent6="accent6" hlink="hlink" folHlink="folHlink"/>
+  <p:notesStyle>
+    <a:lvl1pPr marL="0" algn="l" defTabSz="457200" rtl="0" eaLnBrk="1" latinLnBrk="0" hangingPunct="1">
+      <a:defRPr sz="1200" kern="1200">
+        <a:solidFill>
+          <a:schemeClr val="tx1"/>
+        </a:solidFill>
+        <a:latin typeface="+mn-lt"/>
+        <a:ea typeface="+mn-ea"/>
+        <a:cs typeface="+mn-cs"/>
+      </a:defRPr>
+    </a:lvl1pPr>
+    <a:lvl2pPr marL="457200" algn="l" defTabSz="457200" rtl="0" eaLnBrk="1" latinLnBrk="0" hangingPunct="1">
+      <a:defRPr sz="1200" kern="1200">
+        <a:solidFill>
+          <a:schemeClr val="tx1"/>
+        </a:solidFill>
+        <a:latin typeface="+mn-lt"/>
+        <a:ea typeface="+mn-ea"/>
+        <a:cs typeface="+mn-cs"/>
+      </a:defRPr>
+    </a:lvl2pPr>
+    <a:lvl3pPr marL="914400" algn="l" defTabSz="457200" rtl="0" eaLnBrk="1" latinLnBrk="0" hangingPunct="1">
+      <a:defRPr sz="1200" kern="1200">
+        <a:solidFill>
+          <a:schemeClr val="tx1"/>
+        </a:solidFill>
+        <a:latin typeface="+mn-lt"/>
+        <a:ea typeface="+mn-ea"/>
+        <a:cs typeface="+mn-cs"/>
+      </a:defRPr>
+    </a:lvl3pPr>
+    <a:lvl4pPr marL="1371600" algn="l" defTabSz="457200" rtl="0" eaLnBrk="1" latinLnBrk="0" hangingPunct="1">
+      <a:defRPr sz="1200" kern="1200">
+        <a:solidFill>
+          <a:schemeClr val="tx1"/>
+        </a:solidFill>
+        <a:latin typeface="+mn-lt"/>
+        <a:ea typeface="+mn-ea"/>
+        <a:cs typeface="+mn-cs"/>
+      </a:defRPr>
+    </a:lvl4pPr>
+    <a:lvl5pPr marL="1828800" algn="l" defTabSz="457200" rtl="0" eaLnBrk="1" latinLnBrk="0" hangingPunct="1">
+      <a:defRPr sz="1200" kern="1200">
+        <a:solidFill>
+          <a:schemeClr val="tx1"/>
+        </a:solidFill>
+        <a:latin typeface="+mn-lt"/>
+        <a:ea typeface="+mn-ea"/>
+        <a:cs typeface="+mn-cs"/>
+      </a:defRPr>
+    </a:lvl5pPr>
+    <a:lvl6pPr marL="2286000" algn="l" defTabSz="457200" rtl="0" eaLnBrk="1" latinLnBrk="0" hangingPunct="1">
+      <a:defRPr sz="1200" kern="1200">
+        <a:solidFill>
+          <a:schemeClr val="tx1"/>
+        </a:solidFill>
+        <a:latin typeface="+mn-lt"/>
+        <a:ea typeface="+mn-ea"/>
+        <a:cs typeface="+mn-cs"/>
+      </a:defRPr>
+    </a:lvl6pPr>
+    <a:lvl7pPr marL="2743200" algn="l" defTabSz="457200" rtl="0" eaLnBrk="1" latinLnBrk="0" hangingPunct="1">
+      <a:defRPr sz="1200" kern="1200">
+        <a:solidFill>
+          <a:schemeClr val="tx1"/>
+        </a:solidFill>
+        <a:latin typeface="+mn-lt"/>
+        <a:ea typeface="+mn-ea"/>
+        <a:cs typeface="+mn-cs"/>
+      </a:defRPr>
+    </a:lvl7pPr>
+    <a:lvl8pPr marL="3200400" algn="l" defTabSz="457200" rtl="0" eaLnBrk="1" latinLnBrk="0" hangingPunct="1">
+      <a:defRPr sz="1200" kern="1200">
+        <a:solidFill>
+          <a:schemeClr val="tx1"/>
+        </a:solidFill>
+        <a:latin typeface="+mn-lt"/>
+        <a:ea typeface="+mn-ea"/>
+        <a:cs typeface="+mn-cs"/>
+      </a:defRPr>
+    </a:lvl8pPr>
+    <a:lvl9pPr marL="3657600" algn="l" defTabSz="457200" rtl="0" eaLnBrk="1" latinLnBrk="0" hangingPunct="1">
+      <a:defRPr sz="1200" kern="1200">
+        <a:solidFill>
+          <a:schemeClr val="tx1"/>
+        </a:solidFill>
+        <a:latin typeface="+mn-lt"/>
+        <a:ea typeface="+mn-ea"/>
+        <a:cs typeface="+mn-cs"/>
+      </a:defRPr>
+    </a:lvl9pPr>
+  </p:notesStyle>
+</p:notesMaster>
+</file>
+
+<file path=ppt/notesSlides/notesSlide1.xml><?xml version="1.0" encoding="utf-8"?>
+<p:notes xmlns:a="http://schemas.openxmlformats.org/drawingml/2006/main" xmlns:p="http://schemas.openxmlformats.org/presentationml/2006/main" xmlns:r="http://schemas.openxmlformats.org/officeDocument/2006/relationships">
+  <p:cSld>
+    <p:spTree>
+      <p:nvGrpSpPr>
+        <p:cNvPr id="1" name=""/>
+        <p:cNvGrpSpPr/>
+        <p:nvPr/>
+      </p:nvGrpSpPr>
+      <p:grpSpPr>
+        <a:xfrm>
+          <a:off x="0" y="0"/>
+          <a:ext cx="0" cy="0"/>
+          <a:chOff x="0" y="0"/>
+          <a:chExt cx="0" cy="0"/>
+        </a:xfrm>
+      </p:grpSpPr>
+      <p:sp>
+        <p:nvSpPr>
+          <p:cNvPr id="2" name="Slide Image Placeholder 1"/>
+          <p:cNvSpPr>
+            <a:spLocks noGrp="1"/>
+          </p:cNvSpPr>
+          <p:nvPr>
+            <p:ph type="sldImg" idx="2"/>
+          </p:nvPr>
+        </p:nvSpPr>
+        <p:spPr/>
+      </p:sp>
+      <p:sp>
+        <p:nvSpPr>
+          <p:cNvPr id="3" name="Notes Placeholder 2"/>
+          <p:cNvSpPr>
+            <a:spLocks noGrp="1"/>
+          </p:cNvSpPr>
+          <p:nvPr>
+            <p:ph type="body" idx="3" sz="quarter"/>
+          </p:nvPr>
+        </p:nvSpPr>
+        <p:spPr/>
+        <p:txBody>
+          <a:bodyPr/>
+          <a:lstStyle/>
+          <a:p>
+            <a:r>
+              <a:t>Frame Topic 6 as the DELIVERY half of AT2 — Topic 5 planned and allocated; now the team writes the</a:t>
+            </a:r>
+          </a:p>
+          <a:p>
+            <a:r>
+              <a:t>IaC and you LEAD the build. Set the mode; don't teach coaching yet.</a:t>
+            </a:r>
+          </a:p>
+          <a:p>
+            <a:r>
+              <a:t>• First bullet: Topic 5 planned the team and allocated the four components; now the team writes the</a:t>
+            </a:r>
+          </a:p>
+          <a:p>
+            <a:r>
+              <a:t>code and you run the build.</a:t>
+            </a:r>
+          </a:p>
+          <a:p>
+            <a:r>
+              <a:t>• Second bullet: name what "leading the build" actually is — coaching, supporting, facilitating issue</a:t>
+            </a:r>
+          </a:p>
+          <a:p>
+            <a:r>
+              <a:t>resolution, problem-solving, managing conflict, then measuring performance and developing others. That</a:t>
+            </a:r>
+          </a:p>
+          <a:p>
+            <a:r>
+              <a:t>list IS today's four sections.</a:t>
+            </a:r>
+          </a:p>
+          <a:p>
+            <a:r>
+              <a:t>• Third bullet: in-world you lead the YAT ICT team building Ledgerline's improved infrastructure —</a:t>
+            </a:r>
+          </a:p>
+          <a:p>
+            <a:r>
+              <a:t>keep it concrete.</a:t>
+            </a:r>
+          </a:p>
+          <a:p>
+            <a:r>
+              <a:t>• Fourth bullet (the framing to hold all Topic): LEADERSHIP, NOT CODE — the CloudFormation write is</a:t>
+            </a:r>
+          </a:p>
+          <a:p>
+            <a:r>
+              <a:t>the vehicle; the assessed evidence (AT2) is how you lead it.</a:t>
+            </a:r>
+          </a:p>
+          <a:p>
+            <a:r>
+              <a:t>Misconception to pre-empt: "to lead the build I need to be the best coder." No — you don't write the</a:t>
+            </a:r>
+          </a:p>
+          <a:p>
+            <a:r>
+              <a:t>components; you develop the people and run the process. The leadership is what's marked (BSBXTW401</a:t>
+            </a:r>
+          </a:p>
+          <a:p>
+            <a:r>
+              <a:t>el 3–4).</a:t>
+            </a:r>
+          </a:p>
+          <a:p>
+            <a:r>
+              <a:t>Question to pose: "If you're not writing any of the four components, what exactly are you contributing</a:t>
+            </a:r>
+          </a:p>
+          <a:p>
+            <a:r>
+              <a:t>to this build?" (draws out coaching, unblocking, measuring, developing — the leadership).</a:t>
+            </a:r>
+          </a:p>
+          <a:p>
+            <a:r>
+              <a:t>UoC/AT2 tie: opens the AT2 delivery arc — BSBXTW401 el 3–4 (support + monitor the team); everything</a:t>
+            </a:r>
+          </a:p>
+          <a:p>
+            <a:r>
+              <a:t>today feeds the coaching/issue-resolution/feedback/development evidence in AT2.</a:t>
+            </a:r>
+          </a:p>
+        </p:txBody>
+      </p:sp>
+      <p:sp>
+        <p:nvSpPr>
+          <p:cNvPr id="4" name="Slide Number Placeholder 3"/>
+          <p:cNvSpPr>
+            <a:spLocks noGrp="1"/>
+          </p:cNvSpPr>
+          <p:nvPr>
+            <p:ph type="sldNum" idx="5" sz="quarter"/>
+          </p:nvPr>
+        </p:nvSpPr>
+        <p:spPr/>
+      </p:sp>
+    </p:spTree>
+  </p:cSld>
+  <p:clrMapOvr>
+    <a:masterClrMapping/>
+  </p:clrMapOvr>
+</p:notes>
+</file>
+
+<file path=ppt/notesSlides/notesSlide10.xml><?xml version="1.0" encoding="utf-8"?>
+<p:notes xmlns:a="http://schemas.openxmlformats.org/drawingml/2006/main" xmlns:p="http://schemas.openxmlformats.org/presentationml/2006/main" xmlns:r="http://schemas.openxmlformats.org/officeDocument/2006/relationships">
+  <p:cSld>
+    <p:spTree>
+      <p:nvGrpSpPr>
+        <p:cNvPr id="1" name=""/>
+        <p:cNvGrpSpPr/>
+        <p:nvPr/>
+      </p:nvGrpSpPr>
+      <p:grpSpPr>
+        <a:xfrm>
+          <a:off x="0" y="0"/>
+          <a:ext cx="0" cy="0"/>
+          <a:chOff x="0" y="0"/>
+          <a:chExt cx="0" cy="0"/>
+        </a:xfrm>
+      </p:grpSpPr>
+      <p:sp>
+        <p:nvSpPr>
+          <p:cNvPr id="2" name="Slide Image Placeholder 1"/>
+          <p:cNvSpPr>
+            <a:spLocks noGrp="1"/>
+          </p:cNvSpPr>
+          <p:nvPr>
+            <p:ph type="sldImg" idx="2"/>
+          </p:nvPr>
+        </p:nvSpPr>
+        <p:spPr/>
+      </p:sp>
+      <p:sp>
+        <p:nvSpPr>
+          <p:cNvPr id="3" name="Notes Placeholder 2"/>
+          <p:cNvSpPr>
+            <a:spLocks noGrp="1"/>
+          </p:cNvSpPr>
+          <p:nvPr>
+            <p:ph type="body" idx="3" sz="quarter"/>
+          </p:nvPr>
+        </p:nvSpPr>
+        <p:spPr/>
+        <p:txBody>
+          <a:bodyPr/>
+          <a:lstStyle/>
+          <a:p>
+            <a:r>
+              <a:t>Open Section 4 — turn measured gaps into GROWTH. PC 4.3 lands here.</a:t>
+            </a:r>
+          </a:p>
+          <a:p>
+            <a:r>
+              <a:t>• First bullet: identify specific learning and development opportunities to improve team and</a:t>
+            </a:r>
+          </a:p>
+          <a:p>
+            <a:r>
+              <a:t>individual performance and behaviours (PC 4.3). "Specific" is the word — not "do more training".</a:t>
+            </a:r>
+          </a:p>
+          <a:p>
+            <a:r>
+              <a:t>• Second bullet: a gap you MEASURED (Section 3) becomes a development opportunity — a skill to build,</a:t>
+            </a:r>
+          </a:p>
+          <a:p>
+            <a:r>
+              <a:t>a behaviour to shift. The measurement feeds this directly.</a:t>
+            </a:r>
+          </a:p>
+          <a:p>
+            <a:r>
+              <a:t>• Third bullet: tie each opportunity to an INDIVIDUAL and to the team's common goals — development</a:t>
+            </a:r>
+          </a:p>
+          <a:p>
+            <a:r>
+              <a:t>serves the build, not just the person's CV.</a:t>
+            </a:r>
+          </a:p>
+          <a:p>
+            <a:r>
+              <a:t>Misconception to pre-empt: "development opportunities are generic courses." No — they're specific,</a:t>
+            </a:r>
+          </a:p>
+          <a:p>
+            <a:r>
+              <a:t>drawn from a measured gap, tied to a named person and the team goal; generic = not assessable.</a:t>
+            </a:r>
+          </a:p>
+          <a:p>
+            <a:r>
+              <a:t>Question to pose: "The network owner struggled with shared parameters — what specific development</a:t>
+            </a:r>
+          </a:p>
+          <a:p>
+            <a:r>
+              <a:t>opportunity does that suggest, for whom?" (turns a measured gap into a specific opportunity).</a:t>
+            </a:r>
+          </a:p>
+          <a:p>
+            <a:r>
+              <a:t>UoC/AT2 tie: BSBXTW401 PC 4.3 (identify specific learning/development opportunities) → the development</a:t>
+            </a:r>
+          </a:p>
+          <a:p>
+            <a:r>
+              <a:t>plan evidenced in AT2.</a:t>
+            </a:r>
+          </a:p>
+        </p:txBody>
+      </p:sp>
+      <p:sp>
+        <p:nvSpPr>
+          <p:cNvPr id="4" name="Slide Number Placeholder 3"/>
+          <p:cNvSpPr>
+            <a:spLocks noGrp="1"/>
+          </p:cNvSpPr>
+          <p:nvPr>
+            <p:ph type="sldNum" idx="5" sz="quarter"/>
+          </p:nvPr>
+        </p:nvSpPr>
+        <p:spPr/>
+      </p:sp>
+    </p:spTree>
+  </p:cSld>
+  <p:clrMapOvr>
+    <a:masterClrMapping/>
+  </p:clrMapOvr>
+</p:notes>
+</file>
+
+<file path=ppt/notesSlides/notesSlide11.xml><?xml version="1.0" encoding="utf-8"?>
+<p:notes xmlns:a="http://schemas.openxmlformats.org/drawingml/2006/main" xmlns:p="http://schemas.openxmlformats.org/presentationml/2006/main" xmlns:r="http://schemas.openxmlformats.org/officeDocument/2006/relationships">
+  <p:cSld>
+    <p:spTree>
+      <p:nvGrpSpPr>
+        <p:cNvPr id="1" name=""/>
+        <p:cNvGrpSpPr/>
+        <p:nvPr/>
+      </p:nvGrpSpPr>
+      <p:grpSpPr>
+        <a:xfrm>
+          <a:off x="0" y="0"/>
+          <a:ext cx="0" cy="0"/>
+          <a:chOff x="0" y="0"/>
+          <a:chExt cx="0" cy="0"/>
+        </a:xfrm>
+      </p:grpSpPr>
+      <p:sp>
+        <p:nvSpPr>
+          <p:cNvPr id="2" name="Slide Image Placeholder 1"/>
+          <p:cNvSpPr>
+            <a:spLocks noGrp="1"/>
+          </p:cNvSpPr>
+          <p:nvPr>
+            <p:ph type="sldImg" idx="2"/>
+          </p:nvPr>
+        </p:nvSpPr>
+        <p:spPr/>
+      </p:sp>
+      <p:sp>
+        <p:nvSpPr>
+          <p:cNvPr id="3" name="Notes Placeholder 2"/>
+          <p:cNvSpPr>
+            <a:spLocks noGrp="1"/>
+          </p:cNvSpPr>
+          <p:nvPr>
+            <p:ph type="body" idx="3" sz="quarter"/>
+          </p:nvPr>
+        </p:nvSpPr>
+        <p:spPr/>
+        <p:txBody>
+          <a:bodyPr/>
+          <a:lstStyle/>
+          <a:p>
+            <a:r>
+              <a:t>Close Section 4 — make development ACTIONABLE and evidence-based. PC 4.4, PE 3, PE 4 land here.</a:t>
+            </a:r>
+          </a:p>
+          <a:p>
+            <a:r>
+              <a:t>• First bullet: implement ACTION PLANS to address individual and team training needs — who, what, by</a:t>
+            </a:r>
+          </a:p>
+          <a:p>
+            <a:r>
+              <a:t>when (PC 4.4). An opportunity without an action plan is just a note.</a:t>
+            </a:r>
+          </a:p>
+          <a:p>
+            <a:r>
+              <a:t>• Second bullet: COLLATE feedback on individual and team performance so the picture is EVIDENCE, not</a:t>
+            </a:r>
+          </a:p>
+          <a:p>
+            <a:r>
+              <a:t>impression (PE 3). Pulling it together is what makes it defensible.</a:t>
+            </a:r>
+          </a:p>
+          <a:p>
+            <a:r>
+              <a:t>• Third bullet: identify and implement development opportunities for OTHERS (PE 4) — leadership grows</a:t>
+            </a:r>
+          </a:p>
+          <a:p>
+            <a:r>
+              <a:t>the team, not just the build. This is the leader-develops-people point.</a:t>
+            </a:r>
+          </a:p>
+          <a:p>
+            <a:r>
+              <a:t>Misconception to pre-empt: "collating feedback is admin busywork." No — collated feedback is what</a:t>
+            </a:r>
+          </a:p>
+          <a:p>
+            <a:r>
+              <a:t>turns scattered impressions into an evidence base for the action plans (and for AT2).</a:t>
+            </a:r>
+          </a:p>
+          <a:p>
+            <a:r>
+              <a:t>Question to pose: "You have feedback from three stand-ups on the storage owner — what does 'collating'</a:t>
+            </a:r>
+          </a:p>
+          <a:p>
+            <a:r>
+              <a:t>it give you that three separate notes don't?" (draws out the evidence-base point).</a:t>
+            </a:r>
+          </a:p>
+          <a:p>
+            <a:r>
+              <a:t>UoC/AT2 tie: BSBXTW401 PC 4.4 + PE 3 + PE 4 (action plans; collate feedback; develop others) → the</a:t>
+            </a:r>
+          </a:p>
+          <a:p>
+            <a:r>
+              <a:t>development / action-plan evidence in AT2.</a:t>
+            </a:r>
+          </a:p>
+        </p:txBody>
+      </p:sp>
+      <p:sp>
+        <p:nvSpPr>
+          <p:cNvPr id="4" name="Slide Number Placeholder 3"/>
+          <p:cNvSpPr>
+            <a:spLocks noGrp="1"/>
+          </p:cNvSpPr>
+          <p:nvPr>
+            <p:ph type="sldNum" idx="5" sz="quarter"/>
+          </p:nvPr>
+        </p:nvSpPr>
+        <p:spPr/>
+      </p:sp>
+    </p:spTree>
+  </p:cSld>
+  <p:clrMapOvr>
+    <a:masterClrMapping/>
+  </p:clrMapOvr>
+</p:notes>
+</file>
+
+<file path=ppt/notesSlides/notesSlide2.xml><?xml version="1.0" encoding="utf-8"?>
+<p:notes xmlns:a="http://schemas.openxmlformats.org/drawingml/2006/main" xmlns:p="http://schemas.openxmlformats.org/presentationml/2006/main" xmlns:r="http://schemas.openxmlformats.org/officeDocument/2006/relationships">
+  <p:cSld>
+    <p:spTree>
+      <p:nvGrpSpPr>
+        <p:cNvPr id="1" name=""/>
+        <p:cNvGrpSpPr/>
+        <p:nvPr/>
+      </p:nvGrpSpPr>
+      <p:grpSpPr>
+        <a:xfrm>
+          <a:off x="0" y="0"/>
+          <a:ext cx="0" cy="0"/>
+          <a:chOff x="0" y="0"/>
+          <a:chExt cx="0" cy="0"/>
+        </a:xfrm>
+      </p:grpSpPr>
+      <p:sp>
+        <p:nvSpPr>
+          <p:cNvPr id="2" name="Slide Image Placeholder 1"/>
+          <p:cNvSpPr>
+            <a:spLocks noGrp="1"/>
+          </p:cNvSpPr>
+          <p:nvPr>
+            <p:ph type="sldImg" idx="2"/>
+          </p:nvPr>
+        </p:nvSpPr>
+        <p:spPr/>
+      </p:sp>
+      <p:sp>
+        <p:nvSpPr>
+          <p:cNvPr id="3" name="Notes Placeholder 2"/>
+          <p:cNvSpPr>
+            <a:spLocks noGrp="1"/>
+          </p:cNvSpPr>
+          <p:nvPr>
+            <p:ph type="body" idx="3" sz="quarter"/>
+          </p:nvPr>
+        </p:nvSpPr>
+        <p:spPr/>
+        <p:txBody>
+          <a:bodyPr/>
+          <a:lstStyle/>
+          <a:p>
+            <a:r>
+              <a:t>Set the vehicle before teaching coaching — use the team-build-flow diagram (component drafts →</a:t>
+            </a:r>
+          </a:p>
+          <a:p>
+            <a:r>
+              <a:t>integrate → review/monitor → team sign-off) so students see WHERE leadership acts.</a:t>
+            </a:r>
+          </a:p>
+          <a:p>
+            <a:r>
+              <a:t>• First bullet: the team writes four components — network, compute, database, storage — one per</a:t>
+            </a:r>
+          </a:p>
+          <a:p>
+            <a:r>
+              <a:t>member, integrated into ONE template.</a:t>
+            </a:r>
+          </a:p>
+          <a:p>
+            <a:r>
+              <a:t>• Second bullet: walk the flow off the diagram — component drafts → integrate into one template →</a:t>
+            </a:r>
+          </a:p>
+          <a:p>
+            <a:r>
+              <a:t>review and monitor → team sign-off. Point at each stage.</a:t>
+            </a:r>
+          </a:p>
+          <a:p>
+            <a:r>
+              <a:t>• Third bullet (the framing): you don't write the components; you RUN the build — coaching, supporting</a:t>
+            </a:r>
+          </a:p>
+          <a:p>
+            <a:r>
+              <a:t>and monitoring the team through each of those stages. Your work sits ON the flow, not inside a</a:t>
+            </a:r>
+          </a:p>
+          <a:p>
+            <a:r>
+              <a:t>component.</a:t>
+            </a:r>
+          </a:p>
+          <a:p>
+            <a:r>
+              <a:t>Misconception to pre-empt: "the integrate step is a technical merge I do." No — you FACILITATE the</a:t>
+            </a:r>
+          </a:p>
+          <a:p>
+            <a:r>
+              <a:t>integration (the seams the team agreed in Topic 5); the leadership is getting the four to fit, not</a:t>
+            </a:r>
+          </a:p>
+          <a:p>
+            <a:r>
+              <a:t>typing the merge.</a:t>
+            </a:r>
+          </a:p>
+          <a:p>
+            <a:r>
+              <a:t>Question to pose: "Point at the flow — at which stage is a conflict between two component owners most</a:t>
+            </a:r>
+          </a:p>
+          <a:p>
+            <a:r>
+              <a:t>likely, and what do you do there?" (locates leadership on the diagram; sets up C2).</a:t>
+            </a:r>
+          </a:p>
+          <a:p>
+            <a:r>
+              <a:t>UoC/AT2 tie: frames the C1–C4 leadership of the build; the divided write is the vehicle for BSBXTW401</a:t>
+            </a:r>
+          </a:p>
+          <a:p>
+            <a:r>
+              <a:t>el 3–4 evidenced in AT2.</a:t>
+            </a:r>
+          </a:p>
+        </p:txBody>
+      </p:sp>
+      <p:sp>
+        <p:nvSpPr>
+          <p:cNvPr id="4" name="Slide Number Placeholder 3"/>
+          <p:cNvSpPr>
+            <a:spLocks noGrp="1"/>
+          </p:cNvSpPr>
+          <p:nvPr>
+            <p:ph type="sldNum" idx="5" sz="quarter"/>
+          </p:nvPr>
+        </p:nvSpPr>
+        <p:spPr/>
+      </p:sp>
+    </p:spTree>
+  </p:cSld>
+  <p:clrMapOvr>
+    <a:masterClrMapping/>
+  </p:clrMapOvr>
+</p:notes>
+</file>
+
+<file path=ppt/notesSlides/notesSlide3.xml><?xml version="1.0" encoding="utf-8"?>
+<p:notes xmlns:a="http://schemas.openxmlformats.org/drawingml/2006/main" xmlns:p="http://schemas.openxmlformats.org/presentationml/2006/main" xmlns:r="http://schemas.openxmlformats.org/officeDocument/2006/relationships">
+  <p:cSld>
+    <p:spTree>
+      <p:nvGrpSpPr>
+        <p:cNvPr id="1" name=""/>
+        <p:cNvGrpSpPr/>
+        <p:nvPr/>
+      </p:nvGrpSpPr>
+      <p:grpSpPr>
+        <a:xfrm>
+          <a:off x="0" y="0"/>
+          <a:ext cx="0" cy="0"/>
+          <a:chOff x="0" y="0"/>
+          <a:chExt cx="0" cy="0"/>
+        </a:xfrm>
+      </p:grpSpPr>
+      <p:sp>
+        <p:nvSpPr>
+          <p:cNvPr id="2" name="Slide Image Placeholder 1"/>
+          <p:cNvSpPr>
+            <a:spLocks noGrp="1"/>
+          </p:cNvSpPr>
+          <p:nvPr>
+            <p:ph type="sldImg" idx="2"/>
+          </p:nvPr>
+        </p:nvSpPr>
+        <p:spPr/>
+      </p:sp>
+      <p:sp>
+        <p:nvSpPr>
+          <p:cNvPr id="3" name="Notes Placeholder 2"/>
+          <p:cNvSpPr>
+            <a:spLocks noGrp="1"/>
+          </p:cNvSpPr>
+          <p:nvPr>
+            <p:ph type="body" idx="3" sz="quarter"/>
+          </p:nvPr>
+        </p:nvSpPr>
+        <p:spPr/>
+        <p:txBody>
+          <a:bodyPr/>
+          <a:lstStyle/>
+          <a:p>
+            <a:r>
+              <a:t>The primer for C1 — distinguish coaching from mentoring and give nameable techniques (KE 4).</a:t>
+            </a:r>
+          </a:p>
+          <a:p>
+            <a:r>
+              <a:t>• First bullet: COACHING develops capability in the moment; MENTORING builds it over time — both grow</a:t>
+            </a:r>
+          </a:p>
+          <a:p>
+            <a:r>
+              <a:t>the PERSON, not just the task (KE 4). Say the distinction explicitly.</a:t>
+            </a:r>
+          </a:p>
+          <a:p>
+            <a:r>
+              <a:t>• Second bullet: name the techniques — ask before telling, model then hand over, give room to try,</a:t>
+            </a:r>
+          </a:p>
+          <a:p>
+            <a:r>
+              <a:t>check understanding. These are the moves students are marked on using.</a:t>
+            </a:r>
+          </a:p>
+          <a:p>
+            <a:r>
+              <a:t>• Third bullet: coaching is how you ENHANCE the workplace culture — a team that learns from each</a:t>
+            </a:r>
+          </a:p>
+          <a:p>
+            <a:r>
+              <a:t>other, not one that waits to be told. Culture is the payoff, not a side-effect.</a:t>
+            </a:r>
+          </a:p>
+          <a:p>
+            <a:r>
+              <a:t>Misconception to pre-empt: "coaching = giving the answer faster." No — "ask before telling" is the</a:t>
+            </a:r>
+          </a:p>
+          <a:p>
+            <a:r>
+              <a:t>point; if you just supply the fix you've solved the task but developed no one.</a:t>
+            </a:r>
+          </a:p>
+          <a:p>
+            <a:r>
+              <a:t>Question to pose: "A member is stuck on their component — what's a COACHING response versus a telling</a:t>
+            </a:r>
+          </a:p>
+          <a:p>
+            <a:r>
+              <a:t>response?" (draws out ask-before-telling).</a:t>
+            </a:r>
+          </a:p>
+          <a:p>
+            <a:r>
+              <a:t>UoC/AT2 tie: BSBXTW401 KE 4 (mentoring/coaching techniques) → the coaching evidence in AT2; underpins</a:t>
+            </a:r>
+          </a:p>
+          <a:p>
+            <a:r>
+              <a:t>PC 3.1 on the next slide.</a:t>
+            </a:r>
+          </a:p>
+        </p:txBody>
+      </p:sp>
+      <p:sp>
+        <p:nvSpPr>
+          <p:cNvPr id="4" name="Slide Number Placeholder 3"/>
+          <p:cNvSpPr>
+            <a:spLocks noGrp="1"/>
+          </p:cNvSpPr>
+          <p:nvPr>
+            <p:ph type="sldNum" idx="5" sz="quarter"/>
+          </p:nvPr>
+        </p:nvSpPr>
+        <p:spPr/>
+      </p:sp>
+    </p:spTree>
+  </p:cSld>
+  <p:clrMapOvr>
+    <a:masterClrMapping/>
+  </p:clrMapOvr>
+</p:notes>
+</file>
+
+<file path=ppt/notesSlides/notesSlide4.xml><?xml version="1.0" encoding="utf-8"?>
+<p:notes xmlns:a="http://schemas.openxmlformats.org/drawingml/2006/main" xmlns:p="http://schemas.openxmlformats.org/presentationml/2006/main" xmlns:r="http://schemas.openxmlformats.org/officeDocument/2006/relationships">
+  <p:cSld>
+    <p:spTree>
+      <p:nvGrpSpPr>
+        <p:cNvPr id="1" name=""/>
+        <p:cNvGrpSpPr/>
+        <p:nvPr/>
+      </p:nvGrpSpPr>
+      <p:grpSpPr>
+        <a:xfrm>
+          <a:off x="0" y="0"/>
+          <a:ext cx="0" cy="0"/>
+          <a:chOff x="0" y="0"/>
+          <a:chExt cx="0" cy="0"/>
+        </a:xfrm>
+      </p:grpSpPr>
+      <p:sp>
+        <p:nvSpPr>
+          <p:cNvPr id="2" name="Slide Image Placeholder 1"/>
+          <p:cNvSpPr>
+            <a:spLocks noGrp="1"/>
+          </p:cNvSpPr>
+          <p:nvPr>
+            <p:ph type="sldImg" idx="2"/>
+          </p:nvPr>
+        </p:nvSpPr>
+        <p:spPr/>
+      </p:sp>
+      <p:sp>
+        <p:nvSpPr>
+          <p:cNvPr id="3" name="Notes Placeholder 2"/>
+          <p:cNvSpPr>
+            <a:spLocks noGrp="1"/>
+          </p:cNvSpPr>
+          <p:nvPr>
+            <p:ph type="body" idx="3" sz="quarter"/>
+          </p:nvPr>
+        </p:nvSpPr>
+        <p:spPr/>
+        <p:txBody>
+          <a:bodyPr/>
+          <a:lstStyle/>
+          <a:p>
+            <a:r>
+              <a:t>Apply the coaching primer to the build — this is where PC 3.1, PC 3.2 and KE 8 land.</a:t>
+            </a:r>
+          </a:p>
+          <a:p>
+            <a:r>
+              <a:t>• First bullet: provide COACHING to enhance workplace culture as the team writes its components</a:t>
+            </a:r>
+          </a:p>
+          <a:p>
+            <a:r>
+              <a:t>(PC 3.1) — coaching in the flow of the build, not a separate training session.</a:t>
+            </a:r>
+          </a:p>
+          <a:p>
+            <a:r>
+              <a:t>• Second bullet: SUPPORT individuals per organisational requirements toward the COMMON goal — the one</a:t>
+            </a:r>
+          </a:p>
+          <a:p>
+            <a:r>
+              <a:t>integrated, working template (PC 3.2). Support is aimed at the shared outcome, not just individual</a:t>
+            </a:r>
+          </a:p>
+          <a:p>
+            <a:r>
+              <a:t>comfort.</a:t>
+            </a:r>
+          </a:p>
+          <a:p>
+            <a:r>
+              <a:t>• Third bullet: role-model professional leadership behaviours — reliability, fairness, openness,</a:t>
+            </a:r>
+          </a:p>
+          <a:p>
+            <a:r>
+              <a:t>following through (KE 8). The team copies what you DO, not what you say.</a:t>
+            </a:r>
+          </a:p>
+          <a:p>
+            <a:r>
+              <a:t>Misconception to pre-empt: "supporting individuals means shielding them from the hard parts." No —</a:t>
+            </a:r>
+          </a:p>
+          <a:p>
+            <a:r>
+              <a:t>support moves them toward the common goal; sometimes that's a stretch, not a rescue.</a:t>
+            </a:r>
+          </a:p>
+          <a:p>
+            <a:r>
+              <a:t>Question to pose: "Name one professional behaviour you'd role-model in the first stand-up, and what</a:t>
+            </a:r>
+          </a:p>
+          <a:p>
+            <a:r>
+              <a:t>the team would take from seeing it" (makes KE 8 concrete).</a:t>
+            </a:r>
+          </a:p>
+          <a:p>
+            <a:r>
+              <a:t>UoC/AT2 tie: BSBXTW401 PC 3.1 + PC 3.2 + KE 8 → the coaching/support records and role-modelling</a:t>
+            </a:r>
+          </a:p>
+          <a:p>
+            <a:r>
+              <a:t>evidenced in AT2.</a:t>
+            </a:r>
+          </a:p>
+        </p:txBody>
+      </p:sp>
+      <p:sp>
+        <p:nvSpPr>
+          <p:cNvPr id="4" name="Slide Number Placeholder 3"/>
+          <p:cNvSpPr>
+            <a:spLocks noGrp="1"/>
+          </p:cNvSpPr>
+          <p:nvPr>
+            <p:ph type="sldNum" idx="5" sz="quarter"/>
+          </p:nvPr>
+        </p:nvSpPr>
+        <p:spPr/>
+      </p:sp>
+    </p:spTree>
+  </p:cSld>
+  <p:clrMapOvr>
+    <a:masterClrMapping/>
+  </p:clrMapOvr>
+</p:notes>
+</file>
+
+<file path=ppt/notesSlides/notesSlide5.xml><?xml version="1.0" encoding="utf-8"?>
+<p:notes xmlns:a="http://schemas.openxmlformats.org/drawingml/2006/main" xmlns:p="http://schemas.openxmlformats.org/presentationml/2006/main" xmlns:r="http://schemas.openxmlformats.org/officeDocument/2006/relationships">
+  <p:cSld>
+    <p:spTree>
+      <p:nvGrpSpPr>
+        <p:cNvPr id="1" name=""/>
+        <p:cNvGrpSpPr/>
+        <p:nvPr/>
+      </p:nvGrpSpPr>
+      <p:grpSpPr>
+        <a:xfrm>
+          <a:off x="0" y="0"/>
+          <a:ext cx="0" cy="0"/>
+          <a:chOff x="0" y="0"/>
+          <a:chExt cx="0" cy="0"/>
+        </a:xfrm>
+      </p:grpSpPr>
+      <p:sp>
+        <p:nvSpPr>
+          <p:cNvPr id="2" name="Slide Image Placeholder 1"/>
+          <p:cNvSpPr>
+            <a:spLocks noGrp="1"/>
+          </p:cNvSpPr>
+          <p:nvPr>
+            <p:ph type="sldImg" idx="2"/>
+          </p:nvPr>
+        </p:nvSpPr>
+        <p:spPr/>
+      </p:sp>
+      <p:sp>
+        <p:nvSpPr>
+          <p:cNvPr id="3" name="Notes Placeholder 2"/>
+          <p:cNvSpPr>
+            <a:spLocks noGrp="1"/>
+          </p:cNvSpPr>
+          <p:nvPr>
+            <p:ph type="body" idx="3" sz="quarter"/>
+          </p:nvPr>
+        </p:nvSpPr>
+        <p:spPr/>
+        <p:txBody>
+          <a:bodyPr/>
+          <a:lstStyle/>
+          <a:p>
+            <a:r>
+              <a:t>Open Section 2 — the leader RUNS the problem-solving process, doesn't own the solution. PC 3.3 and</a:t>
+            </a:r>
+          </a:p>
+          <a:p>
+            <a:r>
+              <a:t>PC 3.4 land here.</a:t>
+            </a:r>
+          </a:p>
+          <a:p>
+            <a:r>
+              <a:t>• First bullet: facilitate the team to IDENTIFY, BRAINSTORM, REPORT and RESOLVE task-related issues</a:t>
+            </a:r>
+          </a:p>
+          <a:p>
+            <a:r>
+              <a:t>and inefficiencies — don't solve it for them, run the process (PC 3.3). The verbs are the process.</a:t>
+            </a:r>
+          </a:p>
+          <a:p>
+            <a:r>
+              <a:t>• Second bullet: use problem-solving skills for team, task or individual challenges — name the</a:t>
+            </a:r>
+          </a:p>
+          <a:p>
+            <a:r>
+              <a:t>problem, options, decide, act (PC 3.4). A repeatable four-step loop.</a:t>
+            </a:r>
+          </a:p>
+          <a:p>
+            <a:r>
+              <a:t>• Third bullet: a STAND-UP is the routine that surfaces issues early — blockers reported before they</a:t>
+            </a:r>
+          </a:p>
+          <a:p>
+            <a:r>
+              <a:t>stall the build. Routine beats heroics.</a:t>
+            </a:r>
+          </a:p>
+          <a:p>
+            <a:r>
+              <a:t>Misconception to pre-empt: "resolving issues = the leader gives the fix." No — PC 3.3 is FACILITATION;</a:t>
+            </a:r>
+          </a:p>
+          <a:p>
+            <a:r>
+              <a:t>if you supply every answer the team never learns to surface and solve its own issues.</a:t>
+            </a:r>
+          </a:p>
+          <a:p>
+            <a:r>
+              <a:t>Question to pose: "A member reports their component won't integrate — do you fix it, or facilitate?</a:t>
+            </a:r>
+          </a:p>
+          <a:p>
+            <a:r>
+              <a:t>What does facilitating look like here?" (draws out the run-the-process stance).</a:t>
+            </a:r>
+          </a:p>
+          <a:p>
+            <a:r>
+              <a:t>UoC/AT2 tie: BSBXTW401 PC 3.3 + PC 3.4 → the issue-resolution episodes evidenced in AT2; exercised in</a:t>
+            </a:r>
+          </a:p>
+          <a:p>
+            <a:r>
+              <a:t>the next activity.</a:t>
+            </a:r>
+          </a:p>
+        </p:txBody>
+      </p:sp>
+      <p:sp>
+        <p:nvSpPr>
+          <p:cNvPr id="4" name="Slide Number Placeholder 3"/>
+          <p:cNvSpPr>
+            <a:spLocks noGrp="1"/>
+          </p:cNvSpPr>
+          <p:nvPr>
+            <p:ph type="sldNum" idx="5" sz="quarter"/>
+          </p:nvPr>
+        </p:nvSpPr>
+        <p:spPr/>
+      </p:sp>
+    </p:spTree>
+  </p:cSld>
+  <p:clrMapOvr>
+    <a:masterClrMapping/>
+  </p:clrMapOvr>
+</p:notes>
+</file>
+
+<file path=ppt/notesSlides/notesSlide6.xml><?xml version="1.0" encoding="utf-8"?>
+<p:notes xmlns:a="http://schemas.openxmlformats.org/drawingml/2006/main" xmlns:p="http://schemas.openxmlformats.org/presentationml/2006/main" xmlns:r="http://schemas.openxmlformats.org/officeDocument/2006/relationships">
+  <p:cSld>
+    <p:spTree>
+      <p:nvGrpSpPr>
+        <p:cNvPr id="1" name=""/>
+        <p:cNvGrpSpPr/>
+        <p:nvPr/>
+      </p:nvGrpSpPr>
+      <p:grpSpPr>
+        <a:xfrm>
+          <a:off x="0" y="0"/>
+          <a:ext cx="0" cy="0"/>
+          <a:chOff x="0" y="0"/>
+          <a:chExt cx="0" cy="0"/>
+        </a:xfrm>
+      </p:grpSpPr>
+      <p:sp>
+        <p:nvSpPr>
+          <p:cNvPr id="2" name="Slide Image Placeholder 1"/>
+          <p:cNvSpPr>
+            <a:spLocks noGrp="1"/>
+          </p:cNvSpPr>
+          <p:nvPr>
+            <p:ph type="sldImg" idx="2"/>
+          </p:nvPr>
+        </p:nvSpPr>
+        <p:spPr/>
+      </p:sp>
+      <p:sp>
+        <p:nvSpPr>
+          <p:cNvPr id="3" name="Notes Placeholder 2"/>
+          <p:cNvSpPr>
+            <a:spLocks noGrp="1"/>
+          </p:cNvSpPr>
+          <p:nvPr>
+            <p:ph type="body" idx="3" sz="quarter"/>
+          </p:nvPr>
+        </p:nvSpPr>
+        <p:spPr/>
+        <p:txBody>
+          <a:bodyPr/>
+          <a:lstStyle/>
+          <a:p>
+            <a:r>
+              <a:t>The conflict-and-challenges slide — PE 5, KE 5 and the KE 10 checklist land here.</a:t>
+            </a:r>
+          </a:p>
+          <a:p>
+            <a:r>
+              <a:t>• First bullet: manage conflicts and challenges per organisational requirements using</a:t>
+            </a:r>
+          </a:p>
+          <a:p>
+            <a:r>
+              <a:t>conflict-resolution and negotiation strategies (PE 5, KE 5). Conflict is normal; managing it well is</a:t>
+            </a:r>
+          </a:p>
+          <a:p>
+            <a:r>
+              <a:t>the skill.</a:t>
+            </a:r>
+          </a:p>
+          <a:p>
+            <a:r>
+              <a:t>• Second bullet: the technique — separate the person from the problem; find the shared interest; agree</a:t>
+            </a:r>
+          </a:p>
+          <a:p>
+            <a:r>
+              <a:t>a way forward, not a winner. Say it as a procedure they can run.</a:t>
+            </a:r>
+          </a:p>
+          <a:p>
+            <a:r>
+              <a:t>• Third bullet: watch for the teamwork challenges the evidence EXPECTS (KE 10) — difficulties</a:t>
+            </a:r>
+          </a:p>
+          <a:p>
+            <a:r>
+              <a:t>performing tasks; conflicts with clients or team members; potential risks or safety hazards;</a:t>
+            </a:r>
+          </a:p>
+          <a:p>
+            <a:r>
+              <a:t>unethical or inappropriate behaviour. This is a named list they must be able to recognise.</a:t>
+            </a:r>
+          </a:p>
+          <a:p>
+            <a:r>
+              <a:t>Misconception to pre-empt: "good teams don't have conflict, so I should suppress it." No — surfaced,</a:t>
+            </a:r>
+          </a:p>
+          <a:p>
+            <a:r>
+              <a:t>well-managed conflict improves the build; suppressed conflict resurfaces at integration. Manage, don't</a:t>
+            </a:r>
+          </a:p>
+          <a:p>
+            <a:r>
+              <a:t>bury.</a:t>
+            </a:r>
+          </a:p>
+          <a:p>
+            <a:r>
+              <a:t>Question to pose: "Two owners disagree on the network/compute boundary — what's the shared interest</a:t>
+            </a:r>
+          </a:p>
+          <a:p>
+            <a:r>
+              <a:t>you'd steer them to?" (models person-vs-problem; previews the seeded conflict in the activity).</a:t>
+            </a:r>
+          </a:p>
+          <a:p>
+            <a:r>
+              <a:t>UoC/AT2 tie: BSBXTW401 PE 5 + KE 5 + KE 10 → the conflict-management episode evidenced in AT2</a:t>
+            </a:r>
+          </a:p>
+          <a:p>
+            <a:r>
+              <a:t>(exercised next).</a:t>
+            </a:r>
+          </a:p>
+        </p:txBody>
+      </p:sp>
+      <p:sp>
+        <p:nvSpPr>
+          <p:cNvPr id="4" name="Slide Number Placeholder 3"/>
+          <p:cNvSpPr>
+            <a:spLocks noGrp="1"/>
+          </p:cNvSpPr>
+          <p:nvPr>
+            <p:ph type="sldNum" idx="5" sz="quarter"/>
+          </p:nvPr>
+        </p:nvSpPr>
+        <p:spPr/>
+      </p:sp>
+    </p:spTree>
+  </p:cSld>
+  <p:clrMapOvr>
+    <a:masterClrMapping/>
+  </p:clrMapOvr>
+</p:notes>
+</file>
+
+<file path=ppt/notesSlides/notesSlide7.xml><?xml version="1.0" encoding="utf-8"?>
+<p:notes xmlns:a="http://schemas.openxmlformats.org/drawingml/2006/main" xmlns:p="http://schemas.openxmlformats.org/presentationml/2006/main" xmlns:r="http://schemas.openxmlformats.org/officeDocument/2006/relationships">
+  <p:cSld>
+    <p:spTree>
+      <p:nvGrpSpPr>
+        <p:cNvPr id="1" name=""/>
+        <p:cNvGrpSpPr/>
+        <p:nvPr/>
+      </p:nvGrpSpPr>
+      <p:grpSpPr>
+        <a:xfrm>
+          <a:off x="0" y="0"/>
+          <a:ext cx="0" cy="0"/>
+          <a:chOff x="0" y="0"/>
+          <a:chExt cx="0" cy="0"/>
+        </a:xfrm>
+      </p:grpSpPr>
+      <p:sp>
+        <p:nvSpPr>
+          <p:cNvPr id="2" name="Slide Image Placeholder 1"/>
+          <p:cNvSpPr>
+            <a:spLocks noGrp="1"/>
+          </p:cNvSpPr>
+          <p:nvPr>
+            <p:ph type="sldImg" idx="2"/>
+          </p:nvPr>
+        </p:nvSpPr>
+        <p:spPr/>
+      </p:sp>
+      <p:sp>
+        <p:nvSpPr>
+          <p:cNvPr id="3" name="Notes Placeholder 2"/>
+          <p:cNvSpPr>
+            <a:spLocks noGrp="1"/>
+          </p:cNvSpPr>
+          <p:nvPr>
+            <p:ph type="body" idx="3" sz="quarter"/>
+          </p:nvPr>
+        </p:nvSpPr>
+        <p:spPr/>
+        <p:txBody>
+          <a:bodyPr/>
+          <a:lstStyle/>
+          <a:p>
+            <a:r>
+              <a:t>Facilitation — the Section 2 practice; students LEAD a stand-up and facilitate an injected conflict to</a:t>
+            </a:r>
+          </a:p>
+          <a:p>
+            <a:r>
+              <a:t>resolution, recording how they handled it (the AT2 evidence shape).</a:t>
+            </a:r>
+          </a:p>
+          <a:p>
+            <a:r>
+              <a:t>Tell students, in these words: "Lead a stand-up for your practice team — each member reports progress</a:t>
+            </a:r>
+          </a:p>
+          <a:p>
+            <a:r>
+              <a:t>on their component and any blocker. Partway through, a conflict is injected: two members disagree over</a:t>
+            </a:r>
+          </a:p>
+          <a:p>
+            <a:r>
+              <a:t>an integration boundary. Facilitate it to a resolution and record how you handled it."</a:t>
+            </a:r>
+          </a:p>
+          <a:p>
+            <a:r>
+              <a:t>Steps (put on the board):</a:t>
+            </a:r>
+          </a:p>
+          <a:p>
+            <a:r>
+              <a:t>1. Run the stand-up — each member: what's done, what's next, any blocker.</a:t>
+            </a:r>
+          </a:p>
+          <a:p>
+            <a:r>
+              <a:t>2. When the conflict lands, separate person from problem; surface each side's interest.</a:t>
+            </a:r>
+          </a:p>
+          <a:p>
+            <a:r>
+              <a:t>3. Steer to a shared way forward (not a winner); confirm the agreed boundary.</a:t>
+            </a:r>
+          </a:p>
+          <a:p>
+            <a:r>
+              <a:t>4. Record the episode — the issue, what you did, the resolution.</a:t>
+            </a:r>
+          </a:p>
+          <a:p>
+            <a:r>
+              <a:t>Must produce: a short written record of the facilitated stand-up and the conflict resolution — the</a:t>
+            </a:r>
+          </a:p>
+          <a:p>
+            <a:r>
+              <a:t>practice version of the AT2 issue-resolution evidence.</a:t>
+            </a:r>
+          </a:p>
+          <a:p>
+            <a:r>
+              <a:t>Timing: ~25 min. Where they get stuck: they ADJUDICATE (pick a winner) instead of facilitating a</a:t>
+            </a:r>
+          </a:p>
+          <a:p>
+            <a:r>
+              <a:t>shared way forward — circulate and push "what do both owners actually need?"; and the stand-up drifts</a:t>
+            </a:r>
+          </a:p>
+          <a:p>
+            <a:r>
+              <a:t>into solving the whole thing on the spot.</a:t>
+            </a:r>
+          </a:p>
+          <a:p>
+            <a:r>
+              <a:t>Share-back prompt: ask one leader how they turned the disagreement into a shared interest — surface the</a:t>
+            </a:r>
+          </a:p>
+          <a:p>
+            <a:r>
+              <a:t>person-vs-problem move.</a:t>
+            </a:r>
+          </a:p>
+          <a:p>
+            <a:r>
+              <a:t>No-leakage note: this is the PRACTICE team — AT2 assesses the same conflict-management leadership on</a:t>
+            </a:r>
+          </a:p>
+          <a:p>
+            <a:r>
+              <a:t>the Ledgerline build (comparable, not identical); keep them on the practice vehicle.</a:t>
+            </a:r>
+          </a:p>
+        </p:txBody>
+      </p:sp>
+      <p:sp>
+        <p:nvSpPr>
+          <p:cNvPr id="4" name="Slide Number Placeholder 3"/>
+          <p:cNvSpPr>
+            <a:spLocks noGrp="1"/>
+          </p:cNvSpPr>
+          <p:nvPr>
+            <p:ph type="sldNum" idx="5" sz="quarter"/>
+          </p:nvPr>
+        </p:nvSpPr>
+        <p:spPr/>
+      </p:sp>
+    </p:spTree>
+  </p:cSld>
+  <p:clrMapOvr>
+    <a:masterClrMapping/>
+  </p:clrMapOvr>
+</p:notes>
+</file>
+
+<file path=ppt/notesSlides/notesSlide8.xml><?xml version="1.0" encoding="utf-8"?>
+<p:notes xmlns:a="http://schemas.openxmlformats.org/drawingml/2006/main" xmlns:p="http://schemas.openxmlformats.org/presentationml/2006/main" xmlns:r="http://schemas.openxmlformats.org/officeDocument/2006/relationships">
+  <p:cSld>
+    <p:spTree>
+      <p:nvGrpSpPr>
+        <p:cNvPr id="1" name=""/>
+        <p:cNvGrpSpPr/>
+        <p:nvPr/>
+      </p:nvGrpSpPr>
+      <p:grpSpPr>
+        <a:xfrm>
+          <a:off x="0" y="0"/>
+          <a:ext cx="0" cy="0"/>
+          <a:chOff x="0" y="0"/>
+          <a:chExt cx="0" cy="0"/>
+        </a:xfrm>
+      </p:grpSpPr>
+      <p:sp>
+        <p:nvSpPr>
+          <p:cNvPr id="2" name="Slide Image Placeholder 1"/>
+          <p:cNvSpPr>
+            <a:spLocks noGrp="1"/>
+          </p:cNvSpPr>
+          <p:nvPr>
+            <p:ph type="sldImg" idx="2"/>
+          </p:nvPr>
+        </p:nvSpPr>
+        <p:spPr/>
+      </p:sp>
+      <p:sp>
+        <p:nvSpPr>
+          <p:cNvPr id="3" name="Notes Placeholder 2"/>
+          <p:cNvSpPr>
+            <a:spLocks noGrp="1"/>
+          </p:cNvSpPr>
+          <p:nvPr>
+            <p:ph type="body" idx="3" sz="quarter"/>
+          </p:nvPr>
+        </p:nvSpPr>
+        <p:spPr/>
+        <p:txBody>
+          <a:bodyPr/>
+          <a:lstStyle/>
+          <a:p>
+            <a:r>
+              <a:t>Open Section 3 — measurement is the input to feedback. PC 4.1 lands here.</a:t>
+            </a:r>
+          </a:p>
+          <a:p>
+            <a:r>
+              <a:t>• First bullet: measure each member's performance against the AGREED WORK PLANS from Topic 5 — the</a:t>
+            </a:r>
+          </a:p>
+          <a:p>
+            <a:r>
+              <a:t>plan is the yardstick (PC 4.1). This is why the performance plans had to be measurable.</a:t>
+            </a:r>
+          </a:p>
+          <a:p>
+            <a:r>
+              <a:t>• Second bullet: measure the WORK, not the person — what was due, what was delivered, at what quality.</a:t>
+            </a:r>
+          </a:p>
+          <a:p>
+            <a:r>
+              <a:t>Keep it objective and evidence-based.</a:t>
+            </a:r>
+          </a:p>
+          <a:p>
+            <a:r>
+              <a:t>• Third bullet: measurement is the INPUT to feedback — you can't give useful feedback without it.</a:t>
+            </a:r>
+          </a:p>
+          <a:p>
+            <a:r>
+              <a:t>Section 3 runs measure → feedback in order.</a:t>
+            </a:r>
+          </a:p>
+          <a:p>
+            <a:r>
+              <a:t>Misconception to pre-empt: "measuring performance = judging the person." No — you measure the work</a:t>
+            </a:r>
+          </a:p>
+          <a:p>
+            <a:r>
+              <a:t>against the plan; the person-level conversation is the feedback that follows, and it's about the gap,</a:t>
+            </a:r>
+          </a:p>
+          <a:p>
+            <a:r>
+              <a:t>not character.</a:t>
+            </a:r>
+          </a:p>
+          <a:p>
+            <a:r>
+              <a:t>Question to pose: "The compute owner's plan said 'valid, peer-reviewed, deployed by the milestone' —</a:t>
+            </a:r>
+          </a:p>
+          <a:p>
+            <a:r>
+              <a:t>how do you measure whether they met it?" (ties measurement back to the Topic 5 plan).</a:t>
+            </a:r>
+          </a:p>
+          <a:p>
+            <a:r>
+              <a:t>UoC/AT2 tie: BSBXTW401 PC 4.1 (measure performance against agreed work plans) → the</a:t>
+            </a:r>
+          </a:p>
+          <a:p>
+            <a:r>
+              <a:t>performance-measurement evidence in AT2.</a:t>
+            </a:r>
+          </a:p>
+        </p:txBody>
+      </p:sp>
+      <p:sp>
+        <p:nvSpPr>
+          <p:cNvPr id="4" name="Slide Number Placeholder 3"/>
+          <p:cNvSpPr>
+            <a:spLocks noGrp="1"/>
+          </p:cNvSpPr>
+          <p:nvPr>
+            <p:ph type="sldNum" idx="5" sz="quarter"/>
+          </p:nvPr>
+        </p:nvSpPr>
+        <p:spPr/>
+      </p:sp>
+    </p:spTree>
+  </p:cSld>
+  <p:clrMapOvr>
+    <a:masterClrMapping/>
+  </p:clrMapOvr>
+</p:notes>
+</file>
+
+<file path=ppt/notesSlides/notesSlide9.xml><?xml version="1.0" encoding="utf-8"?>
+<p:notes xmlns:a="http://schemas.openxmlformats.org/drawingml/2006/main" xmlns:p="http://schemas.openxmlformats.org/presentationml/2006/main" xmlns:r="http://schemas.openxmlformats.org/officeDocument/2006/relationships">
+  <p:cSld>
+    <p:spTree>
+      <p:nvGrpSpPr>
+        <p:cNvPr id="1" name=""/>
+        <p:cNvGrpSpPr/>
+        <p:nvPr/>
+      </p:nvGrpSpPr>
+      <p:grpSpPr>
+        <a:xfrm>
+          <a:off x="0" y="0"/>
+          <a:ext cx="0" cy="0"/>
+          <a:chOff x="0" y="0"/>
+          <a:chExt cx="0" cy="0"/>
+        </a:xfrm>
+      </p:grpSpPr>
+      <p:sp>
+        <p:nvSpPr>
+          <p:cNvPr id="2" name="Slide Image Placeholder 1"/>
+          <p:cNvSpPr>
+            <a:spLocks noGrp="1"/>
+          </p:cNvSpPr>
+          <p:nvPr>
+            <p:ph type="sldImg" idx="2"/>
+          </p:nvPr>
+        </p:nvSpPr>
+        <p:spPr/>
+      </p:sp>
+      <p:sp>
+        <p:nvSpPr>
+          <p:cNvPr id="3" name="Notes Placeholder 2"/>
+          <p:cNvSpPr>
+            <a:spLocks noGrp="1"/>
+          </p:cNvSpPr>
+          <p:nvPr>
+            <p:ph type="body" idx="3" sz="quarter"/>
+          </p:nvPr>
+        </p:nvSpPr>
+        <p:spPr/>
+        <p:txBody>
+          <a:bodyPr/>
+          <a:lstStyle/>
+          <a:p>
+            <a:r>
+              <a:t>The feedback slide — PC 4.2 and PE 2 land here. Teach feedback as a skill with a shape.</a:t>
+            </a:r>
+          </a:p>
+          <a:p>
+            <a:r>
+              <a:t>• First bullet: provide TIMELY, CONSTRUCTIVE feedback to expected organisational standards — close to</a:t>
+            </a:r>
+          </a:p>
+          <a:p>
+            <a:r>
+              <a:t>the event, specific, actionable (PC 4.2). Late or vague feedback doesn't change anything.</a:t>
+            </a:r>
+          </a:p>
+          <a:p>
+            <a:r>
+              <a:t>• Second bullet: the shape — balance recognition with the gap; describe the BEHAVIOUR and its EFFECT,</a:t>
+            </a:r>
+          </a:p>
+          <a:p>
+            <a:r>
+              <a:t>then agree the next step. Behaviour → effect → next step keeps it constructive.</a:t>
+            </a:r>
+          </a:p>
+          <a:p>
+            <a:r>
+              <a:t>• Third bullet: provide feedback AND ASSISTANCE (PE 2) — feedback names the gap, assistance helps</a:t>
+            </a:r>
+          </a:p>
+          <a:p>
+            <a:r>
+              <a:t>close it. Naming a gap without helping close it is half a job.</a:t>
+            </a:r>
+          </a:p>
+          <a:p>
+            <a:r>
+              <a:t>Misconception to pre-empt: "constructive feedback means only positives." No — it means specific and</a:t>
+            </a:r>
+          </a:p>
+          <a:p>
+            <a:r>
+              <a:t>actionable, including the gap; a "constructive" that never names the gap develops no one.</a:t>
+            </a:r>
+          </a:p>
+          <a:p>
+            <a:r>
+              <a:t>Question to pose: "Give the database owner feedback that they missed the peer-review step — say it as</a:t>
+            </a:r>
+          </a:p>
+          <a:p>
+            <a:r>
+              <a:t>behaviour → effect → next step" (rehearses the shape live).</a:t>
+            </a:r>
+          </a:p>
+          <a:p>
+            <a:r>
+              <a:t>UoC/AT2 tie: BSBXTW401 PC 4.2 + PE 2 (timely constructive feedback; feedback and assistance) → the</a:t>
+            </a:r>
+          </a:p>
+          <a:p>
+            <a:r>
+              <a:t>feedback records in AT2.</a:t>
+            </a:r>
+          </a:p>
+        </p:txBody>
+      </p:sp>
+      <p:sp>
+        <p:nvSpPr>
+          <p:cNvPr id="4" name="Slide Number Placeholder 3"/>
+          <p:cNvSpPr>
+            <a:spLocks noGrp="1"/>
+          </p:cNvSpPr>
+          <p:nvPr>
+            <p:ph type="sldNum" idx="5" sz="quarter"/>
+          </p:nvPr>
+        </p:nvSpPr>
+        <p:spPr/>
+      </p:sp>
+    </p:spTree>
+  </p:cSld>
+  <p:clrMapOvr>
+    <a:masterClrMapping/>
+  </p:clrMapOvr>
+</p:notes>
 </file>
 
 <file path=ppt/slideLayouts/slideLayout1.xml><?xml version="1.0" encoding="utf-8"?>
@@ -9603,4 +11483,324 @@
   </a:objectDefaults>
   <a:extraClrSchemeLst/>
 </a:theme>
+</file>
+
+<file path=ppt/theme/theme2.xml><?xml version="1.0" encoding="utf-8"?>
+<a:theme xmlns:a="http://schemas.openxmlformats.org/drawingml/2006/main" name="Office Theme">
+  <a:themeElements>
+    <a:clrScheme name="Office">
+      <a:dk1>
+        <a:sysClr val="windowText" lastClr="000000"/>
+      </a:dk1>
+      <a:lt1>
+        <a:sysClr val="window" lastClr="FFFFFF"/>
+      </a:lt1>
+      <a:dk2>
+        <a:srgbClr val="1F497D"/>
+      </a:dk2>
+      <a:lt2>
+        <a:srgbClr val="EEECE1"/>
+      </a:lt2>
+      <a:accent1>
+        <a:srgbClr val="4F81BD"/>
+      </a:accent1>
+      <a:accent2>
+        <a:srgbClr val="C0504D"/>
+      </a:accent2>
+      <a:accent3>
+        <a:srgbClr val="9BBB59"/>
+      </a:accent3>
+      <a:accent4>
+        <a:srgbClr val="8064A2"/>
+      </a:accent4>
+      <a:accent5>
+        <a:srgbClr val="4BACC6"/>
+      </a:accent5>
+      <a:accent6>
+        <a:srgbClr val="F79646"/>
+      </a:accent6>
+      <a:hlink>
+        <a:srgbClr val="0000FF"/>
+      </a:hlink>
+      <a:folHlink>
+        <a:srgbClr val="800080"/>
+      </a:folHlink>
+    </a:clrScheme>
+    <a:fontScheme name="Office">
+      <a:majorFont>
+        <a:latin typeface="Calibri"/>
+        <a:ea typeface=""/>
+        <a:cs typeface=""/>
+        <a:font script="Jpan" typeface="ＭＳ Ｐゴシック"/>
+        <a:font script="Hang" typeface="맑은 고딕"/>
+        <a:font script="Hans" typeface="宋体"/>
+        <a:font script="Hant" typeface="新細明體"/>
+        <a:font script="Arab" typeface="Times New Roman"/>
+        <a:font script="Hebr" typeface="Times New Roman"/>
+        <a:font script="Thai" typeface="Angsana New"/>
+        <a:font script="Ethi" typeface="Nyala"/>
+        <a:font script="Beng" typeface="Vrinda"/>
+        <a:font script="Gujr" typeface="Shruti"/>
+        <a:font script="Khmr" typeface="MoolBoran"/>
+        <a:font script="Knda" typeface="Tunga"/>
+        <a:font script="Guru" typeface="Raavi"/>
+        <a:font script="Cans" typeface="Euphemia"/>
+        <a:font script="Cher" typeface="Plantagenet Cherokee"/>
+        <a:font script="Yiii" typeface="Microsoft Yi Baiti"/>
+        <a:font script="Tibt" typeface="Microsoft Himalaya"/>
+        <a:font script="Thaa" typeface="MV Boli"/>
+        <a:font script="Deva" typeface="Mangal"/>
+        <a:font script="Telu" typeface="Gautami"/>
+        <a:font script="Taml" typeface="Latha"/>
+        <a:font script="Syrc" typeface="Estrangelo Edessa"/>
+        <a:font script="Orya" typeface="Kalinga"/>
+        <a:font script="Mlym" typeface="Kartika"/>
+        <a:font script="Laoo" typeface="DokChampa"/>
+        <a:font script="Sinh" typeface="Iskoola Pota"/>
+        <a:font script="Mong" typeface="Mongolian Baiti"/>
+        <a:font script="Viet" typeface="Times New Roman"/>
+        <a:font script="Uigh" typeface="Microsoft Uighur"/>
+        <a:font script="Geor" typeface="Sylfaen"/>
+      </a:majorFont>
+      <a:minorFont>
+        <a:latin typeface="Calibri"/>
+        <a:ea typeface=""/>
+        <a:cs typeface=""/>
+        <a:font script="Jpan" typeface="ＭＳ Ｐゴシック"/>
+        <a:font script="Hang" typeface="맑은 고딕"/>
+        <a:font script="Hans" typeface="宋体"/>
+        <a:font script="Hant" typeface="新細明體"/>
+        <a:font script="Arab" typeface="Arial"/>
+        <a:font script="Hebr" typeface="Arial"/>
+        <a:font script="Thai" typeface="Cordia New"/>
+        <a:font script="Ethi" typeface="Nyala"/>
+        <a:font script="Beng" typeface="Vrinda"/>
+        <a:font script="Gujr" typeface="Shruti"/>
+        <a:font script="Khmr" typeface="DaunPenh"/>
+        <a:font script="Knda" typeface="Tunga"/>
+        <a:font script="Guru" typeface="Raavi"/>
+        <a:font script="Cans" typeface="Euphemia"/>
+        <a:font script="Cher" typeface="Plantagenet Cherokee"/>
+        <a:font script="Yiii" typeface="Microsoft Yi Baiti"/>
+        <a:font script="Tibt" typeface="Microsoft Himalaya"/>
+        <a:font script="Thaa" typeface="MV Boli"/>
+        <a:font script="Deva" typeface="Mangal"/>
+        <a:font script="Telu" typeface="Gautami"/>
+        <a:font script="Taml" typeface="Latha"/>
+        <a:font script="Syrc" typeface="Estrangelo Edessa"/>
+        <a:font script="Orya" typeface="Kalinga"/>
+        <a:font script="Mlym" typeface="Kartika"/>
+        <a:font script="Laoo" typeface="DokChampa"/>
+        <a:font script="Sinh" typeface="Iskoola Pota"/>
+        <a:font script="Mong" typeface="Mongolian Baiti"/>
+        <a:font script="Viet" typeface="Arial"/>
+        <a:font script="Uigh" typeface="Microsoft Uighur"/>
+        <a:font script="Geor" typeface="Sylfaen"/>
+      </a:minorFont>
+    </a:fontScheme>
+    <a:fmtScheme name="Office">
+      <a:fillStyleLst>
+        <a:solidFill>
+          <a:schemeClr val="phClr"/>
+        </a:solidFill>
+        <a:gradFill rotWithShape="1">
+          <a:gsLst>
+            <a:gs pos="0">
+              <a:schemeClr val="phClr">
+                <a:tint val="50000"/>
+                <a:satMod val="300000"/>
+              </a:schemeClr>
+            </a:gs>
+            <a:gs pos="35000">
+              <a:schemeClr val="phClr">
+                <a:tint val="37000"/>
+                <a:satMod val="300000"/>
+              </a:schemeClr>
+            </a:gs>
+            <a:gs pos="100000">
+              <a:schemeClr val="phClr">
+                <a:tint val="15000"/>
+                <a:satMod val="350000"/>
+              </a:schemeClr>
+            </a:gs>
+          </a:gsLst>
+          <a:lin ang="16200000" scaled="1"/>
+        </a:gradFill>
+        <a:gradFill rotWithShape="1">
+          <a:gsLst>
+            <a:gs pos="0">
+              <a:schemeClr val="phClr">
+                <a:tint val="100000"/>
+                <a:shade val="100000"/>
+                <a:satMod val="130000"/>
+              </a:schemeClr>
+            </a:gs>
+            <a:gs pos="100000">
+              <a:schemeClr val="phClr">
+                <a:tint val="50000"/>
+                <a:shade val="100000"/>
+                <a:satMod val="350000"/>
+              </a:schemeClr>
+            </a:gs>
+          </a:gsLst>
+          <a:lin ang="16200000" scaled="0"/>
+        </a:gradFill>
+      </a:fillStyleLst>
+      <a:lnStyleLst>
+        <a:ln w="9525" cap="flat" cmpd="sng" algn="ctr">
+          <a:solidFill>
+            <a:schemeClr val="phClr">
+              <a:shade val="95000"/>
+              <a:satMod val="105000"/>
+            </a:schemeClr>
+          </a:solidFill>
+          <a:prstDash val="solid"/>
+        </a:ln>
+        <a:ln w="25400" cap="flat" cmpd="sng" algn="ctr">
+          <a:solidFill>
+            <a:schemeClr val="phClr"/>
+          </a:solidFill>
+          <a:prstDash val="solid"/>
+        </a:ln>
+        <a:ln w="38100" cap="flat" cmpd="sng" algn="ctr">
+          <a:solidFill>
+            <a:schemeClr val="phClr"/>
+          </a:solidFill>
+          <a:prstDash val="solid"/>
+        </a:ln>
+      </a:lnStyleLst>
+      <a:effectStyleLst>
+        <a:effectStyle>
+          <a:effectLst>
+            <a:outerShdw blurRad="40000" dist="20000" dir="5400000" rotWithShape="0">
+              <a:srgbClr val="000000">
+                <a:alpha val="38000"/>
+              </a:srgbClr>
+            </a:outerShdw>
+          </a:effectLst>
+        </a:effectStyle>
+        <a:effectStyle>
+          <a:effectLst>
+            <a:outerShdw blurRad="40000" dist="23000" dir="5400000" rotWithShape="0">
+              <a:srgbClr val="000000">
+                <a:alpha val="35000"/>
+              </a:srgbClr>
+            </a:outerShdw>
+          </a:effectLst>
+        </a:effectStyle>
+        <a:effectStyle>
+          <a:effectLst>
+            <a:outerShdw blurRad="40000" dist="23000" dir="5400000" rotWithShape="0">
+              <a:srgbClr val="000000">
+                <a:alpha val="35000"/>
+              </a:srgbClr>
+            </a:outerShdw>
+          </a:effectLst>
+          <a:scene3d>
+            <a:camera prst="orthographicFront">
+              <a:rot lat="0" lon="0" rev="0"/>
+            </a:camera>
+            <a:lightRig rig="threePt" dir="t">
+              <a:rot lat="0" lon="0" rev="1200000"/>
+            </a:lightRig>
+          </a:scene3d>
+          <a:sp3d>
+            <a:bevelT w="63500" h="25400"/>
+          </a:sp3d>
+        </a:effectStyle>
+      </a:effectStyleLst>
+      <a:bgFillStyleLst>
+        <a:solidFill>
+          <a:schemeClr val="phClr"/>
+        </a:solidFill>
+        <a:gradFill rotWithShape="1">
+          <a:gsLst>
+            <a:gs pos="0">
+              <a:schemeClr val="phClr">
+                <a:tint val="40000"/>
+                <a:satMod val="350000"/>
+              </a:schemeClr>
+            </a:gs>
+            <a:gs pos="40000">
+              <a:schemeClr val="phClr">
+                <a:tint val="45000"/>
+                <a:shade val="99000"/>
+                <a:satMod val="350000"/>
+              </a:schemeClr>
+            </a:gs>
+            <a:gs pos="100000">
+              <a:schemeClr val="phClr">
+                <a:shade val="20000"/>
+                <a:satMod val="255000"/>
+              </a:schemeClr>
+            </a:gs>
+          </a:gsLst>
+          <a:path path="circle">
+            <a:fillToRect l="50000" t="-80000" r="50000" b="180000"/>
+          </a:path>
+        </a:gradFill>
+        <a:gradFill rotWithShape="1">
+          <a:gsLst>
+            <a:gs pos="0">
+              <a:schemeClr val="phClr">
+                <a:tint val="80000"/>
+                <a:satMod val="300000"/>
+              </a:schemeClr>
+            </a:gs>
+            <a:gs pos="100000">
+              <a:schemeClr val="phClr">
+                <a:shade val="30000"/>
+                <a:satMod val="200000"/>
+              </a:schemeClr>
+            </a:gs>
+          </a:gsLst>
+          <a:path path="circle">
+            <a:fillToRect l="50000" t="50000" r="50000" b="50000"/>
+          </a:path>
+        </a:gradFill>
+      </a:bgFillStyleLst>
+    </a:fmtScheme>
+  </a:themeElements>
+  <a:objectDefaults>
+    <a:spDef>
+      <a:spPr/>
+      <a:bodyPr/>
+      <a:lstStyle/>
+      <a:style>
+        <a:lnRef idx="1">
+          <a:schemeClr val="accent1"/>
+        </a:lnRef>
+        <a:fillRef idx="3">
+          <a:schemeClr val="accent1"/>
+        </a:fillRef>
+        <a:effectRef idx="2">
+          <a:schemeClr val="accent1"/>
+        </a:effectRef>
+        <a:fontRef idx="minor">
+          <a:schemeClr val="lt1"/>
+        </a:fontRef>
+      </a:style>
+    </a:spDef>
+    <a:lnDef>
+      <a:spPr/>
+      <a:bodyPr/>
+      <a:lstStyle/>
+      <a:style>
+        <a:lnRef idx="2">
+          <a:schemeClr val="accent1"/>
+        </a:lnRef>
+        <a:fillRef idx="0">
+          <a:schemeClr val="accent1"/>
+        </a:fillRef>
+        <a:effectRef idx="1">
+          <a:schemeClr val="accent1"/>
+        </a:effectRef>
+        <a:fontRef idx="minor">
+          <a:schemeClr val="tx1"/>
+        </a:fontRef>
+      </a:style>
+    </a:lnDef>
+  </a:objectDefaults>
+  <a:extraClrSchemeLst/>
+</a:theme>
 </file>
--- a/S1-CL3-Cloud-Infrastructure-Improvement/delivery/topic_06/Topic_06_Slides.pptx
+++ b/S1-CL3-Cloud-Infrastructure-Improvement/delivery/topic_06/Topic_06_Slides.pptx
@@ -23,6 +23,14 @@
     <p:sldId id="271" r:id="rId23"/>
     <p:sldId id="272" r:id="rId24"/>
     <p:sldId id="273" r:id="rId25"/>
+    <p:sldId id="274" r:id="rId26"/>
+    <p:sldId id="275" r:id="rId27"/>
+    <p:sldId id="276" r:id="rId28"/>
+    <p:sldId id="277" r:id="rId29"/>
+    <p:sldId id="278" r:id="rId30"/>
+    <p:sldId id="279" r:id="rId31"/>
+    <p:sldId id="280" r:id="rId32"/>
+    <p:sldId id="281" r:id="rId33"/>
   </p:sldIdLst>
   <p:sldSz cx="12191695" cy="6858000" type="screen4x3"/>
   <p:notesSz cx="6858000" cy="9144000"/>
@@ -519,92 +527,12 @@
           <a:lstStyle/>
           <a:p>
             <a:r>
-              <a:t>Frame Topic 6 as the DELIVERY half of AT2 — Topic 5 planned and allocated; now the team writes the</a:t>
-            </a:r>
-          </a:p>
-          <a:p>
-            <a:r>
-              <a:t>IaC and you LEAD the build. Set the mode; don't teach coaching yet.</a:t>
-            </a:r>
-          </a:p>
-          <a:p>
-            <a:r>
-              <a:t>• First bullet: Topic 5 planned the team and allocated the four components; now the team writes the</a:t>
-            </a:r>
-          </a:p>
-          <a:p>
-            <a:r>
-              <a:t>code and you run the build.</a:t>
-            </a:r>
-          </a:p>
-          <a:p>
-            <a:r>
-              <a:t>• Second bullet: name what "leading the build" actually is — coaching, supporting, facilitating issue</a:t>
-            </a:r>
-          </a:p>
-          <a:p>
-            <a:r>
-              <a:t>resolution, problem-solving, managing conflict, then measuring performance and developing others. That</a:t>
-            </a:r>
-          </a:p>
-          <a:p>
-            <a:r>
-              <a:t>list IS today's four sections.</a:t>
-            </a:r>
-          </a:p>
-          <a:p>
-            <a:r>
-              <a:t>• Third bullet: in-world you lead the YAT ICT team building Ledgerline's improved infrastructure —</a:t>
-            </a:r>
-          </a:p>
-          <a:p>
-            <a:r>
-              <a:t>keep it concrete.</a:t>
-            </a:r>
-          </a:p>
-          <a:p>
-            <a:r>
-              <a:t>• Fourth bullet (the framing to hold all Topic): LEADERSHIP, NOT CODE — the CloudFormation write is</a:t>
-            </a:r>
-          </a:p>
-          <a:p>
-            <a:r>
-              <a:t>the vehicle; the assessed evidence (AT2) is how you lead it.</a:t>
-            </a:r>
-          </a:p>
-          <a:p>
-            <a:r>
-              <a:t>Misconception to pre-empt: "to lead the build I need to be the best coder." No — you don't write the</a:t>
-            </a:r>
-          </a:p>
-          <a:p>
-            <a:r>
-              <a:t>components; you develop the people and run the process. The leadership is what's marked (BSBXTW401</a:t>
-            </a:r>
-          </a:p>
-          <a:p>
-            <a:r>
-              <a:t>el 3–4).</a:t>
-            </a:r>
-          </a:p>
-          <a:p>
-            <a:r>
-              <a:t>Question to pose: "If you're not writing any of the four components, what exactly are you contributing</a:t>
-            </a:r>
-          </a:p>
-          <a:p>
-            <a:r>
-              <a:t>to this build?" (draws out coaching, unblocking, measuring, developing — the leadership).</a:t>
-            </a:r>
-          </a:p>
-          <a:p>
-            <a:r>
-              <a:t>UoC/AT2 tie: opens the AT2 delivery arc — BSBXTW401 el 3–4 (support + monitor the team); everything</a:t>
-            </a:r>
-          </a:p>
-          <a:p>
-            <a:r>
-              <a:t>today feeds the coaching/issue-resolution/feedback/development evidence in AT2.</a:t>
+              <a:t>Workbook tasks 7 to 17 today, plus the written questions. The reflective accounts (11–17) are written from real episodes in the build — that's why the build comes first.</a:t>
+            </a:r>
+          </a:p>
+          <a:p>
+            <a:r>
+              <a:t>Misconception: to lead the build you must be the best coder. You run the process and develop the people.</a:t>
             </a:r>
           </a:p>
         </p:txBody>
@@ -674,67 +602,12 @@
           <a:lstStyle/>
           <a:p>
             <a:r>
-              <a:t>Open Section 4 — turn measured gaps into GROWTH. PC 4.3 lands here.</a:t>
-            </a:r>
-          </a:p>
-          <a:p>
-            <a:r>
-              <a:t>• First bullet: identify specific learning and development opportunities to improve team and</a:t>
-            </a:r>
-          </a:p>
-          <a:p>
-            <a:r>
-              <a:t>individual performance and behaviours (PC 4.3). "Specific" is the word — not "do more training".</a:t>
-            </a:r>
-          </a:p>
-          <a:p>
-            <a:r>
-              <a:t>• Second bullet: a gap you MEASURED (Section 3) becomes a development opportunity — a skill to build,</a:t>
-            </a:r>
-          </a:p>
-          <a:p>
-            <a:r>
-              <a:t>a behaviour to shift. The measurement feeds this directly.</a:t>
-            </a:r>
-          </a:p>
-          <a:p>
-            <a:r>
-              <a:t>• Third bullet: tie each opportunity to an INDIVIDUAL and to the team's common goals — development</a:t>
-            </a:r>
-          </a:p>
-          <a:p>
-            <a:r>
-              <a:t>serves the build, not just the person's CV.</a:t>
-            </a:r>
-          </a:p>
-          <a:p>
-            <a:r>
-              <a:t>Misconception to pre-empt: "development opportunities are generic courses." No — they're specific,</a:t>
-            </a:r>
-          </a:p>
-          <a:p>
-            <a:r>
-              <a:t>drawn from a measured gap, tied to a named person and the team goal; generic = not assessable.</a:t>
-            </a:r>
-          </a:p>
-          <a:p>
-            <a:r>
-              <a:t>Question to pose: "The network owner struggled with shared parameters — what specific development</a:t>
-            </a:r>
-          </a:p>
-          <a:p>
-            <a:r>
-              <a:t>opportunity does that suggest, for whom?" (turns a measured gap into a specific opportunity).</a:t>
-            </a:r>
-          </a:p>
-          <a:p>
-            <a:r>
-              <a:t>UoC/AT2 tie: BSBXTW401 PC 4.3 (identify specific learning/development opportunities) → the development</a:t>
-            </a:r>
-          </a:p>
-          <a:p>
-            <a:r>
-              <a:t>plan evidenced in AT2.</a:t>
+              <a:t>Workbook task 14. This is why the Topic 5 performance plans had to be measurable.</a:t>
+            </a:r>
+          </a:p>
+          <a:p>
+            <a:r>
+              <a:t>Collating scattered notes into one picture is what makes the judgement defensible.</a:t>
             </a:r>
           </a:p>
         </p:txBody>
@@ -804,67 +677,237 @@
           <a:lstStyle/>
           <a:p>
             <a:r>
-              <a:t>Close Section 4 — make development ACTIONABLE and evidence-based. PC 4.4, PE 3, PE 4 land here.</a:t>
-            </a:r>
-          </a:p>
-          <a:p>
-            <a:r>
-              <a:t>• First bullet: implement ACTION PLANS to address individual and team training needs — who, what, by</a:t>
-            </a:r>
-          </a:p>
-          <a:p>
-            <a:r>
-              <a:t>when (PC 4.4). An opportunity without an action plan is just a note.</a:t>
-            </a:r>
-          </a:p>
-          <a:p>
-            <a:r>
-              <a:t>• Second bullet: COLLATE feedback on individual and team performance so the picture is EVIDENCE, not</a:t>
-            </a:r>
-          </a:p>
-          <a:p>
-            <a:r>
-              <a:t>impression (PE 3). Pulling it together is what makes it defensible.</a:t>
-            </a:r>
-          </a:p>
-          <a:p>
-            <a:r>
-              <a:t>• Third bullet: identify and implement development opportunities for OTHERS (PE 4) — leadership grows</a:t>
-            </a:r>
-          </a:p>
-          <a:p>
-            <a:r>
-              <a:t>the team, not just the build. This is the leader-develops-people point.</a:t>
-            </a:r>
-          </a:p>
-          <a:p>
-            <a:r>
-              <a:t>Misconception to pre-empt: "collating feedback is admin busywork." No — collated feedback is what</a:t>
-            </a:r>
-          </a:p>
-          <a:p>
-            <a:r>
-              <a:t>turns scattered impressions into an evidence base for the action plans (and for AT2).</a:t>
-            </a:r>
-          </a:p>
-          <a:p>
-            <a:r>
-              <a:t>Question to pose: "You have feedback from three stand-ups on the storage owner — what does 'collating'</a:t>
-            </a:r>
-          </a:p>
-          <a:p>
-            <a:r>
-              <a:t>it give you that three separate notes don't?" (draws out the evidence-base point).</a:t>
-            </a:r>
-          </a:p>
-          <a:p>
-            <a:r>
-              <a:t>UoC/AT2 tie: BSBXTW401 PC 4.4 + PE 3 + PE 4 (action plans; collate feedback; develop others) → the</a:t>
-            </a:r>
-          </a:p>
-          <a:p>
-            <a:r>
-              <a:t>development / action-plan evidence in AT2.</a:t>
+              <a:t>Workbook tasks 15 and 16. Feedback that never names the gap develops no one; a gap without help closing it is half a job.</a:t>
+            </a:r>
+          </a:p>
+          <a:p>
+            <a:r>
+              <a:t>"Do more training" is not a development opportunity; a named skill for a named person is.</a:t>
+            </a:r>
+          </a:p>
+        </p:txBody>
+      </p:sp>
+      <p:sp>
+        <p:nvSpPr>
+          <p:cNvPr id="4" name="Slide Number Placeholder 3"/>
+          <p:cNvSpPr>
+            <a:spLocks noGrp="1"/>
+          </p:cNvSpPr>
+          <p:nvPr>
+            <p:ph type="sldNum" idx="5" sz="quarter"/>
+          </p:nvPr>
+        </p:nvSpPr>
+        <p:spPr/>
+      </p:sp>
+    </p:spTree>
+  </p:cSld>
+  <p:clrMapOvr>
+    <a:masterClrMapping/>
+  </p:clrMapOvr>
+</p:notes>
+</file>
+
+<file path=ppt/notesSlides/notesSlide12.xml><?xml version="1.0" encoding="utf-8"?>
+<p:notes xmlns:a="http://schemas.openxmlformats.org/drawingml/2006/main" xmlns:p="http://schemas.openxmlformats.org/presentationml/2006/main" xmlns:r="http://schemas.openxmlformats.org/officeDocument/2006/relationships">
+  <p:cSld>
+    <p:spTree>
+      <p:nvGrpSpPr>
+        <p:cNvPr id="1" name=""/>
+        <p:cNvGrpSpPr/>
+        <p:nvPr/>
+      </p:nvGrpSpPr>
+      <p:grpSpPr>
+        <a:xfrm>
+          <a:off x="0" y="0"/>
+          <a:ext cx="0" cy="0"/>
+          <a:chOff x="0" y="0"/>
+          <a:chExt cx="0" cy="0"/>
+        </a:xfrm>
+      </p:grpSpPr>
+      <p:sp>
+        <p:nvSpPr>
+          <p:cNvPr id="2" name="Slide Image Placeholder 1"/>
+          <p:cNvSpPr>
+            <a:spLocks noGrp="1"/>
+          </p:cNvSpPr>
+          <p:nvPr>
+            <p:ph type="sldImg" idx="2"/>
+          </p:nvPr>
+        </p:nvSpPr>
+        <p:spPr/>
+      </p:sp>
+      <p:sp>
+        <p:nvSpPr>
+          <p:cNvPr id="3" name="Notes Placeholder 2"/>
+          <p:cNvSpPr>
+            <a:spLocks noGrp="1"/>
+          </p:cNvSpPr>
+          <p:nvPr>
+            <p:ph type="body" idx="3" sz="quarter"/>
+          </p:nvPr>
+        </p:nvSpPr>
+        <p:spPr/>
+        <p:txBody>
+          <a:bodyPr/>
+          <a:lstStyle/>
+          <a:p>
+            <a:r>
+              <a:t>Activity = practice workbook tasks 14–16.</a:t>
+            </a:r>
+          </a:p>
+          <a:p>
+            <a:r>
+              <a:t>Every judgement cites the plan; every opportunity carries an action.</a:t>
+            </a:r>
+          </a:p>
+        </p:txBody>
+      </p:sp>
+      <p:sp>
+        <p:nvSpPr>
+          <p:cNvPr id="4" name="Slide Number Placeholder 3"/>
+          <p:cNvSpPr>
+            <a:spLocks noGrp="1"/>
+          </p:cNvSpPr>
+          <p:nvPr>
+            <p:ph type="sldNum" idx="5" sz="quarter"/>
+          </p:nvPr>
+        </p:nvSpPr>
+        <p:spPr/>
+      </p:sp>
+    </p:spTree>
+  </p:cSld>
+  <p:clrMapOvr>
+    <a:masterClrMapping/>
+  </p:clrMapOvr>
+</p:notes>
+</file>
+
+<file path=ppt/notesSlides/notesSlide13.xml><?xml version="1.0" encoding="utf-8"?>
+<p:notes xmlns:a="http://schemas.openxmlformats.org/drawingml/2006/main" xmlns:p="http://schemas.openxmlformats.org/presentationml/2006/main" xmlns:r="http://schemas.openxmlformats.org/officeDocument/2006/relationships">
+  <p:cSld>
+    <p:spTree>
+      <p:nvGrpSpPr>
+        <p:cNvPr id="1" name=""/>
+        <p:cNvGrpSpPr/>
+        <p:nvPr/>
+      </p:nvGrpSpPr>
+      <p:grpSpPr>
+        <a:xfrm>
+          <a:off x="0" y="0"/>
+          <a:ext cx="0" cy="0"/>
+          <a:chOff x="0" y="0"/>
+          <a:chExt cx="0" cy="0"/>
+        </a:xfrm>
+      </p:grpSpPr>
+      <p:sp>
+        <p:nvSpPr>
+          <p:cNvPr id="2" name="Slide Image Placeholder 1"/>
+          <p:cNvSpPr>
+            <a:spLocks noGrp="1"/>
+          </p:cNvSpPr>
+          <p:nvPr>
+            <p:ph type="sldImg" idx="2"/>
+          </p:nvPr>
+        </p:nvSpPr>
+        <p:spPr/>
+      </p:sp>
+      <p:sp>
+        <p:nvSpPr>
+          <p:cNvPr id="3" name="Notes Placeholder 2"/>
+          <p:cNvSpPr>
+            <a:spLocks noGrp="1"/>
+          </p:cNvSpPr>
+          <p:nvPr>
+            <p:ph type="body" idx="3" sz="quarter"/>
+          </p:nvPr>
+        </p:nvSpPr>
+        <p:spPr/>
+        <p:txBody>
+          <a:bodyPr/>
+          <a:lstStyle/>
+          <a:p>
+            <a:r>
+              <a:t>Workbook task 17 plus the assessment's Q1–Q3, rehearsed from the practice build.</a:t>
+            </a:r>
+          </a:p>
+          <a:p>
+            <a:r>
+              <a:t>The team copies what a leader does, not what they say — the reflection should notice what was copied.</a:t>
+            </a:r>
+          </a:p>
+        </p:txBody>
+      </p:sp>
+      <p:sp>
+        <p:nvSpPr>
+          <p:cNvPr id="4" name="Slide Number Placeholder 3"/>
+          <p:cNvSpPr>
+            <a:spLocks noGrp="1"/>
+          </p:cNvSpPr>
+          <p:nvPr>
+            <p:ph type="sldNum" idx="5" sz="quarter"/>
+          </p:nvPr>
+        </p:nvSpPr>
+        <p:spPr/>
+      </p:sp>
+    </p:spTree>
+  </p:cSld>
+  <p:clrMapOvr>
+    <a:masterClrMapping/>
+  </p:clrMapOvr>
+</p:notes>
+</file>
+
+<file path=ppt/notesSlides/notesSlide14.xml><?xml version="1.0" encoding="utf-8"?>
+<p:notes xmlns:a="http://schemas.openxmlformats.org/drawingml/2006/main" xmlns:p="http://schemas.openxmlformats.org/presentationml/2006/main" xmlns:r="http://schemas.openxmlformats.org/officeDocument/2006/relationships">
+  <p:cSld>
+    <p:spTree>
+      <p:nvGrpSpPr>
+        <p:cNvPr id="1" name=""/>
+        <p:cNvGrpSpPr/>
+        <p:nvPr/>
+      </p:nvGrpSpPr>
+      <p:grpSpPr>
+        <a:xfrm>
+          <a:off x="0" y="0"/>
+          <a:ext cx="0" cy="0"/>
+          <a:chOff x="0" y="0"/>
+          <a:chExt cx="0" cy="0"/>
+        </a:xfrm>
+      </p:grpSpPr>
+      <p:sp>
+        <p:nvSpPr>
+          <p:cNvPr id="2" name="Slide Image Placeholder 1"/>
+          <p:cNvSpPr>
+            <a:spLocks noGrp="1"/>
+          </p:cNvSpPr>
+          <p:nvPr>
+            <p:ph type="sldImg" idx="2"/>
+          </p:nvPr>
+        </p:nvSpPr>
+        <p:spPr/>
+      </p:sp>
+      <p:sp>
+        <p:nvSpPr>
+          <p:cNvPr id="3" name="Notes Placeholder 2"/>
+          <p:cNvSpPr>
+            <a:spLocks noGrp="1"/>
+          </p:cNvSpPr>
+          <p:nvPr>
+            <p:ph type="body" idx="3" sz="quarter"/>
+          </p:nvPr>
+        </p:nvSpPr>
+        <p:spPr/>
+        <p:txBody>
+          <a:bodyPr/>
+          <a:lstStyle/>
+          <a:p>
+            <a:r>
+              <a:t>Activity = practice workbook task 17 + assessment Q1–Q3.</a:t>
+            </a:r>
+          </a:p>
+          <a:p>
+            <a:r>
+              <a:t>Every answer cites an episode from their own build — the accounts from C3 are the source material.</a:t>
             </a:r>
           </a:p>
         </p:txBody>
@@ -934,82 +977,12 @@
           <a:lstStyle/>
           <a:p>
             <a:r>
-              <a:t>Set the vehicle before teaching coaching — use the team-build-flow diagram (component drafts →</a:t>
-            </a:r>
-          </a:p>
-          <a:p>
-            <a:r>
-              <a:t>integrate → review/monitor → team sign-off) so students see WHERE leadership acts.</a:t>
-            </a:r>
-          </a:p>
-          <a:p>
-            <a:r>
-              <a:t>• First bullet: the team writes four components — network, compute, database, storage — one per</a:t>
-            </a:r>
-          </a:p>
-          <a:p>
-            <a:r>
-              <a:t>member, integrated into ONE template.</a:t>
-            </a:r>
-          </a:p>
-          <a:p>
-            <a:r>
-              <a:t>• Second bullet: walk the flow off the diagram — component drafts → integrate into one template →</a:t>
-            </a:r>
-          </a:p>
-          <a:p>
-            <a:r>
-              <a:t>review and monitor → team sign-off. Point at each stage.</a:t>
-            </a:r>
-          </a:p>
-          <a:p>
-            <a:r>
-              <a:t>• Third bullet (the framing): you don't write the components; you RUN the build — coaching, supporting</a:t>
-            </a:r>
-          </a:p>
-          <a:p>
-            <a:r>
-              <a:t>and monitoring the team through each of those stages. Your work sits ON the flow, not inside a</a:t>
-            </a:r>
-          </a:p>
-          <a:p>
-            <a:r>
-              <a:t>component.</a:t>
-            </a:r>
-          </a:p>
-          <a:p>
-            <a:r>
-              <a:t>Misconception to pre-empt: "the integrate step is a technical merge I do." No — you FACILITATE the</a:t>
-            </a:r>
-          </a:p>
-          <a:p>
-            <a:r>
-              <a:t>integration (the seams the team agreed in Topic 5); the leadership is getting the four to fit, not</a:t>
-            </a:r>
-          </a:p>
-          <a:p>
-            <a:r>
-              <a:t>typing the merge.</a:t>
-            </a:r>
-          </a:p>
-          <a:p>
-            <a:r>
-              <a:t>Question to pose: "Point at the flow — at which stage is a conflict between two component owners most</a:t>
-            </a:r>
-          </a:p>
-          <a:p>
-            <a:r>
-              <a:t>likely, and what do you do there?" (locates leadership on the diagram; sets up C2).</a:t>
-            </a:r>
-          </a:p>
-          <a:p>
-            <a:r>
-              <a:t>UoC/AT2 tie: frames the C1–C4 leadership of the build; the divided write is the vehicle for BSBXTW401</a:t>
-            </a:r>
-          </a:p>
-          <a:p>
-            <a:r>
-              <a:t>el 3–4 evidenced in AT2.</a:t>
+              <a:t>Workbook tasks 7 and 8. Walk the flow on the diagram: drafts, integrate, review, team sign-off.</a:t>
+            </a:r>
+          </a:p>
+          <a:p>
+            <a:r>
+              <a:t>Integration is facilitated, not typed — the seams agreed in Topic 5 come due here.</a:t>
             </a:r>
           </a:p>
         </p:txBody>
@@ -1079,67 +1052,12 @@
           <a:lstStyle/>
           <a:p>
             <a:r>
-              <a:t>The primer for C1 — distinguish coaching from mentoring and give nameable techniques (KE 4).</a:t>
-            </a:r>
-          </a:p>
-          <a:p>
-            <a:r>
-              <a:t>• First bullet: COACHING develops capability in the moment; MENTORING builds it over time — both grow</a:t>
-            </a:r>
-          </a:p>
-          <a:p>
-            <a:r>
-              <a:t>the PERSON, not just the task (KE 4). Say the distinction explicitly.</a:t>
-            </a:r>
-          </a:p>
-          <a:p>
-            <a:r>
-              <a:t>• Second bullet: name the techniques — ask before telling, model then hand over, give room to try,</a:t>
-            </a:r>
-          </a:p>
-          <a:p>
-            <a:r>
-              <a:t>check understanding. These are the moves students are marked on using.</a:t>
-            </a:r>
-          </a:p>
-          <a:p>
-            <a:r>
-              <a:t>• Third bullet: coaching is how you ENHANCE the workplace culture — a team that learns from each</a:t>
-            </a:r>
-          </a:p>
-          <a:p>
-            <a:r>
-              <a:t>other, not one that waits to be told. Culture is the payoff, not a side-effect.</a:t>
-            </a:r>
-          </a:p>
-          <a:p>
-            <a:r>
-              <a:t>Misconception to pre-empt: "coaching = giving the answer faster." No — "ask before telling" is the</a:t>
-            </a:r>
-          </a:p>
-          <a:p>
-            <a:r>
-              <a:t>point; if you just supply the fix you've solved the task but developed no one.</a:t>
-            </a:r>
-          </a:p>
-          <a:p>
-            <a:r>
-              <a:t>Question to pose: "A member is stuck on their component — what's a COACHING response versus a telling</a:t>
-            </a:r>
-          </a:p>
-          <a:p>
-            <a:r>
-              <a:t>response?" (draws out ask-before-telling).</a:t>
-            </a:r>
-          </a:p>
-          <a:p>
-            <a:r>
-              <a:t>UoC/AT2 tie: BSBXTW401 KE 4 (mentoring/coaching techniques) → the coaching evidence in AT2; underpins</a:t>
-            </a:r>
-          </a:p>
-          <a:p>
-            <a:r>
-              <a:t>PC 3.1 on the next slide.</a:t>
+              <a:t>Activity = practice workbook tasks 7–8 — the working session of the Topic; budget real time.</a:t>
+            </a:r>
+          </a:p>
+          <a:p>
+            <a:r>
+              <a:t>Record what integration actually took — that record feeds the issue reflection later.</a:t>
             </a:r>
           </a:p>
         </p:txBody>
@@ -1209,72 +1127,12 @@
           <a:lstStyle/>
           <a:p>
             <a:r>
-              <a:t>Apply the coaching primer to the build — this is where PC 3.1, PC 3.2 and KE 8 land.</a:t>
-            </a:r>
-          </a:p>
-          <a:p>
-            <a:r>
-              <a:t>• First bullet: provide COACHING to enhance workplace culture as the team writes its components</a:t>
-            </a:r>
-          </a:p>
-          <a:p>
-            <a:r>
-              <a:t>(PC 3.1) — coaching in the flow of the build, not a separate training session.</a:t>
-            </a:r>
-          </a:p>
-          <a:p>
-            <a:r>
-              <a:t>• Second bullet: SUPPORT individuals per organisational requirements toward the COMMON goal — the one</a:t>
-            </a:r>
-          </a:p>
-          <a:p>
-            <a:r>
-              <a:t>integrated, working template (PC 3.2). Support is aimed at the shared outcome, not just individual</a:t>
-            </a:r>
-          </a:p>
-          <a:p>
-            <a:r>
-              <a:t>comfort.</a:t>
-            </a:r>
-          </a:p>
-          <a:p>
-            <a:r>
-              <a:t>• Third bullet: role-model professional leadership behaviours — reliability, fairness, openness,</a:t>
-            </a:r>
-          </a:p>
-          <a:p>
-            <a:r>
-              <a:t>following through (KE 8). The team copies what you DO, not what you say.</a:t>
-            </a:r>
-          </a:p>
-          <a:p>
-            <a:r>
-              <a:t>Misconception to pre-empt: "supporting individuals means shielding them from the hard parts." No —</a:t>
-            </a:r>
-          </a:p>
-          <a:p>
-            <a:r>
-              <a:t>support moves them toward the common goal; sometimes that's a stretch, not a rescue.</a:t>
-            </a:r>
-          </a:p>
-          <a:p>
-            <a:r>
-              <a:t>Question to pose: "Name one professional behaviour you'd role-model in the first stand-up, and what</a:t>
-            </a:r>
-          </a:p>
-          <a:p>
-            <a:r>
-              <a:t>the team would take from seeing it" (makes KE 8 concrete).</a:t>
-            </a:r>
-          </a:p>
-          <a:p>
-            <a:r>
-              <a:t>UoC/AT2 tie: BSBXTW401 PC 3.1 + PC 3.2 + KE 8 → the coaching/support records and role-modelling</a:t>
-            </a:r>
-          </a:p>
-          <a:p>
-            <a:r>
-              <a:t>evidenced in AT2.</a:t>
+              <a:t>Workbook tasks 9 and 10 — the meeting is observed by the assessor in AT2; here a classmate or the teacher observes.</a:t>
+            </a:r>
+          </a:p>
+          <a:p>
+            <a:r>
+              <a:t>The observable behaviours are the teaching: stating purpose, inviting contributions, resolving on the spot, recording decisions.</a:t>
             </a:r>
           </a:p>
         </p:txBody>
@@ -1344,72 +1202,12 @@
           <a:lstStyle/>
           <a:p>
             <a:r>
-              <a:t>Open Section 2 — the leader RUNS the problem-solving process, doesn't own the solution. PC 3.3 and</a:t>
-            </a:r>
-          </a:p>
-          <a:p>
-            <a:r>
-              <a:t>PC 3.4 land here.</a:t>
-            </a:r>
-          </a:p>
-          <a:p>
-            <a:r>
-              <a:t>• First bullet: facilitate the team to IDENTIFY, BRAINSTORM, REPORT and RESOLVE task-related issues</a:t>
-            </a:r>
-          </a:p>
-          <a:p>
-            <a:r>
-              <a:t>and inefficiencies — don't solve it for them, run the process (PC 3.3). The verbs are the process.</a:t>
-            </a:r>
-          </a:p>
-          <a:p>
-            <a:r>
-              <a:t>• Second bullet: use problem-solving skills for team, task or individual challenges — name the</a:t>
-            </a:r>
-          </a:p>
-          <a:p>
-            <a:r>
-              <a:t>problem, options, decide, act (PC 3.4). A repeatable four-step loop.</a:t>
-            </a:r>
-          </a:p>
-          <a:p>
-            <a:r>
-              <a:t>• Third bullet: a STAND-UP is the routine that surfaces issues early — blockers reported before they</a:t>
-            </a:r>
-          </a:p>
-          <a:p>
-            <a:r>
-              <a:t>stall the build. Routine beats heroics.</a:t>
-            </a:r>
-          </a:p>
-          <a:p>
-            <a:r>
-              <a:t>Misconception to pre-empt: "resolving issues = the leader gives the fix." No — PC 3.3 is FACILITATION;</a:t>
-            </a:r>
-          </a:p>
-          <a:p>
-            <a:r>
-              <a:t>if you supply every answer the team never learns to surface and solve its own issues.</a:t>
-            </a:r>
-          </a:p>
-          <a:p>
-            <a:r>
-              <a:t>Question to pose: "A member reports their component won't integrate — do you fix it, or facilitate?</a:t>
-            </a:r>
-          </a:p>
-          <a:p>
-            <a:r>
-              <a:t>What does facilitating look like here?" (draws out the run-the-process stance).</a:t>
-            </a:r>
-          </a:p>
-          <a:p>
-            <a:r>
-              <a:t>UoC/AT2 tie: BSBXTW401 PC 3.3 + PC 3.4 → the issue-resolution episodes evidenced in AT2; exercised in</a:t>
-            </a:r>
-          </a:p>
-          <a:p>
-            <a:r>
-              <a:t>the next activity.</a:t>
+              <a:t>Activity = practice workbook tasks 9–10, roles rotated so everyone leads once.</a:t>
+            </a:r>
+          </a:p>
+          <a:p>
+            <a:r>
+              <a:t>The observer writes what they saw, not what they'd have done — that's the note's value.</a:t>
             </a:r>
           </a:p>
         </p:txBody>
@@ -1479,82 +1277,12 @@
           <a:lstStyle/>
           <a:p>
             <a:r>
-              <a:t>The conflict-and-challenges slide — PE 5, KE 5 and the KE 10 checklist land here.</a:t>
-            </a:r>
-          </a:p>
-          <a:p>
-            <a:r>
-              <a:t>• First bullet: manage conflicts and challenges per organisational requirements using</a:t>
-            </a:r>
-          </a:p>
-          <a:p>
-            <a:r>
-              <a:t>conflict-resolution and negotiation strategies (PE 5, KE 5). Conflict is normal; managing it well is</a:t>
-            </a:r>
-          </a:p>
-          <a:p>
-            <a:r>
-              <a:t>the skill.</a:t>
-            </a:r>
-          </a:p>
-          <a:p>
-            <a:r>
-              <a:t>• Second bullet: the technique — separate the person from the problem; find the shared interest; agree</a:t>
-            </a:r>
-          </a:p>
-          <a:p>
-            <a:r>
-              <a:t>a way forward, not a winner. Say it as a procedure they can run.</a:t>
-            </a:r>
-          </a:p>
-          <a:p>
-            <a:r>
-              <a:t>• Third bullet: watch for the teamwork challenges the evidence EXPECTS (KE 10) — difficulties</a:t>
-            </a:r>
-          </a:p>
-          <a:p>
-            <a:r>
-              <a:t>performing tasks; conflicts with clients or team members; potential risks or safety hazards;</a:t>
-            </a:r>
-          </a:p>
-          <a:p>
-            <a:r>
-              <a:t>unethical or inappropriate behaviour. This is a named list they must be able to recognise.</a:t>
-            </a:r>
-          </a:p>
-          <a:p>
-            <a:r>
-              <a:t>Misconception to pre-empt: "good teams don't have conflict, so I should suppress it." No — surfaced,</a:t>
-            </a:r>
-          </a:p>
-          <a:p>
-            <a:r>
-              <a:t>well-managed conflict improves the build; suppressed conflict resurfaces at integration. Manage, don't</a:t>
-            </a:r>
-          </a:p>
-          <a:p>
-            <a:r>
-              <a:t>bury.</a:t>
-            </a:r>
-          </a:p>
-          <a:p>
-            <a:r>
-              <a:t>Question to pose: "Two owners disagree on the network/compute boundary — what's the shared interest</a:t>
-            </a:r>
-          </a:p>
-          <a:p>
-            <a:r>
-              <a:t>you'd steer them to?" (models person-vs-problem; previews the seeded conflict in the activity).</a:t>
-            </a:r>
-          </a:p>
-          <a:p>
-            <a:r>
-              <a:t>UoC/AT2 tie: BSBXTW401 PE 5 + KE 5 + KE 10 → the conflict-management episode evidenced in AT2</a:t>
-            </a:r>
-          </a:p>
-          <a:p>
-            <a:r>
-              <a:t>(exercised next).</a:t>
+              <a:t>The techniques behind workbook task 11's reflection. Conflict is normal; managing it is the skill.</a:t>
+            </a:r>
+          </a:p>
+          <a:p>
+            <a:r>
+              <a:t>The named challenge list is examinable — it also shapes what counts as a reportable episode.</a:t>
             </a:r>
           </a:p>
         </p:txBody>
@@ -1624,97 +1352,12 @@
           <a:lstStyle/>
           <a:p>
             <a:r>
-              <a:t>Facilitation — the Section 2 practice; students LEAD a stand-up and facilitate an injected conflict to</a:t>
-            </a:r>
-          </a:p>
-          <a:p>
-            <a:r>
-              <a:t>resolution, recording how they handled it (the AT2 evidence shape).</a:t>
-            </a:r>
-          </a:p>
-          <a:p>
-            <a:r>
-              <a:t>Tell students, in these words: "Lead a stand-up for your practice team — each member reports progress</a:t>
-            </a:r>
-          </a:p>
-          <a:p>
-            <a:r>
-              <a:t>on their component and any blocker. Partway through, a conflict is injected: two members disagree over</a:t>
-            </a:r>
-          </a:p>
-          <a:p>
-            <a:r>
-              <a:t>an integration boundary. Facilitate it to a resolution and record how you handled it."</a:t>
-            </a:r>
-          </a:p>
-          <a:p>
-            <a:r>
-              <a:t>Steps (put on the board):</a:t>
-            </a:r>
-          </a:p>
-          <a:p>
-            <a:r>
-              <a:t>1. Run the stand-up — each member: what's done, what's next, any blocker.</a:t>
-            </a:r>
-          </a:p>
-          <a:p>
-            <a:r>
-              <a:t>2. When the conflict lands, separate person from problem; surface each side's interest.</a:t>
-            </a:r>
-          </a:p>
-          <a:p>
-            <a:r>
-              <a:t>3. Steer to a shared way forward (not a winner); confirm the agreed boundary.</a:t>
-            </a:r>
-          </a:p>
-          <a:p>
-            <a:r>
-              <a:t>4. Record the episode — the issue, what you did, the resolution.</a:t>
-            </a:r>
-          </a:p>
-          <a:p>
-            <a:r>
-              <a:t>Must produce: a short written record of the facilitated stand-up and the conflict resolution — the</a:t>
-            </a:r>
-          </a:p>
-          <a:p>
-            <a:r>
-              <a:t>practice version of the AT2 issue-resolution evidence.</a:t>
-            </a:r>
-          </a:p>
-          <a:p>
-            <a:r>
-              <a:t>Timing: ~25 min. Where they get stuck: they ADJUDICATE (pick a winner) instead of facilitating a</a:t>
-            </a:r>
-          </a:p>
-          <a:p>
-            <a:r>
-              <a:t>shared way forward — circulate and push "what do both owners actually need?"; and the stand-up drifts</a:t>
-            </a:r>
-          </a:p>
-          <a:p>
-            <a:r>
-              <a:t>into solving the whole thing on the spot.</a:t>
-            </a:r>
-          </a:p>
-          <a:p>
-            <a:r>
-              <a:t>Share-back prompt: ask one leader how they turned the disagreement into a shared interest — surface the</a:t>
-            </a:r>
-          </a:p>
-          <a:p>
-            <a:r>
-              <a:t>person-vs-problem move.</a:t>
-            </a:r>
-          </a:p>
-          <a:p>
-            <a:r>
-              <a:t>No-leakage note: this is the PRACTICE team — AT2 assesses the same conflict-management leadership on</a:t>
-            </a:r>
-          </a:p>
-          <a:p>
-            <a:r>
-              <a:t>the Ledgerline build (comparable, not identical); keep them on the practice vehicle.</a:t>
+              <a:t>The techniques behind task 12's reflection. Ask-before-telling is the move to rehearse.</a:t>
+            </a:r>
+          </a:p>
+          <a:p>
+            <a:r>
+              <a:t>Coaching in the flow of the build, not a separate training session.</a:t>
             </a:r>
           </a:p>
         </p:txBody>
@@ -1784,72 +1427,12 @@
           <a:lstStyle/>
           <a:p>
             <a:r>
-              <a:t>Open Section 3 — measurement is the input to feedback. PC 4.1 lands here.</a:t>
-            </a:r>
-          </a:p>
-          <a:p>
-            <a:r>
-              <a:t>• First bullet: measure each member's performance against the AGREED WORK PLANS from Topic 5 — the</a:t>
-            </a:r>
-          </a:p>
-          <a:p>
-            <a:r>
-              <a:t>plan is the yardstick (PC 4.1). This is why the performance plans had to be measurable.</a:t>
-            </a:r>
-          </a:p>
-          <a:p>
-            <a:r>
-              <a:t>• Second bullet: measure the WORK, not the person — what was due, what was delivered, at what quality.</a:t>
-            </a:r>
-          </a:p>
-          <a:p>
-            <a:r>
-              <a:t>Keep it objective and evidence-based.</a:t>
-            </a:r>
-          </a:p>
-          <a:p>
-            <a:r>
-              <a:t>• Third bullet: measurement is the INPUT to feedback — you can't give useful feedback without it.</a:t>
-            </a:r>
-          </a:p>
-          <a:p>
-            <a:r>
-              <a:t>Section 3 runs measure → feedback in order.</a:t>
-            </a:r>
-          </a:p>
-          <a:p>
-            <a:r>
-              <a:t>Misconception to pre-empt: "measuring performance = judging the person." No — you measure the work</a:t>
-            </a:r>
-          </a:p>
-          <a:p>
-            <a:r>
-              <a:t>against the plan; the person-level conversation is the feedback that follows, and it's about the gap,</a:t>
-            </a:r>
-          </a:p>
-          <a:p>
-            <a:r>
-              <a:t>not character.</a:t>
-            </a:r>
-          </a:p>
-          <a:p>
-            <a:r>
-              <a:t>Question to pose: "The compute owner's plan said 'valid, peer-reviewed, deployed by the milestone' —</a:t>
-            </a:r>
-          </a:p>
-          <a:p>
-            <a:r>
-              <a:t>how do you measure whether they met it?" (ties measurement back to the Topic 5 plan).</a:t>
-            </a:r>
-          </a:p>
-          <a:p>
-            <a:r>
-              <a:t>UoC/AT2 tie: BSBXTW401 PC 4.1 (measure performance against agreed work plans) → the</a:t>
-            </a:r>
-          </a:p>
-          <a:p>
-            <a:r>
-              <a:t>performance-measurement evidence in AT2.</a:t>
+              <a:t>Workbook tasks 11, 12 and 13. The episodes come from the build they just ran — that's why the order matters.</a:t>
+            </a:r>
+          </a:p>
+          <a:p>
+            <a:r>
+              <a:t>An invented episode reads as one; the honest small story beats the polished fiction.</a:t>
             </a:r>
           </a:p>
         </p:txBody>
@@ -1919,67 +1502,12 @@
           <a:lstStyle/>
           <a:p>
             <a:r>
-              <a:t>The feedback slide — PC 4.2 and PE 2 land here. Teach feedback as a skill with a shape.</a:t>
-            </a:r>
-          </a:p>
-          <a:p>
-            <a:r>
-              <a:t>• First bullet: provide TIMELY, CONSTRUCTIVE feedback to expected organisational standards — close to</a:t>
-            </a:r>
-          </a:p>
-          <a:p>
-            <a:r>
-              <a:t>the event, specific, actionable (PC 4.2). Late or vague feedback doesn't change anything.</a:t>
-            </a:r>
-          </a:p>
-          <a:p>
-            <a:r>
-              <a:t>• Second bullet: the shape — balance recognition with the gap; describe the BEHAVIOUR and its EFFECT,</a:t>
-            </a:r>
-          </a:p>
-          <a:p>
-            <a:r>
-              <a:t>then agree the next step. Behaviour → effect → next step keeps it constructive.</a:t>
-            </a:r>
-          </a:p>
-          <a:p>
-            <a:r>
-              <a:t>• Third bullet: provide feedback AND ASSISTANCE (PE 2) — feedback names the gap, assistance helps</a:t>
-            </a:r>
-          </a:p>
-          <a:p>
-            <a:r>
-              <a:t>close it. Naming a gap without helping close it is half a job.</a:t>
-            </a:r>
-          </a:p>
-          <a:p>
-            <a:r>
-              <a:t>Misconception to pre-empt: "constructive feedback means only positives." No — it means specific and</a:t>
-            </a:r>
-          </a:p>
-          <a:p>
-            <a:r>
-              <a:t>actionable, including the gap; a "constructive" that never names the gap develops no one.</a:t>
-            </a:r>
-          </a:p>
-          <a:p>
-            <a:r>
-              <a:t>Question to pose: "Give the database owner feedback that they missed the peer-review step — say it as</a:t>
-            </a:r>
-          </a:p>
-          <a:p>
-            <a:r>
-              <a:t>behaviour → effect → next step" (rehearses the shape live).</a:t>
-            </a:r>
-          </a:p>
-          <a:p>
-            <a:r>
-              <a:t>UoC/AT2 tie: BSBXTW401 PC 4.2 + PE 2 (timely constructive feedback; feedback and assistance) → the</a:t>
-            </a:r>
-          </a:p>
-          <a:p>
-            <a:r>
-              <a:t>feedback records in AT2.</a:t>
+              <a:t>Activity = practice workbook tasks 11–13, individually.</a:t>
+            </a:r>
+          </a:p>
+          <a:p>
+            <a:r>
+              <a:t>Press for the technique named in every account, and the what-would-you-do-differently line.</a:t>
             </a:r>
           </a:p>
         </p:txBody>
@@ -5082,7 +4610,7 @@
                 </a:solidFill>
                 <a:latin typeface="Roboto"/>
               </a:rPr>
-              <a:t>Writing the IaC by component: leading, supporting and monitoring the team</a:t>
+              <a:t>Leading the build</a:t>
             </a:r>
           </a:p>
           <a:p>
@@ -5098,7 +4626,7 @@
                 </a:solidFill>
                 <a:latin typeface="Roboto Light"/>
               </a:rPr>
-              <a:t/>
+              <a:t>Build and integrate as a team, lead the observed meeting, reflect, measure and develop</a:t>
             </a:r>
           </a:p>
         </p:txBody>
@@ -5160,7 +4688,7 @@
     <p:bg>
       <p:bgPr>
         <a:solidFill>
-          <a:srgbClr val="FFFFFF"/>
+          <a:srgbClr val="F9F9F9"/>
         </a:solidFill>
         <a:effectLst/>
       </p:bgPr>
@@ -5174,14 +4702,64 @@
       <p:grpSpPr/>
       <p:sp>
         <p:nvSpPr>
-          <p:cNvPr id="2" name="Rectangle 1"/>
+          <p:cNvPr id="2" name="TextBox 1"/>
+          <p:cNvSpPr txBox="1"/>
+          <p:nvPr/>
+        </p:nvSpPr>
+        <p:spPr>
+          <a:xfrm>
+            <a:off x="640080" y="548640"/>
+            <a:ext cx="10881360" cy="1097280"/>
+          </a:xfrm>
+          <a:prstGeom prst="rect">
+            <a:avLst/>
+          </a:prstGeom>
+          <a:noFill/>
+        </p:spPr>
+        <p:txBody>
+          <a:bodyPr wrap="square" anchor="t" lIns="0" rIns="0" tIns="0" bIns="0">
+            <a:spAutoFit/>
+          </a:bodyPr>
+          <a:lstStyle/>
+          <a:p>
+            <a:r>
+              <a:rPr sz="3200" b="1" i="0">
+                <a:solidFill>
+                  <a:srgbClr val="2A2929"/>
+                </a:solidFill>
+                <a:latin typeface="Roboto"/>
+              </a:rPr>
+              <a:t>Key takeaways</a:t>
+            </a:r>
+          </a:p>
+          <a:p>
+            <a:pPr>
+              <a:spcBef>
+                <a:spcPts val="200"/>
+              </a:spcBef>
+            </a:pPr>
+            <a:r>
+              <a:rPr sz="1800" b="1" i="0">
+                <a:solidFill>
+                  <a:srgbClr val="27B5CE"/>
+                </a:solidFill>
+                <a:latin typeface="Roboto"/>
+              </a:rPr>
+              <a:t>Section 2 · The meeting</a:t>
+            </a:r>
+          </a:p>
+        </p:txBody>
+      </p:sp>
+      <p:sp>
+        <p:nvSpPr>
+          <p:cNvPr id="3" name="Rectangle 2"/>
           <p:cNvSpPr/>
           <p:nvPr/>
         </p:nvSpPr>
         <p:spPr>
           <a:xfrm>
-            <a:off x="0" y="0"/>
-            <a:ext cx="12191695" cy="1234440"/>
+            <a:off x="658368" y="1600200"/>
+            <a:ext cx="1463040" cy="50800"/>
           </a:xfrm>
           <a:prstGeom prst="rect">
             <a:avLst/>
@@ -5218,192 +4796,20 @@
       </p:sp>
       <p:sp>
         <p:nvSpPr>
-          <p:cNvPr id="3" name="Rounded Rectangle 2"/>
+          <p:cNvPr id="4" name="Rectangle 3"/>
           <p:cNvSpPr/>
           <p:nvPr/>
         </p:nvSpPr>
         <p:spPr>
           <a:xfrm>
-            <a:off x="640080" y="384048"/>
-            <a:ext cx="1691640" cy="457200"/>
-          </a:xfrm>
-          <a:prstGeom prst="roundRect">
+            <a:off x="640080" y="1965960"/>
+            <a:ext cx="10927080" cy="841248"/>
+          </a:xfrm>
+          <a:prstGeom prst="rect">
             <a:avLst/>
           </a:prstGeom>
           <a:solidFill>
-            <a:srgbClr val="2A2929"/>
-          </a:solidFill>
-          <a:ln>
-            <a:noFill/>
-          </a:ln>
-          <a:effectLst/>
-        </p:spPr>
-        <p:style>
-          <a:lnRef idx="1">
-            <a:schemeClr val="accent1"/>
-          </a:lnRef>
-          <a:fillRef idx="3">
-            <a:schemeClr val="accent1"/>
-          </a:fillRef>
-          <a:effectRef idx="2">
-            <a:schemeClr val="accent1"/>
-          </a:effectRef>
-          <a:fontRef idx="minor">
-            <a:schemeClr val="lt1"/>
-          </a:fontRef>
-        </p:style>
-        <p:txBody>
-          <a:bodyPr rtlCol="0" anchor="ctr"/>
-          <a:lstStyle/>
-          <a:p>
-            <a:pPr algn="ctr"/>
-            <a:r>
-              <a:rPr sz="1400" b="1" i="0">
-                <a:solidFill>
-                  <a:srgbClr val="FBB900"/>
-                </a:solidFill>
-                <a:latin typeface="Roboto"/>
-              </a:rPr>
-              <a:t>ACTIVITY</a:t>
-            </a:r>
-          </a:p>
-        </p:txBody>
-      </p:sp>
-      <p:sp>
-        <p:nvSpPr>
-          <p:cNvPr id="4" name="TextBox 3"/>
-          <p:cNvSpPr txBox="1"/>
-          <p:nvPr/>
-        </p:nvSpPr>
-        <p:spPr>
-          <a:xfrm>
-            <a:off x="2560320" y="310896"/>
-            <a:ext cx="8961120" cy="685800"/>
-          </a:xfrm>
-          <a:prstGeom prst="rect">
-            <a:avLst/>
-          </a:prstGeom>
-          <a:noFill/>
-        </p:spPr>
-        <p:txBody>
-          <a:bodyPr wrap="square" anchor="ctr" lIns="0" rIns="0" tIns="0" bIns="0">
-            <a:spAutoFit/>
-          </a:bodyPr>
-          <a:lstStyle/>
-          <a:p>
-            <a:r>
-              <a:rPr sz="2600" b="1" i="0">
-                <a:solidFill>
-                  <a:srgbClr val="FFFFFF"/>
-                </a:solidFill>
-                <a:latin typeface="Roboto"/>
-              </a:rPr>
-              <a:t>Run the stand-up &amp; resolve a seeded conflict</a:t>
-            </a:r>
-          </a:p>
-        </p:txBody>
-      </p:sp>
-      <p:sp>
-        <p:nvSpPr>
-          <p:cNvPr id="5" name="TextBox 4"/>
-          <p:cNvSpPr txBox="1"/>
-          <p:nvPr/>
-        </p:nvSpPr>
-        <p:spPr>
-          <a:xfrm>
-            <a:off x="658368" y="1554480"/>
-            <a:ext cx="10881360" cy="4297680"/>
-          </a:xfrm>
-          <a:prstGeom prst="rect">
-            <a:avLst/>
-          </a:prstGeom>
-          <a:noFill/>
-        </p:spPr>
-        <p:txBody>
-          <a:bodyPr wrap="square" anchor="t" lIns="0" rIns="0" tIns="0" bIns="0">
-            <a:spAutoFit/>
-          </a:bodyPr>
-          <a:lstStyle/>
-          <a:p>
-            <a:pPr marL="0" indent="0">
-              <a:lnSpc>
-                <a:spcPct val="105000"/>
-              </a:lnSpc>
-              <a:spcBef>
-                <a:spcPts val="0"/>
-              </a:spcBef>
-              <a:spcAft>
-                <a:spcPts val="1000"/>
-              </a:spcAft>
-            </a:pPr>
-            <a:r>
-              <a:rPr sz="1700" b="1" i="0">
-                <a:solidFill>
-                  <a:srgbClr val="EDAB0C"/>
-                </a:solidFill>
-                <a:latin typeface="Roboto"/>
-              </a:rPr>
-              <a:t>■  </a:t>
-            </a:r>
-            <a:r>
-              <a:rPr sz="1700" b="0" i="0">
-                <a:solidFill>
-                  <a:srgbClr val="2A2929"/>
-                </a:solidFill>
-                <a:latin typeface="Roboto"/>
-              </a:rPr>
-              <a:t>Lead a stand-up for the practice team: each member reports progress on their component and any blocker.</a:t>
-            </a:r>
-          </a:p>
-          <a:p>
-            <a:pPr marL="0" indent="0">
-              <a:lnSpc>
-                <a:spcPct val="105000"/>
-              </a:lnSpc>
-              <a:spcBef>
-                <a:spcPts val="0"/>
-              </a:spcBef>
-              <a:spcAft>
-                <a:spcPts val="1000"/>
-              </a:spcAft>
-            </a:pPr>
-            <a:r>
-              <a:rPr sz="1700" b="1" i="0">
-                <a:solidFill>
-                  <a:srgbClr val="EDAB0C"/>
-                </a:solidFill>
-                <a:latin typeface="Roboto"/>
-              </a:rPr>
-              <a:t>■  </a:t>
-            </a:r>
-            <a:r>
-              <a:rPr sz="1700" b="0" i="0">
-                <a:solidFill>
-                  <a:srgbClr val="2A2929"/>
-                </a:solidFill>
-                <a:latin typeface="Roboto"/>
-              </a:rPr>
-              <a:t>A conflict is injected (two members disagree over an integration boundary) — facilitate it to a resolution and record how you handled it.</a:t>
-            </a:r>
-          </a:p>
-        </p:txBody>
-      </p:sp>
-      <p:sp>
-        <p:nvSpPr>
-          <p:cNvPr id="6" name="Rounded Rectangle 5"/>
-          <p:cNvSpPr/>
-          <p:nvPr/>
-        </p:nvSpPr>
-        <p:spPr>
-          <a:xfrm>
-            <a:off x="640080" y="5897880"/>
-            <a:ext cx="4023360" cy="457200"/>
-          </a:xfrm>
-          <a:prstGeom prst="roundRect">
-            <a:avLst/>
-          </a:prstGeom>
-          <a:solidFill>
-            <a:srgbClr val="F9F9F9"/>
+            <a:srgbClr val="FFFFFF"/>
           </a:solidFill>
           <a:ln w="12700">
             <a:solidFill>
@@ -5436,48 +4842,14 @@
       </p:sp>
       <p:sp>
         <p:nvSpPr>
-          <p:cNvPr id="7" name="TextBox 6"/>
-          <p:cNvSpPr txBox="1"/>
-          <p:nvPr/>
-        </p:nvSpPr>
-        <p:spPr>
-          <a:xfrm>
-            <a:off x="822960" y="5943600"/>
-            <a:ext cx="3657600" cy="365760"/>
-          </a:xfrm>
-          <a:prstGeom prst="rect">
-            <a:avLst/>
-          </a:prstGeom>
-          <a:noFill/>
-        </p:spPr>
-        <p:txBody>
-          <a:bodyPr wrap="square" anchor="ctr" lIns="0" rIns="0" tIns="0" bIns="0">
-            <a:spAutoFit/>
-          </a:bodyPr>
-          <a:lstStyle/>
-          <a:p>
-            <a:r>
-              <a:rPr sz="1500" b="1" i="0">
-                <a:solidFill>
-                  <a:srgbClr val="2A2929"/>
-                </a:solidFill>
-                <a:latin typeface="Roboto"/>
-              </a:rPr>
-              <a:t>⏱  ~25 min</a:t>
-            </a:r>
-          </a:p>
-        </p:txBody>
-      </p:sp>
-      <p:sp>
-        <p:nvSpPr>
-          <p:cNvPr id="8" name="Rectangle 7"/>
+          <p:cNvPr id="5" name="Rectangle 4"/>
           <p:cNvSpPr/>
           <p:nvPr/>
         </p:nvSpPr>
         <p:spPr>
           <a:xfrm>
-            <a:off x="0" y="6565392"/>
-            <a:ext cx="12191695" cy="38100"/>
+            <a:off x="640080" y="1965960"/>
+            <a:ext cx="109728" cy="841248"/>
           </a:xfrm>
           <a:prstGeom prst="rect">
             <a:avLst/>
@@ -5514,7 +4886,219 @@
       </p:sp>
       <p:sp>
         <p:nvSpPr>
+          <p:cNvPr id="6" name="TextBox 5"/>
+          <p:cNvSpPr txBox="1"/>
+          <p:nvPr/>
+        </p:nvSpPr>
+        <p:spPr>
+          <a:xfrm>
+            <a:off x="960120" y="1965960"/>
+            <a:ext cx="10424160" cy="841248"/>
+          </a:xfrm>
+          <a:prstGeom prst="rect">
+            <a:avLst/>
+          </a:prstGeom>
+          <a:noFill/>
+        </p:spPr>
+        <p:txBody>
+          <a:bodyPr wrap="square" anchor="ctr" lIns="0" rIns="0" tIns="0" bIns="0">
+            <a:spAutoFit/>
+          </a:bodyPr>
+          <a:lstStyle/>
+          <a:p>
+            <a:pPr>
+              <a:lnSpc>
+                <a:spcPct val="100000"/>
+              </a:lnSpc>
+            </a:pPr>
+            <a:r>
+              <a:rPr sz="1700" b="0" i="0">
+                <a:solidFill>
+                  <a:srgbClr val="2A2929"/>
+                </a:solidFill>
+                <a:latin typeface="Roboto"/>
+              </a:rPr>
+              <a:t>Purpose, voices, blockers, decisions, record.</a:t>
+            </a:r>
+          </a:p>
+        </p:txBody>
+      </p:sp>
+      <p:sp>
+        <p:nvSpPr>
+          <p:cNvPr id="7" name="Rectangle 6"/>
+          <p:cNvSpPr/>
+          <p:nvPr/>
+        </p:nvSpPr>
+        <p:spPr>
+          <a:xfrm>
+            <a:off x="640080" y="2916936"/>
+            <a:ext cx="10927080" cy="841248"/>
+          </a:xfrm>
+          <a:prstGeom prst="rect">
+            <a:avLst/>
+          </a:prstGeom>
+          <a:solidFill>
+            <a:srgbClr val="FFFFFF"/>
+          </a:solidFill>
+          <a:ln w="12700">
+            <a:solidFill>
+              <a:srgbClr val="CCCCCC"/>
+            </a:solidFill>
+          </a:ln>
+          <a:effectLst/>
+        </p:spPr>
+        <p:style>
+          <a:lnRef idx="1">
+            <a:schemeClr val="accent1"/>
+          </a:lnRef>
+          <a:fillRef idx="3">
+            <a:schemeClr val="accent1"/>
+          </a:fillRef>
+          <a:effectRef idx="2">
+            <a:schemeClr val="accent1"/>
+          </a:effectRef>
+          <a:fontRef idx="minor">
+            <a:schemeClr val="lt1"/>
+          </a:fontRef>
+        </p:style>
+        <p:txBody>
+          <a:bodyPr rtlCol="0" anchor="ctr"/>
+          <a:lstStyle/>
+          <a:p>
+            <a:pPr algn="ctr"/>
+          </a:p>
+        </p:txBody>
+      </p:sp>
+      <p:sp>
+        <p:nvSpPr>
+          <p:cNvPr id="8" name="Rectangle 7"/>
+          <p:cNvSpPr/>
+          <p:nvPr/>
+        </p:nvSpPr>
+        <p:spPr>
+          <a:xfrm>
+            <a:off x="640080" y="2916936"/>
+            <a:ext cx="109728" cy="841248"/>
+          </a:xfrm>
+          <a:prstGeom prst="rect">
+            <a:avLst/>
+          </a:prstGeom>
+          <a:solidFill>
+            <a:srgbClr val="27B5CE"/>
+          </a:solidFill>
+          <a:ln>
+            <a:noFill/>
+          </a:ln>
+          <a:effectLst/>
+        </p:spPr>
+        <p:style>
+          <a:lnRef idx="1">
+            <a:schemeClr val="accent1"/>
+          </a:lnRef>
+          <a:fillRef idx="3">
+            <a:schemeClr val="accent1"/>
+          </a:fillRef>
+          <a:effectRef idx="2">
+            <a:schemeClr val="accent1"/>
+          </a:effectRef>
+          <a:fontRef idx="minor">
+            <a:schemeClr val="lt1"/>
+          </a:fontRef>
+        </p:style>
+        <p:txBody>
+          <a:bodyPr rtlCol="0" anchor="ctr"/>
+          <a:lstStyle/>
+          <a:p>
+            <a:pPr algn="ctr"/>
+          </a:p>
+        </p:txBody>
+      </p:sp>
+      <p:sp>
+        <p:nvSpPr>
           <p:cNvPr id="9" name="TextBox 8"/>
+          <p:cNvSpPr txBox="1"/>
+          <p:nvPr/>
+        </p:nvSpPr>
+        <p:spPr>
+          <a:xfrm>
+            <a:off x="960120" y="2916936"/>
+            <a:ext cx="10424160" cy="841248"/>
+          </a:xfrm>
+          <a:prstGeom prst="rect">
+            <a:avLst/>
+          </a:prstGeom>
+          <a:noFill/>
+        </p:spPr>
+        <p:txBody>
+          <a:bodyPr wrap="square" anchor="ctr" lIns="0" rIns="0" tIns="0" bIns="0">
+            <a:spAutoFit/>
+          </a:bodyPr>
+          <a:lstStyle/>
+          <a:p>
+            <a:pPr>
+              <a:lnSpc>
+                <a:spcPct val="100000"/>
+              </a:lnSpc>
+            </a:pPr>
+            <a:r>
+              <a:rPr sz="1700" b="0" i="0">
+                <a:solidFill>
+                  <a:srgbClr val="2A2929"/>
+                </a:solidFill>
+                <a:latin typeface="Roboto"/>
+              </a:rPr>
+              <a:t>The observer's view is evidence — hear it while it's fresh.</a:t>
+            </a:r>
+          </a:p>
+        </p:txBody>
+      </p:sp>
+      <p:sp>
+        <p:nvSpPr>
+          <p:cNvPr id="10" name="Rectangle 9"/>
+          <p:cNvSpPr/>
+          <p:nvPr/>
+        </p:nvSpPr>
+        <p:spPr>
+          <a:xfrm>
+            <a:off x="0" y="6565392"/>
+            <a:ext cx="12191695" cy="38100"/>
+          </a:xfrm>
+          <a:prstGeom prst="rect">
+            <a:avLst/>
+          </a:prstGeom>
+          <a:solidFill>
+            <a:srgbClr val="27B5CE"/>
+          </a:solidFill>
+          <a:ln>
+            <a:noFill/>
+          </a:ln>
+          <a:effectLst/>
+        </p:spPr>
+        <p:style>
+          <a:lnRef idx="1">
+            <a:schemeClr val="accent1"/>
+          </a:lnRef>
+          <a:fillRef idx="3">
+            <a:schemeClr val="accent1"/>
+          </a:fillRef>
+          <a:effectRef idx="2">
+            <a:schemeClr val="accent1"/>
+          </a:effectRef>
+          <a:fontRef idx="minor">
+            <a:schemeClr val="lt1"/>
+          </a:fontRef>
+        </p:style>
+        <p:txBody>
+          <a:bodyPr rtlCol="0" anchor="ctr"/>
+          <a:lstStyle/>
+          <a:p>
+            <a:pPr algn="ctr"/>
+          </a:p>
+        </p:txBody>
+      </p:sp>
+      <p:sp>
+        <p:nvSpPr>
+          <p:cNvPr id="11" name="TextBox 10"/>
           <p:cNvSpPr txBox="1"/>
           <p:nvPr/>
         </p:nvSpPr>
@@ -5557,7 +5141,7 @@
       </p:sp>
       <p:sp>
         <p:nvSpPr>
-          <p:cNvPr id="10" name="TextBox 9"/>
+          <p:cNvPr id="12" name="TextBox 11"/>
           <p:cNvSpPr txBox="1"/>
           <p:nvPr/>
         </p:nvSpPr>
@@ -5739,7 +5323,7 @@
                 </a:solidFill>
                 <a:latin typeface="Roboto"/>
               </a:rPr>
-              <a:t>Measuring performance &amp; feedback</a:t>
+              <a:t>The reflective accounts</a:t>
             </a:r>
           </a:p>
           <a:p>
@@ -5755,7 +5339,7 @@
                 </a:solidFill>
                 <a:latin typeface="Roboto Light"/>
               </a:rPr>
-              <a:t>measure against the plan, feed it back</a:t>
+              <a:t>real episodes, told honestly</a:t>
             </a:r>
           </a:p>
         </p:txBody>
@@ -5937,7 +5521,7 @@
                 </a:solidFill>
                 <a:latin typeface="Roboto"/>
               </a:rPr>
-              <a:t>Measuring performance against the work plans</a:t>
+              <a:t>Handling conflict and challenge</a:t>
             </a:r>
           </a:p>
         </p:txBody>
@@ -6035,7 +5619,7 @@
                 </a:solidFill>
                 <a:latin typeface="Roboto"/>
               </a:rPr>
-              <a:t>Measure each member's performance against the agreed work plans from Topic 5 — the plan is the yardstick (PC 4.1).</a:t>
+              <a:t>The strategies: separate the person from the problem, find the shared interest, agree a way forward — not a winner.</a:t>
             </a:r>
           </a:p>
           <a:p>
@@ -6066,7 +5650,7 @@
                 </a:solidFill>
                 <a:latin typeface="Roboto"/>
               </a:rPr>
-              <a:t>Measure the work, not the person: what was due, what was delivered, on what quality.</a:t>
+              <a:t>The challenges worth recognising: difficulty performing tasks, conflict with clients or teammates, risks and hazards, unethical behaviour.</a:t>
             </a:r>
           </a:p>
           <a:p>
@@ -6097,7 +5681,7 @@
                 </a:solidFill>
                 <a:latin typeface="Roboto"/>
               </a:rPr>
-              <a:t>Measurement is the input to feedback — you can't give useful feedback without it.</a:t>
+              <a:t>Surfaced and managed conflict improves the build; suppressed conflict resurfaces at integration.</a:t>
             </a:r>
           </a:p>
         </p:txBody>
@@ -6279,7 +5863,7 @@
                 </a:solidFill>
                 <a:latin typeface="Roboto"/>
               </a:rPr>
-              <a:t>Timely, constructive feedback &amp; assistance</a:t>
+              <a:t>Coaching, and supporting individuals</a:t>
             </a:r>
           </a:p>
         </p:txBody>
@@ -6377,7 +5961,7 @@
                 </a:solidFill>
                 <a:latin typeface="Roboto"/>
               </a:rPr>
-              <a:t>Provide timely, constructive performance feedback to expected organisational standards — close to the event, specific, actionable (PC 4.2).</a:t>
+              <a:t>Coaching develops capability in the moment: ask before telling, model then hand over, give room to try, check understanding.</a:t>
             </a:r>
           </a:p>
           <a:p>
@@ -6408,7 +5992,7 @@
                 </a:solidFill>
                 <a:latin typeface="Roboto"/>
               </a:rPr>
-              <a:t>Balance recognition with the gap; describe the behaviour and its effect, then agree the next step.</a:t>
+              <a:t>Support individuals toward the common goal — sometimes that's a stretch, not a rescue.</a:t>
             </a:r>
           </a:p>
           <a:p>
@@ -6439,7 +6023,7 @@
                 </a:solidFill>
                 <a:latin typeface="Roboto"/>
               </a:rPr>
-              <a:t>Provide feedback and assistance to team members — feedback names the gap, assistance helps close it (PE 2).</a:t>
+              <a:t>If you just supply the fix, you've solved the task and developed no one.</a:t>
             </a:r>
           </a:p>
         </p:txBody>
@@ -6594,20 +6178,54 @@
       <p:grpSpPr/>
       <p:sp>
         <p:nvSpPr>
-          <p:cNvPr id="2" name="Rectangle 1"/>
+          <p:cNvPr id="2" name="TextBox 1"/>
+          <p:cNvSpPr txBox="1"/>
+          <p:nvPr/>
+        </p:nvSpPr>
+        <p:spPr>
+          <a:xfrm>
+            <a:off x="640080" y="457200"/>
+            <a:ext cx="10881360" cy="960120"/>
+          </a:xfrm>
+          <a:prstGeom prst="rect">
+            <a:avLst/>
+          </a:prstGeom>
+          <a:noFill/>
+        </p:spPr>
+        <p:txBody>
+          <a:bodyPr wrap="square" anchor="t" lIns="0" rIns="0" tIns="0" bIns="0">
+            <a:spAutoFit/>
+          </a:bodyPr>
+          <a:lstStyle/>
+          <a:p>
+            <a:r>
+              <a:rPr sz="2800" b="1" i="0">
+                <a:solidFill>
+                  <a:srgbClr val="2A2929"/>
+                </a:solidFill>
+                <a:latin typeface="Roboto"/>
+              </a:rPr>
+              <a:t>Writing a reflective account</a:t>
+            </a:r>
+          </a:p>
+        </p:txBody>
+      </p:sp>
+      <p:sp>
+        <p:nvSpPr>
+          <p:cNvPr id="3" name="Rectangle 2"/>
           <p:cNvSpPr/>
           <p:nvPr/>
         </p:nvSpPr>
         <p:spPr>
           <a:xfrm>
-            <a:off x="0" y="0"/>
-            <a:ext cx="3931920" cy="6858000"/>
+            <a:off x="658368" y="1371600"/>
+            <a:ext cx="1463040" cy="50800"/>
           </a:xfrm>
           <a:prstGeom prst="rect">
             <a:avLst/>
           </a:prstGeom>
           <a:solidFill>
-            <a:srgbClr val="004488"/>
+            <a:srgbClr val="205F61"/>
           </a:solidFill>
           <a:ln>
             <a:noFill/>
@@ -6638,14 +6256,14 @@
       </p:sp>
       <p:sp>
         <p:nvSpPr>
-          <p:cNvPr id="3" name="TextBox 2"/>
+          <p:cNvPr id="4" name="TextBox 3"/>
           <p:cNvSpPr txBox="1"/>
           <p:nvPr/>
         </p:nvSpPr>
         <p:spPr>
           <a:xfrm>
-            <a:off x="365760" y="2103120"/>
-            <a:ext cx="3291840" cy="2194560"/>
+            <a:off x="658368" y="1691640"/>
+            <a:ext cx="10881360" cy="4480560"/>
           </a:xfrm>
           <a:prstGeom prst="rect">
             <a:avLst/>
@@ -6653,85 +6271,101 @@
           <a:noFill/>
         </p:spPr>
         <p:txBody>
-          <a:bodyPr wrap="square" anchor="t" lIns="0" rIns="0" tIns="0" bIns="0">
+          <a:bodyPr wrap="square" anchor="ctr" lIns="0" rIns="0" tIns="0" bIns="0">
             <a:spAutoFit/>
           </a:bodyPr>
           <a:lstStyle/>
           <a:p>
-            <a:r>
-              <a:rPr sz="13000" b="1" i="0">
-                <a:solidFill>
-                  <a:srgbClr val="FFFFFF"/>
-                </a:solidFill>
-                <a:latin typeface="Roboto"/>
-              </a:rPr>
-              <a:t>04</a:t>
-            </a:r>
-          </a:p>
-        </p:txBody>
-      </p:sp>
-      <p:sp>
-        <p:nvSpPr>
-          <p:cNvPr id="4" name="TextBox 3"/>
-          <p:cNvSpPr txBox="1"/>
-          <p:nvPr/>
-        </p:nvSpPr>
-        <p:spPr>
-          <a:xfrm>
-            <a:off x="4480560" y="2468880"/>
-            <a:ext cx="7132320" cy="2194560"/>
-          </a:xfrm>
-          <a:prstGeom prst="rect">
-            <a:avLst/>
-          </a:prstGeom>
-          <a:noFill/>
-        </p:spPr>
-        <p:txBody>
-          <a:bodyPr wrap="square" anchor="t" lIns="0" rIns="0" tIns="0" bIns="0">
-            <a:spAutoFit/>
-          </a:bodyPr>
-          <a:lstStyle/>
-          <a:p>
-            <a:r>
-              <a:rPr sz="1600" b="1" i="0">
-                <a:solidFill>
-                  <a:srgbClr val="004488"/>
-                </a:solidFill>
-                <a:latin typeface="Roboto"/>
-              </a:rPr>
-              <a:t>SECTION</a:t>
-            </a:r>
-          </a:p>
-          <a:p>
-            <a:pPr>
+            <a:pPr marL="0" indent="0">
+              <a:lnSpc>
+                <a:spcPct val="105000"/>
+              </a:lnSpc>
               <a:spcBef>
-                <a:spcPts val="600"/>
+                <a:spcPts val="0"/>
               </a:spcBef>
+              <a:spcAft>
+                <a:spcPts val="1000"/>
+              </a:spcAft>
             </a:pPr>
             <a:r>
-              <a:rPr sz="3800" b="1" i="0">
+              <a:rPr sz="2400" b="1" i="0">
+                <a:solidFill>
+                  <a:srgbClr val="EDAB0C"/>
+                </a:solidFill>
+                <a:latin typeface="Roboto"/>
+              </a:rPr>
+              <a:t>■  </a:t>
+            </a:r>
+            <a:r>
+              <a:rPr sz="2400" b="0" i="0">
                 <a:solidFill>
                   <a:srgbClr val="2A2929"/>
                 </a:solidFill>
                 <a:latin typeface="Roboto"/>
               </a:rPr>
-              <a:t>Development opportunities &amp; action plans</a:t>
-            </a:r>
-          </a:p>
-          <a:p>
-            <a:pPr>
+              <a:t>A reflection is a real episode, told honestly: what happened, what you did, what came of it, what you'd do differently.</a:t>
+            </a:r>
+          </a:p>
+          <a:p>
+            <a:pPr marL="0" indent="0">
+              <a:lnSpc>
+                <a:spcPct val="105000"/>
+              </a:lnSpc>
               <a:spcBef>
+                <a:spcPts val="0"/>
+              </a:spcBef>
+              <a:spcAft>
                 <a:spcPts val="1000"/>
+              </a:spcAft>
+            </a:pPr>
+            <a:r>
+              <a:rPr sz="2400" b="1" i="0">
+                <a:solidFill>
+                  <a:srgbClr val="EDAB0C"/>
+                </a:solidFill>
+                <a:latin typeface="Roboto"/>
+              </a:rPr>
+              <a:t>■  </a:t>
+            </a:r>
+            <a:r>
+              <a:rPr sz="2400" b="0" i="0">
+                <a:solidFill>
+                  <a:srgbClr val="2A2929"/>
+                </a:solidFill>
+                <a:latin typeface="Roboto"/>
+              </a:rPr>
+              <a:t>Name the technique you used — the account shows the skill by showing it in use.</a:t>
+            </a:r>
+          </a:p>
+          <a:p>
+            <a:pPr marL="0" indent="0">
+              <a:lnSpc>
+                <a:spcPct val="105000"/>
+              </a:lnSpc>
+              <a:spcBef>
+                <a:spcPts val="0"/>
               </a:spcBef>
+              <a:spcAft>
+                <a:spcPts val="1000"/>
+              </a:spcAft>
             </a:pPr>
             <a:r>
-              <a:rPr sz="2000" b="0" i="1">
-                <a:solidFill>
-                  <a:srgbClr val="484848"/>
-                </a:solidFill>
-                <a:latin typeface="Roboto Light"/>
-              </a:rPr>
-              <a:t>turn the gaps into growth</a:t>
+              <a:rPr sz="2400" b="1" i="0">
+                <a:solidFill>
+                  <a:srgbClr val="EDAB0C"/>
+                </a:solidFill>
+                <a:latin typeface="Roboto"/>
+              </a:rPr>
+              <a:t>■  </a:t>
+            </a:r>
+            <a:r>
+              <a:rPr sz="2400" b="0" i="0">
+                <a:solidFill>
+                  <a:srgbClr val="2A2929"/>
+                </a:solidFill>
+                <a:latin typeface="Roboto"/>
+              </a:rPr>
+              <a:t>Three accounts: a conflict or challenge, a coaching moment, an issue the team hit and your part in resolving it.</a:t>
             </a:r>
           </a:p>
         </p:txBody>
@@ -6751,7 +6385,7 @@
             <a:avLst/>
           </a:prstGeom>
           <a:solidFill>
-            <a:srgbClr val="004488"/>
+            <a:srgbClr val="205F61"/>
           </a:solidFill>
           <a:ln>
             <a:noFill/>
@@ -6853,7 +6487,7 @@
                 </a:solidFill>
                 <a:latin typeface="Roboto"/>
               </a:rPr>
-              <a:t/>
+              <a:t>10</a:t>
             </a:r>
           </a:p>
         </p:txBody>
@@ -6886,54 +6520,20 @@
       <p:grpSpPr/>
       <p:sp>
         <p:nvSpPr>
-          <p:cNvPr id="2" name="TextBox 1"/>
-          <p:cNvSpPr txBox="1"/>
-          <p:nvPr/>
-        </p:nvSpPr>
-        <p:spPr>
-          <a:xfrm>
-            <a:off x="640080" y="457200"/>
-            <a:ext cx="10881360" cy="960120"/>
-          </a:xfrm>
-          <a:prstGeom prst="rect">
-            <a:avLst/>
-          </a:prstGeom>
-          <a:noFill/>
-        </p:spPr>
-        <p:txBody>
-          <a:bodyPr wrap="square" anchor="t" lIns="0" rIns="0" tIns="0" bIns="0">
-            <a:spAutoFit/>
-          </a:bodyPr>
-          <a:lstStyle/>
-          <a:p>
-            <a:r>
-              <a:rPr sz="2800" b="1" i="0">
-                <a:solidFill>
-                  <a:srgbClr val="2A2929"/>
-                </a:solidFill>
-                <a:latin typeface="Roboto"/>
-              </a:rPr>
-              <a:t>Identify learning &amp; development opportunities</a:t>
-            </a:r>
-          </a:p>
-        </p:txBody>
-      </p:sp>
-      <p:sp>
-        <p:nvSpPr>
-          <p:cNvPr id="3" name="Rectangle 2"/>
+          <p:cNvPr id="2" name="Rectangle 1"/>
           <p:cNvSpPr/>
           <p:nvPr/>
         </p:nvSpPr>
         <p:spPr>
           <a:xfrm>
-            <a:off x="658368" y="1371600"/>
-            <a:ext cx="1463040" cy="50800"/>
+            <a:off x="0" y="0"/>
+            <a:ext cx="12191695" cy="1234440"/>
           </a:xfrm>
           <a:prstGeom prst="rect">
             <a:avLst/>
           </a:prstGeom>
           <a:solidFill>
-            <a:srgbClr val="004488"/>
+            <a:srgbClr val="205F61"/>
           </a:solidFill>
           <a:ln>
             <a:noFill/>
@@ -6964,14 +6564,67 @@
       </p:sp>
       <p:sp>
         <p:nvSpPr>
+          <p:cNvPr id="3" name="Rounded Rectangle 2"/>
+          <p:cNvSpPr/>
+          <p:nvPr/>
+        </p:nvSpPr>
+        <p:spPr>
+          <a:xfrm>
+            <a:off x="640080" y="384048"/>
+            <a:ext cx="1691640" cy="457200"/>
+          </a:xfrm>
+          <a:prstGeom prst="roundRect">
+            <a:avLst/>
+          </a:prstGeom>
+          <a:solidFill>
+            <a:srgbClr val="2A2929"/>
+          </a:solidFill>
+          <a:ln>
+            <a:noFill/>
+          </a:ln>
+          <a:effectLst/>
+        </p:spPr>
+        <p:style>
+          <a:lnRef idx="1">
+            <a:schemeClr val="accent1"/>
+          </a:lnRef>
+          <a:fillRef idx="3">
+            <a:schemeClr val="accent1"/>
+          </a:fillRef>
+          <a:effectRef idx="2">
+            <a:schemeClr val="accent1"/>
+          </a:effectRef>
+          <a:fontRef idx="minor">
+            <a:schemeClr val="lt1"/>
+          </a:fontRef>
+        </p:style>
+        <p:txBody>
+          <a:bodyPr rtlCol="0" anchor="ctr"/>
+          <a:lstStyle/>
+          <a:p>
+            <a:pPr algn="ctr"/>
+            <a:r>
+              <a:rPr sz="1400" b="1" i="0">
+                <a:solidFill>
+                  <a:srgbClr val="FBB900"/>
+                </a:solidFill>
+                <a:latin typeface="Roboto"/>
+              </a:rPr>
+              <a:t>ACTIVITY</a:t>
+            </a:r>
+          </a:p>
+        </p:txBody>
+      </p:sp>
+      <p:sp>
+        <p:nvSpPr>
           <p:cNvPr id="4" name="TextBox 3"/>
           <p:cNvSpPr txBox="1"/>
           <p:nvPr/>
         </p:nvSpPr>
         <p:spPr>
           <a:xfrm>
-            <a:off x="658368" y="1691640"/>
-            <a:ext cx="10881360" cy="4480560"/>
+            <a:off x="2560320" y="310896"/>
+            <a:ext cx="8961120" cy="685800"/>
           </a:xfrm>
           <a:prstGeom prst="rect">
             <a:avLst/>
@@ -6980,6 +6633,40 @@
         </p:spPr>
         <p:txBody>
           <a:bodyPr wrap="square" anchor="ctr" lIns="0" rIns="0" tIns="0" bIns="0">
+            <a:spAutoFit/>
+          </a:bodyPr>
+          <a:lstStyle/>
+          <a:p>
+            <a:r>
+              <a:rPr sz="2600" b="1" i="0">
+                <a:solidFill>
+                  <a:srgbClr val="FFFFFF"/>
+                </a:solidFill>
+                <a:latin typeface="Roboto"/>
+              </a:rPr>
+              <a:t>Write the three accounts</a:t>
+            </a:r>
+          </a:p>
+        </p:txBody>
+      </p:sp>
+      <p:sp>
+        <p:nvSpPr>
+          <p:cNvPr id="5" name="TextBox 4"/>
+          <p:cNvSpPr txBox="1"/>
+          <p:nvPr/>
+        </p:nvSpPr>
+        <p:spPr>
+          <a:xfrm>
+            <a:off x="658368" y="1554480"/>
+            <a:ext cx="10881360" cy="4297680"/>
+          </a:xfrm>
+          <a:prstGeom prst="rect">
+            <a:avLst/>
+          </a:prstGeom>
+          <a:noFill/>
+        </p:spPr>
+        <p:txBody>
+          <a:bodyPr wrap="square" anchor="t" lIns="0" rIns="0" tIns="0" bIns="0">
             <a:spAutoFit/>
           </a:bodyPr>
           <a:lstStyle/>
@@ -6996,7 +6683,7 @@
               </a:spcAft>
             </a:pPr>
             <a:r>
-              <a:rPr sz="2400" b="1" i="0">
+              <a:rPr sz="1700" b="1" i="0">
                 <a:solidFill>
                   <a:srgbClr val="EDAB0C"/>
                 </a:solidFill>
@@ -7005,13 +6692,13 @@
               <a:t>■  </a:t>
             </a:r>
             <a:r>
-              <a:rPr sz="2400" b="0" i="0">
+              <a:rPr sz="1700" b="0" i="0">
                 <a:solidFill>
                   <a:srgbClr val="2A2929"/>
                 </a:solidFill>
                 <a:latin typeface="Roboto"/>
               </a:rPr>
-              <a:t>Identify specific learning and development opportunities to improve team and individual performance and behaviours (PC 4.3).</a:t>
+              <a:t>Workbook — tasks 11, 12 and 13.</a:t>
             </a:r>
           </a:p>
           <a:p>
@@ -7027,7 +6714,7 @@
               </a:spcAft>
             </a:pPr>
             <a:r>
-              <a:rPr sz="2400" b="1" i="0">
+              <a:rPr sz="1700" b="1" i="0">
                 <a:solidFill>
                   <a:srgbClr val="EDAB0C"/>
                 </a:solidFill>
@@ -7036,51 +6723,100 @@
               <a:t>■  </a:t>
             </a:r>
             <a:r>
-              <a:rPr sz="2400" b="0" i="0">
+              <a:rPr sz="1700" b="0" i="0">
                 <a:solidFill>
                   <a:srgbClr val="2A2929"/>
                 </a:solidFill>
                 <a:latin typeface="Roboto"/>
               </a:rPr>
-              <a:t>A gap you measured (C3) becomes a development opportunity — a skill to build, a behaviour to shift.</a:t>
-            </a:r>
-          </a:p>
-          <a:p>
-            <a:pPr marL="0" indent="0">
-              <a:lnSpc>
-                <a:spcPct val="105000"/>
-              </a:lnSpc>
-              <a:spcBef>
-                <a:spcPts val="0"/>
-              </a:spcBef>
-              <a:spcAft>
-                <a:spcPts val="1000"/>
-              </a:spcAft>
-            </a:pPr>
-            <a:r>
-              <a:rPr sz="2400" b="1" i="0">
-                <a:solidFill>
-                  <a:srgbClr val="EDAB0C"/>
-                </a:solidFill>
-                <a:latin typeface="Roboto"/>
-              </a:rPr>
-              <a:t>■  </a:t>
-            </a:r>
-            <a:r>
-              <a:rPr sz="2400" b="0" i="0">
+              <a:t>Write the conflict account, the coaching account, and the issue account — real episodes from your build, with the technique named in each.</a:t>
+            </a:r>
+          </a:p>
+        </p:txBody>
+      </p:sp>
+      <p:sp>
+        <p:nvSpPr>
+          <p:cNvPr id="6" name="Rounded Rectangle 5"/>
+          <p:cNvSpPr/>
+          <p:nvPr/>
+        </p:nvSpPr>
+        <p:spPr>
+          <a:xfrm>
+            <a:off x="640080" y="5897880"/>
+            <a:ext cx="4023360" cy="457200"/>
+          </a:xfrm>
+          <a:prstGeom prst="roundRect">
+            <a:avLst/>
+          </a:prstGeom>
+          <a:solidFill>
+            <a:srgbClr val="F9F9F9"/>
+          </a:solidFill>
+          <a:ln w="12700">
+            <a:solidFill>
+              <a:srgbClr val="CCCCCC"/>
+            </a:solidFill>
+          </a:ln>
+          <a:effectLst/>
+        </p:spPr>
+        <p:style>
+          <a:lnRef idx="1">
+            <a:schemeClr val="accent1"/>
+          </a:lnRef>
+          <a:fillRef idx="3">
+            <a:schemeClr val="accent1"/>
+          </a:fillRef>
+          <a:effectRef idx="2">
+            <a:schemeClr val="accent1"/>
+          </a:effectRef>
+          <a:fontRef idx="minor">
+            <a:schemeClr val="lt1"/>
+          </a:fontRef>
+        </p:style>
+        <p:txBody>
+          <a:bodyPr rtlCol="0" anchor="ctr"/>
+          <a:lstStyle/>
+          <a:p>
+            <a:pPr algn="ctr"/>
+          </a:p>
+        </p:txBody>
+      </p:sp>
+      <p:sp>
+        <p:nvSpPr>
+          <p:cNvPr id="7" name="TextBox 6"/>
+          <p:cNvSpPr txBox="1"/>
+          <p:nvPr/>
+        </p:nvSpPr>
+        <p:spPr>
+          <a:xfrm>
+            <a:off x="822960" y="5943600"/>
+            <a:ext cx="3657600" cy="365760"/>
+          </a:xfrm>
+          <a:prstGeom prst="rect">
+            <a:avLst/>
+          </a:prstGeom>
+          <a:noFill/>
+        </p:spPr>
+        <p:txBody>
+          <a:bodyPr wrap="square" anchor="ctr" lIns="0" rIns="0" tIns="0" bIns="0">
+            <a:spAutoFit/>
+          </a:bodyPr>
+          <a:lstStyle/>
+          <a:p>
+            <a:r>
+              <a:rPr sz="1500" b="1" i="0">
                 <a:solidFill>
                   <a:srgbClr val="2A2929"/>
                 </a:solidFill>
                 <a:latin typeface="Roboto"/>
               </a:rPr>
-              <a:t>Tie each opportunity to an individual and to the team's common goals.</a:t>
-            </a:r>
-          </a:p>
-        </p:txBody>
-      </p:sp>
-      <p:sp>
-        <p:nvSpPr>
-          <p:cNvPr id="5" name="Rectangle 4"/>
+              <a:t>⏱  ~35 min</a:t>
+            </a:r>
+          </a:p>
+        </p:txBody>
+      </p:sp>
+      <p:sp>
+        <p:nvSpPr>
+          <p:cNvPr id="8" name="Rectangle 7"/>
           <p:cNvSpPr/>
           <p:nvPr/>
         </p:nvSpPr>
@@ -7093,7 +6829,7 @@
             <a:avLst/>
           </a:prstGeom>
           <a:solidFill>
-            <a:srgbClr val="004488"/>
+            <a:srgbClr val="205F61"/>
           </a:solidFill>
           <a:ln>
             <a:noFill/>
@@ -7124,7 +6860,7 @@
       </p:sp>
       <p:sp>
         <p:nvSpPr>
-          <p:cNvPr id="6" name="TextBox 5"/>
+          <p:cNvPr id="9" name="TextBox 8"/>
           <p:cNvSpPr txBox="1"/>
           <p:nvPr/>
         </p:nvSpPr>
@@ -7167,7 +6903,7 @@
       </p:sp>
       <p:sp>
         <p:nvSpPr>
-          <p:cNvPr id="7" name="TextBox 6"/>
+          <p:cNvPr id="10" name="TextBox 9"/>
           <p:cNvSpPr txBox="1"/>
           <p:nvPr/>
         </p:nvSpPr>
@@ -7195,7 +6931,7 @@
                 </a:solidFill>
                 <a:latin typeface="Roboto"/>
               </a:rPr>
-              <a:t>10</a:t>
+              <a:t>11</a:t>
             </a:r>
           </a:p>
         </p:txBody>
@@ -7209,6 +6945,635 @@
 </file>
 
 <file path=ppt/slides/slide16.xml><?xml version="1.0" encoding="utf-8"?>
+<p:sld xmlns:a="http://schemas.openxmlformats.org/drawingml/2006/main" xmlns:p="http://schemas.openxmlformats.org/presentationml/2006/main" xmlns:r="http://schemas.openxmlformats.org/officeDocument/2006/relationships">
+  <p:cSld>
+    <p:bg>
+      <p:bgPr>
+        <a:solidFill>
+          <a:srgbClr val="F9F9F9"/>
+        </a:solidFill>
+        <a:effectLst/>
+      </p:bgPr>
+    </p:bg>
+    <p:spTree>
+      <p:nvGrpSpPr>
+        <p:cNvPr id="1" name=""/>
+        <p:cNvGrpSpPr/>
+        <p:nvPr/>
+      </p:nvGrpSpPr>
+      <p:grpSpPr/>
+      <p:sp>
+        <p:nvSpPr>
+          <p:cNvPr id="2" name="TextBox 1"/>
+          <p:cNvSpPr txBox="1"/>
+          <p:nvPr/>
+        </p:nvSpPr>
+        <p:spPr>
+          <a:xfrm>
+            <a:off x="640080" y="548640"/>
+            <a:ext cx="10881360" cy="1097280"/>
+          </a:xfrm>
+          <a:prstGeom prst="rect">
+            <a:avLst/>
+          </a:prstGeom>
+          <a:noFill/>
+        </p:spPr>
+        <p:txBody>
+          <a:bodyPr wrap="square" anchor="t" lIns="0" rIns="0" tIns="0" bIns="0">
+            <a:spAutoFit/>
+          </a:bodyPr>
+          <a:lstStyle/>
+          <a:p>
+            <a:r>
+              <a:rPr sz="3200" b="1" i="0">
+                <a:solidFill>
+                  <a:srgbClr val="2A2929"/>
+                </a:solidFill>
+                <a:latin typeface="Roboto"/>
+              </a:rPr>
+              <a:t>Key takeaways</a:t>
+            </a:r>
+          </a:p>
+          <a:p>
+            <a:pPr>
+              <a:spcBef>
+                <a:spcPts val="200"/>
+              </a:spcBef>
+            </a:pPr>
+            <a:r>
+              <a:rPr sz="1800" b="1" i="0">
+                <a:solidFill>
+                  <a:srgbClr val="205F61"/>
+                </a:solidFill>
+                <a:latin typeface="Roboto"/>
+              </a:rPr>
+              <a:t>Section 3 · The accounts</a:t>
+            </a:r>
+          </a:p>
+        </p:txBody>
+      </p:sp>
+      <p:sp>
+        <p:nvSpPr>
+          <p:cNvPr id="3" name="Rectangle 2"/>
+          <p:cNvSpPr/>
+          <p:nvPr/>
+        </p:nvSpPr>
+        <p:spPr>
+          <a:xfrm>
+            <a:off x="658368" y="1600200"/>
+            <a:ext cx="1463040" cy="50800"/>
+          </a:xfrm>
+          <a:prstGeom prst="rect">
+            <a:avLst/>
+          </a:prstGeom>
+          <a:solidFill>
+            <a:srgbClr val="205F61"/>
+          </a:solidFill>
+          <a:ln>
+            <a:noFill/>
+          </a:ln>
+          <a:effectLst/>
+        </p:spPr>
+        <p:style>
+          <a:lnRef idx="1">
+            <a:schemeClr val="accent1"/>
+          </a:lnRef>
+          <a:fillRef idx="3">
+            <a:schemeClr val="accent1"/>
+          </a:fillRef>
+          <a:effectRef idx="2">
+            <a:schemeClr val="accent1"/>
+          </a:effectRef>
+          <a:fontRef idx="minor">
+            <a:schemeClr val="lt1"/>
+          </a:fontRef>
+        </p:style>
+        <p:txBody>
+          <a:bodyPr rtlCol="0" anchor="ctr"/>
+          <a:lstStyle/>
+          <a:p>
+            <a:pPr algn="ctr"/>
+          </a:p>
+        </p:txBody>
+      </p:sp>
+      <p:sp>
+        <p:nvSpPr>
+          <p:cNvPr id="4" name="Rectangle 3"/>
+          <p:cNvSpPr/>
+          <p:nvPr/>
+        </p:nvSpPr>
+        <p:spPr>
+          <a:xfrm>
+            <a:off x="640080" y="1965960"/>
+            <a:ext cx="10927080" cy="841248"/>
+          </a:xfrm>
+          <a:prstGeom prst="rect">
+            <a:avLst/>
+          </a:prstGeom>
+          <a:solidFill>
+            <a:srgbClr val="FFFFFF"/>
+          </a:solidFill>
+          <a:ln w="12700">
+            <a:solidFill>
+              <a:srgbClr val="CCCCCC"/>
+            </a:solidFill>
+          </a:ln>
+          <a:effectLst/>
+        </p:spPr>
+        <p:style>
+          <a:lnRef idx="1">
+            <a:schemeClr val="accent1"/>
+          </a:lnRef>
+          <a:fillRef idx="3">
+            <a:schemeClr val="accent1"/>
+          </a:fillRef>
+          <a:effectRef idx="2">
+            <a:schemeClr val="accent1"/>
+          </a:effectRef>
+          <a:fontRef idx="minor">
+            <a:schemeClr val="lt1"/>
+          </a:fontRef>
+        </p:style>
+        <p:txBody>
+          <a:bodyPr rtlCol="0" anchor="ctr"/>
+          <a:lstStyle/>
+          <a:p>
+            <a:pPr algn="ctr"/>
+          </a:p>
+        </p:txBody>
+      </p:sp>
+      <p:sp>
+        <p:nvSpPr>
+          <p:cNvPr id="5" name="Rectangle 4"/>
+          <p:cNvSpPr/>
+          <p:nvPr/>
+        </p:nvSpPr>
+        <p:spPr>
+          <a:xfrm>
+            <a:off x="640080" y="1965960"/>
+            <a:ext cx="109728" cy="841248"/>
+          </a:xfrm>
+          <a:prstGeom prst="rect">
+            <a:avLst/>
+          </a:prstGeom>
+          <a:solidFill>
+            <a:srgbClr val="205F61"/>
+          </a:solidFill>
+          <a:ln>
+            <a:noFill/>
+          </a:ln>
+          <a:effectLst/>
+        </p:spPr>
+        <p:style>
+          <a:lnRef idx="1">
+            <a:schemeClr val="accent1"/>
+          </a:lnRef>
+          <a:fillRef idx="3">
+            <a:schemeClr val="accent1"/>
+          </a:fillRef>
+          <a:effectRef idx="2">
+            <a:schemeClr val="accent1"/>
+          </a:effectRef>
+          <a:fontRef idx="minor">
+            <a:schemeClr val="lt1"/>
+          </a:fontRef>
+        </p:style>
+        <p:txBody>
+          <a:bodyPr rtlCol="0" anchor="ctr"/>
+          <a:lstStyle/>
+          <a:p>
+            <a:pPr algn="ctr"/>
+          </a:p>
+        </p:txBody>
+      </p:sp>
+      <p:sp>
+        <p:nvSpPr>
+          <p:cNvPr id="6" name="TextBox 5"/>
+          <p:cNvSpPr txBox="1"/>
+          <p:nvPr/>
+        </p:nvSpPr>
+        <p:spPr>
+          <a:xfrm>
+            <a:off x="960120" y="1965960"/>
+            <a:ext cx="10424160" cy="841248"/>
+          </a:xfrm>
+          <a:prstGeom prst="rect">
+            <a:avLst/>
+          </a:prstGeom>
+          <a:noFill/>
+        </p:spPr>
+        <p:txBody>
+          <a:bodyPr wrap="square" anchor="ctr" lIns="0" rIns="0" tIns="0" bIns="0">
+            <a:spAutoFit/>
+          </a:bodyPr>
+          <a:lstStyle/>
+          <a:p>
+            <a:pPr>
+              <a:lnSpc>
+                <a:spcPct val="100000"/>
+              </a:lnSpc>
+            </a:pPr>
+            <a:r>
+              <a:rPr sz="1700" b="0" i="0">
+                <a:solidFill>
+                  <a:srgbClr val="2A2929"/>
+                </a:solidFill>
+                <a:latin typeface="Roboto"/>
+              </a:rPr>
+              <a:t>Person from problem; shared interest; a way forward.</a:t>
+            </a:r>
+          </a:p>
+        </p:txBody>
+      </p:sp>
+      <p:sp>
+        <p:nvSpPr>
+          <p:cNvPr id="7" name="Rectangle 6"/>
+          <p:cNvSpPr/>
+          <p:nvPr/>
+        </p:nvSpPr>
+        <p:spPr>
+          <a:xfrm>
+            <a:off x="640080" y="2916936"/>
+            <a:ext cx="10927080" cy="841248"/>
+          </a:xfrm>
+          <a:prstGeom prst="rect">
+            <a:avLst/>
+          </a:prstGeom>
+          <a:solidFill>
+            <a:srgbClr val="FFFFFF"/>
+          </a:solidFill>
+          <a:ln w="12700">
+            <a:solidFill>
+              <a:srgbClr val="CCCCCC"/>
+            </a:solidFill>
+          </a:ln>
+          <a:effectLst/>
+        </p:spPr>
+        <p:style>
+          <a:lnRef idx="1">
+            <a:schemeClr val="accent1"/>
+          </a:lnRef>
+          <a:fillRef idx="3">
+            <a:schemeClr val="accent1"/>
+          </a:fillRef>
+          <a:effectRef idx="2">
+            <a:schemeClr val="accent1"/>
+          </a:effectRef>
+          <a:fontRef idx="minor">
+            <a:schemeClr val="lt1"/>
+          </a:fontRef>
+        </p:style>
+        <p:txBody>
+          <a:bodyPr rtlCol="0" anchor="ctr"/>
+          <a:lstStyle/>
+          <a:p>
+            <a:pPr algn="ctr"/>
+          </a:p>
+        </p:txBody>
+      </p:sp>
+      <p:sp>
+        <p:nvSpPr>
+          <p:cNvPr id="8" name="Rectangle 7"/>
+          <p:cNvSpPr/>
+          <p:nvPr/>
+        </p:nvSpPr>
+        <p:spPr>
+          <a:xfrm>
+            <a:off x="640080" y="2916936"/>
+            <a:ext cx="109728" cy="841248"/>
+          </a:xfrm>
+          <a:prstGeom prst="rect">
+            <a:avLst/>
+          </a:prstGeom>
+          <a:solidFill>
+            <a:srgbClr val="205F61"/>
+          </a:solidFill>
+          <a:ln>
+            <a:noFill/>
+          </a:ln>
+          <a:effectLst/>
+        </p:spPr>
+        <p:style>
+          <a:lnRef idx="1">
+            <a:schemeClr val="accent1"/>
+          </a:lnRef>
+          <a:fillRef idx="3">
+            <a:schemeClr val="accent1"/>
+          </a:fillRef>
+          <a:effectRef idx="2">
+            <a:schemeClr val="accent1"/>
+          </a:effectRef>
+          <a:fontRef idx="minor">
+            <a:schemeClr val="lt1"/>
+          </a:fontRef>
+        </p:style>
+        <p:txBody>
+          <a:bodyPr rtlCol="0" anchor="ctr"/>
+          <a:lstStyle/>
+          <a:p>
+            <a:pPr algn="ctr"/>
+          </a:p>
+        </p:txBody>
+      </p:sp>
+      <p:sp>
+        <p:nvSpPr>
+          <p:cNvPr id="9" name="TextBox 8"/>
+          <p:cNvSpPr txBox="1"/>
+          <p:nvPr/>
+        </p:nvSpPr>
+        <p:spPr>
+          <a:xfrm>
+            <a:off x="960120" y="2916936"/>
+            <a:ext cx="10424160" cy="841248"/>
+          </a:xfrm>
+          <a:prstGeom prst="rect">
+            <a:avLst/>
+          </a:prstGeom>
+          <a:noFill/>
+        </p:spPr>
+        <p:txBody>
+          <a:bodyPr wrap="square" anchor="ctr" lIns="0" rIns="0" tIns="0" bIns="0">
+            <a:spAutoFit/>
+          </a:bodyPr>
+          <a:lstStyle/>
+          <a:p>
+            <a:pPr>
+              <a:lnSpc>
+                <a:spcPct val="100000"/>
+              </a:lnSpc>
+            </a:pPr>
+            <a:r>
+              <a:rPr sz="1700" b="0" i="0">
+                <a:solidFill>
+                  <a:srgbClr val="2A2929"/>
+                </a:solidFill>
+                <a:latin typeface="Roboto"/>
+              </a:rPr>
+              <a:t>Ask before telling; stretch, don't rescue.</a:t>
+            </a:r>
+          </a:p>
+        </p:txBody>
+      </p:sp>
+      <p:sp>
+        <p:nvSpPr>
+          <p:cNvPr id="10" name="Rectangle 9"/>
+          <p:cNvSpPr/>
+          <p:nvPr/>
+        </p:nvSpPr>
+        <p:spPr>
+          <a:xfrm>
+            <a:off x="640080" y="3867912"/>
+            <a:ext cx="10927080" cy="841248"/>
+          </a:xfrm>
+          <a:prstGeom prst="rect">
+            <a:avLst/>
+          </a:prstGeom>
+          <a:solidFill>
+            <a:srgbClr val="FFFFFF"/>
+          </a:solidFill>
+          <a:ln w="12700">
+            <a:solidFill>
+              <a:srgbClr val="CCCCCC"/>
+            </a:solidFill>
+          </a:ln>
+          <a:effectLst/>
+        </p:spPr>
+        <p:style>
+          <a:lnRef idx="1">
+            <a:schemeClr val="accent1"/>
+          </a:lnRef>
+          <a:fillRef idx="3">
+            <a:schemeClr val="accent1"/>
+          </a:fillRef>
+          <a:effectRef idx="2">
+            <a:schemeClr val="accent1"/>
+          </a:effectRef>
+          <a:fontRef idx="minor">
+            <a:schemeClr val="lt1"/>
+          </a:fontRef>
+        </p:style>
+        <p:txBody>
+          <a:bodyPr rtlCol="0" anchor="ctr"/>
+          <a:lstStyle/>
+          <a:p>
+            <a:pPr algn="ctr"/>
+          </a:p>
+        </p:txBody>
+      </p:sp>
+      <p:sp>
+        <p:nvSpPr>
+          <p:cNvPr id="11" name="Rectangle 10"/>
+          <p:cNvSpPr/>
+          <p:nvPr/>
+        </p:nvSpPr>
+        <p:spPr>
+          <a:xfrm>
+            <a:off x="640080" y="3867912"/>
+            <a:ext cx="109728" cy="841248"/>
+          </a:xfrm>
+          <a:prstGeom prst="rect">
+            <a:avLst/>
+          </a:prstGeom>
+          <a:solidFill>
+            <a:srgbClr val="205F61"/>
+          </a:solidFill>
+          <a:ln>
+            <a:noFill/>
+          </a:ln>
+          <a:effectLst/>
+        </p:spPr>
+        <p:style>
+          <a:lnRef idx="1">
+            <a:schemeClr val="accent1"/>
+          </a:lnRef>
+          <a:fillRef idx="3">
+            <a:schemeClr val="accent1"/>
+          </a:fillRef>
+          <a:effectRef idx="2">
+            <a:schemeClr val="accent1"/>
+          </a:effectRef>
+          <a:fontRef idx="minor">
+            <a:schemeClr val="lt1"/>
+          </a:fontRef>
+        </p:style>
+        <p:txBody>
+          <a:bodyPr rtlCol="0" anchor="ctr"/>
+          <a:lstStyle/>
+          <a:p>
+            <a:pPr algn="ctr"/>
+          </a:p>
+        </p:txBody>
+      </p:sp>
+      <p:sp>
+        <p:nvSpPr>
+          <p:cNvPr id="12" name="TextBox 11"/>
+          <p:cNvSpPr txBox="1"/>
+          <p:nvPr/>
+        </p:nvSpPr>
+        <p:spPr>
+          <a:xfrm>
+            <a:off x="960120" y="3867912"/>
+            <a:ext cx="10424160" cy="841248"/>
+          </a:xfrm>
+          <a:prstGeom prst="rect">
+            <a:avLst/>
+          </a:prstGeom>
+          <a:noFill/>
+        </p:spPr>
+        <p:txBody>
+          <a:bodyPr wrap="square" anchor="ctr" lIns="0" rIns="0" tIns="0" bIns="0">
+            <a:spAutoFit/>
+          </a:bodyPr>
+          <a:lstStyle/>
+          <a:p>
+            <a:pPr>
+              <a:lnSpc>
+                <a:spcPct val="100000"/>
+              </a:lnSpc>
+            </a:pPr>
+            <a:r>
+              <a:rPr sz="1700" b="0" i="0">
+                <a:solidFill>
+                  <a:srgbClr val="2A2929"/>
+                </a:solidFill>
+                <a:latin typeface="Roboto"/>
+              </a:rPr>
+              <a:t>Real episode, named technique, honest lesson.</a:t>
+            </a:r>
+          </a:p>
+        </p:txBody>
+      </p:sp>
+      <p:sp>
+        <p:nvSpPr>
+          <p:cNvPr id="13" name="Rectangle 12"/>
+          <p:cNvSpPr/>
+          <p:nvPr/>
+        </p:nvSpPr>
+        <p:spPr>
+          <a:xfrm>
+            <a:off x="0" y="6565392"/>
+            <a:ext cx="12191695" cy="38100"/>
+          </a:xfrm>
+          <a:prstGeom prst="rect">
+            <a:avLst/>
+          </a:prstGeom>
+          <a:solidFill>
+            <a:srgbClr val="205F61"/>
+          </a:solidFill>
+          <a:ln>
+            <a:noFill/>
+          </a:ln>
+          <a:effectLst/>
+        </p:spPr>
+        <p:style>
+          <a:lnRef idx="1">
+            <a:schemeClr val="accent1"/>
+          </a:lnRef>
+          <a:fillRef idx="3">
+            <a:schemeClr val="accent1"/>
+          </a:fillRef>
+          <a:effectRef idx="2">
+            <a:schemeClr val="accent1"/>
+          </a:effectRef>
+          <a:fontRef idx="minor">
+            <a:schemeClr val="lt1"/>
+          </a:fontRef>
+        </p:style>
+        <p:txBody>
+          <a:bodyPr rtlCol="0" anchor="ctr"/>
+          <a:lstStyle/>
+          <a:p>
+            <a:pPr algn="ctr"/>
+          </a:p>
+        </p:txBody>
+      </p:sp>
+      <p:sp>
+        <p:nvSpPr>
+          <p:cNvPr id="14" name="TextBox 13"/>
+          <p:cNvSpPr txBox="1"/>
+          <p:nvPr/>
+        </p:nvSpPr>
+        <p:spPr>
+          <a:xfrm>
+            <a:off x="502920" y="6400800"/>
+            <a:ext cx="5486400" cy="320040"/>
+          </a:xfrm>
+          <a:prstGeom prst="rect">
+            <a:avLst/>
+          </a:prstGeom>
+          <a:noFill/>
+        </p:spPr>
+        <p:txBody>
+          <a:bodyPr wrap="square" anchor="t" lIns="0" rIns="0" tIns="0" bIns="0">
+            <a:spAutoFit/>
+          </a:bodyPr>
+          <a:lstStyle/>
+          <a:p>
+            <a:r>
+              <a:rPr sz="1100" b="1" i="0">
+                <a:solidFill>
+                  <a:srgbClr val="2A2929"/>
+                </a:solidFill>
+                <a:latin typeface="Roboto"/>
+              </a:rPr>
+              <a:t>Kangan </a:t>
+            </a:r>
+            <a:r>
+              <a:rPr sz="1100" b="1" i="0">
+                <a:solidFill>
+                  <a:srgbClr val="D68E10"/>
+                </a:solidFill>
+                <a:latin typeface="Roboto"/>
+              </a:rPr>
+              <a:t>Institute</a:t>
+            </a:r>
+          </a:p>
+        </p:txBody>
+      </p:sp>
+      <p:sp>
+        <p:nvSpPr>
+          <p:cNvPr id="15" name="TextBox 14"/>
+          <p:cNvSpPr txBox="1"/>
+          <p:nvPr/>
+        </p:nvSpPr>
+        <p:spPr>
+          <a:xfrm>
+            <a:off x="10515600" y="6400800"/>
+            <a:ext cx="1188720" cy="320040"/>
+          </a:xfrm>
+          <a:prstGeom prst="rect">
+            <a:avLst/>
+          </a:prstGeom>
+          <a:noFill/>
+        </p:spPr>
+        <p:txBody>
+          <a:bodyPr wrap="square" anchor="t" lIns="0" rIns="0" tIns="0" bIns="0">
+            <a:spAutoFit/>
+          </a:bodyPr>
+          <a:lstStyle/>
+          <a:p>
+            <a:pPr algn="r"/>
+            <a:r>
+              <a:rPr sz="1100" b="0" i="0">
+                <a:solidFill>
+                  <a:srgbClr val="7A7A7A"/>
+                </a:solidFill>
+                <a:latin typeface="Roboto"/>
+              </a:rPr>
+              <a:t>12</a:t>
+            </a:r>
+          </a:p>
+        </p:txBody>
+      </p:sp>
+    </p:spTree>
+  </p:cSld>
+  <p:clrMapOvr>
+    <a:masterClrMapping/>
+  </p:clrMapOvr>
+</p:sld>
+</file>
+
+<file path=ppt/slides/slide17.xml><?xml version="1.0" encoding="utf-8"?>
 <p:sld xmlns:a="http://schemas.openxmlformats.org/drawingml/2006/main" xmlns:p="http://schemas.openxmlformats.org/presentationml/2006/main" xmlns:r="http://schemas.openxmlformats.org/officeDocument/2006/relationships">
   <p:cSld>
     <p:bg>
@@ -7228,48 +7593,14 @@
       <p:grpSpPr/>
       <p:sp>
         <p:nvSpPr>
-          <p:cNvPr id="2" name="TextBox 1"/>
-          <p:cNvSpPr txBox="1"/>
-          <p:nvPr/>
-        </p:nvSpPr>
-        <p:spPr>
-          <a:xfrm>
-            <a:off x="640080" y="457200"/>
-            <a:ext cx="10881360" cy="960120"/>
-          </a:xfrm>
-          <a:prstGeom prst="rect">
-            <a:avLst/>
-          </a:prstGeom>
-          <a:noFill/>
-        </p:spPr>
-        <p:txBody>
-          <a:bodyPr wrap="square" anchor="t" lIns="0" rIns="0" tIns="0" bIns="0">
-            <a:spAutoFit/>
-          </a:bodyPr>
-          <a:lstStyle/>
-          <a:p>
-            <a:r>
-              <a:rPr sz="2800" b="1" i="0">
-                <a:solidFill>
-                  <a:srgbClr val="2A2929"/>
-                </a:solidFill>
-                <a:latin typeface="Roboto"/>
-              </a:rPr>
-              <a:t>Action plans, collated feedback &amp; developing others</a:t>
-            </a:r>
-          </a:p>
-        </p:txBody>
-      </p:sp>
-      <p:sp>
-        <p:nvSpPr>
-          <p:cNvPr id="3" name="Rectangle 2"/>
+          <p:cNvPr id="2" name="Rectangle 1"/>
           <p:cNvSpPr/>
           <p:nvPr/>
         </p:nvSpPr>
         <p:spPr>
           <a:xfrm>
-            <a:off x="658368" y="1371600"/>
-            <a:ext cx="1463040" cy="50800"/>
+            <a:off x="0" y="0"/>
+            <a:ext cx="3931920" cy="6858000"/>
           </a:xfrm>
           <a:prstGeom prst="rect">
             <a:avLst/>
@@ -7306,14 +7637,48 @@
       </p:sp>
       <p:sp>
         <p:nvSpPr>
+          <p:cNvPr id="3" name="TextBox 2"/>
+          <p:cNvSpPr txBox="1"/>
+          <p:nvPr/>
+        </p:nvSpPr>
+        <p:spPr>
+          <a:xfrm>
+            <a:off x="365760" y="2103120"/>
+            <a:ext cx="3291840" cy="2194560"/>
+          </a:xfrm>
+          <a:prstGeom prst="rect">
+            <a:avLst/>
+          </a:prstGeom>
+          <a:noFill/>
+        </p:spPr>
+        <p:txBody>
+          <a:bodyPr wrap="square" anchor="t" lIns="0" rIns="0" tIns="0" bIns="0">
+            <a:spAutoFit/>
+          </a:bodyPr>
+          <a:lstStyle/>
+          <a:p>
+            <a:r>
+              <a:rPr sz="13000" b="1" i="0">
+                <a:solidFill>
+                  <a:srgbClr val="FFFFFF"/>
+                </a:solidFill>
+                <a:latin typeface="Roboto"/>
+              </a:rPr>
+              <a:t>04</a:t>
+            </a:r>
+          </a:p>
+        </p:txBody>
+      </p:sp>
+      <p:sp>
+        <p:nvSpPr>
           <p:cNvPr id="4" name="TextBox 3"/>
           <p:cNvSpPr txBox="1"/>
           <p:nvPr/>
         </p:nvSpPr>
         <p:spPr>
           <a:xfrm>
-            <a:off x="658368" y="1691640"/>
-            <a:ext cx="10881360" cy="4480560"/>
+            <a:off x="4480560" y="2468880"/>
+            <a:ext cx="7132320" cy="2194560"/>
           </a:xfrm>
           <a:prstGeom prst="rect">
             <a:avLst/>
@@ -7321,101 +7686,51 @@
           <a:noFill/>
         </p:spPr>
         <p:txBody>
-          <a:bodyPr wrap="square" anchor="ctr" lIns="0" rIns="0" tIns="0" bIns="0">
+          <a:bodyPr wrap="square" anchor="t" lIns="0" rIns="0" tIns="0" bIns="0">
             <a:spAutoFit/>
           </a:bodyPr>
           <a:lstStyle/>
           <a:p>
-            <a:pPr marL="0" indent="0">
-              <a:lnSpc>
-                <a:spcPct val="105000"/>
-              </a:lnSpc>
+            <a:r>
+              <a:rPr sz="1600" b="1" i="0">
+                <a:solidFill>
+                  <a:srgbClr val="004488"/>
+                </a:solidFill>
+                <a:latin typeface="Roboto"/>
+              </a:rPr>
+              <a:t>SECTION</a:t>
+            </a:r>
+          </a:p>
+          <a:p>
+            <a:pPr>
               <a:spcBef>
-                <a:spcPts val="0"/>
+                <a:spcPts val="600"/>
               </a:spcBef>
-              <a:spcAft>
+            </a:pPr>
+            <a:r>
+              <a:rPr sz="3800" b="1" i="0">
+                <a:solidFill>
+                  <a:srgbClr val="2A2929"/>
+                </a:solidFill>
+                <a:latin typeface="Roboto"/>
+              </a:rPr>
+              <a:t>Measure, feed back, develop</a:t>
+            </a:r>
+          </a:p>
+          <a:p>
+            <a:pPr>
+              <a:spcBef>
                 <a:spcPts val="1000"/>
-              </a:spcAft>
+              </a:spcBef>
             </a:pPr>
             <a:r>
-              <a:rPr sz="2400" b="1" i="0">
-                <a:solidFill>
-                  <a:srgbClr val="EDAB0C"/>
-                </a:solidFill>
-                <a:latin typeface="Roboto"/>
-              </a:rPr>
-              <a:t>■  </a:t>
-            </a:r>
-            <a:r>
-              <a:rPr sz="2400" b="0" i="0">
-                <a:solidFill>
-                  <a:srgbClr val="2A2929"/>
-                </a:solidFill>
-                <a:latin typeface="Roboto"/>
-              </a:rPr>
-              <a:t>Implement action plans to address individual and team training needs — who, what, by when (PC 4.4).</a:t>
-            </a:r>
-          </a:p>
-          <a:p>
-            <a:pPr marL="0" indent="0">
-              <a:lnSpc>
-                <a:spcPct val="105000"/>
-              </a:lnSpc>
-              <a:spcBef>
-                <a:spcPts val="0"/>
-              </a:spcBef>
-              <a:spcAft>
-                <a:spcPts val="1000"/>
-              </a:spcAft>
-            </a:pPr>
-            <a:r>
-              <a:rPr sz="2400" b="1" i="0">
-                <a:solidFill>
-                  <a:srgbClr val="EDAB0C"/>
-                </a:solidFill>
-                <a:latin typeface="Roboto"/>
-              </a:rPr>
-              <a:t>■  </a:t>
-            </a:r>
-            <a:r>
-              <a:rPr sz="2400" b="0" i="0">
-                <a:solidFill>
-                  <a:srgbClr val="2A2929"/>
-                </a:solidFill>
-                <a:latin typeface="Roboto"/>
-              </a:rPr>
-              <a:t>Collate feedback on individual and team performance so the picture is evidence, not impression (PE 3).</a:t>
-            </a:r>
-          </a:p>
-          <a:p>
-            <a:pPr marL="0" indent="0">
-              <a:lnSpc>
-                <a:spcPct val="105000"/>
-              </a:lnSpc>
-              <a:spcBef>
-                <a:spcPts val="0"/>
-              </a:spcBef>
-              <a:spcAft>
-                <a:spcPts val="1000"/>
-              </a:spcAft>
-            </a:pPr>
-            <a:r>
-              <a:rPr sz="2400" b="1" i="0">
-                <a:solidFill>
-                  <a:srgbClr val="EDAB0C"/>
-                </a:solidFill>
-                <a:latin typeface="Roboto"/>
-              </a:rPr>
-              <a:t>■  </a:t>
-            </a:r>
-            <a:r>
-              <a:rPr sz="2400" b="0" i="0">
-                <a:solidFill>
-                  <a:srgbClr val="2A2929"/>
-                </a:solidFill>
-                <a:latin typeface="Roboto"/>
-              </a:rPr>
-              <a:t>Identify and implement development opportunities for others — leadership grows the team, not just the build (PE 4).</a:t>
+              <a:rPr sz="2000" b="0" i="1">
+                <a:solidFill>
+                  <a:srgbClr val="484848"/>
+                </a:solidFill>
+                <a:latin typeface="Roboto Light"/>
+              </a:rPr>
+              <a:t>the plan is the yardstick</a:t>
             </a:r>
           </a:p>
         </p:txBody>
@@ -7537,765 +7852,7 @@
                 </a:solidFill>
                 <a:latin typeface="Roboto"/>
               </a:rPr>
-              <a:t>11</a:t>
-            </a:r>
-          </a:p>
-        </p:txBody>
-      </p:sp>
-    </p:spTree>
-  </p:cSld>
-  <p:clrMapOvr>
-    <a:masterClrMapping/>
-  </p:clrMapOvr>
-</p:sld>
-</file>
-
-<file path=ppt/slides/slide17.xml><?xml version="1.0" encoding="utf-8"?>
-<p:sld xmlns:a="http://schemas.openxmlformats.org/drawingml/2006/main" xmlns:p="http://schemas.openxmlformats.org/presentationml/2006/main" xmlns:r="http://schemas.openxmlformats.org/officeDocument/2006/relationships">
-  <p:cSld>
-    <p:bg>
-      <p:bgPr>
-        <a:solidFill>
-          <a:srgbClr val="F9F9F9"/>
-        </a:solidFill>
-        <a:effectLst/>
-      </p:bgPr>
-    </p:bg>
-    <p:spTree>
-      <p:nvGrpSpPr>
-        <p:cNvPr id="1" name=""/>
-        <p:cNvGrpSpPr/>
-        <p:nvPr/>
-      </p:nvGrpSpPr>
-      <p:grpSpPr/>
-      <p:sp>
-        <p:nvSpPr>
-          <p:cNvPr id="2" name="TextBox 1"/>
-          <p:cNvSpPr txBox="1"/>
-          <p:nvPr/>
-        </p:nvSpPr>
-        <p:spPr>
-          <a:xfrm>
-            <a:off x="640080" y="548640"/>
-            <a:ext cx="10881360" cy="1097280"/>
-          </a:xfrm>
-          <a:prstGeom prst="rect">
-            <a:avLst/>
-          </a:prstGeom>
-          <a:noFill/>
-        </p:spPr>
-        <p:txBody>
-          <a:bodyPr wrap="square" anchor="t" lIns="0" rIns="0" tIns="0" bIns="0">
-            <a:spAutoFit/>
-          </a:bodyPr>
-          <a:lstStyle/>
-          <a:p>
-            <a:r>
-              <a:rPr sz="3200" b="1" i="0">
-                <a:solidFill>
-                  <a:srgbClr val="2A2929"/>
-                </a:solidFill>
-                <a:latin typeface="Roboto"/>
-              </a:rPr>
-              <a:t>Key takeaways</a:t>
-            </a:r>
-          </a:p>
-          <a:p>
-            <a:pPr>
-              <a:spcBef>
-                <a:spcPts val="200"/>
-              </a:spcBef>
-            </a:pPr>
-            <a:r>
-              <a:rPr sz="1800" b="1" i="0">
-                <a:solidFill>
-                  <a:srgbClr val="004488"/>
-                </a:solidFill>
-                <a:latin typeface="Roboto"/>
-              </a:rPr>
-              <a:t>Topic 6 · Key takeaways</a:t>
-            </a:r>
-          </a:p>
-        </p:txBody>
-      </p:sp>
-      <p:sp>
-        <p:nvSpPr>
-          <p:cNvPr id="3" name="Rectangle 2"/>
-          <p:cNvSpPr/>
-          <p:nvPr/>
-        </p:nvSpPr>
-        <p:spPr>
-          <a:xfrm>
-            <a:off x="658368" y="1600200"/>
-            <a:ext cx="1463040" cy="50800"/>
-          </a:xfrm>
-          <a:prstGeom prst="rect">
-            <a:avLst/>
-          </a:prstGeom>
-          <a:solidFill>
-            <a:srgbClr val="004488"/>
-          </a:solidFill>
-          <a:ln>
-            <a:noFill/>
-          </a:ln>
-          <a:effectLst/>
-        </p:spPr>
-        <p:style>
-          <a:lnRef idx="1">
-            <a:schemeClr val="accent1"/>
-          </a:lnRef>
-          <a:fillRef idx="3">
-            <a:schemeClr val="accent1"/>
-          </a:fillRef>
-          <a:effectRef idx="2">
-            <a:schemeClr val="accent1"/>
-          </a:effectRef>
-          <a:fontRef idx="minor">
-            <a:schemeClr val="lt1"/>
-          </a:fontRef>
-        </p:style>
-        <p:txBody>
-          <a:bodyPr rtlCol="0" anchor="ctr"/>
-          <a:lstStyle/>
-          <a:p>
-            <a:pPr algn="ctr"/>
-          </a:p>
-        </p:txBody>
-      </p:sp>
-      <p:sp>
-        <p:nvSpPr>
-          <p:cNvPr id="4" name="Rectangle 3"/>
-          <p:cNvSpPr/>
-          <p:nvPr/>
-        </p:nvSpPr>
-        <p:spPr>
-          <a:xfrm>
-            <a:off x="640080" y="1965960"/>
-            <a:ext cx="10927080" cy="841248"/>
-          </a:xfrm>
-          <a:prstGeom prst="rect">
-            <a:avLst/>
-          </a:prstGeom>
-          <a:solidFill>
-            <a:srgbClr val="FFFFFF"/>
-          </a:solidFill>
-          <a:ln w="12700">
-            <a:solidFill>
-              <a:srgbClr val="CCCCCC"/>
-            </a:solidFill>
-          </a:ln>
-          <a:effectLst/>
-        </p:spPr>
-        <p:style>
-          <a:lnRef idx="1">
-            <a:schemeClr val="accent1"/>
-          </a:lnRef>
-          <a:fillRef idx="3">
-            <a:schemeClr val="accent1"/>
-          </a:fillRef>
-          <a:effectRef idx="2">
-            <a:schemeClr val="accent1"/>
-          </a:effectRef>
-          <a:fontRef idx="minor">
-            <a:schemeClr val="lt1"/>
-          </a:fontRef>
-        </p:style>
-        <p:txBody>
-          <a:bodyPr rtlCol="0" anchor="ctr"/>
-          <a:lstStyle/>
-          <a:p>
-            <a:pPr algn="ctr"/>
-          </a:p>
-        </p:txBody>
-      </p:sp>
-      <p:sp>
-        <p:nvSpPr>
-          <p:cNvPr id="5" name="Rectangle 4"/>
-          <p:cNvSpPr/>
-          <p:nvPr/>
-        </p:nvSpPr>
-        <p:spPr>
-          <a:xfrm>
-            <a:off x="640080" y="1965960"/>
-            <a:ext cx="109728" cy="841248"/>
-          </a:xfrm>
-          <a:prstGeom prst="rect">
-            <a:avLst/>
-          </a:prstGeom>
-          <a:solidFill>
-            <a:srgbClr val="004488"/>
-          </a:solidFill>
-          <a:ln>
-            <a:noFill/>
-          </a:ln>
-          <a:effectLst/>
-        </p:spPr>
-        <p:style>
-          <a:lnRef idx="1">
-            <a:schemeClr val="accent1"/>
-          </a:lnRef>
-          <a:fillRef idx="3">
-            <a:schemeClr val="accent1"/>
-          </a:fillRef>
-          <a:effectRef idx="2">
-            <a:schemeClr val="accent1"/>
-          </a:effectRef>
-          <a:fontRef idx="minor">
-            <a:schemeClr val="lt1"/>
-          </a:fontRef>
-        </p:style>
-        <p:txBody>
-          <a:bodyPr rtlCol="0" anchor="ctr"/>
-          <a:lstStyle/>
-          <a:p>
-            <a:pPr algn="ctr"/>
-          </a:p>
-        </p:txBody>
-      </p:sp>
-      <p:sp>
-        <p:nvSpPr>
-          <p:cNvPr id="6" name="TextBox 5"/>
-          <p:cNvSpPr txBox="1"/>
-          <p:nvPr/>
-        </p:nvSpPr>
-        <p:spPr>
-          <a:xfrm>
-            <a:off x="960120" y="1965960"/>
-            <a:ext cx="10424160" cy="841248"/>
-          </a:xfrm>
-          <a:prstGeom prst="rect">
-            <a:avLst/>
-          </a:prstGeom>
-          <a:noFill/>
-        </p:spPr>
-        <p:txBody>
-          <a:bodyPr wrap="square" anchor="ctr" lIns="0" rIns="0" tIns="0" bIns="0">
-            <a:spAutoFit/>
-          </a:bodyPr>
-          <a:lstStyle/>
-          <a:p>
-            <a:pPr>
-              <a:lnSpc>
-                <a:spcPct val="100000"/>
-              </a:lnSpc>
-            </a:pPr>
-            <a:r>
-              <a:rPr sz="1700" b="0" i="0">
-                <a:solidFill>
-                  <a:srgbClr val="2A2929"/>
-                </a:solidFill>
-                <a:latin typeface="Roboto"/>
-              </a:rPr>
-              <a:t>You lead the build; the divided-IaC write is the vehicle, the leadership is the assessed evidence (AT2).</a:t>
-            </a:r>
-          </a:p>
-        </p:txBody>
-      </p:sp>
-      <p:sp>
-        <p:nvSpPr>
-          <p:cNvPr id="7" name="Rectangle 6"/>
-          <p:cNvSpPr/>
-          <p:nvPr/>
-        </p:nvSpPr>
-        <p:spPr>
-          <a:xfrm>
-            <a:off x="640080" y="2916936"/>
-            <a:ext cx="10927080" cy="841248"/>
-          </a:xfrm>
-          <a:prstGeom prst="rect">
-            <a:avLst/>
-          </a:prstGeom>
-          <a:solidFill>
-            <a:srgbClr val="FFFFFF"/>
-          </a:solidFill>
-          <a:ln w="12700">
-            <a:solidFill>
-              <a:srgbClr val="CCCCCC"/>
-            </a:solidFill>
-          </a:ln>
-          <a:effectLst/>
-        </p:spPr>
-        <p:style>
-          <a:lnRef idx="1">
-            <a:schemeClr val="accent1"/>
-          </a:lnRef>
-          <a:fillRef idx="3">
-            <a:schemeClr val="accent1"/>
-          </a:fillRef>
-          <a:effectRef idx="2">
-            <a:schemeClr val="accent1"/>
-          </a:effectRef>
-          <a:fontRef idx="minor">
-            <a:schemeClr val="lt1"/>
-          </a:fontRef>
-        </p:style>
-        <p:txBody>
-          <a:bodyPr rtlCol="0" anchor="ctr"/>
-          <a:lstStyle/>
-          <a:p>
-            <a:pPr algn="ctr"/>
-          </a:p>
-        </p:txBody>
-      </p:sp>
-      <p:sp>
-        <p:nvSpPr>
-          <p:cNvPr id="8" name="Rectangle 7"/>
-          <p:cNvSpPr/>
-          <p:nvPr/>
-        </p:nvSpPr>
-        <p:spPr>
-          <a:xfrm>
-            <a:off x="640080" y="2916936"/>
-            <a:ext cx="109728" cy="841248"/>
-          </a:xfrm>
-          <a:prstGeom prst="rect">
-            <a:avLst/>
-          </a:prstGeom>
-          <a:solidFill>
-            <a:srgbClr val="004488"/>
-          </a:solidFill>
-          <a:ln>
-            <a:noFill/>
-          </a:ln>
-          <a:effectLst/>
-        </p:spPr>
-        <p:style>
-          <a:lnRef idx="1">
-            <a:schemeClr val="accent1"/>
-          </a:lnRef>
-          <a:fillRef idx="3">
-            <a:schemeClr val="accent1"/>
-          </a:fillRef>
-          <a:effectRef idx="2">
-            <a:schemeClr val="accent1"/>
-          </a:effectRef>
-          <a:fontRef idx="minor">
-            <a:schemeClr val="lt1"/>
-          </a:fontRef>
-        </p:style>
-        <p:txBody>
-          <a:bodyPr rtlCol="0" anchor="ctr"/>
-          <a:lstStyle/>
-          <a:p>
-            <a:pPr algn="ctr"/>
-          </a:p>
-        </p:txBody>
-      </p:sp>
-      <p:sp>
-        <p:nvSpPr>
-          <p:cNvPr id="9" name="TextBox 8"/>
-          <p:cNvSpPr txBox="1"/>
-          <p:nvPr/>
-        </p:nvSpPr>
-        <p:spPr>
-          <a:xfrm>
-            <a:off x="960120" y="2916936"/>
-            <a:ext cx="10424160" cy="841248"/>
-          </a:xfrm>
-          <a:prstGeom prst="rect">
-            <a:avLst/>
-          </a:prstGeom>
-          <a:noFill/>
-        </p:spPr>
-        <p:txBody>
-          <a:bodyPr wrap="square" anchor="ctr" lIns="0" rIns="0" tIns="0" bIns="0">
-            <a:spAutoFit/>
-          </a:bodyPr>
-          <a:lstStyle/>
-          <a:p>
-            <a:pPr>
-              <a:lnSpc>
-                <a:spcPct val="100000"/>
-              </a:lnSpc>
-            </a:pPr>
-            <a:r>
-              <a:rPr sz="1700" b="0" i="0">
-                <a:solidFill>
-                  <a:srgbClr val="2A2929"/>
-                </a:solidFill>
-                <a:latin typeface="Roboto"/>
-              </a:rPr>
-              <a:t>Coach to enhance culture and support individuals toward the common goal; role-model professional behaviours.</a:t>
-            </a:r>
-          </a:p>
-        </p:txBody>
-      </p:sp>
-      <p:sp>
-        <p:nvSpPr>
-          <p:cNvPr id="10" name="Rectangle 9"/>
-          <p:cNvSpPr/>
-          <p:nvPr/>
-        </p:nvSpPr>
-        <p:spPr>
-          <a:xfrm>
-            <a:off x="640080" y="3867912"/>
-            <a:ext cx="10927080" cy="841248"/>
-          </a:xfrm>
-          <a:prstGeom prst="rect">
-            <a:avLst/>
-          </a:prstGeom>
-          <a:solidFill>
-            <a:srgbClr val="FFFFFF"/>
-          </a:solidFill>
-          <a:ln w="12700">
-            <a:solidFill>
-              <a:srgbClr val="CCCCCC"/>
-            </a:solidFill>
-          </a:ln>
-          <a:effectLst/>
-        </p:spPr>
-        <p:style>
-          <a:lnRef idx="1">
-            <a:schemeClr val="accent1"/>
-          </a:lnRef>
-          <a:fillRef idx="3">
-            <a:schemeClr val="accent1"/>
-          </a:fillRef>
-          <a:effectRef idx="2">
-            <a:schemeClr val="accent1"/>
-          </a:effectRef>
-          <a:fontRef idx="minor">
-            <a:schemeClr val="lt1"/>
-          </a:fontRef>
-        </p:style>
-        <p:txBody>
-          <a:bodyPr rtlCol="0" anchor="ctr"/>
-          <a:lstStyle/>
-          <a:p>
-            <a:pPr algn="ctr"/>
-          </a:p>
-        </p:txBody>
-      </p:sp>
-      <p:sp>
-        <p:nvSpPr>
-          <p:cNvPr id="11" name="Rectangle 10"/>
-          <p:cNvSpPr/>
-          <p:nvPr/>
-        </p:nvSpPr>
-        <p:spPr>
-          <a:xfrm>
-            <a:off x="640080" y="3867912"/>
-            <a:ext cx="109728" cy="841248"/>
-          </a:xfrm>
-          <a:prstGeom prst="rect">
-            <a:avLst/>
-          </a:prstGeom>
-          <a:solidFill>
-            <a:srgbClr val="004488"/>
-          </a:solidFill>
-          <a:ln>
-            <a:noFill/>
-          </a:ln>
-          <a:effectLst/>
-        </p:spPr>
-        <p:style>
-          <a:lnRef idx="1">
-            <a:schemeClr val="accent1"/>
-          </a:lnRef>
-          <a:fillRef idx="3">
-            <a:schemeClr val="accent1"/>
-          </a:fillRef>
-          <a:effectRef idx="2">
-            <a:schemeClr val="accent1"/>
-          </a:effectRef>
-          <a:fontRef idx="minor">
-            <a:schemeClr val="lt1"/>
-          </a:fontRef>
-        </p:style>
-        <p:txBody>
-          <a:bodyPr rtlCol="0" anchor="ctr"/>
-          <a:lstStyle/>
-          <a:p>
-            <a:pPr algn="ctr"/>
-          </a:p>
-        </p:txBody>
-      </p:sp>
-      <p:sp>
-        <p:nvSpPr>
-          <p:cNvPr id="12" name="TextBox 11"/>
-          <p:cNvSpPr txBox="1"/>
-          <p:nvPr/>
-        </p:nvSpPr>
-        <p:spPr>
-          <a:xfrm>
-            <a:off x="960120" y="3867912"/>
-            <a:ext cx="10424160" cy="841248"/>
-          </a:xfrm>
-          <a:prstGeom prst="rect">
-            <a:avLst/>
-          </a:prstGeom>
-          <a:noFill/>
-        </p:spPr>
-        <p:txBody>
-          <a:bodyPr wrap="square" anchor="ctr" lIns="0" rIns="0" tIns="0" bIns="0">
-            <a:spAutoFit/>
-          </a:bodyPr>
-          <a:lstStyle/>
-          <a:p>
-            <a:pPr>
-              <a:lnSpc>
-                <a:spcPct val="100000"/>
-              </a:lnSpc>
-            </a:pPr>
-            <a:r>
-              <a:rPr sz="1700" b="0" i="0">
-                <a:solidFill>
-                  <a:srgbClr val="2A2929"/>
-                </a:solidFill>
-                <a:latin typeface="Roboto"/>
-              </a:rPr>
-              <a:t>Facilitate issue resolution and problem-solving; manage conflict and the teamwork risks.</a:t>
-            </a:r>
-          </a:p>
-        </p:txBody>
-      </p:sp>
-      <p:sp>
-        <p:nvSpPr>
-          <p:cNvPr id="13" name="Rectangle 12"/>
-          <p:cNvSpPr/>
-          <p:nvPr/>
-        </p:nvSpPr>
-        <p:spPr>
-          <a:xfrm>
-            <a:off x="640080" y="4818888"/>
-            <a:ext cx="10927080" cy="841248"/>
-          </a:xfrm>
-          <a:prstGeom prst="rect">
-            <a:avLst/>
-          </a:prstGeom>
-          <a:solidFill>
-            <a:srgbClr val="FFFFFF"/>
-          </a:solidFill>
-          <a:ln w="12700">
-            <a:solidFill>
-              <a:srgbClr val="CCCCCC"/>
-            </a:solidFill>
-          </a:ln>
-          <a:effectLst/>
-        </p:spPr>
-        <p:style>
-          <a:lnRef idx="1">
-            <a:schemeClr val="accent1"/>
-          </a:lnRef>
-          <a:fillRef idx="3">
-            <a:schemeClr val="accent1"/>
-          </a:fillRef>
-          <a:effectRef idx="2">
-            <a:schemeClr val="accent1"/>
-          </a:effectRef>
-          <a:fontRef idx="minor">
-            <a:schemeClr val="lt1"/>
-          </a:fontRef>
-        </p:style>
-        <p:txBody>
-          <a:bodyPr rtlCol="0" anchor="ctr"/>
-          <a:lstStyle/>
-          <a:p>
-            <a:pPr algn="ctr"/>
-          </a:p>
-        </p:txBody>
-      </p:sp>
-      <p:sp>
-        <p:nvSpPr>
-          <p:cNvPr id="14" name="Rectangle 13"/>
-          <p:cNvSpPr/>
-          <p:nvPr/>
-        </p:nvSpPr>
-        <p:spPr>
-          <a:xfrm>
-            <a:off x="640080" y="4818888"/>
-            <a:ext cx="109728" cy="841248"/>
-          </a:xfrm>
-          <a:prstGeom prst="rect">
-            <a:avLst/>
-          </a:prstGeom>
-          <a:solidFill>
-            <a:srgbClr val="004488"/>
-          </a:solidFill>
-          <a:ln>
-            <a:noFill/>
-          </a:ln>
-          <a:effectLst/>
-        </p:spPr>
-        <p:style>
-          <a:lnRef idx="1">
-            <a:schemeClr val="accent1"/>
-          </a:lnRef>
-          <a:fillRef idx="3">
-            <a:schemeClr val="accent1"/>
-          </a:fillRef>
-          <a:effectRef idx="2">
-            <a:schemeClr val="accent1"/>
-          </a:effectRef>
-          <a:fontRef idx="minor">
-            <a:schemeClr val="lt1"/>
-          </a:fontRef>
-        </p:style>
-        <p:txBody>
-          <a:bodyPr rtlCol="0" anchor="ctr"/>
-          <a:lstStyle/>
-          <a:p>
-            <a:pPr algn="ctr"/>
-          </a:p>
-        </p:txBody>
-      </p:sp>
-      <p:sp>
-        <p:nvSpPr>
-          <p:cNvPr id="15" name="TextBox 14"/>
-          <p:cNvSpPr txBox="1"/>
-          <p:nvPr/>
-        </p:nvSpPr>
-        <p:spPr>
-          <a:xfrm>
-            <a:off x="960120" y="4818888"/>
-            <a:ext cx="10424160" cy="841248"/>
-          </a:xfrm>
-          <a:prstGeom prst="rect">
-            <a:avLst/>
-          </a:prstGeom>
-          <a:noFill/>
-        </p:spPr>
-        <p:txBody>
-          <a:bodyPr wrap="square" anchor="ctr" lIns="0" rIns="0" tIns="0" bIns="0">
-            <a:spAutoFit/>
-          </a:bodyPr>
-          <a:lstStyle/>
-          <a:p>
-            <a:pPr>
-              <a:lnSpc>
-                <a:spcPct val="100000"/>
-              </a:lnSpc>
-            </a:pPr>
-            <a:r>
-              <a:rPr sz="1700" b="0" i="0">
-                <a:solidFill>
-                  <a:srgbClr val="2A2929"/>
-                </a:solidFill>
-                <a:latin typeface="Roboto"/>
-              </a:rPr>
-              <a:t>Measure against the work plans, give timely constructive feedback, and turn gaps into development action plans.</a:t>
-            </a:r>
-          </a:p>
-        </p:txBody>
-      </p:sp>
-      <p:sp>
-        <p:nvSpPr>
-          <p:cNvPr id="16" name="Rectangle 15"/>
-          <p:cNvSpPr/>
-          <p:nvPr/>
-        </p:nvSpPr>
-        <p:spPr>
-          <a:xfrm>
-            <a:off x="0" y="6565392"/>
-            <a:ext cx="12191695" cy="38100"/>
-          </a:xfrm>
-          <a:prstGeom prst="rect">
-            <a:avLst/>
-          </a:prstGeom>
-          <a:solidFill>
-            <a:srgbClr val="004488"/>
-          </a:solidFill>
-          <a:ln>
-            <a:noFill/>
-          </a:ln>
-          <a:effectLst/>
-        </p:spPr>
-        <p:style>
-          <a:lnRef idx="1">
-            <a:schemeClr val="accent1"/>
-          </a:lnRef>
-          <a:fillRef idx="3">
-            <a:schemeClr val="accent1"/>
-          </a:fillRef>
-          <a:effectRef idx="2">
-            <a:schemeClr val="accent1"/>
-          </a:effectRef>
-          <a:fontRef idx="minor">
-            <a:schemeClr val="lt1"/>
-          </a:fontRef>
-        </p:style>
-        <p:txBody>
-          <a:bodyPr rtlCol="0" anchor="ctr"/>
-          <a:lstStyle/>
-          <a:p>
-            <a:pPr algn="ctr"/>
-          </a:p>
-        </p:txBody>
-      </p:sp>
-      <p:sp>
-        <p:nvSpPr>
-          <p:cNvPr id="17" name="TextBox 16"/>
-          <p:cNvSpPr txBox="1"/>
-          <p:nvPr/>
-        </p:nvSpPr>
-        <p:spPr>
-          <a:xfrm>
-            <a:off x="502920" y="6400800"/>
-            <a:ext cx="5486400" cy="320040"/>
-          </a:xfrm>
-          <a:prstGeom prst="rect">
-            <a:avLst/>
-          </a:prstGeom>
-          <a:noFill/>
-        </p:spPr>
-        <p:txBody>
-          <a:bodyPr wrap="square" anchor="t" lIns="0" rIns="0" tIns="0" bIns="0">
-            <a:spAutoFit/>
-          </a:bodyPr>
-          <a:lstStyle/>
-          <a:p>
-            <a:r>
-              <a:rPr sz="1100" b="1" i="0">
-                <a:solidFill>
-                  <a:srgbClr val="2A2929"/>
-                </a:solidFill>
-                <a:latin typeface="Roboto"/>
-              </a:rPr>
-              <a:t>Kangan </a:t>
-            </a:r>
-            <a:r>
-              <a:rPr sz="1100" b="1" i="0">
-                <a:solidFill>
-                  <a:srgbClr val="D68E10"/>
-                </a:solidFill>
-                <a:latin typeface="Roboto"/>
-              </a:rPr>
-              <a:t>Institute</a:t>
-            </a:r>
-          </a:p>
-        </p:txBody>
-      </p:sp>
-      <p:sp>
-        <p:nvSpPr>
-          <p:cNvPr id="18" name="TextBox 17"/>
-          <p:cNvSpPr txBox="1"/>
-          <p:nvPr/>
-        </p:nvSpPr>
-        <p:spPr>
-          <a:xfrm>
-            <a:off x="10515600" y="6400800"/>
-            <a:ext cx="1188720" cy="320040"/>
-          </a:xfrm>
-          <a:prstGeom prst="rect">
-            <a:avLst/>
-          </a:prstGeom>
-          <a:noFill/>
-        </p:spPr>
-        <p:txBody>
-          <a:bodyPr wrap="square" anchor="t" lIns="0" rIns="0" tIns="0" bIns="0">
-            <a:spAutoFit/>
-          </a:bodyPr>
-          <a:lstStyle/>
-          <a:p>
-            <a:pPr algn="r"/>
-            <a:r>
-              <a:rPr sz="1100" b="0" i="0">
-                <a:solidFill>
-                  <a:srgbClr val="7A7A7A"/>
-                </a:solidFill>
-                <a:latin typeface="Roboto"/>
-              </a:rPr>
-              <a:t>12</a:t>
+              <a:t/>
             </a:r>
           </a:p>
         </p:txBody>
@@ -8314,7 +7871,7 @@
     <p:bg>
       <p:bgPr>
         <a:solidFill>
-          <a:srgbClr val="2A2929"/>
+          <a:srgbClr val="FFFFFF"/>
         </a:solidFill>
         <a:effectLst/>
       </p:bgPr>
@@ -8328,20 +7885,54 @@
       <p:grpSpPr/>
       <p:sp>
         <p:nvSpPr>
-          <p:cNvPr id="2" name="Rectangle 1"/>
+          <p:cNvPr id="2" name="TextBox 1"/>
+          <p:cNvSpPr txBox="1"/>
+          <p:nvPr/>
+        </p:nvSpPr>
+        <p:spPr>
+          <a:xfrm>
+            <a:off x="640080" y="457200"/>
+            <a:ext cx="10881360" cy="960120"/>
+          </a:xfrm>
+          <a:prstGeom prst="rect">
+            <a:avLst/>
+          </a:prstGeom>
+          <a:noFill/>
+        </p:spPr>
+        <p:txBody>
+          <a:bodyPr wrap="square" anchor="t" lIns="0" rIns="0" tIns="0" bIns="0">
+            <a:spAutoFit/>
+          </a:bodyPr>
+          <a:lstStyle/>
+          <a:p>
+            <a:r>
+              <a:rPr sz="2800" b="1" i="0">
+                <a:solidFill>
+                  <a:srgbClr val="2A2929"/>
+                </a:solidFill>
+                <a:latin typeface="Roboto"/>
+              </a:rPr>
+              <a:t>Measure the team against the plan</a:t>
+            </a:r>
+          </a:p>
+        </p:txBody>
+      </p:sp>
+      <p:sp>
+        <p:nvSpPr>
+          <p:cNvPr id="3" name="Rectangle 2"/>
           <p:cNvSpPr/>
           <p:nvPr/>
         </p:nvSpPr>
         <p:spPr>
           <a:xfrm>
-            <a:off x="0" y="0"/>
-            <a:ext cx="411480" cy="6858000"/>
+            <a:off x="658368" y="1371600"/>
+            <a:ext cx="1463040" cy="50800"/>
           </a:xfrm>
           <a:prstGeom prst="rect">
             <a:avLst/>
           </a:prstGeom>
           <a:solidFill>
-            <a:srgbClr val="EDAB0C"/>
+            <a:srgbClr val="004488"/>
           </a:solidFill>
           <a:ln>
             <a:noFill/>
@@ -8372,14 +7963,14 @@
       </p:sp>
       <p:sp>
         <p:nvSpPr>
-          <p:cNvPr id="3" name="TextBox 2"/>
+          <p:cNvPr id="4" name="TextBox 3"/>
           <p:cNvSpPr txBox="1"/>
           <p:nvPr/>
         </p:nvSpPr>
         <p:spPr>
           <a:xfrm>
-            <a:off x="914400" y="1463040"/>
-            <a:ext cx="10515600" cy="4023360"/>
+            <a:off x="658368" y="1691640"/>
+            <a:ext cx="10881360" cy="4480560"/>
           </a:xfrm>
           <a:prstGeom prst="rect">
             <a:avLst/>
@@ -8387,57 +7978,565 @@
           <a:noFill/>
         </p:spPr>
         <p:txBody>
-          <a:bodyPr wrap="square" anchor="t" lIns="0" rIns="0" tIns="0" bIns="0">
+          <a:bodyPr wrap="square" anchor="ctr" lIns="0" rIns="0" tIns="0" bIns="0">
             <a:spAutoFit/>
           </a:bodyPr>
           <a:lstStyle/>
           <a:p>
-            <a:r>
-              <a:rPr sz="4000" b="1" i="0">
-                <a:solidFill>
-                  <a:srgbClr val="FFFFFF"/>
-                </a:solidFill>
-                <a:latin typeface="Roboto"/>
-              </a:rPr>
-              <a:t>Next: Topic 7 — the individual deploy</a:t>
-            </a:r>
-          </a:p>
-          <a:p>
-            <a:pPr>
+            <a:pPr marL="0" indent="0">
               <a:lnSpc>
                 <a:spcPct val="105000"/>
               </a:lnSpc>
               <a:spcBef>
-                <a:spcPts val="1200"/>
+                <a:spcPts val="0"/>
               </a:spcBef>
+              <a:spcAft>
+                <a:spcPts val="1000"/>
+              </a:spcAft>
             </a:pPr>
             <a:r>
-              <a:rPr sz="1900" b="0" i="0">
-                <a:solidFill>
-                  <a:srgbClr val="E8E8E8"/>
-                </a:solidFill>
-                <a:latin typeface="Roboto Light"/>
-              </a:rPr>
-              <a:t>You can now lead, support and monitor the team through the build.</a:t>
-            </a:r>
-          </a:p>
-          <a:p>
-            <a:pPr>
+              <a:rPr sz="2400" b="1" i="0">
+                <a:solidFill>
+                  <a:srgbClr val="EDAB0C"/>
+                </a:solidFill>
+                <a:latin typeface="Roboto"/>
+              </a:rPr>
+              <a:t>■  </a:t>
+            </a:r>
+            <a:r>
+              <a:rPr sz="2400" b="0" i="0">
+                <a:solidFill>
+                  <a:srgbClr val="2A2929"/>
+                </a:solidFill>
+                <a:latin typeface="Roboto"/>
+              </a:rPr>
+              <a:t>The performance plans from the set-up are the yardstick: what was due, what was delivered, at what quality.</a:t>
+            </a:r>
+          </a:p>
+          <a:p>
+            <a:pPr marL="0" indent="0">
               <a:lnSpc>
                 <a:spcPct val="105000"/>
               </a:lnSpc>
               <a:spcBef>
-                <a:spcPts val="1200"/>
+                <a:spcPts val="0"/>
               </a:spcBef>
+              <a:spcAft>
+                <a:spcPts val="1000"/>
+              </a:spcAft>
             </a:pPr>
             <a:r>
-              <a:rPr sz="1900" b="0" i="0">
-                <a:solidFill>
-                  <a:srgbClr val="E8E8E8"/>
-                </a:solidFill>
-                <a:latin typeface="Roboto Light"/>
-              </a:rPr>
-              <a:t>Next (AT3, Topics 7–8): each member deploys, tests and documents their built infrastructure — the 504-assessed individual work.</a:t>
+              <a:rPr sz="2400" b="1" i="0">
+                <a:solidFill>
+                  <a:srgbClr val="EDAB0C"/>
+                </a:solidFill>
+                <a:latin typeface="Roboto"/>
+              </a:rPr>
+              <a:t>■  </a:t>
+            </a:r>
+            <a:r>
+              <a:rPr sz="2400" b="0" i="0">
+                <a:solidFill>
+                  <a:srgbClr val="2A2929"/>
+                </a:solidFill>
+                <a:latin typeface="Roboto"/>
+              </a:rPr>
+              <a:t>Measure the work, not the person — objective, evidence-based, collated so the picture is evidence rather than impression.</a:t>
+            </a:r>
+          </a:p>
+          <a:p>
+            <a:pPr marL="0" indent="0">
+              <a:lnSpc>
+                <a:spcPct val="105000"/>
+              </a:lnSpc>
+              <a:spcBef>
+                <a:spcPts val="0"/>
+              </a:spcBef>
+              <a:spcAft>
+                <a:spcPts val="1000"/>
+              </a:spcAft>
+            </a:pPr>
+            <a:r>
+              <a:rPr sz="2400" b="1" i="0">
+                <a:solidFill>
+                  <a:srgbClr val="EDAB0C"/>
+                </a:solidFill>
+                <a:latin typeface="Roboto"/>
+              </a:rPr>
+              <a:t>■  </a:t>
+            </a:r>
+            <a:r>
+              <a:rPr sz="2400" b="0" i="0">
+                <a:solidFill>
+                  <a:srgbClr val="2A2929"/>
+                </a:solidFill>
+                <a:latin typeface="Roboto"/>
+              </a:rPr>
+              <a:t>Measurement is the input to feedback; without it feedback is opinion.</a:t>
+            </a:r>
+          </a:p>
+        </p:txBody>
+      </p:sp>
+      <p:sp>
+        <p:nvSpPr>
+          <p:cNvPr id="5" name="Rectangle 4"/>
+          <p:cNvSpPr/>
+          <p:nvPr/>
+        </p:nvSpPr>
+        <p:spPr>
+          <a:xfrm>
+            <a:off x="0" y="6565392"/>
+            <a:ext cx="12191695" cy="38100"/>
+          </a:xfrm>
+          <a:prstGeom prst="rect">
+            <a:avLst/>
+          </a:prstGeom>
+          <a:solidFill>
+            <a:srgbClr val="004488"/>
+          </a:solidFill>
+          <a:ln>
+            <a:noFill/>
+          </a:ln>
+          <a:effectLst/>
+        </p:spPr>
+        <p:style>
+          <a:lnRef idx="1">
+            <a:schemeClr val="accent1"/>
+          </a:lnRef>
+          <a:fillRef idx="3">
+            <a:schemeClr val="accent1"/>
+          </a:fillRef>
+          <a:effectRef idx="2">
+            <a:schemeClr val="accent1"/>
+          </a:effectRef>
+          <a:fontRef idx="minor">
+            <a:schemeClr val="lt1"/>
+          </a:fontRef>
+        </p:style>
+        <p:txBody>
+          <a:bodyPr rtlCol="0" anchor="ctr"/>
+          <a:lstStyle/>
+          <a:p>
+            <a:pPr algn="ctr"/>
+          </a:p>
+        </p:txBody>
+      </p:sp>
+      <p:sp>
+        <p:nvSpPr>
+          <p:cNvPr id="6" name="TextBox 5"/>
+          <p:cNvSpPr txBox="1"/>
+          <p:nvPr/>
+        </p:nvSpPr>
+        <p:spPr>
+          <a:xfrm>
+            <a:off x="502920" y="6400800"/>
+            <a:ext cx="5486400" cy="320040"/>
+          </a:xfrm>
+          <a:prstGeom prst="rect">
+            <a:avLst/>
+          </a:prstGeom>
+          <a:noFill/>
+        </p:spPr>
+        <p:txBody>
+          <a:bodyPr wrap="square" anchor="t" lIns="0" rIns="0" tIns="0" bIns="0">
+            <a:spAutoFit/>
+          </a:bodyPr>
+          <a:lstStyle/>
+          <a:p>
+            <a:r>
+              <a:rPr sz="1100" b="1" i="0">
+                <a:solidFill>
+                  <a:srgbClr val="2A2929"/>
+                </a:solidFill>
+                <a:latin typeface="Roboto"/>
+              </a:rPr>
+              <a:t>Kangan </a:t>
+            </a:r>
+            <a:r>
+              <a:rPr sz="1100" b="1" i="0">
+                <a:solidFill>
+                  <a:srgbClr val="D68E10"/>
+                </a:solidFill>
+                <a:latin typeface="Roboto"/>
+              </a:rPr>
+              <a:t>Institute</a:t>
+            </a:r>
+          </a:p>
+        </p:txBody>
+      </p:sp>
+      <p:sp>
+        <p:nvSpPr>
+          <p:cNvPr id="7" name="TextBox 6"/>
+          <p:cNvSpPr txBox="1"/>
+          <p:nvPr/>
+        </p:nvSpPr>
+        <p:spPr>
+          <a:xfrm>
+            <a:off x="10515600" y="6400800"/>
+            <a:ext cx="1188720" cy="320040"/>
+          </a:xfrm>
+          <a:prstGeom prst="rect">
+            <a:avLst/>
+          </a:prstGeom>
+          <a:noFill/>
+        </p:spPr>
+        <p:txBody>
+          <a:bodyPr wrap="square" anchor="t" lIns="0" rIns="0" tIns="0" bIns="0">
+            <a:spAutoFit/>
+          </a:bodyPr>
+          <a:lstStyle/>
+          <a:p>
+            <a:pPr algn="r"/>
+            <a:r>
+              <a:rPr sz="1100" b="0" i="0">
+                <a:solidFill>
+                  <a:srgbClr val="7A7A7A"/>
+                </a:solidFill>
+                <a:latin typeface="Roboto"/>
+              </a:rPr>
+              <a:t>13</a:t>
+            </a:r>
+          </a:p>
+        </p:txBody>
+      </p:sp>
+    </p:spTree>
+  </p:cSld>
+  <p:clrMapOvr>
+    <a:masterClrMapping/>
+  </p:clrMapOvr>
+</p:sld>
+</file>
+
+<file path=ppt/slides/slide19.xml><?xml version="1.0" encoding="utf-8"?>
+<p:sld xmlns:a="http://schemas.openxmlformats.org/drawingml/2006/main" xmlns:p="http://schemas.openxmlformats.org/presentationml/2006/main" xmlns:r="http://schemas.openxmlformats.org/officeDocument/2006/relationships">
+  <p:cSld>
+    <p:bg>
+      <p:bgPr>
+        <a:solidFill>
+          <a:srgbClr val="FFFFFF"/>
+        </a:solidFill>
+        <a:effectLst/>
+      </p:bgPr>
+    </p:bg>
+    <p:spTree>
+      <p:nvGrpSpPr>
+        <p:cNvPr id="1" name=""/>
+        <p:cNvGrpSpPr/>
+        <p:nvPr/>
+      </p:nvGrpSpPr>
+      <p:grpSpPr/>
+      <p:sp>
+        <p:nvSpPr>
+          <p:cNvPr id="2" name="TextBox 1"/>
+          <p:cNvSpPr txBox="1"/>
+          <p:nvPr/>
+        </p:nvSpPr>
+        <p:spPr>
+          <a:xfrm>
+            <a:off x="640080" y="457200"/>
+            <a:ext cx="10881360" cy="960120"/>
+          </a:xfrm>
+          <a:prstGeom prst="rect">
+            <a:avLst/>
+          </a:prstGeom>
+          <a:noFill/>
+        </p:spPr>
+        <p:txBody>
+          <a:bodyPr wrap="square" anchor="t" lIns="0" rIns="0" tIns="0" bIns="0">
+            <a:spAutoFit/>
+          </a:bodyPr>
+          <a:lstStyle/>
+          <a:p>
+            <a:r>
+              <a:rPr sz="2800" b="1" i="0">
+                <a:solidFill>
+                  <a:srgbClr val="2A2929"/>
+                </a:solidFill>
+                <a:latin typeface="Roboto"/>
+              </a:rPr>
+              <a:t>Feedback, and development</a:t>
+            </a:r>
+          </a:p>
+        </p:txBody>
+      </p:sp>
+      <p:sp>
+        <p:nvSpPr>
+          <p:cNvPr id="3" name="Rectangle 2"/>
+          <p:cNvSpPr/>
+          <p:nvPr/>
+        </p:nvSpPr>
+        <p:spPr>
+          <a:xfrm>
+            <a:off x="658368" y="1371600"/>
+            <a:ext cx="1463040" cy="50800"/>
+          </a:xfrm>
+          <a:prstGeom prst="rect">
+            <a:avLst/>
+          </a:prstGeom>
+          <a:solidFill>
+            <a:srgbClr val="004488"/>
+          </a:solidFill>
+          <a:ln>
+            <a:noFill/>
+          </a:ln>
+          <a:effectLst/>
+        </p:spPr>
+        <p:style>
+          <a:lnRef idx="1">
+            <a:schemeClr val="accent1"/>
+          </a:lnRef>
+          <a:fillRef idx="3">
+            <a:schemeClr val="accent1"/>
+          </a:fillRef>
+          <a:effectRef idx="2">
+            <a:schemeClr val="accent1"/>
+          </a:effectRef>
+          <a:fontRef idx="minor">
+            <a:schemeClr val="lt1"/>
+          </a:fontRef>
+        </p:style>
+        <p:txBody>
+          <a:bodyPr rtlCol="0" anchor="ctr"/>
+          <a:lstStyle/>
+          <a:p>
+            <a:pPr algn="ctr"/>
+          </a:p>
+        </p:txBody>
+      </p:sp>
+      <p:sp>
+        <p:nvSpPr>
+          <p:cNvPr id="4" name="TextBox 3"/>
+          <p:cNvSpPr txBox="1"/>
+          <p:nvPr/>
+        </p:nvSpPr>
+        <p:spPr>
+          <a:xfrm>
+            <a:off x="658368" y="1691640"/>
+            <a:ext cx="10881360" cy="4480560"/>
+          </a:xfrm>
+          <a:prstGeom prst="rect">
+            <a:avLst/>
+          </a:prstGeom>
+          <a:noFill/>
+        </p:spPr>
+        <p:txBody>
+          <a:bodyPr wrap="square" anchor="ctr" lIns="0" rIns="0" tIns="0" bIns="0">
+            <a:spAutoFit/>
+          </a:bodyPr>
+          <a:lstStyle/>
+          <a:p>
+            <a:pPr marL="0" indent="0">
+              <a:lnSpc>
+                <a:spcPct val="105000"/>
+              </a:lnSpc>
+              <a:spcBef>
+                <a:spcPts val="0"/>
+              </a:spcBef>
+              <a:spcAft>
+                <a:spcPts val="1000"/>
+              </a:spcAft>
+            </a:pPr>
+            <a:r>
+              <a:rPr sz="2400" b="1" i="0">
+                <a:solidFill>
+                  <a:srgbClr val="EDAB0C"/>
+                </a:solidFill>
+                <a:latin typeface="Roboto"/>
+              </a:rPr>
+              <a:t>■  </a:t>
+            </a:r>
+            <a:r>
+              <a:rPr sz="2400" b="0" i="0">
+                <a:solidFill>
+                  <a:srgbClr val="2A2929"/>
+                </a:solidFill>
+                <a:latin typeface="Roboto"/>
+              </a:rPr>
+              <a:t>The feedback shape: close to the event, specific, actionable — behaviour, effect, next step.</a:t>
+            </a:r>
+          </a:p>
+          <a:p>
+            <a:pPr marL="0" indent="0">
+              <a:lnSpc>
+                <a:spcPct val="105000"/>
+              </a:lnSpc>
+              <a:spcBef>
+                <a:spcPts val="0"/>
+              </a:spcBef>
+              <a:spcAft>
+                <a:spcPts val="1000"/>
+              </a:spcAft>
+            </a:pPr>
+            <a:r>
+              <a:rPr sz="2400" b="1" i="0">
+                <a:solidFill>
+                  <a:srgbClr val="EDAB0C"/>
+                </a:solidFill>
+                <a:latin typeface="Roboto"/>
+              </a:rPr>
+              <a:t>■  </a:t>
+            </a:r>
+            <a:r>
+              <a:rPr sz="2400" b="0" i="0">
+                <a:solidFill>
+                  <a:srgbClr val="2A2929"/>
+                </a:solidFill>
+                <a:latin typeface="Roboto"/>
+              </a:rPr>
+              <a:t>A measured gap becomes a development opportunity: specific, tied to a person and the team's goal.</a:t>
+            </a:r>
+          </a:p>
+          <a:p>
+            <a:pPr marL="0" indent="0">
+              <a:lnSpc>
+                <a:spcPct val="105000"/>
+              </a:lnSpc>
+              <a:spcBef>
+                <a:spcPts val="0"/>
+              </a:spcBef>
+              <a:spcAft>
+                <a:spcPts val="1000"/>
+              </a:spcAft>
+            </a:pPr>
+            <a:r>
+              <a:rPr sz="2400" b="1" i="0">
+                <a:solidFill>
+                  <a:srgbClr val="EDAB0C"/>
+                </a:solidFill>
+                <a:latin typeface="Roboto"/>
+              </a:rPr>
+              <a:t>■  </a:t>
+            </a:r>
+            <a:r>
+              <a:rPr sz="2400" b="0" i="0">
+                <a:solidFill>
+                  <a:srgbClr val="2A2929"/>
+                </a:solidFill>
+                <a:latin typeface="Roboto"/>
+              </a:rPr>
+              <a:t>An opportunity without an action plan is a note — who, what, by when.</a:t>
+            </a:r>
+          </a:p>
+        </p:txBody>
+      </p:sp>
+      <p:sp>
+        <p:nvSpPr>
+          <p:cNvPr id="5" name="Rectangle 4"/>
+          <p:cNvSpPr/>
+          <p:nvPr/>
+        </p:nvSpPr>
+        <p:spPr>
+          <a:xfrm>
+            <a:off x="0" y="6565392"/>
+            <a:ext cx="12191695" cy="38100"/>
+          </a:xfrm>
+          <a:prstGeom prst="rect">
+            <a:avLst/>
+          </a:prstGeom>
+          <a:solidFill>
+            <a:srgbClr val="004488"/>
+          </a:solidFill>
+          <a:ln>
+            <a:noFill/>
+          </a:ln>
+          <a:effectLst/>
+        </p:spPr>
+        <p:style>
+          <a:lnRef idx="1">
+            <a:schemeClr val="accent1"/>
+          </a:lnRef>
+          <a:fillRef idx="3">
+            <a:schemeClr val="accent1"/>
+          </a:fillRef>
+          <a:effectRef idx="2">
+            <a:schemeClr val="accent1"/>
+          </a:effectRef>
+          <a:fontRef idx="minor">
+            <a:schemeClr val="lt1"/>
+          </a:fontRef>
+        </p:style>
+        <p:txBody>
+          <a:bodyPr rtlCol="0" anchor="ctr"/>
+          <a:lstStyle/>
+          <a:p>
+            <a:pPr algn="ctr"/>
+          </a:p>
+        </p:txBody>
+      </p:sp>
+      <p:sp>
+        <p:nvSpPr>
+          <p:cNvPr id="6" name="TextBox 5"/>
+          <p:cNvSpPr txBox="1"/>
+          <p:nvPr/>
+        </p:nvSpPr>
+        <p:spPr>
+          <a:xfrm>
+            <a:off x="502920" y="6400800"/>
+            <a:ext cx="5486400" cy="320040"/>
+          </a:xfrm>
+          <a:prstGeom prst="rect">
+            <a:avLst/>
+          </a:prstGeom>
+          <a:noFill/>
+        </p:spPr>
+        <p:txBody>
+          <a:bodyPr wrap="square" anchor="t" lIns="0" rIns="0" tIns="0" bIns="0">
+            <a:spAutoFit/>
+          </a:bodyPr>
+          <a:lstStyle/>
+          <a:p>
+            <a:r>
+              <a:rPr sz="1100" b="1" i="0">
+                <a:solidFill>
+                  <a:srgbClr val="2A2929"/>
+                </a:solidFill>
+                <a:latin typeface="Roboto"/>
+              </a:rPr>
+              <a:t>Kangan </a:t>
+            </a:r>
+            <a:r>
+              <a:rPr sz="1100" b="1" i="0">
+                <a:solidFill>
+                  <a:srgbClr val="D68E10"/>
+                </a:solidFill>
+                <a:latin typeface="Roboto"/>
+              </a:rPr>
+              <a:t>Institute</a:t>
+            </a:r>
+          </a:p>
+        </p:txBody>
+      </p:sp>
+      <p:sp>
+        <p:nvSpPr>
+          <p:cNvPr id="7" name="TextBox 6"/>
+          <p:cNvSpPr txBox="1"/>
+          <p:nvPr/>
+        </p:nvSpPr>
+        <p:spPr>
+          <a:xfrm>
+            <a:off x="10515600" y="6400800"/>
+            <a:ext cx="1188720" cy="320040"/>
+          </a:xfrm>
+          <a:prstGeom prst="rect">
+            <a:avLst/>
+          </a:prstGeom>
+          <a:noFill/>
+        </p:spPr>
+        <p:txBody>
+          <a:bodyPr wrap="square" anchor="t" lIns="0" rIns="0" tIns="0" bIns="0">
+            <a:spAutoFit/>
+          </a:bodyPr>
+          <a:lstStyle/>
+          <a:p>
+            <a:pPr algn="r"/>
+            <a:r>
+              <a:rPr sz="1100" b="0" i="0">
+                <a:solidFill>
+                  <a:srgbClr val="7A7A7A"/>
+                </a:solidFill>
+                <a:latin typeface="Roboto"/>
+              </a:rPr>
+              <a:t>14</a:t>
             </a:r>
           </a:p>
         </p:txBody>
@@ -8497,7 +8596,7 @@
                 </a:solidFill>
                 <a:latin typeface="Roboto"/>
               </a:rPr>
-              <a:t>Leading the AT2 build</a:t>
+              <a:t>Leading the build</a:t>
             </a:r>
           </a:p>
         </p:txBody>
@@ -8595,7 +8694,7 @@
                 </a:solidFill>
                 <a:latin typeface="Roboto"/>
               </a:rPr>
-              <a:t>Topic 5 planned the team and allocated the four components; now the team writes the IaC and you lead the build.</a:t>
+              <a:t>The team is stood up; now the build runs — and the evidence is how you lead it.</a:t>
             </a:r>
           </a:p>
           <a:p>
@@ -8626,7 +8725,7 @@
                 </a:solidFill>
                 <a:latin typeface="Roboto"/>
               </a:rPr>
-              <a:t>The team leader runs the build: coaching, supporting, facilitating issue resolution, problem-solving, managing conflict, then monitoring performance and developing others.</a:t>
+              <a:t>Today: build and integrate, lead the observed meeting, then the written accounts — conflict, coaching, issues, measurement, feedback, development, reflection.</a:t>
             </a:r>
           </a:p>
           <a:p>
@@ -8657,9 +8756,335 @@
                 </a:solidFill>
                 <a:latin typeface="Roboto"/>
               </a:rPr>
-              <a:t>In-world: you lead the YAT ICT team building Ledgerline's improved infrastructure.</a:t>
-            </a:r>
-          </a:p>
+              <a:t>Leadership, not code: nobody is marked on their template here.</a:t>
+            </a:r>
+          </a:p>
+        </p:txBody>
+      </p:sp>
+      <p:pic>
+        <p:nvPicPr>
+          <p:cNvPr id="5" name="Picture 4" descr="gen-facacd57.png"/>
+          <p:cNvPicPr>
+            <a:picLocks noChangeAspect="1"/>
+          </p:cNvPicPr>
+          <p:nvPr/>
+        </p:nvPicPr>
+        <p:blipFill>
+          <a:blip r:embed="rId2"/>
+          <a:stretch>
+            <a:fillRect/>
+          </a:stretch>
+        </p:blipFill>
+        <p:spPr>
+          <a:xfrm>
+            <a:off x="6949440" y="1783080"/>
+            <a:ext cx="4023360" cy="4023360"/>
+          </a:xfrm>
+          <a:prstGeom prst="rect">
+            <a:avLst/>
+          </a:prstGeom>
+        </p:spPr>
+      </p:pic>
+      <p:sp>
+        <p:nvSpPr>
+          <p:cNvPr id="6" name="Rectangle 5"/>
+          <p:cNvSpPr/>
+          <p:nvPr/>
+        </p:nvSpPr>
+        <p:spPr>
+          <a:xfrm>
+            <a:off x="0" y="6565392"/>
+            <a:ext cx="12191695" cy="38100"/>
+          </a:xfrm>
+          <a:prstGeom prst="rect">
+            <a:avLst/>
+          </a:prstGeom>
+          <a:solidFill>
+            <a:srgbClr val="EDAB0C"/>
+          </a:solidFill>
+          <a:ln>
+            <a:noFill/>
+          </a:ln>
+          <a:effectLst/>
+        </p:spPr>
+        <p:style>
+          <a:lnRef idx="1">
+            <a:schemeClr val="accent1"/>
+          </a:lnRef>
+          <a:fillRef idx="3">
+            <a:schemeClr val="accent1"/>
+          </a:fillRef>
+          <a:effectRef idx="2">
+            <a:schemeClr val="accent1"/>
+          </a:effectRef>
+          <a:fontRef idx="minor">
+            <a:schemeClr val="lt1"/>
+          </a:fontRef>
+        </p:style>
+        <p:txBody>
+          <a:bodyPr rtlCol="0" anchor="ctr"/>
+          <a:lstStyle/>
+          <a:p>
+            <a:pPr algn="ctr"/>
+          </a:p>
+        </p:txBody>
+      </p:sp>
+      <p:sp>
+        <p:nvSpPr>
+          <p:cNvPr id="7" name="TextBox 6"/>
+          <p:cNvSpPr txBox="1"/>
+          <p:nvPr/>
+        </p:nvSpPr>
+        <p:spPr>
+          <a:xfrm>
+            <a:off x="502920" y="6400800"/>
+            <a:ext cx="5486400" cy="320040"/>
+          </a:xfrm>
+          <a:prstGeom prst="rect">
+            <a:avLst/>
+          </a:prstGeom>
+          <a:noFill/>
+        </p:spPr>
+        <p:txBody>
+          <a:bodyPr wrap="square" anchor="t" lIns="0" rIns="0" tIns="0" bIns="0">
+            <a:spAutoFit/>
+          </a:bodyPr>
+          <a:lstStyle/>
+          <a:p>
+            <a:r>
+              <a:rPr sz="1100" b="1" i="0">
+                <a:solidFill>
+                  <a:srgbClr val="2A2929"/>
+                </a:solidFill>
+                <a:latin typeface="Roboto"/>
+              </a:rPr>
+              <a:t>Kangan </a:t>
+            </a:r>
+            <a:r>
+              <a:rPr sz="1100" b="1" i="0">
+                <a:solidFill>
+                  <a:srgbClr val="D68E10"/>
+                </a:solidFill>
+                <a:latin typeface="Roboto"/>
+              </a:rPr>
+              <a:t>Institute</a:t>
+            </a:r>
+          </a:p>
+        </p:txBody>
+      </p:sp>
+      <p:sp>
+        <p:nvSpPr>
+          <p:cNvPr id="8" name="TextBox 7"/>
+          <p:cNvSpPr txBox="1"/>
+          <p:nvPr/>
+        </p:nvSpPr>
+        <p:spPr>
+          <a:xfrm>
+            <a:off x="10515600" y="6400800"/>
+            <a:ext cx="1188720" cy="320040"/>
+          </a:xfrm>
+          <a:prstGeom prst="rect">
+            <a:avLst/>
+          </a:prstGeom>
+          <a:noFill/>
+        </p:spPr>
+        <p:txBody>
+          <a:bodyPr wrap="square" anchor="t" lIns="0" rIns="0" tIns="0" bIns="0">
+            <a:spAutoFit/>
+          </a:bodyPr>
+          <a:lstStyle/>
+          <a:p>
+            <a:pPr algn="r"/>
+            <a:r>
+              <a:rPr sz="1100" b="0" i="0">
+                <a:solidFill>
+                  <a:srgbClr val="7A7A7A"/>
+                </a:solidFill>
+                <a:latin typeface="Roboto"/>
+              </a:rPr>
+              <a:t>1</a:t>
+            </a:r>
+          </a:p>
+        </p:txBody>
+      </p:sp>
+    </p:spTree>
+  </p:cSld>
+  <p:clrMapOvr>
+    <a:masterClrMapping/>
+  </p:clrMapOvr>
+</p:sld>
+</file>
+
+<file path=ppt/slides/slide20.xml><?xml version="1.0" encoding="utf-8"?>
+<p:sld xmlns:a="http://schemas.openxmlformats.org/drawingml/2006/main" xmlns:p="http://schemas.openxmlformats.org/presentationml/2006/main" xmlns:r="http://schemas.openxmlformats.org/officeDocument/2006/relationships">
+  <p:cSld>
+    <p:bg>
+      <p:bgPr>
+        <a:solidFill>
+          <a:srgbClr val="FFFFFF"/>
+        </a:solidFill>
+        <a:effectLst/>
+      </p:bgPr>
+    </p:bg>
+    <p:spTree>
+      <p:nvGrpSpPr>
+        <p:cNvPr id="1" name=""/>
+        <p:cNvGrpSpPr/>
+        <p:nvPr/>
+      </p:nvGrpSpPr>
+      <p:grpSpPr/>
+      <p:sp>
+        <p:nvSpPr>
+          <p:cNvPr id="2" name="Rectangle 1"/>
+          <p:cNvSpPr/>
+          <p:nvPr/>
+        </p:nvSpPr>
+        <p:spPr>
+          <a:xfrm>
+            <a:off x="0" y="0"/>
+            <a:ext cx="12191695" cy="1234440"/>
+          </a:xfrm>
+          <a:prstGeom prst="rect">
+            <a:avLst/>
+          </a:prstGeom>
+          <a:solidFill>
+            <a:srgbClr val="004488"/>
+          </a:solidFill>
+          <a:ln>
+            <a:noFill/>
+          </a:ln>
+          <a:effectLst/>
+        </p:spPr>
+        <p:style>
+          <a:lnRef idx="1">
+            <a:schemeClr val="accent1"/>
+          </a:lnRef>
+          <a:fillRef idx="3">
+            <a:schemeClr val="accent1"/>
+          </a:fillRef>
+          <a:effectRef idx="2">
+            <a:schemeClr val="accent1"/>
+          </a:effectRef>
+          <a:fontRef idx="minor">
+            <a:schemeClr val="lt1"/>
+          </a:fontRef>
+        </p:style>
+        <p:txBody>
+          <a:bodyPr rtlCol="0" anchor="ctr"/>
+          <a:lstStyle/>
+          <a:p>
+            <a:pPr algn="ctr"/>
+          </a:p>
+        </p:txBody>
+      </p:sp>
+      <p:sp>
+        <p:nvSpPr>
+          <p:cNvPr id="3" name="Rounded Rectangle 2"/>
+          <p:cNvSpPr/>
+          <p:nvPr/>
+        </p:nvSpPr>
+        <p:spPr>
+          <a:xfrm>
+            <a:off x="640080" y="384048"/>
+            <a:ext cx="1691640" cy="457200"/>
+          </a:xfrm>
+          <a:prstGeom prst="roundRect">
+            <a:avLst/>
+          </a:prstGeom>
+          <a:solidFill>
+            <a:srgbClr val="2A2929"/>
+          </a:solidFill>
+          <a:ln>
+            <a:noFill/>
+          </a:ln>
+          <a:effectLst/>
+        </p:spPr>
+        <p:style>
+          <a:lnRef idx="1">
+            <a:schemeClr val="accent1"/>
+          </a:lnRef>
+          <a:fillRef idx="3">
+            <a:schemeClr val="accent1"/>
+          </a:fillRef>
+          <a:effectRef idx="2">
+            <a:schemeClr val="accent1"/>
+          </a:effectRef>
+          <a:fontRef idx="minor">
+            <a:schemeClr val="lt1"/>
+          </a:fontRef>
+        </p:style>
+        <p:txBody>
+          <a:bodyPr rtlCol="0" anchor="ctr"/>
+          <a:lstStyle/>
+          <a:p>
+            <a:pPr algn="ctr"/>
+            <a:r>
+              <a:rPr sz="1400" b="1" i="0">
+                <a:solidFill>
+                  <a:srgbClr val="FBB900"/>
+                </a:solidFill>
+                <a:latin typeface="Roboto"/>
+              </a:rPr>
+              <a:t>ACTIVITY</a:t>
+            </a:r>
+          </a:p>
+        </p:txBody>
+      </p:sp>
+      <p:sp>
+        <p:nvSpPr>
+          <p:cNvPr id="4" name="TextBox 3"/>
+          <p:cNvSpPr txBox="1"/>
+          <p:nvPr/>
+        </p:nvSpPr>
+        <p:spPr>
+          <a:xfrm>
+            <a:off x="2560320" y="310896"/>
+            <a:ext cx="8961120" cy="685800"/>
+          </a:xfrm>
+          <a:prstGeom prst="rect">
+            <a:avLst/>
+          </a:prstGeom>
+          <a:noFill/>
+        </p:spPr>
+        <p:txBody>
+          <a:bodyPr wrap="square" anchor="ctr" lIns="0" rIns="0" tIns="0" bIns="0">
+            <a:spAutoFit/>
+          </a:bodyPr>
+          <a:lstStyle/>
+          <a:p>
+            <a:r>
+              <a:rPr sz="2600" b="1" i="0">
+                <a:solidFill>
+                  <a:srgbClr val="FFFFFF"/>
+                </a:solidFill>
+                <a:latin typeface="Roboto"/>
+              </a:rPr>
+              <a:t>Measure, feed back, develop</a:t>
+            </a:r>
+          </a:p>
+        </p:txBody>
+      </p:sp>
+      <p:sp>
+        <p:nvSpPr>
+          <p:cNvPr id="5" name="TextBox 4"/>
+          <p:cNvSpPr txBox="1"/>
+          <p:nvPr/>
+        </p:nvSpPr>
+        <p:spPr>
+          <a:xfrm>
+            <a:off x="658368" y="1554480"/>
+            <a:ext cx="10881360" cy="4297680"/>
+          </a:xfrm>
+          <a:prstGeom prst="rect">
+            <a:avLst/>
+          </a:prstGeom>
+          <a:noFill/>
+        </p:spPr>
+        <p:txBody>
+          <a:bodyPr wrap="square" anchor="t" lIns="0" rIns="0" tIns="0" bIns="0">
+            <a:spAutoFit/>
+          </a:bodyPr>
+          <a:lstStyle/>
           <a:p>
             <a:pPr marL="0" indent="0">
               <a:lnSpc>
@@ -8688,38 +9113,125 @@
                 </a:solidFill>
                 <a:latin typeface="Roboto"/>
               </a:rPr>
-              <a:t>Leadership, not code — the CloudFormation write is the vehicle; the assessed evidence (AT2) is how you lead it.</a:t>
-            </a:r>
-          </a:p>
-        </p:txBody>
-      </p:sp>
-      <p:pic>
-        <p:nvPicPr>
-          <p:cNvPr id="5" name="Picture 4" descr="gen-facacd57.png"/>
-          <p:cNvPicPr>
-            <a:picLocks noChangeAspect="1"/>
-          </p:cNvPicPr>
-          <p:nvPr/>
-        </p:nvPicPr>
-        <p:blipFill>
-          <a:blip r:embed="rId2"/>
-          <a:stretch>
-            <a:fillRect/>
-          </a:stretch>
-        </p:blipFill>
-        <p:spPr>
-          <a:xfrm>
-            <a:off x="6949440" y="1783080"/>
-            <a:ext cx="4023360" cy="4023360"/>
-          </a:xfrm>
-          <a:prstGeom prst="rect">
-            <a:avLst/>
-          </a:prstGeom>
-        </p:spPr>
-      </p:pic>
-      <p:sp>
-        <p:nvSpPr>
-          <p:cNvPr id="6" name="Rectangle 5"/>
+              <a:t>Workbook — tasks 14, 15 and 16.</a:t>
+            </a:r>
+          </a:p>
+          <a:p>
+            <a:pPr marL="0" indent="0">
+              <a:lnSpc>
+                <a:spcPct val="105000"/>
+              </a:lnSpc>
+              <a:spcBef>
+                <a:spcPts val="0"/>
+              </a:spcBef>
+              <a:spcAft>
+                <a:spcPts val="1000"/>
+              </a:spcAft>
+            </a:pPr>
+            <a:r>
+              <a:rPr sz="1700" b="1" i="0">
+                <a:solidFill>
+                  <a:srgbClr val="EDAB0C"/>
+                </a:solidFill>
+                <a:latin typeface="Roboto"/>
+              </a:rPr>
+              <a:t>■  </a:t>
+            </a:r>
+            <a:r>
+              <a:rPr sz="1700" b="0" i="0">
+                <a:solidFill>
+                  <a:srgbClr val="2A2929"/>
+                </a:solidFill>
+                <a:latin typeface="Roboto"/>
+              </a:rPr>
+              <a:t>Measure the team against the plan, record the feedback you gave, and record the development opportunities and what you did about them.</a:t>
+            </a:r>
+          </a:p>
+        </p:txBody>
+      </p:sp>
+      <p:sp>
+        <p:nvSpPr>
+          <p:cNvPr id="6" name="Rounded Rectangle 5"/>
+          <p:cNvSpPr/>
+          <p:nvPr/>
+        </p:nvSpPr>
+        <p:spPr>
+          <a:xfrm>
+            <a:off x="640080" y="5897880"/>
+            <a:ext cx="4023360" cy="457200"/>
+          </a:xfrm>
+          <a:prstGeom prst="roundRect">
+            <a:avLst/>
+          </a:prstGeom>
+          <a:solidFill>
+            <a:srgbClr val="F9F9F9"/>
+          </a:solidFill>
+          <a:ln w="12700">
+            <a:solidFill>
+              <a:srgbClr val="CCCCCC"/>
+            </a:solidFill>
+          </a:ln>
+          <a:effectLst/>
+        </p:spPr>
+        <p:style>
+          <a:lnRef idx="1">
+            <a:schemeClr val="accent1"/>
+          </a:lnRef>
+          <a:fillRef idx="3">
+            <a:schemeClr val="accent1"/>
+          </a:fillRef>
+          <a:effectRef idx="2">
+            <a:schemeClr val="accent1"/>
+          </a:effectRef>
+          <a:fontRef idx="minor">
+            <a:schemeClr val="lt1"/>
+          </a:fontRef>
+        </p:style>
+        <p:txBody>
+          <a:bodyPr rtlCol="0" anchor="ctr"/>
+          <a:lstStyle/>
+          <a:p>
+            <a:pPr algn="ctr"/>
+          </a:p>
+        </p:txBody>
+      </p:sp>
+      <p:sp>
+        <p:nvSpPr>
+          <p:cNvPr id="7" name="TextBox 6"/>
+          <p:cNvSpPr txBox="1"/>
+          <p:nvPr/>
+        </p:nvSpPr>
+        <p:spPr>
+          <a:xfrm>
+            <a:off x="822960" y="5943600"/>
+            <a:ext cx="3657600" cy="365760"/>
+          </a:xfrm>
+          <a:prstGeom prst="rect">
+            <a:avLst/>
+          </a:prstGeom>
+          <a:noFill/>
+        </p:spPr>
+        <p:txBody>
+          <a:bodyPr wrap="square" anchor="ctr" lIns="0" rIns="0" tIns="0" bIns="0">
+            <a:spAutoFit/>
+          </a:bodyPr>
+          <a:lstStyle/>
+          <a:p>
+            <a:r>
+              <a:rPr sz="1500" b="1" i="0">
+                <a:solidFill>
+                  <a:srgbClr val="2A2929"/>
+                </a:solidFill>
+                <a:latin typeface="Roboto"/>
+              </a:rPr>
+              <a:t>⏱  ~30 min</a:t>
+            </a:r>
+          </a:p>
+        </p:txBody>
+      </p:sp>
+      <p:sp>
+        <p:nvSpPr>
+          <p:cNvPr id="8" name="Rectangle 7"/>
           <p:cNvSpPr/>
           <p:nvPr/>
         </p:nvSpPr>
@@ -8727,6 +9239,2490 @@
           <a:xfrm>
             <a:off x="0" y="6565392"/>
             <a:ext cx="12191695" cy="38100"/>
+          </a:xfrm>
+          <a:prstGeom prst="rect">
+            <a:avLst/>
+          </a:prstGeom>
+          <a:solidFill>
+            <a:srgbClr val="004488"/>
+          </a:solidFill>
+          <a:ln>
+            <a:noFill/>
+          </a:ln>
+          <a:effectLst/>
+        </p:spPr>
+        <p:style>
+          <a:lnRef idx="1">
+            <a:schemeClr val="accent1"/>
+          </a:lnRef>
+          <a:fillRef idx="3">
+            <a:schemeClr val="accent1"/>
+          </a:fillRef>
+          <a:effectRef idx="2">
+            <a:schemeClr val="accent1"/>
+          </a:effectRef>
+          <a:fontRef idx="minor">
+            <a:schemeClr val="lt1"/>
+          </a:fontRef>
+        </p:style>
+        <p:txBody>
+          <a:bodyPr rtlCol="0" anchor="ctr"/>
+          <a:lstStyle/>
+          <a:p>
+            <a:pPr algn="ctr"/>
+          </a:p>
+        </p:txBody>
+      </p:sp>
+      <p:sp>
+        <p:nvSpPr>
+          <p:cNvPr id="9" name="TextBox 8"/>
+          <p:cNvSpPr txBox="1"/>
+          <p:nvPr/>
+        </p:nvSpPr>
+        <p:spPr>
+          <a:xfrm>
+            <a:off x="502920" y="6400800"/>
+            <a:ext cx="5486400" cy="320040"/>
+          </a:xfrm>
+          <a:prstGeom prst="rect">
+            <a:avLst/>
+          </a:prstGeom>
+          <a:noFill/>
+        </p:spPr>
+        <p:txBody>
+          <a:bodyPr wrap="square" anchor="t" lIns="0" rIns="0" tIns="0" bIns="0">
+            <a:spAutoFit/>
+          </a:bodyPr>
+          <a:lstStyle/>
+          <a:p>
+            <a:r>
+              <a:rPr sz="1100" b="1" i="0">
+                <a:solidFill>
+                  <a:srgbClr val="2A2929"/>
+                </a:solidFill>
+                <a:latin typeface="Roboto"/>
+              </a:rPr>
+              <a:t>Kangan </a:t>
+            </a:r>
+            <a:r>
+              <a:rPr sz="1100" b="1" i="0">
+                <a:solidFill>
+                  <a:srgbClr val="D68E10"/>
+                </a:solidFill>
+                <a:latin typeface="Roboto"/>
+              </a:rPr>
+              <a:t>Institute</a:t>
+            </a:r>
+          </a:p>
+        </p:txBody>
+      </p:sp>
+      <p:sp>
+        <p:nvSpPr>
+          <p:cNvPr id="10" name="TextBox 9"/>
+          <p:cNvSpPr txBox="1"/>
+          <p:nvPr/>
+        </p:nvSpPr>
+        <p:spPr>
+          <a:xfrm>
+            <a:off x="10515600" y="6400800"/>
+            <a:ext cx="1188720" cy="320040"/>
+          </a:xfrm>
+          <a:prstGeom prst="rect">
+            <a:avLst/>
+          </a:prstGeom>
+          <a:noFill/>
+        </p:spPr>
+        <p:txBody>
+          <a:bodyPr wrap="square" anchor="t" lIns="0" rIns="0" tIns="0" bIns="0">
+            <a:spAutoFit/>
+          </a:bodyPr>
+          <a:lstStyle/>
+          <a:p>
+            <a:pPr algn="r"/>
+            <a:r>
+              <a:rPr sz="1100" b="0" i="0">
+                <a:solidFill>
+                  <a:srgbClr val="7A7A7A"/>
+                </a:solidFill>
+                <a:latin typeface="Roboto"/>
+              </a:rPr>
+              <a:t>15</a:t>
+            </a:r>
+          </a:p>
+        </p:txBody>
+      </p:sp>
+    </p:spTree>
+  </p:cSld>
+  <p:clrMapOvr>
+    <a:masterClrMapping/>
+  </p:clrMapOvr>
+</p:sld>
+</file>
+
+<file path=ppt/slides/slide21.xml><?xml version="1.0" encoding="utf-8"?>
+<p:sld xmlns:a="http://schemas.openxmlformats.org/drawingml/2006/main" xmlns:p="http://schemas.openxmlformats.org/presentationml/2006/main" xmlns:r="http://schemas.openxmlformats.org/officeDocument/2006/relationships">
+  <p:cSld>
+    <p:bg>
+      <p:bgPr>
+        <a:solidFill>
+          <a:srgbClr val="F9F9F9"/>
+        </a:solidFill>
+        <a:effectLst/>
+      </p:bgPr>
+    </p:bg>
+    <p:spTree>
+      <p:nvGrpSpPr>
+        <p:cNvPr id="1" name=""/>
+        <p:cNvGrpSpPr/>
+        <p:nvPr/>
+      </p:nvGrpSpPr>
+      <p:grpSpPr/>
+      <p:sp>
+        <p:nvSpPr>
+          <p:cNvPr id="2" name="TextBox 1"/>
+          <p:cNvSpPr txBox="1"/>
+          <p:nvPr/>
+        </p:nvSpPr>
+        <p:spPr>
+          <a:xfrm>
+            <a:off x="640080" y="548640"/>
+            <a:ext cx="10881360" cy="1097280"/>
+          </a:xfrm>
+          <a:prstGeom prst="rect">
+            <a:avLst/>
+          </a:prstGeom>
+          <a:noFill/>
+        </p:spPr>
+        <p:txBody>
+          <a:bodyPr wrap="square" anchor="t" lIns="0" rIns="0" tIns="0" bIns="0">
+            <a:spAutoFit/>
+          </a:bodyPr>
+          <a:lstStyle/>
+          <a:p>
+            <a:r>
+              <a:rPr sz="3200" b="1" i="0">
+                <a:solidFill>
+                  <a:srgbClr val="2A2929"/>
+                </a:solidFill>
+                <a:latin typeface="Roboto"/>
+              </a:rPr>
+              <a:t>Key takeaways</a:t>
+            </a:r>
+          </a:p>
+          <a:p>
+            <a:pPr>
+              <a:spcBef>
+                <a:spcPts val="200"/>
+              </a:spcBef>
+            </a:pPr>
+            <a:r>
+              <a:rPr sz="1800" b="1" i="0">
+                <a:solidFill>
+                  <a:srgbClr val="004488"/>
+                </a:solidFill>
+                <a:latin typeface="Roboto"/>
+              </a:rPr>
+              <a:t>Section 4 · Measure and grow</a:t>
+            </a:r>
+          </a:p>
+        </p:txBody>
+      </p:sp>
+      <p:sp>
+        <p:nvSpPr>
+          <p:cNvPr id="3" name="Rectangle 2"/>
+          <p:cNvSpPr/>
+          <p:nvPr/>
+        </p:nvSpPr>
+        <p:spPr>
+          <a:xfrm>
+            <a:off x="658368" y="1600200"/>
+            <a:ext cx="1463040" cy="50800"/>
+          </a:xfrm>
+          <a:prstGeom prst="rect">
+            <a:avLst/>
+          </a:prstGeom>
+          <a:solidFill>
+            <a:srgbClr val="004488"/>
+          </a:solidFill>
+          <a:ln>
+            <a:noFill/>
+          </a:ln>
+          <a:effectLst/>
+        </p:spPr>
+        <p:style>
+          <a:lnRef idx="1">
+            <a:schemeClr val="accent1"/>
+          </a:lnRef>
+          <a:fillRef idx="3">
+            <a:schemeClr val="accent1"/>
+          </a:fillRef>
+          <a:effectRef idx="2">
+            <a:schemeClr val="accent1"/>
+          </a:effectRef>
+          <a:fontRef idx="minor">
+            <a:schemeClr val="lt1"/>
+          </a:fontRef>
+        </p:style>
+        <p:txBody>
+          <a:bodyPr rtlCol="0" anchor="ctr"/>
+          <a:lstStyle/>
+          <a:p>
+            <a:pPr algn="ctr"/>
+          </a:p>
+        </p:txBody>
+      </p:sp>
+      <p:sp>
+        <p:nvSpPr>
+          <p:cNvPr id="4" name="Rectangle 3"/>
+          <p:cNvSpPr/>
+          <p:nvPr/>
+        </p:nvSpPr>
+        <p:spPr>
+          <a:xfrm>
+            <a:off x="640080" y="1965960"/>
+            <a:ext cx="10927080" cy="841248"/>
+          </a:xfrm>
+          <a:prstGeom prst="rect">
+            <a:avLst/>
+          </a:prstGeom>
+          <a:solidFill>
+            <a:srgbClr val="FFFFFF"/>
+          </a:solidFill>
+          <a:ln w="12700">
+            <a:solidFill>
+              <a:srgbClr val="CCCCCC"/>
+            </a:solidFill>
+          </a:ln>
+          <a:effectLst/>
+        </p:spPr>
+        <p:style>
+          <a:lnRef idx="1">
+            <a:schemeClr val="accent1"/>
+          </a:lnRef>
+          <a:fillRef idx="3">
+            <a:schemeClr val="accent1"/>
+          </a:fillRef>
+          <a:effectRef idx="2">
+            <a:schemeClr val="accent1"/>
+          </a:effectRef>
+          <a:fontRef idx="minor">
+            <a:schemeClr val="lt1"/>
+          </a:fontRef>
+        </p:style>
+        <p:txBody>
+          <a:bodyPr rtlCol="0" anchor="ctr"/>
+          <a:lstStyle/>
+          <a:p>
+            <a:pPr algn="ctr"/>
+          </a:p>
+        </p:txBody>
+      </p:sp>
+      <p:sp>
+        <p:nvSpPr>
+          <p:cNvPr id="5" name="Rectangle 4"/>
+          <p:cNvSpPr/>
+          <p:nvPr/>
+        </p:nvSpPr>
+        <p:spPr>
+          <a:xfrm>
+            <a:off x="640080" y="1965960"/>
+            <a:ext cx="109728" cy="841248"/>
+          </a:xfrm>
+          <a:prstGeom prst="rect">
+            <a:avLst/>
+          </a:prstGeom>
+          <a:solidFill>
+            <a:srgbClr val="004488"/>
+          </a:solidFill>
+          <a:ln>
+            <a:noFill/>
+          </a:ln>
+          <a:effectLst/>
+        </p:spPr>
+        <p:style>
+          <a:lnRef idx="1">
+            <a:schemeClr val="accent1"/>
+          </a:lnRef>
+          <a:fillRef idx="3">
+            <a:schemeClr val="accent1"/>
+          </a:fillRef>
+          <a:effectRef idx="2">
+            <a:schemeClr val="accent1"/>
+          </a:effectRef>
+          <a:fontRef idx="minor">
+            <a:schemeClr val="lt1"/>
+          </a:fontRef>
+        </p:style>
+        <p:txBody>
+          <a:bodyPr rtlCol="0" anchor="ctr"/>
+          <a:lstStyle/>
+          <a:p>
+            <a:pPr algn="ctr"/>
+          </a:p>
+        </p:txBody>
+      </p:sp>
+      <p:sp>
+        <p:nvSpPr>
+          <p:cNvPr id="6" name="TextBox 5"/>
+          <p:cNvSpPr txBox="1"/>
+          <p:nvPr/>
+        </p:nvSpPr>
+        <p:spPr>
+          <a:xfrm>
+            <a:off x="960120" y="1965960"/>
+            <a:ext cx="10424160" cy="841248"/>
+          </a:xfrm>
+          <a:prstGeom prst="rect">
+            <a:avLst/>
+          </a:prstGeom>
+          <a:noFill/>
+        </p:spPr>
+        <p:txBody>
+          <a:bodyPr wrap="square" anchor="ctr" lIns="0" rIns="0" tIns="0" bIns="0">
+            <a:spAutoFit/>
+          </a:bodyPr>
+          <a:lstStyle/>
+          <a:p>
+            <a:pPr>
+              <a:lnSpc>
+                <a:spcPct val="100000"/>
+              </a:lnSpc>
+            </a:pPr>
+            <a:r>
+              <a:rPr sz="1700" b="0" i="0">
+                <a:solidFill>
+                  <a:srgbClr val="2A2929"/>
+                </a:solidFill>
+                <a:latin typeface="Roboto"/>
+              </a:rPr>
+              <a:t>Measured against the plan, collated as evidence.</a:t>
+            </a:r>
+          </a:p>
+        </p:txBody>
+      </p:sp>
+      <p:sp>
+        <p:nvSpPr>
+          <p:cNvPr id="7" name="Rectangle 6"/>
+          <p:cNvSpPr/>
+          <p:nvPr/>
+        </p:nvSpPr>
+        <p:spPr>
+          <a:xfrm>
+            <a:off x="640080" y="2916936"/>
+            <a:ext cx="10927080" cy="841248"/>
+          </a:xfrm>
+          <a:prstGeom prst="rect">
+            <a:avLst/>
+          </a:prstGeom>
+          <a:solidFill>
+            <a:srgbClr val="FFFFFF"/>
+          </a:solidFill>
+          <a:ln w="12700">
+            <a:solidFill>
+              <a:srgbClr val="CCCCCC"/>
+            </a:solidFill>
+          </a:ln>
+          <a:effectLst/>
+        </p:spPr>
+        <p:style>
+          <a:lnRef idx="1">
+            <a:schemeClr val="accent1"/>
+          </a:lnRef>
+          <a:fillRef idx="3">
+            <a:schemeClr val="accent1"/>
+          </a:fillRef>
+          <a:effectRef idx="2">
+            <a:schemeClr val="accent1"/>
+          </a:effectRef>
+          <a:fontRef idx="minor">
+            <a:schemeClr val="lt1"/>
+          </a:fontRef>
+        </p:style>
+        <p:txBody>
+          <a:bodyPr rtlCol="0" anchor="ctr"/>
+          <a:lstStyle/>
+          <a:p>
+            <a:pPr algn="ctr"/>
+          </a:p>
+        </p:txBody>
+      </p:sp>
+      <p:sp>
+        <p:nvSpPr>
+          <p:cNvPr id="8" name="Rectangle 7"/>
+          <p:cNvSpPr/>
+          <p:nvPr/>
+        </p:nvSpPr>
+        <p:spPr>
+          <a:xfrm>
+            <a:off x="640080" y="2916936"/>
+            <a:ext cx="109728" cy="841248"/>
+          </a:xfrm>
+          <a:prstGeom prst="rect">
+            <a:avLst/>
+          </a:prstGeom>
+          <a:solidFill>
+            <a:srgbClr val="004488"/>
+          </a:solidFill>
+          <a:ln>
+            <a:noFill/>
+          </a:ln>
+          <a:effectLst/>
+        </p:spPr>
+        <p:style>
+          <a:lnRef idx="1">
+            <a:schemeClr val="accent1"/>
+          </a:lnRef>
+          <a:fillRef idx="3">
+            <a:schemeClr val="accent1"/>
+          </a:fillRef>
+          <a:effectRef idx="2">
+            <a:schemeClr val="accent1"/>
+          </a:effectRef>
+          <a:fontRef idx="minor">
+            <a:schemeClr val="lt1"/>
+          </a:fontRef>
+        </p:style>
+        <p:txBody>
+          <a:bodyPr rtlCol="0" anchor="ctr"/>
+          <a:lstStyle/>
+          <a:p>
+            <a:pPr algn="ctr"/>
+          </a:p>
+        </p:txBody>
+      </p:sp>
+      <p:sp>
+        <p:nvSpPr>
+          <p:cNvPr id="9" name="TextBox 8"/>
+          <p:cNvSpPr txBox="1"/>
+          <p:nvPr/>
+        </p:nvSpPr>
+        <p:spPr>
+          <a:xfrm>
+            <a:off x="960120" y="2916936"/>
+            <a:ext cx="10424160" cy="841248"/>
+          </a:xfrm>
+          <a:prstGeom prst="rect">
+            <a:avLst/>
+          </a:prstGeom>
+          <a:noFill/>
+        </p:spPr>
+        <p:txBody>
+          <a:bodyPr wrap="square" anchor="ctr" lIns="0" rIns="0" tIns="0" bIns="0">
+            <a:spAutoFit/>
+          </a:bodyPr>
+          <a:lstStyle/>
+          <a:p>
+            <a:pPr>
+              <a:lnSpc>
+                <a:spcPct val="100000"/>
+              </a:lnSpc>
+            </a:pPr>
+            <a:r>
+              <a:rPr sz="1700" b="0" i="0">
+                <a:solidFill>
+                  <a:srgbClr val="2A2929"/>
+                </a:solidFill>
+                <a:latin typeface="Roboto"/>
+              </a:rPr>
+              <a:t>Behaviour, effect, next step.</a:t>
+            </a:r>
+          </a:p>
+        </p:txBody>
+      </p:sp>
+      <p:sp>
+        <p:nvSpPr>
+          <p:cNvPr id="10" name="Rectangle 9"/>
+          <p:cNvSpPr/>
+          <p:nvPr/>
+        </p:nvSpPr>
+        <p:spPr>
+          <a:xfrm>
+            <a:off x="640080" y="3867912"/>
+            <a:ext cx="10927080" cy="841248"/>
+          </a:xfrm>
+          <a:prstGeom prst="rect">
+            <a:avLst/>
+          </a:prstGeom>
+          <a:solidFill>
+            <a:srgbClr val="FFFFFF"/>
+          </a:solidFill>
+          <a:ln w="12700">
+            <a:solidFill>
+              <a:srgbClr val="CCCCCC"/>
+            </a:solidFill>
+          </a:ln>
+          <a:effectLst/>
+        </p:spPr>
+        <p:style>
+          <a:lnRef idx="1">
+            <a:schemeClr val="accent1"/>
+          </a:lnRef>
+          <a:fillRef idx="3">
+            <a:schemeClr val="accent1"/>
+          </a:fillRef>
+          <a:effectRef idx="2">
+            <a:schemeClr val="accent1"/>
+          </a:effectRef>
+          <a:fontRef idx="minor">
+            <a:schemeClr val="lt1"/>
+          </a:fontRef>
+        </p:style>
+        <p:txBody>
+          <a:bodyPr rtlCol="0" anchor="ctr"/>
+          <a:lstStyle/>
+          <a:p>
+            <a:pPr algn="ctr"/>
+          </a:p>
+        </p:txBody>
+      </p:sp>
+      <p:sp>
+        <p:nvSpPr>
+          <p:cNvPr id="11" name="Rectangle 10"/>
+          <p:cNvSpPr/>
+          <p:nvPr/>
+        </p:nvSpPr>
+        <p:spPr>
+          <a:xfrm>
+            <a:off x="640080" y="3867912"/>
+            <a:ext cx="109728" cy="841248"/>
+          </a:xfrm>
+          <a:prstGeom prst="rect">
+            <a:avLst/>
+          </a:prstGeom>
+          <a:solidFill>
+            <a:srgbClr val="004488"/>
+          </a:solidFill>
+          <a:ln>
+            <a:noFill/>
+          </a:ln>
+          <a:effectLst/>
+        </p:spPr>
+        <p:style>
+          <a:lnRef idx="1">
+            <a:schemeClr val="accent1"/>
+          </a:lnRef>
+          <a:fillRef idx="3">
+            <a:schemeClr val="accent1"/>
+          </a:fillRef>
+          <a:effectRef idx="2">
+            <a:schemeClr val="accent1"/>
+          </a:effectRef>
+          <a:fontRef idx="minor">
+            <a:schemeClr val="lt1"/>
+          </a:fontRef>
+        </p:style>
+        <p:txBody>
+          <a:bodyPr rtlCol="0" anchor="ctr"/>
+          <a:lstStyle/>
+          <a:p>
+            <a:pPr algn="ctr"/>
+          </a:p>
+        </p:txBody>
+      </p:sp>
+      <p:sp>
+        <p:nvSpPr>
+          <p:cNvPr id="12" name="TextBox 11"/>
+          <p:cNvSpPr txBox="1"/>
+          <p:nvPr/>
+        </p:nvSpPr>
+        <p:spPr>
+          <a:xfrm>
+            <a:off x="960120" y="3867912"/>
+            <a:ext cx="10424160" cy="841248"/>
+          </a:xfrm>
+          <a:prstGeom prst="rect">
+            <a:avLst/>
+          </a:prstGeom>
+          <a:noFill/>
+        </p:spPr>
+        <p:txBody>
+          <a:bodyPr wrap="square" anchor="ctr" lIns="0" rIns="0" tIns="0" bIns="0">
+            <a:spAutoFit/>
+          </a:bodyPr>
+          <a:lstStyle/>
+          <a:p>
+            <a:pPr>
+              <a:lnSpc>
+                <a:spcPct val="100000"/>
+              </a:lnSpc>
+            </a:pPr>
+            <a:r>
+              <a:rPr sz="1700" b="0" i="0">
+                <a:solidFill>
+                  <a:srgbClr val="2A2929"/>
+                </a:solidFill>
+                <a:latin typeface="Roboto"/>
+              </a:rPr>
+              <a:t>Gaps become opportunities become action plans.</a:t>
+            </a:r>
+          </a:p>
+        </p:txBody>
+      </p:sp>
+      <p:sp>
+        <p:nvSpPr>
+          <p:cNvPr id="13" name="Rectangle 12"/>
+          <p:cNvSpPr/>
+          <p:nvPr/>
+        </p:nvSpPr>
+        <p:spPr>
+          <a:xfrm>
+            <a:off x="0" y="6565392"/>
+            <a:ext cx="12191695" cy="38100"/>
+          </a:xfrm>
+          <a:prstGeom prst="rect">
+            <a:avLst/>
+          </a:prstGeom>
+          <a:solidFill>
+            <a:srgbClr val="004488"/>
+          </a:solidFill>
+          <a:ln>
+            <a:noFill/>
+          </a:ln>
+          <a:effectLst/>
+        </p:spPr>
+        <p:style>
+          <a:lnRef idx="1">
+            <a:schemeClr val="accent1"/>
+          </a:lnRef>
+          <a:fillRef idx="3">
+            <a:schemeClr val="accent1"/>
+          </a:fillRef>
+          <a:effectRef idx="2">
+            <a:schemeClr val="accent1"/>
+          </a:effectRef>
+          <a:fontRef idx="minor">
+            <a:schemeClr val="lt1"/>
+          </a:fontRef>
+        </p:style>
+        <p:txBody>
+          <a:bodyPr rtlCol="0" anchor="ctr"/>
+          <a:lstStyle/>
+          <a:p>
+            <a:pPr algn="ctr"/>
+          </a:p>
+        </p:txBody>
+      </p:sp>
+      <p:sp>
+        <p:nvSpPr>
+          <p:cNvPr id="14" name="TextBox 13"/>
+          <p:cNvSpPr txBox="1"/>
+          <p:nvPr/>
+        </p:nvSpPr>
+        <p:spPr>
+          <a:xfrm>
+            <a:off x="502920" y="6400800"/>
+            <a:ext cx="5486400" cy="320040"/>
+          </a:xfrm>
+          <a:prstGeom prst="rect">
+            <a:avLst/>
+          </a:prstGeom>
+          <a:noFill/>
+        </p:spPr>
+        <p:txBody>
+          <a:bodyPr wrap="square" anchor="t" lIns="0" rIns="0" tIns="0" bIns="0">
+            <a:spAutoFit/>
+          </a:bodyPr>
+          <a:lstStyle/>
+          <a:p>
+            <a:r>
+              <a:rPr sz="1100" b="1" i="0">
+                <a:solidFill>
+                  <a:srgbClr val="2A2929"/>
+                </a:solidFill>
+                <a:latin typeface="Roboto"/>
+              </a:rPr>
+              <a:t>Kangan </a:t>
+            </a:r>
+            <a:r>
+              <a:rPr sz="1100" b="1" i="0">
+                <a:solidFill>
+                  <a:srgbClr val="D68E10"/>
+                </a:solidFill>
+                <a:latin typeface="Roboto"/>
+              </a:rPr>
+              <a:t>Institute</a:t>
+            </a:r>
+          </a:p>
+        </p:txBody>
+      </p:sp>
+      <p:sp>
+        <p:nvSpPr>
+          <p:cNvPr id="15" name="TextBox 14"/>
+          <p:cNvSpPr txBox="1"/>
+          <p:nvPr/>
+        </p:nvSpPr>
+        <p:spPr>
+          <a:xfrm>
+            <a:off x="10515600" y="6400800"/>
+            <a:ext cx="1188720" cy="320040"/>
+          </a:xfrm>
+          <a:prstGeom prst="rect">
+            <a:avLst/>
+          </a:prstGeom>
+          <a:noFill/>
+        </p:spPr>
+        <p:txBody>
+          <a:bodyPr wrap="square" anchor="t" lIns="0" rIns="0" tIns="0" bIns="0">
+            <a:spAutoFit/>
+          </a:bodyPr>
+          <a:lstStyle/>
+          <a:p>
+            <a:pPr algn="r"/>
+            <a:r>
+              <a:rPr sz="1100" b="0" i="0">
+                <a:solidFill>
+                  <a:srgbClr val="7A7A7A"/>
+                </a:solidFill>
+                <a:latin typeface="Roboto"/>
+              </a:rPr>
+              <a:t>16</a:t>
+            </a:r>
+          </a:p>
+        </p:txBody>
+      </p:sp>
+    </p:spTree>
+  </p:cSld>
+  <p:clrMapOvr>
+    <a:masterClrMapping/>
+  </p:clrMapOvr>
+</p:sld>
+</file>
+
+<file path=ppt/slides/slide22.xml><?xml version="1.0" encoding="utf-8"?>
+<p:sld xmlns:a="http://schemas.openxmlformats.org/drawingml/2006/main" xmlns:p="http://schemas.openxmlformats.org/presentationml/2006/main" xmlns:r="http://schemas.openxmlformats.org/officeDocument/2006/relationships">
+  <p:cSld>
+    <p:bg>
+      <p:bgPr>
+        <a:solidFill>
+          <a:srgbClr val="FFFFFF"/>
+        </a:solidFill>
+        <a:effectLst/>
+      </p:bgPr>
+    </p:bg>
+    <p:spTree>
+      <p:nvGrpSpPr>
+        <p:cNvPr id="1" name=""/>
+        <p:cNvGrpSpPr/>
+        <p:nvPr/>
+      </p:nvGrpSpPr>
+      <p:grpSpPr/>
+      <p:sp>
+        <p:nvSpPr>
+          <p:cNvPr id="2" name="Rectangle 1"/>
+          <p:cNvSpPr/>
+          <p:nvPr/>
+        </p:nvSpPr>
+        <p:spPr>
+          <a:xfrm>
+            <a:off x="0" y="0"/>
+            <a:ext cx="3931920" cy="6858000"/>
+          </a:xfrm>
+          <a:prstGeom prst="rect">
+            <a:avLst/>
+          </a:prstGeom>
+          <a:solidFill>
+            <a:srgbClr val="92268F"/>
+          </a:solidFill>
+          <a:ln>
+            <a:noFill/>
+          </a:ln>
+          <a:effectLst/>
+        </p:spPr>
+        <p:style>
+          <a:lnRef idx="1">
+            <a:schemeClr val="accent1"/>
+          </a:lnRef>
+          <a:fillRef idx="3">
+            <a:schemeClr val="accent1"/>
+          </a:fillRef>
+          <a:effectRef idx="2">
+            <a:schemeClr val="accent1"/>
+          </a:effectRef>
+          <a:fontRef idx="minor">
+            <a:schemeClr val="lt1"/>
+          </a:fontRef>
+        </p:style>
+        <p:txBody>
+          <a:bodyPr rtlCol="0" anchor="ctr"/>
+          <a:lstStyle/>
+          <a:p>
+            <a:pPr algn="ctr"/>
+          </a:p>
+        </p:txBody>
+      </p:sp>
+      <p:sp>
+        <p:nvSpPr>
+          <p:cNvPr id="3" name="TextBox 2"/>
+          <p:cNvSpPr txBox="1"/>
+          <p:nvPr/>
+        </p:nvSpPr>
+        <p:spPr>
+          <a:xfrm>
+            <a:off x="365760" y="2103120"/>
+            <a:ext cx="3291840" cy="2194560"/>
+          </a:xfrm>
+          <a:prstGeom prst="rect">
+            <a:avLst/>
+          </a:prstGeom>
+          <a:noFill/>
+        </p:spPr>
+        <p:txBody>
+          <a:bodyPr wrap="square" anchor="t" lIns="0" rIns="0" tIns="0" bIns="0">
+            <a:spAutoFit/>
+          </a:bodyPr>
+          <a:lstStyle/>
+          <a:p>
+            <a:r>
+              <a:rPr sz="13000" b="1" i="0">
+                <a:solidFill>
+                  <a:srgbClr val="FFFFFF"/>
+                </a:solidFill>
+                <a:latin typeface="Roboto"/>
+              </a:rPr>
+              <a:t>05</a:t>
+            </a:r>
+          </a:p>
+        </p:txBody>
+      </p:sp>
+      <p:sp>
+        <p:nvSpPr>
+          <p:cNvPr id="4" name="TextBox 3"/>
+          <p:cNvSpPr txBox="1"/>
+          <p:nvPr/>
+        </p:nvSpPr>
+        <p:spPr>
+          <a:xfrm>
+            <a:off x="4480560" y="2468880"/>
+            <a:ext cx="7132320" cy="2194560"/>
+          </a:xfrm>
+          <a:prstGeom prst="rect">
+            <a:avLst/>
+          </a:prstGeom>
+          <a:noFill/>
+        </p:spPr>
+        <p:txBody>
+          <a:bodyPr wrap="square" anchor="t" lIns="0" rIns="0" tIns="0" bIns="0">
+            <a:spAutoFit/>
+          </a:bodyPr>
+          <a:lstStyle/>
+          <a:p>
+            <a:r>
+              <a:rPr sz="1600" b="1" i="0">
+                <a:solidFill>
+                  <a:srgbClr val="92268F"/>
+                </a:solidFill>
+                <a:latin typeface="Roboto"/>
+              </a:rPr>
+              <a:t>SECTION</a:t>
+            </a:r>
+          </a:p>
+          <a:p>
+            <a:pPr>
+              <a:spcBef>
+                <a:spcPts val="600"/>
+              </a:spcBef>
+            </a:pPr>
+            <a:r>
+              <a:rPr sz="3800" b="1" i="0">
+                <a:solidFill>
+                  <a:srgbClr val="2A2929"/>
+                </a:solidFill>
+                <a:latin typeface="Roboto"/>
+              </a:rPr>
+              <a:t>Reflect, and answer</a:t>
+            </a:r>
+          </a:p>
+          <a:p>
+            <a:pPr>
+              <a:spcBef>
+                <a:spcPts val="1000"/>
+              </a:spcBef>
+            </a:pPr>
+            <a:r>
+              <a:rPr sz="2000" b="0" i="1">
+                <a:solidFill>
+                  <a:srgbClr val="484848"/>
+                </a:solidFill>
+                <a:latin typeface="Roboto Light"/>
+              </a:rPr>
+              <a:t>how you led, in your own words</a:t>
+            </a:r>
+          </a:p>
+        </p:txBody>
+      </p:sp>
+      <p:sp>
+        <p:nvSpPr>
+          <p:cNvPr id="5" name="Rectangle 4"/>
+          <p:cNvSpPr/>
+          <p:nvPr/>
+        </p:nvSpPr>
+        <p:spPr>
+          <a:xfrm>
+            <a:off x="0" y="6565392"/>
+            <a:ext cx="12191695" cy="38100"/>
+          </a:xfrm>
+          <a:prstGeom prst="rect">
+            <a:avLst/>
+          </a:prstGeom>
+          <a:solidFill>
+            <a:srgbClr val="92268F"/>
+          </a:solidFill>
+          <a:ln>
+            <a:noFill/>
+          </a:ln>
+          <a:effectLst/>
+        </p:spPr>
+        <p:style>
+          <a:lnRef idx="1">
+            <a:schemeClr val="accent1"/>
+          </a:lnRef>
+          <a:fillRef idx="3">
+            <a:schemeClr val="accent1"/>
+          </a:fillRef>
+          <a:effectRef idx="2">
+            <a:schemeClr val="accent1"/>
+          </a:effectRef>
+          <a:fontRef idx="minor">
+            <a:schemeClr val="lt1"/>
+          </a:fontRef>
+        </p:style>
+        <p:txBody>
+          <a:bodyPr rtlCol="0" anchor="ctr"/>
+          <a:lstStyle/>
+          <a:p>
+            <a:pPr algn="ctr"/>
+          </a:p>
+        </p:txBody>
+      </p:sp>
+      <p:sp>
+        <p:nvSpPr>
+          <p:cNvPr id="6" name="TextBox 5"/>
+          <p:cNvSpPr txBox="1"/>
+          <p:nvPr/>
+        </p:nvSpPr>
+        <p:spPr>
+          <a:xfrm>
+            <a:off x="502920" y="6400800"/>
+            <a:ext cx="5486400" cy="320040"/>
+          </a:xfrm>
+          <a:prstGeom prst="rect">
+            <a:avLst/>
+          </a:prstGeom>
+          <a:noFill/>
+        </p:spPr>
+        <p:txBody>
+          <a:bodyPr wrap="square" anchor="t" lIns="0" rIns="0" tIns="0" bIns="0">
+            <a:spAutoFit/>
+          </a:bodyPr>
+          <a:lstStyle/>
+          <a:p>
+            <a:r>
+              <a:rPr sz="1100" b="1" i="0">
+                <a:solidFill>
+                  <a:srgbClr val="2A2929"/>
+                </a:solidFill>
+                <a:latin typeface="Roboto"/>
+              </a:rPr>
+              <a:t>Kangan </a:t>
+            </a:r>
+            <a:r>
+              <a:rPr sz="1100" b="1" i="0">
+                <a:solidFill>
+                  <a:srgbClr val="D68E10"/>
+                </a:solidFill>
+                <a:latin typeface="Roboto"/>
+              </a:rPr>
+              <a:t>Institute</a:t>
+            </a:r>
+          </a:p>
+        </p:txBody>
+      </p:sp>
+      <p:sp>
+        <p:nvSpPr>
+          <p:cNvPr id="7" name="TextBox 6"/>
+          <p:cNvSpPr txBox="1"/>
+          <p:nvPr/>
+        </p:nvSpPr>
+        <p:spPr>
+          <a:xfrm>
+            <a:off x="10515600" y="6400800"/>
+            <a:ext cx="1188720" cy="320040"/>
+          </a:xfrm>
+          <a:prstGeom prst="rect">
+            <a:avLst/>
+          </a:prstGeom>
+          <a:noFill/>
+        </p:spPr>
+        <p:txBody>
+          <a:bodyPr wrap="square" anchor="t" lIns="0" rIns="0" tIns="0" bIns="0">
+            <a:spAutoFit/>
+          </a:bodyPr>
+          <a:lstStyle/>
+          <a:p>
+            <a:pPr algn="r"/>
+            <a:r>
+              <a:rPr sz="1100" b="0" i="0">
+                <a:solidFill>
+                  <a:srgbClr val="7A7A7A"/>
+                </a:solidFill>
+                <a:latin typeface="Roboto"/>
+              </a:rPr>
+              <a:t/>
+            </a:r>
+          </a:p>
+        </p:txBody>
+      </p:sp>
+    </p:spTree>
+  </p:cSld>
+  <p:clrMapOvr>
+    <a:masterClrMapping/>
+  </p:clrMapOvr>
+</p:sld>
+</file>
+
+<file path=ppt/slides/slide23.xml><?xml version="1.0" encoding="utf-8"?>
+<p:sld xmlns:a="http://schemas.openxmlformats.org/drawingml/2006/main" xmlns:p="http://schemas.openxmlformats.org/presentationml/2006/main" xmlns:r="http://schemas.openxmlformats.org/officeDocument/2006/relationships">
+  <p:cSld>
+    <p:bg>
+      <p:bgPr>
+        <a:solidFill>
+          <a:srgbClr val="FFFFFF"/>
+        </a:solidFill>
+        <a:effectLst/>
+      </p:bgPr>
+    </p:bg>
+    <p:spTree>
+      <p:nvGrpSpPr>
+        <p:cNvPr id="1" name=""/>
+        <p:cNvGrpSpPr/>
+        <p:nvPr/>
+      </p:nvGrpSpPr>
+      <p:grpSpPr/>
+      <p:sp>
+        <p:nvSpPr>
+          <p:cNvPr id="2" name="TextBox 1"/>
+          <p:cNvSpPr txBox="1"/>
+          <p:nvPr/>
+        </p:nvSpPr>
+        <p:spPr>
+          <a:xfrm>
+            <a:off x="640080" y="457200"/>
+            <a:ext cx="10881360" cy="960120"/>
+          </a:xfrm>
+          <a:prstGeom prst="rect">
+            <a:avLst/>
+          </a:prstGeom>
+          <a:noFill/>
+        </p:spPr>
+        <p:txBody>
+          <a:bodyPr wrap="square" anchor="t" lIns="0" rIns="0" tIns="0" bIns="0">
+            <a:spAutoFit/>
+          </a:bodyPr>
+          <a:lstStyle/>
+          <a:p>
+            <a:r>
+              <a:rPr sz="2800" b="1" i="0">
+                <a:solidFill>
+                  <a:srgbClr val="2A2929"/>
+                </a:solidFill>
+                <a:latin typeface="Roboto"/>
+              </a:rPr>
+              <a:t>Reflect on how you led</a:t>
+            </a:r>
+          </a:p>
+        </p:txBody>
+      </p:sp>
+      <p:sp>
+        <p:nvSpPr>
+          <p:cNvPr id="3" name="Rectangle 2"/>
+          <p:cNvSpPr/>
+          <p:nvPr/>
+        </p:nvSpPr>
+        <p:spPr>
+          <a:xfrm>
+            <a:off x="658368" y="1371600"/>
+            <a:ext cx="1463040" cy="50800"/>
+          </a:xfrm>
+          <a:prstGeom prst="rect">
+            <a:avLst/>
+          </a:prstGeom>
+          <a:solidFill>
+            <a:srgbClr val="92268F"/>
+          </a:solidFill>
+          <a:ln>
+            <a:noFill/>
+          </a:ln>
+          <a:effectLst/>
+        </p:spPr>
+        <p:style>
+          <a:lnRef idx="1">
+            <a:schemeClr val="accent1"/>
+          </a:lnRef>
+          <a:fillRef idx="3">
+            <a:schemeClr val="accent1"/>
+          </a:fillRef>
+          <a:effectRef idx="2">
+            <a:schemeClr val="accent1"/>
+          </a:effectRef>
+          <a:fontRef idx="minor">
+            <a:schemeClr val="lt1"/>
+          </a:fontRef>
+        </p:style>
+        <p:txBody>
+          <a:bodyPr rtlCol="0" anchor="ctr"/>
+          <a:lstStyle/>
+          <a:p>
+            <a:pPr algn="ctr"/>
+          </a:p>
+        </p:txBody>
+      </p:sp>
+      <p:sp>
+        <p:nvSpPr>
+          <p:cNvPr id="4" name="TextBox 3"/>
+          <p:cNvSpPr txBox="1"/>
+          <p:nvPr/>
+        </p:nvSpPr>
+        <p:spPr>
+          <a:xfrm>
+            <a:off x="658368" y="1691640"/>
+            <a:ext cx="10881360" cy="4480560"/>
+          </a:xfrm>
+          <a:prstGeom prst="rect">
+            <a:avLst/>
+          </a:prstGeom>
+          <a:noFill/>
+        </p:spPr>
+        <p:txBody>
+          <a:bodyPr wrap="square" anchor="ctr" lIns="0" rIns="0" tIns="0" bIns="0">
+            <a:spAutoFit/>
+          </a:bodyPr>
+          <a:lstStyle/>
+          <a:p>
+            <a:pPr marL="0" indent="0">
+              <a:lnSpc>
+                <a:spcPct val="105000"/>
+              </a:lnSpc>
+              <a:spcBef>
+                <a:spcPts val="0"/>
+              </a:spcBef>
+              <a:spcAft>
+                <a:spcPts val="1000"/>
+              </a:spcAft>
+            </a:pPr>
+            <a:r>
+              <a:rPr sz="2400" b="1" i="0">
+                <a:solidFill>
+                  <a:srgbClr val="EDAB0C"/>
+                </a:solidFill>
+                <a:latin typeface="Roboto"/>
+              </a:rPr>
+              <a:t>■  </a:t>
+            </a:r>
+            <a:r>
+              <a:rPr sz="2400" b="0" i="0">
+                <a:solidFill>
+                  <a:srgbClr val="2A2929"/>
+                </a:solidFill>
+                <a:latin typeface="Roboto"/>
+              </a:rPr>
+              <a:t>The professional behaviours to reflect against: reliability, fairness, openness, following through.</a:t>
+            </a:r>
+          </a:p>
+          <a:p>
+            <a:pPr marL="0" indent="0">
+              <a:lnSpc>
+                <a:spcPct val="105000"/>
+              </a:lnSpc>
+              <a:spcBef>
+                <a:spcPts val="0"/>
+              </a:spcBef>
+              <a:spcAft>
+                <a:spcPts val="1000"/>
+              </a:spcAft>
+            </a:pPr>
+            <a:r>
+              <a:rPr sz="2400" b="1" i="0">
+                <a:solidFill>
+                  <a:srgbClr val="EDAB0C"/>
+                </a:solidFill>
+                <a:latin typeface="Roboto"/>
+              </a:rPr>
+              <a:t>■  </a:t>
+            </a:r>
+            <a:r>
+              <a:rPr sz="2400" b="0" i="0">
+                <a:solidFill>
+                  <a:srgbClr val="2A2929"/>
+                </a:solidFill>
+                <a:latin typeface="Roboto"/>
+              </a:rPr>
+              <a:t>A reflection reviews, it doesn't summarise: what your leading changed, what it cost, what you'd carry forward.</a:t>
+            </a:r>
+          </a:p>
+          <a:p>
+            <a:pPr marL="0" indent="0">
+              <a:lnSpc>
+                <a:spcPct val="105000"/>
+              </a:lnSpc>
+              <a:spcBef>
+                <a:spcPts val="0"/>
+              </a:spcBef>
+              <a:spcAft>
+                <a:spcPts val="1000"/>
+              </a:spcAft>
+            </a:pPr>
+            <a:r>
+              <a:rPr sz="2400" b="1" i="0">
+                <a:solidFill>
+                  <a:srgbClr val="EDAB0C"/>
+                </a:solidFill>
+                <a:latin typeface="Roboto"/>
+              </a:rPr>
+              <a:t>■  </a:t>
+            </a:r>
+            <a:r>
+              <a:rPr sz="2400" b="0" i="0">
+                <a:solidFill>
+                  <a:srgbClr val="2A2929"/>
+                </a:solidFill>
+                <a:latin typeface="Roboto"/>
+              </a:rPr>
+              <a:t>The questions that follow ask for your techniques — facilitation, coaching, conflict — cited from your own build.</a:t>
+            </a:r>
+          </a:p>
+        </p:txBody>
+      </p:sp>
+      <p:sp>
+        <p:nvSpPr>
+          <p:cNvPr id="5" name="Rectangle 4"/>
+          <p:cNvSpPr/>
+          <p:nvPr/>
+        </p:nvSpPr>
+        <p:spPr>
+          <a:xfrm>
+            <a:off x="0" y="6565392"/>
+            <a:ext cx="12191695" cy="38100"/>
+          </a:xfrm>
+          <a:prstGeom prst="rect">
+            <a:avLst/>
+          </a:prstGeom>
+          <a:solidFill>
+            <a:srgbClr val="92268F"/>
+          </a:solidFill>
+          <a:ln>
+            <a:noFill/>
+          </a:ln>
+          <a:effectLst/>
+        </p:spPr>
+        <p:style>
+          <a:lnRef idx="1">
+            <a:schemeClr val="accent1"/>
+          </a:lnRef>
+          <a:fillRef idx="3">
+            <a:schemeClr val="accent1"/>
+          </a:fillRef>
+          <a:effectRef idx="2">
+            <a:schemeClr val="accent1"/>
+          </a:effectRef>
+          <a:fontRef idx="minor">
+            <a:schemeClr val="lt1"/>
+          </a:fontRef>
+        </p:style>
+        <p:txBody>
+          <a:bodyPr rtlCol="0" anchor="ctr"/>
+          <a:lstStyle/>
+          <a:p>
+            <a:pPr algn="ctr"/>
+          </a:p>
+        </p:txBody>
+      </p:sp>
+      <p:sp>
+        <p:nvSpPr>
+          <p:cNvPr id="6" name="TextBox 5"/>
+          <p:cNvSpPr txBox="1"/>
+          <p:nvPr/>
+        </p:nvSpPr>
+        <p:spPr>
+          <a:xfrm>
+            <a:off x="502920" y="6400800"/>
+            <a:ext cx="5486400" cy="320040"/>
+          </a:xfrm>
+          <a:prstGeom prst="rect">
+            <a:avLst/>
+          </a:prstGeom>
+          <a:noFill/>
+        </p:spPr>
+        <p:txBody>
+          <a:bodyPr wrap="square" anchor="t" lIns="0" rIns="0" tIns="0" bIns="0">
+            <a:spAutoFit/>
+          </a:bodyPr>
+          <a:lstStyle/>
+          <a:p>
+            <a:r>
+              <a:rPr sz="1100" b="1" i="0">
+                <a:solidFill>
+                  <a:srgbClr val="2A2929"/>
+                </a:solidFill>
+                <a:latin typeface="Roboto"/>
+              </a:rPr>
+              <a:t>Kangan </a:t>
+            </a:r>
+            <a:r>
+              <a:rPr sz="1100" b="1" i="0">
+                <a:solidFill>
+                  <a:srgbClr val="D68E10"/>
+                </a:solidFill>
+                <a:latin typeface="Roboto"/>
+              </a:rPr>
+              <a:t>Institute</a:t>
+            </a:r>
+          </a:p>
+        </p:txBody>
+      </p:sp>
+      <p:sp>
+        <p:nvSpPr>
+          <p:cNvPr id="7" name="TextBox 6"/>
+          <p:cNvSpPr txBox="1"/>
+          <p:nvPr/>
+        </p:nvSpPr>
+        <p:spPr>
+          <a:xfrm>
+            <a:off x="10515600" y="6400800"/>
+            <a:ext cx="1188720" cy="320040"/>
+          </a:xfrm>
+          <a:prstGeom prst="rect">
+            <a:avLst/>
+          </a:prstGeom>
+          <a:noFill/>
+        </p:spPr>
+        <p:txBody>
+          <a:bodyPr wrap="square" anchor="t" lIns="0" rIns="0" tIns="0" bIns="0">
+            <a:spAutoFit/>
+          </a:bodyPr>
+          <a:lstStyle/>
+          <a:p>
+            <a:pPr algn="r"/>
+            <a:r>
+              <a:rPr sz="1100" b="0" i="0">
+                <a:solidFill>
+                  <a:srgbClr val="7A7A7A"/>
+                </a:solidFill>
+                <a:latin typeface="Roboto"/>
+              </a:rPr>
+              <a:t>17</a:t>
+            </a:r>
+          </a:p>
+        </p:txBody>
+      </p:sp>
+    </p:spTree>
+  </p:cSld>
+  <p:clrMapOvr>
+    <a:masterClrMapping/>
+  </p:clrMapOvr>
+</p:sld>
+</file>
+
+<file path=ppt/slides/slide24.xml><?xml version="1.0" encoding="utf-8"?>
+<p:sld xmlns:a="http://schemas.openxmlformats.org/drawingml/2006/main" xmlns:p="http://schemas.openxmlformats.org/presentationml/2006/main" xmlns:r="http://schemas.openxmlformats.org/officeDocument/2006/relationships">
+  <p:cSld>
+    <p:bg>
+      <p:bgPr>
+        <a:solidFill>
+          <a:srgbClr val="FFFFFF"/>
+        </a:solidFill>
+        <a:effectLst/>
+      </p:bgPr>
+    </p:bg>
+    <p:spTree>
+      <p:nvGrpSpPr>
+        <p:cNvPr id="1" name=""/>
+        <p:cNvGrpSpPr/>
+        <p:nvPr/>
+      </p:nvGrpSpPr>
+      <p:grpSpPr/>
+      <p:sp>
+        <p:nvSpPr>
+          <p:cNvPr id="2" name="Rectangle 1"/>
+          <p:cNvSpPr/>
+          <p:nvPr/>
+        </p:nvSpPr>
+        <p:spPr>
+          <a:xfrm>
+            <a:off x="0" y="0"/>
+            <a:ext cx="12191695" cy="1234440"/>
+          </a:xfrm>
+          <a:prstGeom prst="rect">
+            <a:avLst/>
+          </a:prstGeom>
+          <a:solidFill>
+            <a:srgbClr val="92268F"/>
+          </a:solidFill>
+          <a:ln>
+            <a:noFill/>
+          </a:ln>
+          <a:effectLst/>
+        </p:spPr>
+        <p:style>
+          <a:lnRef idx="1">
+            <a:schemeClr val="accent1"/>
+          </a:lnRef>
+          <a:fillRef idx="3">
+            <a:schemeClr val="accent1"/>
+          </a:fillRef>
+          <a:effectRef idx="2">
+            <a:schemeClr val="accent1"/>
+          </a:effectRef>
+          <a:fontRef idx="minor">
+            <a:schemeClr val="lt1"/>
+          </a:fontRef>
+        </p:style>
+        <p:txBody>
+          <a:bodyPr rtlCol="0" anchor="ctr"/>
+          <a:lstStyle/>
+          <a:p>
+            <a:pPr algn="ctr"/>
+          </a:p>
+        </p:txBody>
+      </p:sp>
+      <p:sp>
+        <p:nvSpPr>
+          <p:cNvPr id="3" name="Rounded Rectangle 2"/>
+          <p:cNvSpPr/>
+          <p:nvPr/>
+        </p:nvSpPr>
+        <p:spPr>
+          <a:xfrm>
+            <a:off x="640080" y="384048"/>
+            <a:ext cx="1691640" cy="457200"/>
+          </a:xfrm>
+          <a:prstGeom prst="roundRect">
+            <a:avLst/>
+          </a:prstGeom>
+          <a:solidFill>
+            <a:srgbClr val="2A2929"/>
+          </a:solidFill>
+          <a:ln>
+            <a:noFill/>
+          </a:ln>
+          <a:effectLst/>
+        </p:spPr>
+        <p:style>
+          <a:lnRef idx="1">
+            <a:schemeClr val="accent1"/>
+          </a:lnRef>
+          <a:fillRef idx="3">
+            <a:schemeClr val="accent1"/>
+          </a:fillRef>
+          <a:effectRef idx="2">
+            <a:schemeClr val="accent1"/>
+          </a:effectRef>
+          <a:fontRef idx="minor">
+            <a:schemeClr val="lt1"/>
+          </a:fontRef>
+        </p:style>
+        <p:txBody>
+          <a:bodyPr rtlCol="0" anchor="ctr"/>
+          <a:lstStyle/>
+          <a:p>
+            <a:pPr algn="ctr"/>
+            <a:r>
+              <a:rPr sz="1400" b="1" i="0">
+                <a:solidFill>
+                  <a:srgbClr val="FBB900"/>
+                </a:solidFill>
+                <a:latin typeface="Roboto"/>
+              </a:rPr>
+              <a:t>ACTIVITY</a:t>
+            </a:r>
+          </a:p>
+        </p:txBody>
+      </p:sp>
+      <p:sp>
+        <p:nvSpPr>
+          <p:cNvPr id="4" name="TextBox 3"/>
+          <p:cNvSpPr txBox="1"/>
+          <p:nvPr/>
+        </p:nvSpPr>
+        <p:spPr>
+          <a:xfrm>
+            <a:off x="2560320" y="310896"/>
+            <a:ext cx="8961120" cy="685800"/>
+          </a:xfrm>
+          <a:prstGeom prst="rect">
+            <a:avLst/>
+          </a:prstGeom>
+          <a:noFill/>
+        </p:spPr>
+        <p:txBody>
+          <a:bodyPr wrap="square" anchor="ctr" lIns="0" rIns="0" tIns="0" bIns="0">
+            <a:spAutoFit/>
+          </a:bodyPr>
+          <a:lstStyle/>
+          <a:p>
+            <a:r>
+              <a:rPr sz="2600" b="1" i="0">
+                <a:solidFill>
+                  <a:srgbClr val="FFFFFF"/>
+                </a:solidFill>
+                <a:latin typeface="Roboto"/>
+              </a:rPr>
+              <a:t>Reflect and answer the questions</a:t>
+            </a:r>
+          </a:p>
+        </p:txBody>
+      </p:sp>
+      <p:sp>
+        <p:nvSpPr>
+          <p:cNvPr id="5" name="TextBox 4"/>
+          <p:cNvSpPr txBox="1"/>
+          <p:nvPr/>
+        </p:nvSpPr>
+        <p:spPr>
+          <a:xfrm>
+            <a:off x="658368" y="1554480"/>
+            <a:ext cx="10881360" cy="4297680"/>
+          </a:xfrm>
+          <a:prstGeom prst="rect">
+            <a:avLst/>
+          </a:prstGeom>
+          <a:noFill/>
+        </p:spPr>
+        <p:txBody>
+          <a:bodyPr wrap="square" anchor="t" lIns="0" rIns="0" tIns="0" bIns="0">
+            <a:spAutoFit/>
+          </a:bodyPr>
+          <a:lstStyle/>
+          <a:p>
+            <a:pPr marL="0" indent="0">
+              <a:lnSpc>
+                <a:spcPct val="105000"/>
+              </a:lnSpc>
+              <a:spcBef>
+                <a:spcPts val="0"/>
+              </a:spcBef>
+              <a:spcAft>
+                <a:spcPts val="1000"/>
+              </a:spcAft>
+            </a:pPr>
+            <a:r>
+              <a:rPr sz="1700" b="1" i="0">
+                <a:solidFill>
+                  <a:srgbClr val="EDAB0C"/>
+                </a:solidFill>
+                <a:latin typeface="Roboto"/>
+              </a:rPr>
+              <a:t>■  </a:t>
+            </a:r>
+            <a:r>
+              <a:rPr sz="1700" b="0" i="0">
+                <a:solidFill>
+                  <a:srgbClr val="2A2929"/>
+                </a:solidFill>
+                <a:latin typeface="Roboto"/>
+              </a:rPr>
+              <a:t>Workbook — task 17, then the assessment's questions Q1 to Q3 from your own build.</a:t>
+            </a:r>
+          </a:p>
+          <a:p>
+            <a:pPr marL="0" indent="0">
+              <a:lnSpc>
+                <a:spcPct val="105000"/>
+              </a:lnSpc>
+              <a:spcBef>
+                <a:spcPts val="0"/>
+              </a:spcBef>
+              <a:spcAft>
+                <a:spcPts val="1000"/>
+              </a:spcAft>
+            </a:pPr>
+            <a:r>
+              <a:rPr sz="1700" b="1" i="0">
+                <a:solidFill>
+                  <a:srgbClr val="EDAB0C"/>
+                </a:solidFill>
+                <a:latin typeface="Roboto"/>
+              </a:rPr>
+              <a:t>■  </a:t>
+            </a:r>
+            <a:r>
+              <a:rPr sz="1700" b="0" i="0">
+                <a:solidFill>
+                  <a:srgbClr val="2A2929"/>
+                </a:solidFill>
+                <a:latin typeface="Roboto"/>
+              </a:rPr>
+              <a:t>Reflect on how you led, then answer: the requirements that applied, the techniques you used, and how you resolve conflict.</a:t>
+            </a:r>
+          </a:p>
+        </p:txBody>
+      </p:sp>
+      <p:sp>
+        <p:nvSpPr>
+          <p:cNvPr id="6" name="Rounded Rectangle 5"/>
+          <p:cNvSpPr/>
+          <p:nvPr/>
+        </p:nvSpPr>
+        <p:spPr>
+          <a:xfrm>
+            <a:off x="640080" y="5897880"/>
+            <a:ext cx="4023360" cy="457200"/>
+          </a:xfrm>
+          <a:prstGeom prst="roundRect">
+            <a:avLst/>
+          </a:prstGeom>
+          <a:solidFill>
+            <a:srgbClr val="F9F9F9"/>
+          </a:solidFill>
+          <a:ln w="12700">
+            <a:solidFill>
+              <a:srgbClr val="CCCCCC"/>
+            </a:solidFill>
+          </a:ln>
+          <a:effectLst/>
+        </p:spPr>
+        <p:style>
+          <a:lnRef idx="1">
+            <a:schemeClr val="accent1"/>
+          </a:lnRef>
+          <a:fillRef idx="3">
+            <a:schemeClr val="accent1"/>
+          </a:fillRef>
+          <a:effectRef idx="2">
+            <a:schemeClr val="accent1"/>
+          </a:effectRef>
+          <a:fontRef idx="minor">
+            <a:schemeClr val="lt1"/>
+          </a:fontRef>
+        </p:style>
+        <p:txBody>
+          <a:bodyPr rtlCol="0" anchor="ctr"/>
+          <a:lstStyle/>
+          <a:p>
+            <a:pPr algn="ctr"/>
+          </a:p>
+        </p:txBody>
+      </p:sp>
+      <p:sp>
+        <p:nvSpPr>
+          <p:cNvPr id="7" name="TextBox 6"/>
+          <p:cNvSpPr txBox="1"/>
+          <p:nvPr/>
+        </p:nvSpPr>
+        <p:spPr>
+          <a:xfrm>
+            <a:off x="822960" y="5943600"/>
+            <a:ext cx="3657600" cy="365760"/>
+          </a:xfrm>
+          <a:prstGeom prst="rect">
+            <a:avLst/>
+          </a:prstGeom>
+          <a:noFill/>
+        </p:spPr>
+        <p:txBody>
+          <a:bodyPr wrap="square" anchor="ctr" lIns="0" rIns="0" tIns="0" bIns="0">
+            <a:spAutoFit/>
+          </a:bodyPr>
+          <a:lstStyle/>
+          <a:p>
+            <a:r>
+              <a:rPr sz="1500" b="1" i="0">
+                <a:solidFill>
+                  <a:srgbClr val="2A2929"/>
+                </a:solidFill>
+                <a:latin typeface="Roboto"/>
+              </a:rPr>
+              <a:t>⏱  ~30 min</a:t>
+            </a:r>
+          </a:p>
+        </p:txBody>
+      </p:sp>
+      <p:sp>
+        <p:nvSpPr>
+          <p:cNvPr id="8" name="Rectangle 7"/>
+          <p:cNvSpPr/>
+          <p:nvPr/>
+        </p:nvSpPr>
+        <p:spPr>
+          <a:xfrm>
+            <a:off x="0" y="6565392"/>
+            <a:ext cx="12191695" cy="38100"/>
+          </a:xfrm>
+          <a:prstGeom prst="rect">
+            <a:avLst/>
+          </a:prstGeom>
+          <a:solidFill>
+            <a:srgbClr val="92268F"/>
+          </a:solidFill>
+          <a:ln>
+            <a:noFill/>
+          </a:ln>
+          <a:effectLst/>
+        </p:spPr>
+        <p:style>
+          <a:lnRef idx="1">
+            <a:schemeClr val="accent1"/>
+          </a:lnRef>
+          <a:fillRef idx="3">
+            <a:schemeClr val="accent1"/>
+          </a:fillRef>
+          <a:effectRef idx="2">
+            <a:schemeClr val="accent1"/>
+          </a:effectRef>
+          <a:fontRef idx="minor">
+            <a:schemeClr val="lt1"/>
+          </a:fontRef>
+        </p:style>
+        <p:txBody>
+          <a:bodyPr rtlCol="0" anchor="ctr"/>
+          <a:lstStyle/>
+          <a:p>
+            <a:pPr algn="ctr"/>
+          </a:p>
+        </p:txBody>
+      </p:sp>
+      <p:sp>
+        <p:nvSpPr>
+          <p:cNvPr id="9" name="TextBox 8"/>
+          <p:cNvSpPr txBox="1"/>
+          <p:nvPr/>
+        </p:nvSpPr>
+        <p:spPr>
+          <a:xfrm>
+            <a:off x="502920" y="6400800"/>
+            <a:ext cx="5486400" cy="320040"/>
+          </a:xfrm>
+          <a:prstGeom prst="rect">
+            <a:avLst/>
+          </a:prstGeom>
+          <a:noFill/>
+        </p:spPr>
+        <p:txBody>
+          <a:bodyPr wrap="square" anchor="t" lIns="0" rIns="0" tIns="0" bIns="0">
+            <a:spAutoFit/>
+          </a:bodyPr>
+          <a:lstStyle/>
+          <a:p>
+            <a:r>
+              <a:rPr sz="1100" b="1" i="0">
+                <a:solidFill>
+                  <a:srgbClr val="2A2929"/>
+                </a:solidFill>
+                <a:latin typeface="Roboto"/>
+              </a:rPr>
+              <a:t>Kangan </a:t>
+            </a:r>
+            <a:r>
+              <a:rPr sz="1100" b="1" i="0">
+                <a:solidFill>
+                  <a:srgbClr val="D68E10"/>
+                </a:solidFill>
+                <a:latin typeface="Roboto"/>
+              </a:rPr>
+              <a:t>Institute</a:t>
+            </a:r>
+          </a:p>
+        </p:txBody>
+      </p:sp>
+      <p:sp>
+        <p:nvSpPr>
+          <p:cNvPr id="10" name="TextBox 9"/>
+          <p:cNvSpPr txBox="1"/>
+          <p:nvPr/>
+        </p:nvSpPr>
+        <p:spPr>
+          <a:xfrm>
+            <a:off x="10515600" y="6400800"/>
+            <a:ext cx="1188720" cy="320040"/>
+          </a:xfrm>
+          <a:prstGeom prst="rect">
+            <a:avLst/>
+          </a:prstGeom>
+          <a:noFill/>
+        </p:spPr>
+        <p:txBody>
+          <a:bodyPr wrap="square" anchor="t" lIns="0" rIns="0" tIns="0" bIns="0">
+            <a:spAutoFit/>
+          </a:bodyPr>
+          <a:lstStyle/>
+          <a:p>
+            <a:pPr algn="r"/>
+            <a:r>
+              <a:rPr sz="1100" b="0" i="0">
+                <a:solidFill>
+                  <a:srgbClr val="7A7A7A"/>
+                </a:solidFill>
+                <a:latin typeface="Roboto"/>
+              </a:rPr>
+              <a:t>18</a:t>
+            </a:r>
+          </a:p>
+        </p:txBody>
+      </p:sp>
+    </p:spTree>
+  </p:cSld>
+  <p:clrMapOvr>
+    <a:masterClrMapping/>
+  </p:clrMapOvr>
+</p:sld>
+</file>
+
+<file path=ppt/slides/slide25.xml><?xml version="1.0" encoding="utf-8"?>
+<p:sld xmlns:a="http://schemas.openxmlformats.org/drawingml/2006/main" xmlns:p="http://schemas.openxmlformats.org/presentationml/2006/main" xmlns:r="http://schemas.openxmlformats.org/officeDocument/2006/relationships">
+  <p:cSld>
+    <p:bg>
+      <p:bgPr>
+        <a:solidFill>
+          <a:srgbClr val="F9F9F9"/>
+        </a:solidFill>
+        <a:effectLst/>
+      </p:bgPr>
+    </p:bg>
+    <p:spTree>
+      <p:nvGrpSpPr>
+        <p:cNvPr id="1" name=""/>
+        <p:cNvGrpSpPr/>
+        <p:nvPr/>
+      </p:nvGrpSpPr>
+      <p:grpSpPr/>
+      <p:sp>
+        <p:nvSpPr>
+          <p:cNvPr id="2" name="TextBox 1"/>
+          <p:cNvSpPr txBox="1"/>
+          <p:nvPr/>
+        </p:nvSpPr>
+        <p:spPr>
+          <a:xfrm>
+            <a:off x="640080" y="548640"/>
+            <a:ext cx="10881360" cy="1097280"/>
+          </a:xfrm>
+          <a:prstGeom prst="rect">
+            <a:avLst/>
+          </a:prstGeom>
+          <a:noFill/>
+        </p:spPr>
+        <p:txBody>
+          <a:bodyPr wrap="square" anchor="t" lIns="0" rIns="0" tIns="0" bIns="0">
+            <a:spAutoFit/>
+          </a:bodyPr>
+          <a:lstStyle/>
+          <a:p>
+            <a:r>
+              <a:rPr sz="3200" b="1" i="0">
+                <a:solidFill>
+                  <a:srgbClr val="2A2929"/>
+                </a:solidFill>
+                <a:latin typeface="Roboto"/>
+              </a:rPr>
+              <a:t>Key takeaways</a:t>
+            </a:r>
+          </a:p>
+          <a:p>
+            <a:pPr>
+              <a:spcBef>
+                <a:spcPts val="200"/>
+              </a:spcBef>
+            </a:pPr>
+            <a:r>
+              <a:rPr sz="1800" b="1" i="0">
+                <a:solidFill>
+                  <a:srgbClr val="92268F"/>
+                </a:solidFill>
+                <a:latin typeface="Roboto"/>
+              </a:rPr>
+              <a:t>Topic 6 · Key takeaways</a:t>
+            </a:r>
+          </a:p>
+        </p:txBody>
+      </p:sp>
+      <p:sp>
+        <p:nvSpPr>
+          <p:cNvPr id="3" name="Rectangle 2"/>
+          <p:cNvSpPr/>
+          <p:nvPr/>
+        </p:nvSpPr>
+        <p:spPr>
+          <a:xfrm>
+            <a:off x="658368" y="1600200"/>
+            <a:ext cx="1463040" cy="50800"/>
+          </a:xfrm>
+          <a:prstGeom prst="rect">
+            <a:avLst/>
+          </a:prstGeom>
+          <a:solidFill>
+            <a:srgbClr val="92268F"/>
+          </a:solidFill>
+          <a:ln>
+            <a:noFill/>
+          </a:ln>
+          <a:effectLst/>
+        </p:spPr>
+        <p:style>
+          <a:lnRef idx="1">
+            <a:schemeClr val="accent1"/>
+          </a:lnRef>
+          <a:fillRef idx="3">
+            <a:schemeClr val="accent1"/>
+          </a:fillRef>
+          <a:effectRef idx="2">
+            <a:schemeClr val="accent1"/>
+          </a:effectRef>
+          <a:fontRef idx="minor">
+            <a:schemeClr val="lt1"/>
+          </a:fontRef>
+        </p:style>
+        <p:txBody>
+          <a:bodyPr rtlCol="0" anchor="ctr"/>
+          <a:lstStyle/>
+          <a:p>
+            <a:pPr algn="ctr"/>
+          </a:p>
+        </p:txBody>
+      </p:sp>
+      <p:sp>
+        <p:nvSpPr>
+          <p:cNvPr id="4" name="Rectangle 3"/>
+          <p:cNvSpPr/>
+          <p:nvPr/>
+        </p:nvSpPr>
+        <p:spPr>
+          <a:xfrm>
+            <a:off x="640080" y="1965960"/>
+            <a:ext cx="10927080" cy="841248"/>
+          </a:xfrm>
+          <a:prstGeom prst="rect">
+            <a:avLst/>
+          </a:prstGeom>
+          <a:solidFill>
+            <a:srgbClr val="FFFFFF"/>
+          </a:solidFill>
+          <a:ln w="12700">
+            <a:solidFill>
+              <a:srgbClr val="CCCCCC"/>
+            </a:solidFill>
+          </a:ln>
+          <a:effectLst/>
+        </p:spPr>
+        <p:style>
+          <a:lnRef idx="1">
+            <a:schemeClr val="accent1"/>
+          </a:lnRef>
+          <a:fillRef idx="3">
+            <a:schemeClr val="accent1"/>
+          </a:fillRef>
+          <a:effectRef idx="2">
+            <a:schemeClr val="accent1"/>
+          </a:effectRef>
+          <a:fontRef idx="minor">
+            <a:schemeClr val="lt1"/>
+          </a:fontRef>
+        </p:style>
+        <p:txBody>
+          <a:bodyPr rtlCol="0" anchor="ctr"/>
+          <a:lstStyle/>
+          <a:p>
+            <a:pPr algn="ctr"/>
+          </a:p>
+        </p:txBody>
+      </p:sp>
+      <p:sp>
+        <p:nvSpPr>
+          <p:cNvPr id="5" name="Rectangle 4"/>
+          <p:cNvSpPr/>
+          <p:nvPr/>
+        </p:nvSpPr>
+        <p:spPr>
+          <a:xfrm>
+            <a:off x="640080" y="1965960"/>
+            <a:ext cx="109728" cy="841248"/>
+          </a:xfrm>
+          <a:prstGeom prst="rect">
+            <a:avLst/>
+          </a:prstGeom>
+          <a:solidFill>
+            <a:srgbClr val="92268F"/>
+          </a:solidFill>
+          <a:ln>
+            <a:noFill/>
+          </a:ln>
+          <a:effectLst/>
+        </p:spPr>
+        <p:style>
+          <a:lnRef idx="1">
+            <a:schemeClr val="accent1"/>
+          </a:lnRef>
+          <a:fillRef idx="3">
+            <a:schemeClr val="accent1"/>
+          </a:fillRef>
+          <a:effectRef idx="2">
+            <a:schemeClr val="accent1"/>
+          </a:effectRef>
+          <a:fontRef idx="minor">
+            <a:schemeClr val="lt1"/>
+          </a:fontRef>
+        </p:style>
+        <p:txBody>
+          <a:bodyPr rtlCol="0" anchor="ctr"/>
+          <a:lstStyle/>
+          <a:p>
+            <a:pPr algn="ctr"/>
+          </a:p>
+        </p:txBody>
+      </p:sp>
+      <p:sp>
+        <p:nvSpPr>
+          <p:cNvPr id="6" name="TextBox 5"/>
+          <p:cNvSpPr txBox="1"/>
+          <p:nvPr/>
+        </p:nvSpPr>
+        <p:spPr>
+          <a:xfrm>
+            <a:off x="960120" y="1965960"/>
+            <a:ext cx="10424160" cy="841248"/>
+          </a:xfrm>
+          <a:prstGeom prst="rect">
+            <a:avLst/>
+          </a:prstGeom>
+          <a:noFill/>
+        </p:spPr>
+        <p:txBody>
+          <a:bodyPr wrap="square" anchor="ctr" lIns="0" rIns="0" tIns="0" bIns="0">
+            <a:spAutoFit/>
+          </a:bodyPr>
+          <a:lstStyle/>
+          <a:p>
+            <a:pPr>
+              <a:lnSpc>
+                <a:spcPct val="100000"/>
+              </a:lnSpc>
+            </a:pPr>
+            <a:r>
+              <a:rPr sz="1700" b="0" i="0">
+                <a:solidFill>
+                  <a:srgbClr val="2A2929"/>
+                </a:solidFill>
+                <a:latin typeface="Roboto"/>
+              </a:rPr>
+              <a:t>The build is the vehicle; the leading is the evidence.</a:t>
+            </a:r>
+          </a:p>
+        </p:txBody>
+      </p:sp>
+      <p:sp>
+        <p:nvSpPr>
+          <p:cNvPr id="7" name="Rectangle 6"/>
+          <p:cNvSpPr/>
+          <p:nvPr/>
+        </p:nvSpPr>
+        <p:spPr>
+          <a:xfrm>
+            <a:off x="640080" y="2916936"/>
+            <a:ext cx="10927080" cy="841248"/>
+          </a:xfrm>
+          <a:prstGeom prst="rect">
+            <a:avLst/>
+          </a:prstGeom>
+          <a:solidFill>
+            <a:srgbClr val="FFFFFF"/>
+          </a:solidFill>
+          <a:ln w="12700">
+            <a:solidFill>
+              <a:srgbClr val="CCCCCC"/>
+            </a:solidFill>
+          </a:ln>
+          <a:effectLst/>
+        </p:spPr>
+        <p:style>
+          <a:lnRef idx="1">
+            <a:schemeClr val="accent1"/>
+          </a:lnRef>
+          <a:fillRef idx="3">
+            <a:schemeClr val="accent1"/>
+          </a:fillRef>
+          <a:effectRef idx="2">
+            <a:schemeClr val="accent1"/>
+          </a:effectRef>
+          <a:fontRef idx="minor">
+            <a:schemeClr val="lt1"/>
+          </a:fontRef>
+        </p:style>
+        <p:txBody>
+          <a:bodyPr rtlCol="0" anchor="ctr"/>
+          <a:lstStyle/>
+          <a:p>
+            <a:pPr algn="ctr"/>
+          </a:p>
+        </p:txBody>
+      </p:sp>
+      <p:sp>
+        <p:nvSpPr>
+          <p:cNvPr id="8" name="Rectangle 7"/>
+          <p:cNvSpPr/>
+          <p:nvPr/>
+        </p:nvSpPr>
+        <p:spPr>
+          <a:xfrm>
+            <a:off x="640080" y="2916936"/>
+            <a:ext cx="109728" cy="841248"/>
+          </a:xfrm>
+          <a:prstGeom prst="rect">
+            <a:avLst/>
+          </a:prstGeom>
+          <a:solidFill>
+            <a:srgbClr val="92268F"/>
+          </a:solidFill>
+          <a:ln>
+            <a:noFill/>
+          </a:ln>
+          <a:effectLst/>
+        </p:spPr>
+        <p:style>
+          <a:lnRef idx="1">
+            <a:schemeClr val="accent1"/>
+          </a:lnRef>
+          <a:fillRef idx="3">
+            <a:schemeClr val="accent1"/>
+          </a:fillRef>
+          <a:effectRef idx="2">
+            <a:schemeClr val="accent1"/>
+          </a:effectRef>
+          <a:fontRef idx="minor">
+            <a:schemeClr val="lt1"/>
+          </a:fontRef>
+        </p:style>
+        <p:txBody>
+          <a:bodyPr rtlCol="0" anchor="ctr"/>
+          <a:lstStyle/>
+          <a:p>
+            <a:pPr algn="ctr"/>
+          </a:p>
+        </p:txBody>
+      </p:sp>
+      <p:sp>
+        <p:nvSpPr>
+          <p:cNvPr id="9" name="TextBox 8"/>
+          <p:cNvSpPr txBox="1"/>
+          <p:nvPr/>
+        </p:nvSpPr>
+        <p:spPr>
+          <a:xfrm>
+            <a:off x="960120" y="2916936"/>
+            <a:ext cx="10424160" cy="841248"/>
+          </a:xfrm>
+          <a:prstGeom prst="rect">
+            <a:avLst/>
+          </a:prstGeom>
+          <a:noFill/>
+        </p:spPr>
+        <p:txBody>
+          <a:bodyPr wrap="square" anchor="ctr" lIns="0" rIns="0" tIns="0" bIns="0">
+            <a:spAutoFit/>
+          </a:bodyPr>
+          <a:lstStyle/>
+          <a:p>
+            <a:pPr>
+              <a:lnSpc>
+                <a:spcPct val="100000"/>
+              </a:lnSpc>
+            </a:pPr>
+            <a:r>
+              <a:rPr sz="1700" b="0" i="0">
+                <a:solidFill>
+                  <a:srgbClr val="2A2929"/>
+                </a:solidFill>
+                <a:latin typeface="Roboto"/>
+              </a:rPr>
+              <a:t>Real episodes, techniques named, measured against the plan.</a:t>
+            </a:r>
+          </a:p>
+        </p:txBody>
+      </p:sp>
+      <p:sp>
+        <p:nvSpPr>
+          <p:cNvPr id="10" name="Rectangle 9"/>
+          <p:cNvSpPr/>
+          <p:nvPr/>
+        </p:nvSpPr>
+        <p:spPr>
+          <a:xfrm>
+            <a:off x="640080" y="3867912"/>
+            <a:ext cx="10927080" cy="841248"/>
+          </a:xfrm>
+          <a:prstGeom prst="rect">
+            <a:avLst/>
+          </a:prstGeom>
+          <a:solidFill>
+            <a:srgbClr val="FFFFFF"/>
+          </a:solidFill>
+          <a:ln w="12700">
+            <a:solidFill>
+              <a:srgbClr val="CCCCCC"/>
+            </a:solidFill>
+          </a:ln>
+          <a:effectLst/>
+        </p:spPr>
+        <p:style>
+          <a:lnRef idx="1">
+            <a:schemeClr val="accent1"/>
+          </a:lnRef>
+          <a:fillRef idx="3">
+            <a:schemeClr val="accent1"/>
+          </a:fillRef>
+          <a:effectRef idx="2">
+            <a:schemeClr val="accent1"/>
+          </a:effectRef>
+          <a:fontRef idx="minor">
+            <a:schemeClr val="lt1"/>
+          </a:fontRef>
+        </p:style>
+        <p:txBody>
+          <a:bodyPr rtlCol="0" anchor="ctr"/>
+          <a:lstStyle/>
+          <a:p>
+            <a:pPr algn="ctr"/>
+          </a:p>
+        </p:txBody>
+      </p:sp>
+      <p:sp>
+        <p:nvSpPr>
+          <p:cNvPr id="11" name="Rectangle 10"/>
+          <p:cNvSpPr/>
+          <p:nvPr/>
+        </p:nvSpPr>
+        <p:spPr>
+          <a:xfrm>
+            <a:off x="640080" y="3867912"/>
+            <a:ext cx="109728" cy="841248"/>
+          </a:xfrm>
+          <a:prstGeom prst="rect">
+            <a:avLst/>
+          </a:prstGeom>
+          <a:solidFill>
+            <a:srgbClr val="92268F"/>
+          </a:solidFill>
+          <a:ln>
+            <a:noFill/>
+          </a:ln>
+          <a:effectLst/>
+        </p:spPr>
+        <p:style>
+          <a:lnRef idx="1">
+            <a:schemeClr val="accent1"/>
+          </a:lnRef>
+          <a:fillRef idx="3">
+            <a:schemeClr val="accent1"/>
+          </a:fillRef>
+          <a:effectRef idx="2">
+            <a:schemeClr val="accent1"/>
+          </a:effectRef>
+          <a:fontRef idx="minor">
+            <a:schemeClr val="lt1"/>
+          </a:fontRef>
+        </p:style>
+        <p:txBody>
+          <a:bodyPr rtlCol="0" anchor="ctr"/>
+          <a:lstStyle/>
+          <a:p>
+            <a:pPr algn="ctr"/>
+          </a:p>
+        </p:txBody>
+      </p:sp>
+      <p:sp>
+        <p:nvSpPr>
+          <p:cNvPr id="12" name="TextBox 11"/>
+          <p:cNvSpPr txBox="1"/>
+          <p:nvPr/>
+        </p:nvSpPr>
+        <p:spPr>
+          <a:xfrm>
+            <a:off x="960120" y="3867912"/>
+            <a:ext cx="10424160" cy="841248"/>
+          </a:xfrm>
+          <a:prstGeom prst="rect">
+            <a:avLst/>
+          </a:prstGeom>
+          <a:noFill/>
+        </p:spPr>
+        <p:txBody>
+          <a:bodyPr wrap="square" anchor="ctr" lIns="0" rIns="0" tIns="0" bIns="0">
+            <a:spAutoFit/>
+          </a:bodyPr>
+          <a:lstStyle/>
+          <a:p>
+            <a:pPr>
+              <a:lnSpc>
+                <a:spcPct val="100000"/>
+              </a:lnSpc>
+            </a:pPr>
+            <a:r>
+              <a:rPr sz="1700" b="0" i="0">
+                <a:solidFill>
+                  <a:srgbClr val="2A2929"/>
+                </a:solidFill>
+                <a:latin typeface="Roboto"/>
+              </a:rPr>
+              <a:t>Reflection reviews; answers cite your own build.</a:t>
+            </a:r>
+          </a:p>
+        </p:txBody>
+      </p:sp>
+      <p:sp>
+        <p:nvSpPr>
+          <p:cNvPr id="13" name="Rectangle 12"/>
+          <p:cNvSpPr/>
+          <p:nvPr/>
+        </p:nvSpPr>
+        <p:spPr>
+          <a:xfrm>
+            <a:off x="0" y="6565392"/>
+            <a:ext cx="12191695" cy="38100"/>
+          </a:xfrm>
+          <a:prstGeom prst="rect">
+            <a:avLst/>
+          </a:prstGeom>
+          <a:solidFill>
+            <a:srgbClr val="92268F"/>
+          </a:solidFill>
+          <a:ln>
+            <a:noFill/>
+          </a:ln>
+          <a:effectLst/>
+        </p:spPr>
+        <p:style>
+          <a:lnRef idx="1">
+            <a:schemeClr val="accent1"/>
+          </a:lnRef>
+          <a:fillRef idx="3">
+            <a:schemeClr val="accent1"/>
+          </a:fillRef>
+          <a:effectRef idx="2">
+            <a:schemeClr val="accent1"/>
+          </a:effectRef>
+          <a:fontRef idx="minor">
+            <a:schemeClr val="lt1"/>
+          </a:fontRef>
+        </p:style>
+        <p:txBody>
+          <a:bodyPr rtlCol="0" anchor="ctr"/>
+          <a:lstStyle/>
+          <a:p>
+            <a:pPr algn="ctr"/>
+          </a:p>
+        </p:txBody>
+      </p:sp>
+      <p:sp>
+        <p:nvSpPr>
+          <p:cNvPr id="14" name="TextBox 13"/>
+          <p:cNvSpPr txBox="1"/>
+          <p:nvPr/>
+        </p:nvSpPr>
+        <p:spPr>
+          <a:xfrm>
+            <a:off x="502920" y="6400800"/>
+            <a:ext cx="5486400" cy="320040"/>
+          </a:xfrm>
+          <a:prstGeom prst="rect">
+            <a:avLst/>
+          </a:prstGeom>
+          <a:noFill/>
+        </p:spPr>
+        <p:txBody>
+          <a:bodyPr wrap="square" anchor="t" lIns="0" rIns="0" tIns="0" bIns="0">
+            <a:spAutoFit/>
+          </a:bodyPr>
+          <a:lstStyle/>
+          <a:p>
+            <a:r>
+              <a:rPr sz="1100" b="1" i="0">
+                <a:solidFill>
+                  <a:srgbClr val="2A2929"/>
+                </a:solidFill>
+                <a:latin typeface="Roboto"/>
+              </a:rPr>
+              <a:t>Kangan </a:t>
+            </a:r>
+            <a:r>
+              <a:rPr sz="1100" b="1" i="0">
+                <a:solidFill>
+                  <a:srgbClr val="D68E10"/>
+                </a:solidFill>
+                <a:latin typeface="Roboto"/>
+              </a:rPr>
+              <a:t>Institute</a:t>
+            </a:r>
+          </a:p>
+        </p:txBody>
+      </p:sp>
+      <p:sp>
+        <p:nvSpPr>
+          <p:cNvPr id="15" name="TextBox 14"/>
+          <p:cNvSpPr txBox="1"/>
+          <p:nvPr/>
+        </p:nvSpPr>
+        <p:spPr>
+          <a:xfrm>
+            <a:off x="10515600" y="6400800"/>
+            <a:ext cx="1188720" cy="320040"/>
+          </a:xfrm>
+          <a:prstGeom prst="rect">
+            <a:avLst/>
+          </a:prstGeom>
+          <a:noFill/>
+        </p:spPr>
+        <p:txBody>
+          <a:bodyPr wrap="square" anchor="t" lIns="0" rIns="0" tIns="0" bIns="0">
+            <a:spAutoFit/>
+          </a:bodyPr>
+          <a:lstStyle/>
+          <a:p>
+            <a:pPr algn="r"/>
+            <a:r>
+              <a:rPr sz="1100" b="0" i="0">
+                <a:solidFill>
+                  <a:srgbClr val="7A7A7A"/>
+                </a:solidFill>
+                <a:latin typeface="Roboto"/>
+              </a:rPr>
+              <a:t>19</a:t>
+            </a:r>
+          </a:p>
+        </p:txBody>
+      </p:sp>
+    </p:spTree>
+  </p:cSld>
+  <p:clrMapOvr>
+    <a:masterClrMapping/>
+  </p:clrMapOvr>
+</p:sld>
+</file>
+
+<file path=ppt/slides/slide26.xml><?xml version="1.0" encoding="utf-8"?>
+<p:sld xmlns:a="http://schemas.openxmlformats.org/drawingml/2006/main" xmlns:p="http://schemas.openxmlformats.org/presentationml/2006/main" xmlns:r="http://schemas.openxmlformats.org/officeDocument/2006/relationships">
+  <p:cSld>
+    <p:bg>
+      <p:bgPr>
+        <a:solidFill>
+          <a:srgbClr val="2A2929"/>
+        </a:solidFill>
+        <a:effectLst/>
+      </p:bgPr>
+    </p:bg>
+    <p:spTree>
+      <p:nvGrpSpPr>
+        <p:cNvPr id="1" name=""/>
+        <p:cNvGrpSpPr/>
+        <p:nvPr/>
+      </p:nvGrpSpPr>
+      <p:grpSpPr/>
+      <p:sp>
+        <p:nvSpPr>
+          <p:cNvPr id="2" name="Rectangle 1"/>
+          <p:cNvSpPr/>
+          <p:nvPr/>
+        </p:nvSpPr>
+        <p:spPr>
+          <a:xfrm>
+            <a:off x="0" y="0"/>
+            <a:ext cx="411480" cy="6858000"/>
           </a:xfrm>
           <a:prstGeom prst="rect">
             <a:avLst/>
@@ -8763,14 +11759,14 @@
       </p:sp>
       <p:sp>
         <p:nvSpPr>
-          <p:cNvPr id="7" name="TextBox 6"/>
+          <p:cNvPr id="3" name="TextBox 2"/>
           <p:cNvSpPr txBox="1"/>
           <p:nvPr/>
         </p:nvSpPr>
         <p:spPr>
           <a:xfrm>
-            <a:off x="502920" y="6400800"/>
-            <a:ext cx="5486400" cy="320040"/>
+            <a:off x="914400" y="1463040"/>
+            <a:ext cx="10515600" cy="4023360"/>
           </a:xfrm>
           <a:prstGeom prst="rect">
             <a:avLst/>
@@ -8784,57 +11780,51 @@
           <a:lstStyle/>
           <a:p>
             <a:r>
-              <a:rPr sz="1100" b="1" i="0">
-                <a:solidFill>
-                  <a:srgbClr val="2A2929"/>
-                </a:solidFill>
-                <a:latin typeface="Roboto"/>
-              </a:rPr>
-              <a:t>Kangan </a:t>
-            </a:r>
-            <a:r>
-              <a:rPr sz="1100" b="1" i="0">
-                <a:solidFill>
-                  <a:srgbClr val="D68E10"/>
-                </a:solidFill>
-                <a:latin typeface="Roboto"/>
-              </a:rPr>
-              <a:t>Institute</a:t>
-            </a:r>
-          </a:p>
-        </p:txBody>
-      </p:sp>
-      <p:sp>
-        <p:nvSpPr>
-          <p:cNvPr id="8" name="TextBox 7"/>
-          <p:cNvSpPr txBox="1"/>
-          <p:nvPr/>
-        </p:nvSpPr>
-        <p:spPr>
-          <a:xfrm>
-            <a:off x="10515600" y="6400800"/>
-            <a:ext cx="1188720" cy="320040"/>
-          </a:xfrm>
-          <a:prstGeom prst="rect">
-            <a:avLst/>
-          </a:prstGeom>
-          <a:noFill/>
-        </p:spPr>
-        <p:txBody>
-          <a:bodyPr wrap="square" anchor="t" lIns="0" rIns="0" tIns="0" bIns="0">
-            <a:spAutoFit/>
-          </a:bodyPr>
-          <a:lstStyle/>
-          <a:p>
-            <a:pPr algn="r"/>
-            <a:r>
-              <a:rPr sz="1100" b="0" i="0">
-                <a:solidFill>
-                  <a:srgbClr val="7A7A7A"/>
-                </a:solidFill>
-                <a:latin typeface="Roboto"/>
-              </a:rPr>
-              <a:t>1</a:t>
+              <a:rPr sz="4000" b="1" i="0">
+                <a:solidFill>
+                  <a:srgbClr val="FFFFFF"/>
+                </a:solidFill>
+                <a:latin typeface="Roboto"/>
+              </a:rPr>
+              <a:t>Next: Topic 7 — the individual deploy</a:t>
+            </a:r>
+          </a:p>
+          <a:p>
+            <a:pPr>
+              <a:lnSpc>
+                <a:spcPct val="105000"/>
+              </a:lnSpc>
+              <a:spcBef>
+                <a:spcPts val="1200"/>
+              </a:spcBef>
+            </a:pPr>
+            <a:r>
+              <a:rPr sz="1900" b="0" i="0">
+                <a:solidFill>
+                  <a:srgbClr val="E8E8E8"/>
+                </a:solidFill>
+                <a:latin typeface="Roboto Light"/>
+              </a:rPr>
+              <a:t>The team delivered, and you led it — planned, run, measured, developed, reflected.</a:t>
+            </a:r>
+          </a:p>
+          <a:p>
+            <a:pPr>
+              <a:lnSpc>
+                <a:spcPct val="105000"/>
+              </a:lnSpc>
+              <a:spcBef>
+                <a:spcPts val="1200"/>
+              </a:spcBef>
+            </a:pPr>
+            <a:r>
+              <a:rPr sz="1900" b="0" i="0">
+                <a:solidFill>
+                  <a:srgbClr val="E8E8E8"/>
+                </a:solidFill>
+                <a:latin typeface="Roboto Light"/>
+              </a:rPr>
+              <a:t>Next is AT3: each member individually deploys, tests and proves the improvement.</a:t>
             </a:r>
           </a:p>
         </p:txBody>
@@ -8988,7 +11978,7 @@
                 </a:solidFill>
                 <a:latin typeface="Roboto"/>
               </a:rPr>
-              <a:t>Coaching &amp; supporting</a:t>
+              <a:t>Do the work, and integrate the build</a:t>
             </a:r>
           </a:p>
           <a:p>
@@ -9004,7 +11994,7 @@
                 </a:solidFill>
                 <a:latin typeface="Roboto Light"/>
               </a:rPr>
-              <a:t>coach the people, run the build</a:t>
+              <a:t>four components, one template</a:t>
             </a:r>
           </a:p>
         </p:txBody>
@@ -9186,7 +12176,7 @@
                 </a:solidFill>
                 <a:latin typeface="Roboto"/>
               </a:rPr>
-              <a:t>The divided-IaC write — your vehicle</a:t>
+              <a:t>The build, and where leadership acts</a:t>
             </a:r>
           </a:p>
         </p:txBody>
@@ -9284,7 +12274,7 @@
                 </a:solidFill>
                 <a:latin typeface="Roboto"/>
               </a:rPr>
-              <a:t>The team writes four components — network, compute, database, storage — one per member, integrated into one template.</a:t>
+              <a:t>The team writes four components, one each; they integrate into one deployable template the team confirms together.</a:t>
             </a:r>
           </a:p>
           <a:p>
@@ -9315,7 +12305,7 @@
                 </a:solidFill>
                 <a:latin typeface="Roboto"/>
               </a:rPr>
-              <a:t>The build flows: component drafts → integrate into one template → review and monitor → team sign-off.</a:t>
+              <a:t>Your code is submitted as itself — kept where the team can see it, not copied into worksheets.</a:t>
             </a:r>
           </a:p>
           <a:p>
@@ -9346,7 +12336,7 @@
                 </a:solidFill>
                 <a:latin typeface="Roboto"/>
               </a:rPr>
-              <a:t>You don't write the components; you run the build — coaching, supporting and monitoring the team through it.</a:t>
+              <a:t>The leader's work sits on the flow — coaching, unblocking, integrating — not inside a component.</a:t>
             </a:r>
           </a:p>
         </p:txBody>
@@ -9525,48 +12515,14 @@
       <p:grpSpPr/>
       <p:sp>
         <p:nvSpPr>
-          <p:cNvPr id="2" name="TextBox 1"/>
-          <p:cNvSpPr txBox="1"/>
-          <p:nvPr/>
-        </p:nvSpPr>
-        <p:spPr>
-          <a:xfrm>
-            <a:off x="640080" y="457200"/>
-            <a:ext cx="10881360" cy="960120"/>
-          </a:xfrm>
-          <a:prstGeom prst="rect">
-            <a:avLst/>
-          </a:prstGeom>
-          <a:noFill/>
-        </p:spPr>
-        <p:txBody>
-          <a:bodyPr wrap="square" anchor="t" lIns="0" rIns="0" tIns="0" bIns="0">
-            <a:spAutoFit/>
-          </a:bodyPr>
-          <a:lstStyle/>
-          <a:p>
-            <a:r>
-              <a:rPr sz="2800" b="1" i="0">
-                <a:solidFill>
-                  <a:srgbClr val="2A2929"/>
-                </a:solidFill>
-                <a:latin typeface="Roboto"/>
-              </a:rPr>
-              <a:t>Mentoring &amp; coaching techniques</a:t>
-            </a:r>
-          </a:p>
-        </p:txBody>
-      </p:sp>
-      <p:sp>
-        <p:nvSpPr>
-          <p:cNvPr id="3" name="Rectangle 2"/>
+          <p:cNvPr id="2" name="Rectangle 1"/>
           <p:cNvSpPr/>
           <p:nvPr/>
         </p:nvSpPr>
         <p:spPr>
           <a:xfrm>
-            <a:off x="658368" y="1371600"/>
-            <a:ext cx="1463040" cy="50800"/>
+            <a:off x="0" y="0"/>
+            <a:ext cx="12191695" cy="1234440"/>
           </a:xfrm>
           <a:prstGeom prst="rect">
             <a:avLst/>
@@ -9603,14 +12559,67 @@
       </p:sp>
       <p:sp>
         <p:nvSpPr>
+          <p:cNvPr id="3" name="Rounded Rectangle 2"/>
+          <p:cNvSpPr/>
+          <p:nvPr/>
+        </p:nvSpPr>
+        <p:spPr>
+          <a:xfrm>
+            <a:off x="640080" y="384048"/>
+            <a:ext cx="1691640" cy="457200"/>
+          </a:xfrm>
+          <a:prstGeom prst="roundRect">
+            <a:avLst/>
+          </a:prstGeom>
+          <a:solidFill>
+            <a:srgbClr val="2A2929"/>
+          </a:solidFill>
+          <a:ln>
+            <a:noFill/>
+          </a:ln>
+          <a:effectLst/>
+        </p:spPr>
+        <p:style>
+          <a:lnRef idx="1">
+            <a:schemeClr val="accent1"/>
+          </a:lnRef>
+          <a:fillRef idx="3">
+            <a:schemeClr val="accent1"/>
+          </a:fillRef>
+          <a:effectRef idx="2">
+            <a:schemeClr val="accent1"/>
+          </a:effectRef>
+          <a:fontRef idx="minor">
+            <a:schemeClr val="lt1"/>
+          </a:fontRef>
+        </p:style>
+        <p:txBody>
+          <a:bodyPr rtlCol="0" anchor="ctr"/>
+          <a:lstStyle/>
+          <a:p>
+            <a:pPr algn="ctr"/>
+            <a:r>
+              <a:rPr sz="1400" b="1" i="0">
+                <a:solidFill>
+                  <a:srgbClr val="FBB900"/>
+                </a:solidFill>
+                <a:latin typeface="Roboto"/>
+              </a:rPr>
+              <a:t>ACTIVITY</a:t>
+            </a:r>
+          </a:p>
+        </p:txBody>
+      </p:sp>
+      <p:sp>
+        <p:nvSpPr>
           <p:cNvPr id="4" name="TextBox 3"/>
           <p:cNvSpPr txBox="1"/>
           <p:nvPr/>
         </p:nvSpPr>
         <p:spPr>
           <a:xfrm>
-            <a:off x="658368" y="1691640"/>
-            <a:ext cx="10881360" cy="4480560"/>
+            <a:off x="2560320" y="310896"/>
+            <a:ext cx="8961120" cy="685800"/>
           </a:xfrm>
           <a:prstGeom prst="rect">
             <a:avLst/>
@@ -9619,6 +12628,40 @@
         </p:spPr>
         <p:txBody>
           <a:bodyPr wrap="square" anchor="ctr" lIns="0" rIns="0" tIns="0" bIns="0">
+            <a:spAutoFit/>
+          </a:bodyPr>
+          <a:lstStyle/>
+          <a:p>
+            <a:r>
+              <a:rPr sz="2600" b="1" i="0">
+                <a:solidFill>
+                  <a:srgbClr val="FFFFFF"/>
+                </a:solidFill>
+                <a:latin typeface="Roboto"/>
+              </a:rPr>
+              <a:t>Build and integrate</a:t>
+            </a:r>
+          </a:p>
+        </p:txBody>
+      </p:sp>
+      <p:sp>
+        <p:nvSpPr>
+          <p:cNvPr id="5" name="TextBox 4"/>
+          <p:cNvSpPr txBox="1"/>
+          <p:nvPr/>
+        </p:nvSpPr>
+        <p:spPr>
+          <a:xfrm>
+            <a:off x="658368" y="1554480"/>
+            <a:ext cx="10881360" cy="4297680"/>
+          </a:xfrm>
+          <a:prstGeom prst="rect">
+            <a:avLst/>
+          </a:prstGeom>
+          <a:noFill/>
+        </p:spPr>
+        <p:txBody>
+          <a:bodyPr wrap="square" anchor="t" lIns="0" rIns="0" tIns="0" bIns="0">
             <a:spAutoFit/>
           </a:bodyPr>
           <a:lstStyle/>
@@ -9635,7 +12678,7 @@
               </a:spcAft>
             </a:pPr>
             <a:r>
-              <a:rPr sz="2400" b="1" i="0">
+              <a:rPr sz="1700" b="1" i="0">
                 <a:solidFill>
                   <a:srgbClr val="EDAB0C"/>
                 </a:solidFill>
@@ -9644,13 +12687,13 @@
               <a:t>■  </a:t>
             </a:r>
             <a:r>
-              <a:rPr sz="2400" b="0" i="0">
+              <a:rPr sz="1700" b="0" i="0">
                 <a:solidFill>
                   <a:srgbClr val="2A2929"/>
                 </a:solidFill>
                 <a:latin typeface="Roboto"/>
               </a:rPr>
-              <a:t>Coaching develops capability in the moment; mentoring builds it over time — both grow the person, not just the task (KE 4).</a:t>
+              <a:t>Workbook — tasks 7 and 8.</a:t>
             </a:r>
           </a:p>
           <a:p>
@@ -9666,7 +12709,7 @@
               </a:spcAft>
             </a:pPr>
             <a:r>
-              <a:rPr sz="2400" b="1" i="0">
+              <a:rPr sz="1700" b="1" i="0">
                 <a:solidFill>
                   <a:srgbClr val="EDAB0C"/>
                 </a:solidFill>
@@ -9675,51 +12718,100 @@
               <a:t>■  </a:t>
             </a:r>
             <a:r>
-              <a:rPr sz="2400" b="0" i="0">
+              <a:rPr sz="1700" b="0" i="0">
                 <a:solidFill>
                   <a:srgbClr val="2A2929"/>
                 </a:solidFill>
                 <a:latin typeface="Roboto"/>
               </a:rPr>
-              <a:t>Techniques: ask before telling, model then hand over, give room to try, check understanding.</a:t>
-            </a:r>
-          </a:p>
-          <a:p>
-            <a:pPr marL="0" indent="0">
-              <a:lnSpc>
-                <a:spcPct val="105000"/>
-              </a:lnSpc>
-              <a:spcBef>
-                <a:spcPts val="0"/>
-              </a:spcBef>
-              <a:spcAft>
-                <a:spcPts val="1000"/>
-              </a:spcAft>
-            </a:pPr>
-            <a:r>
-              <a:rPr sz="2400" b="1" i="0">
-                <a:solidFill>
-                  <a:srgbClr val="EDAB0C"/>
-                </a:solidFill>
-                <a:latin typeface="Roboto"/>
-              </a:rPr>
-              <a:t>■  </a:t>
-            </a:r>
-            <a:r>
-              <a:rPr sz="2400" b="0" i="0">
+              <a:t>Build your allocated component and record where it lives, then integrate the four components into one deployable template and confirm it as a team.</a:t>
+            </a:r>
+          </a:p>
+        </p:txBody>
+      </p:sp>
+      <p:sp>
+        <p:nvSpPr>
+          <p:cNvPr id="6" name="Rounded Rectangle 5"/>
+          <p:cNvSpPr/>
+          <p:nvPr/>
+        </p:nvSpPr>
+        <p:spPr>
+          <a:xfrm>
+            <a:off x="640080" y="5897880"/>
+            <a:ext cx="4023360" cy="457200"/>
+          </a:xfrm>
+          <a:prstGeom prst="roundRect">
+            <a:avLst/>
+          </a:prstGeom>
+          <a:solidFill>
+            <a:srgbClr val="F9F9F9"/>
+          </a:solidFill>
+          <a:ln w="12700">
+            <a:solidFill>
+              <a:srgbClr val="CCCCCC"/>
+            </a:solidFill>
+          </a:ln>
+          <a:effectLst/>
+        </p:spPr>
+        <p:style>
+          <a:lnRef idx="1">
+            <a:schemeClr val="accent1"/>
+          </a:lnRef>
+          <a:fillRef idx="3">
+            <a:schemeClr val="accent1"/>
+          </a:fillRef>
+          <a:effectRef idx="2">
+            <a:schemeClr val="accent1"/>
+          </a:effectRef>
+          <a:fontRef idx="minor">
+            <a:schemeClr val="lt1"/>
+          </a:fontRef>
+        </p:style>
+        <p:txBody>
+          <a:bodyPr rtlCol="0" anchor="ctr"/>
+          <a:lstStyle/>
+          <a:p>
+            <a:pPr algn="ctr"/>
+          </a:p>
+        </p:txBody>
+      </p:sp>
+      <p:sp>
+        <p:nvSpPr>
+          <p:cNvPr id="7" name="TextBox 6"/>
+          <p:cNvSpPr txBox="1"/>
+          <p:nvPr/>
+        </p:nvSpPr>
+        <p:spPr>
+          <a:xfrm>
+            <a:off x="822960" y="5943600"/>
+            <a:ext cx="3657600" cy="365760"/>
+          </a:xfrm>
+          <a:prstGeom prst="rect">
+            <a:avLst/>
+          </a:prstGeom>
+          <a:noFill/>
+        </p:spPr>
+        <p:txBody>
+          <a:bodyPr wrap="square" anchor="ctr" lIns="0" rIns="0" tIns="0" bIns="0">
+            <a:spAutoFit/>
+          </a:bodyPr>
+          <a:lstStyle/>
+          <a:p>
+            <a:r>
+              <a:rPr sz="1500" b="1" i="0">
                 <a:solidFill>
                   <a:srgbClr val="2A2929"/>
                 </a:solidFill>
                 <a:latin typeface="Roboto"/>
               </a:rPr>
-              <a:t>Coaching is how you enhance the workplace culture — a team that learns from each other, not one that waits to be told.</a:t>
-            </a:r>
-          </a:p>
-        </p:txBody>
-      </p:sp>
-      <p:sp>
-        <p:nvSpPr>
-          <p:cNvPr id="5" name="Rectangle 4"/>
+              <a:t>⏱  ~60 min</a:t>
+            </a:r>
+          </a:p>
+        </p:txBody>
+      </p:sp>
+      <p:sp>
+        <p:nvSpPr>
+          <p:cNvPr id="8" name="Rectangle 7"/>
           <p:cNvSpPr/>
           <p:nvPr/>
         </p:nvSpPr>
@@ -9763,7 +12855,7 @@
       </p:sp>
       <p:sp>
         <p:nvSpPr>
-          <p:cNvPr id="6" name="TextBox 5"/>
+          <p:cNvPr id="9" name="TextBox 8"/>
           <p:cNvSpPr txBox="1"/>
           <p:nvPr/>
         </p:nvSpPr>
@@ -9806,7 +12898,7 @@
       </p:sp>
       <p:sp>
         <p:nvSpPr>
-          <p:cNvPr id="7" name="TextBox 6"/>
+          <p:cNvPr id="10" name="TextBox 9"/>
           <p:cNvSpPr txBox="1"/>
           <p:nvPr/>
         </p:nvSpPr>
@@ -9853,7 +12945,7 @@
     <p:bg>
       <p:bgPr>
         <a:solidFill>
-          <a:srgbClr val="FFFFFF"/>
+          <a:srgbClr val="F9F9F9"/>
         </a:solidFill>
         <a:effectLst/>
       </p:bgPr>
@@ -9873,8 +12965,8 @@
         </p:nvSpPr>
         <p:spPr>
           <a:xfrm>
-            <a:off x="640080" y="457200"/>
-            <a:ext cx="10881360" cy="960120"/>
+            <a:off x="640080" y="548640"/>
+            <a:ext cx="10881360" cy="1097280"/>
           </a:xfrm>
           <a:prstGeom prst="rect">
             <a:avLst/>
@@ -9888,13 +12980,29 @@
           <a:lstStyle/>
           <a:p>
             <a:r>
-              <a:rPr sz="2800" b="1" i="0">
+              <a:rPr sz="3200" b="1" i="0">
                 <a:solidFill>
                   <a:srgbClr val="2A2929"/>
                 </a:solidFill>
                 <a:latin typeface="Roboto"/>
               </a:rPr>
-              <a:t>Coach the culture, support the individuals</a:t>
+              <a:t>Key takeaways</a:t>
+            </a:r>
+          </a:p>
+          <a:p>
+            <a:pPr>
+              <a:spcBef>
+                <a:spcPts val="200"/>
+              </a:spcBef>
+            </a:pPr>
+            <a:r>
+              <a:rPr sz="1800" b="1" i="0">
+                <a:solidFill>
+                  <a:srgbClr val="92268F"/>
+                </a:solidFill>
+                <a:latin typeface="Roboto"/>
+              </a:rPr>
+              <a:t>Section 1 · The build</a:t>
             </a:r>
           </a:p>
         </p:txBody>
@@ -9907,7 +13015,7 @@
         </p:nvSpPr>
         <p:spPr>
           <a:xfrm>
-            <a:off x="658368" y="1371600"/>
+            <a:off x="658368" y="1600200"/>
             <a:ext cx="1463040" cy="50800"/>
           </a:xfrm>
           <a:prstGeom prst="rect">
@@ -9945,117 +13053,47 @@
       </p:sp>
       <p:sp>
         <p:nvSpPr>
-          <p:cNvPr id="4" name="TextBox 3"/>
-          <p:cNvSpPr txBox="1"/>
-          <p:nvPr/>
-        </p:nvSpPr>
-        <p:spPr>
-          <a:xfrm>
-            <a:off x="658368" y="1691640"/>
-            <a:ext cx="10881360" cy="4480560"/>
-          </a:xfrm>
-          <a:prstGeom prst="rect">
-            <a:avLst/>
-          </a:prstGeom>
-          <a:noFill/>
-        </p:spPr>
-        <p:txBody>
-          <a:bodyPr wrap="square" anchor="ctr" lIns="0" rIns="0" tIns="0" bIns="0">
-            <a:spAutoFit/>
-          </a:bodyPr>
-          <a:lstStyle/>
-          <a:p>
-            <a:pPr marL="0" indent="0">
-              <a:lnSpc>
-                <a:spcPct val="105000"/>
-              </a:lnSpc>
-              <a:spcBef>
-                <a:spcPts val="0"/>
-              </a:spcBef>
-              <a:spcAft>
-                <a:spcPts val="1000"/>
-              </a:spcAft>
-            </a:pPr>
-            <a:r>
-              <a:rPr sz="2400" b="1" i="0">
-                <a:solidFill>
-                  <a:srgbClr val="EDAB0C"/>
-                </a:solidFill>
-                <a:latin typeface="Roboto"/>
-              </a:rPr>
-              <a:t>■  </a:t>
-            </a:r>
-            <a:r>
-              <a:rPr sz="2400" b="0" i="0">
-                <a:solidFill>
-                  <a:srgbClr val="2A2929"/>
-                </a:solidFill>
-                <a:latin typeface="Roboto"/>
-              </a:rPr>
-              <a:t>Provide coaching to staff to enhance workplace culture as the team writes its components (PC 3.1).</a:t>
-            </a:r>
-          </a:p>
-          <a:p>
-            <a:pPr marL="0" indent="0">
-              <a:lnSpc>
-                <a:spcPct val="105000"/>
-              </a:lnSpc>
-              <a:spcBef>
-                <a:spcPts val="0"/>
-              </a:spcBef>
-              <a:spcAft>
-                <a:spcPts val="1000"/>
-              </a:spcAft>
-            </a:pPr>
-            <a:r>
-              <a:rPr sz="2400" b="1" i="0">
-                <a:solidFill>
-                  <a:srgbClr val="EDAB0C"/>
-                </a:solidFill>
-                <a:latin typeface="Roboto"/>
-              </a:rPr>
-              <a:t>■  </a:t>
-            </a:r>
-            <a:r>
-              <a:rPr sz="2400" b="0" i="0">
-                <a:solidFill>
-                  <a:srgbClr val="2A2929"/>
-                </a:solidFill>
-                <a:latin typeface="Roboto"/>
-              </a:rPr>
-              <a:t>Support individuals per organisational requirements toward the common team goals — the one integrated, working template (PC 3.2).</a:t>
-            </a:r>
-          </a:p>
-          <a:p>
-            <a:pPr marL="0" indent="0">
-              <a:lnSpc>
-                <a:spcPct val="105000"/>
-              </a:lnSpc>
-              <a:spcBef>
-                <a:spcPts val="0"/>
-              </a:spcBef>
-              <a:spcAft>
-                <a:spcPts val="1000"/>
-              </a:spcAft>
-            </a:pPr>
-            <a:r>
-              <a:rPr sz="2400" b="1" i="0">
-                <a:solidFill>
-                  <a:srgbClr val="EDAB0C"/>
-                </a:solidFill>
-                <a:latin typeface="Roboto"/>
-              </a:rPr>
-              <a:t>■  </a:t>
-            </a:r>
-            <a:r>
-              <a:rPr sz="2400" b="0" i="0">
-                <a:solidFill>
-                  <a:srgbClr val="2A2929"/>
-                </a:solidFill>
-                <a:latin typeface="Roboto"/>
-              </a:rPr>
-              <a:t>Role-model professional leadership behaviours: reliability, fairness, openness, following through (KE 8).</a:t>
-            </a:r>
+          <p:cNvPr id="4" name="Rectangle 3"/>
+          <p:cNvSpPr/>
+          <p:nvPr/>
+        </p:nvSpPr>
+        <p:spPr>
+          <a:xfrm>
+            <a:off x="640080" y="1965960"/>
+            <a:ext cx="10927080" cy="841248"/>
+          </a:xfrm>
+          <a:prstGeom prst="rect">
+            <a:avLst/>
+          </a:prstGeom>
+          <a:solidFill>
+            <a:srgbClr val="FFFFFF"/>
+          </a:solidFill>
+          <a:ln w="12700">
+            <a:solidFill>
+              <a:srgbClr val="CCCCCC"/>
+            </a:solidFill>
+          </a:ln>
+          <a:effectLst/>
+        </p:spPr>
+        <p:style>
+          <a:lnRef idx="1">
+            <a:schemeClr val="accent1"/>
+          </a:lnRef>
+          <a:fillRef idx="3">
+            <a:schemeClr val="accent1"/>
+          </a:fillRef>
+          <a:effectRef idx="2">
+            <a:schemeClr val="accent1"/>
+          </a:effectRef>
+          <a:fontRef idx="minor">
+            <a:schemeClr val="lt1"/>
+          </a:fontRef>
+        </p:style>
+        <p:txBody>
+          <a:bodyPr rtlCol="0" anchor="ctr"/>
+          <a:lstStyle/>
+          <a:p>
+            <a:pPr algn="ctr"/>
           </a:p>
         </p:txBody>
       </p:sp>
@@ -10067,8 +13105,8 @@
         </p:nvSpPr>
         <p:spPr>
           <a:xfrm>
-            <a:off x="0" y="6565392"/>
-            <a:ext cx="12191695" cy="38100"/>
+            <a:off x="640080" y="1965960"/>
+            <a:ext cx="109728" cy="841248"/>
           </a:xfrm>
           <a:prstGeom prst="rect">
             <a:avLst/>
@@ -10111,6 +13149,218 @@
         </p:nvSpPr>
         <p:spPr>
           <a:xfrm>
+            <a:off x="960120" y="1965960"/>
+            <a:ext cx="10424160" cy="841248"/>
+          </a:xfrm>
+          <a:prstGeom prst="rect">
+            <a:avLst/>
+          </a:prstGeom>
+          <a:noFill/>
+        </p:spPr>
+        <p:txBody>
+          <a:bodyPr wrap="square" anchor="ctr" lIns="0" rIns="0" tIns="0" bIns="0">
+            <a:spAutoFit/>
+          </a:bodyPr>
+          <a:lstStyle/>
+          <a:p>
+            <a:pPr>
+              <a:lnSpc>
+                <a:spcPct val="100000"/>
+              </a:lnSpc>
+            </a:pPr>
+            <a:r>
+              <a:rPr sz="1700" b="0" i="0">
+                <a:solidFill>
+                  <a:srgbClr val="2A2929"/>
+                </a:solidFill>
+                <a:latin typeface="Roboto"/>
+              </a:rPr>
+              <a:t>Work visible to the team, integrated together, confirmed together.</a:t>
+            </a:r>
+          </a:p>
+        </p:txBody>
+      </p:sp>
+      <p:sp>
+        <p:nvSpPr>
+          <p:cNvPr id="7" name="Rectangle 6"/>
+          <p:cNvSpPr/>
+          <p:nvPr/>
+        </p:nvSpPr>
+        <p:spPr>
+          <a:xfrm>
+            <a:off x="640080" y="2916936"/>
+            <a:ext cx="10927080" cy="841248"/>
+          </a:xfrm>
+          <a:prstGeom prst="rect">
+            <a:avLst/>
+          </a:prstGeom>
+          <a:solidFill>
+            <a:srgbClr val="FFFFFF"/>
+          </a:solidFill>
+          <a:ln w="12700">
+            <a:solidFill>
+              <a:srgbClr val="CCCCCC"/>
+            </a:solidFill>
+          </a:ln>
+          <a:effectLst/>
+        </p:spPr>
+        <p:style>
+          <a:lnRef idx="1">
+            <a:schemeClr val="accent1"/>
+          </a:lnRef>
+          <a:fillRef idx="3">
+            <a:schemeClr val="accent1"/>
+          </a:fillRef>
+          <a:effectRef idx="2">
+            <a:schemeClr val="accent1"/>
+          </a:effectRef>
+          <a:fontRef idx="minor">
+            <a:schemeClr val="lt1"/>
+          </a:fontRef>
+        </p:style>
+        <p:txBody>
+          <a:bodyPr rtlCol="0" anchor="ctr"/>
+          <a:lstStyle/>
+          <a:p>
+            <a:pPr algn="ctr"/>
+          </a:p>
+        </p:txBody>
+      </p:sp>
+      <p:sp>
+        <p:nvSpPr>
+          <p:cNvPr id="8" name="Rectangle 7"/>
+          <p:cNvSpPr/>
+          <p:nvPr/>
+        </p:nvSpPr>
+        <p:spPr>
+          <a:xfrm>
+            <a:off x="640080" y="2916936"/>
+            <a:ext cx="109728" cy="841248"/>
+          </a:xfrm>
+          <a:prstGeom prst="rect">
+            <a:avLst/>
+          </a:prstGeom>
+          <a:solidFill>
+            <a:srgbClr val="92268F"/>
+          </a:solidFill>
+          <a:ln>
+            <a:noFill/>
+          </a:ln>
+          <a:effectLst/>
+        </p:spPr>
+        <p:style>
+          <a:lnRef idx="1">
+            <a:schemeClr val="accent1"/>
+          </a:lnRef>
+          <a:fillRef idx="3">
+            <a:schemeClr val="accent1"/>
+          </a:fillRef>
+          <a:effectRef idx="2">
+            <a:schemeClr val="accent1"/>
+          </a:effectRef>
+          <a:fontRef idx="minor">
+            <a:schemeClr val="lt1"/>
+          </a:fontRef>
+        </p:style>
+        <p:txBody>
+          <a:bodyPr rtlCol="0" anchor="ctr"/>
+          <a:lstStyle/>
+          <a:p>
+            <a:pPr algn="ctr"/>
+          </a:p>
+        </p:txBody>
+      </p:sp>
+      <p:sp>
+        <p:nvSpPr>
+          <p:cNvPr id="9" name="TextBox 8"/>
+          <p:cNvSpPr txBox="1"/>
+          <p:nvPr/>
+        </p:nvSpPr>
+        <p:spPr>
+          <a:xfrm>
+            <a:off x="960120" y="2916936"/>
+            <a:ext cx="10424160" cy="841248"/>
+          </a:xfrm>
+          <a:prstGeom prst="rect">
+            <a:avLst/>
+          </a:prstGeom>
+          <a:noFill/>
+        </p:spPr>
+        <p:txBody>
+          <a:bodyPr wrap="square" anchor="ctr" lIns="0" rIns="0" tIns="0" bIns="0">
+            <a:spAutoFit/>
+          </a:bodyPr>
+          <a:lstStyle/>
+          <a:p>
+            <a:pPr>
+              <a:lnSpc>
+                <a:spcPct val="100000"/>
+              </a:lnSpc>
+            </a:pPr>
+            <a:r>
+              <a:rPr sz="1700" b="0" i="0">
+                <a:solidFill>
+                  <a:srgbClr val="2A2929"/>
+                </a:solidFill>
+                <a:latin typeface="Roboto"/>
+              </a:rPr>
+              <a:t>What integration took is worth writing down — it becomes evidence.</a:t>
+            </a:r>
+          </a:p>
+        </p:txBody>
+      </p:sp>
+      <p:sp>
+        <p:nvSpPr>
+          <p:cNvPr id="10" name="Rectangle 9"/>
+          <p:cNvSpPr/>
+          <p:nvPr/>
+        </p:nvSpPr>
+        <p:spPr>
+          <a:xfrm>
+            <a:off x="0" y="6565392"/>
+            <a:ext cx="12191695" cy="38100"/>
+          </a:xfrm>
+          <a:prstGeom prst="rect">
+            <a:avLst/>
+          </a:prstGeom>
+          <a:solidFill>
+            <a:srgbClr val="92268F"/>
+          </a:solidFill>
+          <a:ln>
+            <a:noFill/>
+          </a:ln>
+          <a:effectLst/>
+        </p:spPr>
+        <p:style>
+          <a:lnRef idx="1">
+            <a:schemeClr val="accent1"/>
+          </a:lnRef>
+          <a:fillRef idx="3">
+            <a:schemeClr val="accent1"/>
+          </a:fillRef>
+          <a:effectRef idx="2">
+            <a:schemeClr val="accent1"/>
+          </a:effectRef>
+          <a:fontRef idx="minor">
+            <a:schemeClr val="lt1"/>
+          </a:fontRef>
+        </p:style>
+        <p:txBody>
+          <a:bodyPr rtlCol="0" anchor="ctr"/>
+          <a:lstStyle/>
+          <a:p>
+            <a:pPr algn="ctr"/>
+          </a:p>
+        </p:txBody>
+      </p:sp>
+      <p:sp>
+        <p:nvSpPr>
+          <p:cNvPr id="11" name="TextBox 10"/>
+          <p:cNvSpPr txBox="1"/>
+          <p:nvPr/>
+        </p:nvSpPr>
+        <p:spPr>
+          <a:xfrm>
             <a:off x="502920" y="6400800"/>
             <a:ext cx="5486400" cy="320040"/>
           </a:xfrm>
@@ -10148,7 +13398,7 @@
       </p:sp>
       <p:sp>
         <p:nvSpPr>
-          <p:cNvPr id="7" name="TextBox 6"/>
+          <p:cNvPr id="12" name="TextBox 11"/>
           <p:cNvSpPr txBox="1"/>
           <p:nvPr/>
         </p:nvSpPr>
@@ -10330,7 +13580,7 @@
                 </a:solidFill>
                 <a:latin typeface="Roboto"/>
               </a:rPr>
-              <a:t>Facilitating issue resolution &amp; problem-solving</a:t>
+              <a:t>Lead the meeting, observed</a:t>
             </a:r>
           </a:p>
           <a:p>
@@ -10346,7 +13596,7 @@
                 </a:solidFill>
                 <a:latin typeface="Roboto Light"/>
               </a:rPr>
-              <a:t>surface the issue, resolve it together</a:t>
+              <a:t>run it so someone watching sees leadership</a:t>
             </a:r>
           </a:p>
         </p:txBody>
@@ -10528,7 +13778,7 @@
                 </a:solidFill>
                 <a:latin typeface="Roboto"/>
               </a:rPr>
-              <a:t>Facilitating issue resolution &amp; problem-solving</a:t>
+              <a:t>Leading a team meeting</a:t>
             </a:r>
           </a:p>
         </p:txBody>
@@ -10626,7 +13876,7 @@
                 </a:solidFill>
                 <a:latin typeface="Roboto"/>
               </a:rPr>
-              <a:t>Facilitate the team to identify, brainstorm, report and resolve task-related issues and inefficiencies — don't solve it for them, run the process (PC 3.3).</a:t>
+              <a:t>A led meeting has a shape: purpose stated, everyone heard, blockers surfaced, decisions made and recorded.</a:t>
             </a:r>
           </a:p>
           <a:p>
@@ -10657,7 +13907,7 @@
                 </a:solidFill>
                 <a:latin typeface="Roboto"/>
               </a:rPr>
-              <a:t>Use problem-solving skills for team, task or individual challenges: name the problem, options, decide, act (PC 3.4).</a:t>
+              <a:t>Facilitate open and respectful communication — draw out the quiet member, park the derail, keep the thread.</a:t>
             </a:r>
           </a:p>
           <a:p>
@@ -10688,7 +13938,7 @@
                 </a:solidFill>
                 <a:latin typeface="Roboto"/>
               </a:rPr>
-              <a:t>A stand-up is the routine that surfaces issues early — blockers reported before they stall the build.</a:t>
+              <a:t>An observer completes notes at the end — what someone outside the team saw is part of the record.</a:t>
             </a:r>
           </a:p>
         </p:txBody>
@@ -10843,48 +14093,14 @@
       <p:grpSpPr/>
       <p:sp>
         <p:nvSpPr>
-          <p:cNvPr id="2" name="TextBox 1"/>
-          <p:cNvSpPr txBox="1"/>
-          <p:nvPr/>
-        </p:nvSpPr>
-        <p:spPr>
-          <a:xfrm>
-            <a:off x="640080" y="457200"/>
-            <a:ext cx="10881360" cy="960120"/>
-          </a:xfrm>
-          <a:prstGeom prst="rect">
-            <a:avLst/>
-          </a:prstGeom>
-          <a:noFill/>
-        </p:spPr>
-        <p:txBody>
-          <a:bodyPr wrap="square" anchor="t" lIns="0" rIns="0" tIns="0" bIns="0">
-            <a:spAutoFit/>
-          </a:bodyPr>
-          <a:lstStyle/>
-          <a:p>
-            <a:r>
-              <a:rPr sz="2800" b="1" i="0">
-                <a:solidFill>
-                  <a:srgbClr val="2A2929"/>
-                </a:solidFill>
-                <a:latin typeface="Roboto"/>
-              </a:rPr>
-              <a:t>Conflict, challenges &amp; the teamwork risks</a:t>
-            </a:r>
-          </a:p>
-        </p:txBody>
-      </p:sp>
-      <p:sp>
-        <p:nvSpPr>
-          <p:cNvPr id="3" name="Rectangle 2"/>
+          <p:cNvPr id="2" name="Rectangle 1"/>
           <p:cNvSpPr/>
           <p:nvPr/>
         </p:nvSpPr>
         <p:spPr>
           <a:xfrm>
-            <a:off x="658368" y="1371600"/>
-            <a:ext cx="1463040" cy="50800"/>
+            <a:off x="0" y="0"/>
+            <a:ext cx="12191695" cy="1234440"/>
           </a:xfrm>
           <a:prstGeom prst="rect">
             <a:avLst/>
@@ -10921,14 +14137,67 @@
       </p:sp>
       <p:sp>
         <p:nvSpPr>
+          <p:cNvPr id="3" name="Rounded Rectangle 2"/>
+          <p:cNvSpPr/>
+          <p:nvPr/>
+        </p:nvSpPr>
+        <p:spPr>
+          <a:xfrm>
+            <a:off x="640080" y="384048"/>
+            <a:ext cx="1691640" cy="457200"/>
+          </a:xfrm>
+          <a:prstGeom prst="roundRect">
+            <a:avLst/>
+          </a:prstGeom>
+          <a:solidFill>
+            <a:srgbClr val="2A2929"/>
+          </a:solidFill>
+          <a:ln>
+            <a:noFill/>
+          </a:ln>
+          <a:effectLst/>
+        </p:spPr>
+        <p:style>
+          <a:lnRef idx="1">
+            <a:schemeClr val="accent1"/>
+          </a:lnRef>
+          <a:fillRef idx="3">
+            <a:schemeClr val="accent1"/>
+          </a:fillRef>
+          <a:effectRef idx="2">
+            <a:schemeClr val="accent1"/>
+          </a:effectRef>
+          <a:fontRef idx="minor">
+            <a:schemeClr val="lt1"/>
+          </a:fontRef>
+        </p:style>
+        <p:txBody>
+          <a:bodyPr rtlCol="0" anchor="ctr"/>
+          <a:lstStyle/>
+          <a:p>
+            <a:pPr algn="ctr"/>
+            <a:r>
+              <a:rPr sz="1400" b="1" i="0">
+                <a:solidFill>
+                  <a:srgbClr val="FBB900"/>
+                </a:solidFill>
+                <a:latin typeface="Roboto"/>
+              </a:rPr>
+              <a:t>ACTIVITY</a:t>
+            </a:r>
+          </a:p>
+        </p:txBody>
+      </p:sp>
+      <p:sp>
+        <p:nvSpPr>
           <p:cNvPr id="4" name="TextBox 3"/>
           <p:cNvSpPr txBox="1"/>
           <p:nvPr/>
         </p:nvSpPr>
         <p:spPr>
           <a:xfrm>
-            <a:off x="658368" y="1691640"/>
-            <a:ext cx="10881360" cy="4480560"/>
+            <a:off x="2560320" y="310896"/>
+            <a:ext cx="8961120" cy="685800"/>
           </a:xfrm>
           <a:prstGeom prst="rect">
             <a:avLst/>
@@ -10937,6 +14206,40 @@
         </p:spPr>
         <p:txBody>
           <a:bodyPr wrap="square" anchor="ctr" lIns="0" rIns="0" tIns="0" bIns="0">
+            <a:spAutoFit/>
+          </a:bodyPr>
+          <a:lstStyle/>
+          <a:p>
+            <a:r>
+              <a:rPr sz="2600" b="1" i="0">
+                <a:solidFill>
+                  <a:srgbClr val="FFFFFF"/>
+                </a:solidFill>
+                <a:latin typeface="Roboto"/>
+              </a:rPr>
+              <a:t>Run the meeting</a:t>
+            </a:r>
+          </a:p>
+        </p:txBody>
+      </p:sp>
+      <p:sp>
+        <p:nvSpPr>
+          <p:cNvPr id="5" name="TextBox 4"/>
+          <p:cNvSpPr txBox="1"/>
+          <p:nvPr/>
+        </p:nvSpPr>
+        <p:spPr>
+          <a:xfrm>
+            <a:off x="658368" y="1554480"/>
+            <a:ext cx="10881360" cy="4297680"/>
+          </a:xfrm>
+          <a:prstGeom prst="rect">
+            <a:avLst/>
+          </a:prstGeom>
+          <a:noFill/>
+        </p:spPr>
+        <p:txBody>
+          <a:bodyPr wrap="square" anchor="t" lIns="0" rIns="0" tIns="0" bIns="0">
             <a:spAutoFit/>
           </a:bodyPr>
           <a:lstStyle/>
@@ -10953,7 +14256,7 @@
               </a:spcAft>
             </a:pPr>
             <a:r>
-              <a:rPr sz="2400" b="1" i="0">
+              <a:rPr sz="1700" b="1" i="0">
                 <a:solidFill>
                   <a:srgbClr val="EDAB0C"/>
                 </a:solidFill>
@@ -10962,13 +14265,13 @@
               <a:t>■  </a:t>
             </a:r>
             <a:r>
-              <a:rPr sz="2400" b="0" i="0">
+              <a:rPr sz="1700" b="0" i="0">
                 <a:solidFill>
                   <a:srgbClr val="2A2929"/>
                 </a:solidFill>
                 <a:latin typeface="Roboto"/>
               </a:rPr>
-              <a:t>Manage conflicts and challenges per organisational requirements using conflict-resolution and negotiation strategies (PE 5, KE 5).</a:t>
+              <a:t>Workbook — tasks 9 and 10.</a:t>
             </a:r>
           </a:p>
           <a:p>
@@ -10984,7 +14287,7 @@
               </a:spcAft>
             </a:pPr>
             <a:r>
-              <a:rPr sz="2400" b="1" i="0">
+              <a:rPr sz="1700" b="1" i="0">
                 <a:solidFill>
                   <a:srgbClr val="EDAB0C"/>
                 </a:solidFill>
@@ -10993,51 +14296,100 @@
               <a:t>■  </a:t>
             </a:r>
             <a:r>
-              <a:rPr sz="2400" b="0" i="0">
+              <a:rPr sz="1700" b="0" i="0">
                 <a:solidFill>
                   <a:srgbClr val="2A2929"/>
                 </a:solidFill>
                 <a:latin typeface="Roboto"/>
               </a:rPr>
-              <a:t>Separate the person from the problem; find the shared interest; agree a way forward, not a winner.</a:t>
-            </a:r>
-          </a:p>
-          <a:p>
-            <a:pPr marL="0" indent="0">
-              <a:lnSpc>
-                <a:spcPct val="105000"/>
-              </a:lnSpc>
-              <a:spcBef>
-                <a:spcPts val="0"/>
-              </a:spcBef>
-              <a:spcAft>
-                <a:spcPts val="1000"/>
-              </a:spcAft>
-            </a:pPr>
-            <a:r>
-              <a:rPr sz="2400" b="1" i="0">
-                <a:solidFill>
-                  <a:srgbClr val="EDAB0C"/>
-                </a:solidFill>
-                <a:latin typeface="Roboto"/>
-              </a:rPr>
-              <a:t>■  </a:t>
-            </a:r>
-            <a:r>
-              <a:rPr sz="2400" b="0" i="0">
+              <a:t>Lead a team meeting with an observer watching, then have the observer complete the observation notes while it's fresh.</a:t>
+            </a:r>
+          </a:p>
+        </p:txBody>
+      </p:sp>
+      <p:sp>
+        <p:nvSpPr>
+          <p:cNvPr id="6" name="Rounded Rectangle 5"/>
+          <p:cNvSpPr/>
+          <p:nvPr/>
+        </p:nvSpPr>
+        <p:spPr>
+          <a:xfrm>
+            <a:off x="640080" y="5897880"/>
+            <a:ext cx="4023360" cy="457200"/>
+          </a:xfrm>
+          <a:prstGeom prst="roundRect">
+            <a:avLst/>
+          </a:prstGeom>
+          <a:solidFill>
+            <a:srgbClr val="F9F9F9"/>
+          </a:solidFill>
+          <a:ln w="12700">
+            <a:solidFill>
+              <a:srgbClr val="CCCCCC"/>
+            </a:solidFill>
+          </a:ln>
+          <a:effectLst/>
+        </p:spPr>
+        <p:style>
+          <a:lnRef idx="1">
+            <a:schemeClr val="accent1"/>
+          </a:lnRef>
+          <a:fillRef idx="3">
+            <a:schemeClr val="accent1"/>
+          </a:fillRef>
+          <a:effectRef idx="2">
+            <a:schemeClr val="accent1"/>
+          </a:effectRef>
+          <a:fontRef idx="minor">
+            <a:schemeClr val="lt1"/>
+          </a:fontRef>
+        </p:style>
+        <p:txBody>
+          <a:bodyPr rtlCol="0" anchor="ctr"/>
+          <a:lstStyle/>
+          <a:p>
+            <a:pPr algn="ctr"/>
+          </a:p>
+        </p:txBody>
+      </p:sp>
+      <p:sp>
+        <p:nvSpPr>
+          <p:cNvPr id="7" name="TextBox 6"/>
+          <p:cNvSpPr txBox="1"/>
+          <p:nvPr/>
+        </p:nvSpPr>
+        <p:spPr>
+          <a:xfrm>
+            <a:off x="822960" y="5943600"/>
+            <a:ext cx="3657600" cy="365760"/>
+          </a:xfrm>
+          <a:prstGeom prst="rect">
+            <a:avLst/>
+          </a:prstGeom>
+          <a:noFill/>
+        </p:spPr>
+        <p:txBody>
+          <a:bodyPr wrap="square" anchor="ctr" lIns="0" rIns="0" tIns="0" bIns="0">
+            <a:spAutoFit/>
+          </a:bodyPr>
+          <a:lstStyle/>
+          <a:p>
+            <a:r>
+              <a:rPr sz="1500" b="1" i="0">
                 <a:solidFill>
                   <a:srgbClr val="2A2929"/>
                 </a:solidFill>
                 <a:latin typeface="Roboto"/>
               </a:rPr>
-              <a:t>Watch for the teamwork challenges the evidence expects (KE 10): difficulties performing tasks; conflicts with clients or team members; potential risks or safety hazards; unethical or inappropriate behaviour.</a:t>
-            </a:r>
-          </a:p>
-        </p:txBody>
-      </p:sp>
-      <p:sp>
-        <p:nvSpPr>
-          <p:cNvPr id="5" name="Rectangle 4"/>
+              <a:t>⏱  ~30 min</a:t>
+            </a:r>
+          </a:p>
+        </p:txBody>
+      </p:sp>
+      <p:sp>
+        <p:nvSpPr>
+          <p:cNvPr id="8" name="Rectangle 7"/>
           <p:cNvSpPr/>
           <p:nvPr/>
         </p:nvSpPr>
@@ -11081,7 +14433,7 @@
       </p:sp>
       <p:sp>
         <p:nvSpPr>
-          <p:cNvPr id="6" name="TextBox 5"/>
+          <p:cNvPr id="9" name="TextBox 8"/>
           <p:cNvSpPr txBox="1"/>
           <p:nvPr/>
         </p:nvSpPr>
@@ -11124,7 +14476,7 @@
       </p:sp>
       <p:sp>
         <p:nvSpPr>
-          <p:cNvPr id="7" name="TextBox 6"/>
+          <p:cNvPr id="10" name="TextBox 9"/>
           <p:cNvSpPr txBox="1"/>
           <p:nvPr/>
         </p:nvSpPr>
